--- a/LLM/阶段一.pptx
+++ b/LLM/阶段一.pptx
@@ -5,18 +5,22 @@
     <p:sldMasterId id="2147483648" r:id="rId1"/>
   </p:sldMasterIdLst>
   <p:notesMasterIdLst>
-    <p:notesMasterId r:id="rId11"/>
+    <p:notesMasterId r:id="rId15"/>
   </p:notesMasterIdLst>
   <p:sldIdLst>
     <p:sldId id="256" r:id="rId2"/>
     <p:sldId id="257" r:id="rId3"/>
-    <p:sldId id="260" r:id="rId4"/>
-    <p:sldId id="269" r:id="rId5"/>
-    <p:sldId id="270" r:id="rId6"/>
-    <p:sldId id="261" r:id="rId7"/>
-    <p:sldId id="271" r:id="rId8"/>
-    <p:sldId id="272" r:id="rId9"/>
-    <p:sldId id="273" r:id="rId10"/>
+    <p:sldId id="274" r:id="rId4"/>
+    <p:sldId id="273" r:id="rId5"/>
+    <p:sldId id="276" r:id="rId6"/>
+    <p:sldId id="277" r:id="rId7"/>
+    <p:sldId id="260" r:id="rId8"/>
+    <p:sldId id="269" r:id="rId9"/>
+    <p:sldId id="270" r:id="rId10"/>
+    <p:sldId id="261" r:id="rId11"/>
+    <p:sldId id="271" r:id="rId12"/>
+    <p:sldId id="272" r:id="rId13"/>
+    <p:sldId id="278" r:id="rId14"/>
   </p:sldIdLst>
   <p:sldSz cx="12192000" cy="6858000"/>
   <p:notesSz cx="6858000" cy="9144000"/>
@@ -216,7 +220,7 @@
           <a:p>
             <a:fld id="{B9E7821D-D706-4DD4-95CE-52CCF92123E0}" type="datetimeFigureOut">
               <a:rPr lang="zh-CN" altLang="en-US" smtClean="0"/>
-              <a:t>2026/4/27</a:t>
+              <a:t>2026/4/29</a:t>
             </a:fld>
             <a:endParaRPr lang="zh-CN" altLang="en-US"/>
           </a:p>
@@ -579,6 +583,466 @@
   <p:cSld>
     <p:spTree>
       <p:nvGrpSpPr>
+        <p:cNvPr id="1" name="">
+          <a:extLst>
+            <a:ext uri="{FF2B5EF4-FFF2-40B4-BE49-F238E27FC236}">
+              <a16:creationId xmlns:a16="http://schemas.microsoft.com/office/drawing/2014/main" id="{856BEBEF-C38C-D8AF-FCA4-4F28F272713F}"/>
+            </a:ext>
+          </a:extLst>
+        </p:cNvPr>
+        <p:cNvGrpSpPr/>
+        <p:nvPr/>
+      </p:nvGrpSpPr>
+      <p:grpSpPr>
+        <a:xfrm>
+          <a:off x="0" y="0"/>
+          <a:ext cx="0" cy="0"/>
+          <a:chOff x="0" y="0"/>
+          <a:chExt cx="0" cy="0"/>
+        </a:xfrm>
+      </p:grpSpPr>
+      <p:sp>
+        <p:nvSpPr>
+          <p:cNvPr id="2" name="幻灯片图像占位符 1">
+            <a:extLst>
+              <a:ext uri="{FF2B5EF4-FFF2-40B4-BE49-F238E27FC236}">
+                <a16:creationId xmlns:a16="http://schemas.microsoft.com/office/drawing/2014/main" id="{9FD92B44-225F-BE31-57D3-D82E1A4C51A7}"/>
+              </a:ext>
+            </a:extLst>
+          </p:cNvPr>
+          <p:cNvSpPr>
+            <a:spLocks noGrp="1" noRot="1" noChangeAspect="1"/>
+          </p:cNvSpPr>
+          <p:nvPr>
+            <p:ph type="sldImg"/>
+          </p:nvPr>
+        </p:nvSpPr>
+        <p:spPr/>
+        <p:txBody>
+          <a:bodyPr/>
+          <a:lstStyle/>
+          <a:p>
+            <a:endParaRPr lang="zh-CN" altLang="en-US"/>
+          </a:p>
+        </p:txBody>
+      </p:sp>
+      <p:sp>
+        <p:nvSpPr>
+          <p:cNvPr id="3" name="备注占位符 2">
+            <a:extLst>
+              <a:ext uri="{FF2B5EF4-FFF2-40B4-BE49-F238E27FC236}">
+                <a16:creationId xmlns:a16="http://schemas.microsoft.com/office/drawing/2014/main" id="{63F596D5-143B-7E10-C3C2-C310D6131472}"/>
+              </a:ext>
+            </a:extLst>
+          </p:cNvPr>
+          <p:cNvSpPr>
+            <a:spLocks noGrp="1"/>
+          </p:cNvSpPr>
+          <p:nvPr>
+            <p:ph type="body" idx="1"/>
+          </p:nvPr>
+        </p:nvSpPr>
+        <p:spPr/>
+        <p:txBody>
+          <a:bodyPr/>
+          <a:lstStyle/>
+          <a:p>
+            <a:endParaRPr lang="zh-CN" altLang="en-US" dirty="0"/>
+          </a:p>
+        </p:txBody>
+      </p:sp>
+      <p:sp>
+        <p:nvSpPr>
+          <p:cNvPr id="4" name="灯片编号占位符 3">
+            <a:extLst>
+              <a:ext uri="{FF2B5EF4-FFF2-40B4-BE49-F238E27FC236}">
+                <a16:creationId xmlns:a16="http://schemas.microsoft.com/office/drawing/2014/main" id="{5A0556A6-56CD-7B9B-7242-812E5C7BB1E5}"/>
+              </a:ext>
+            </a:extLst>
+          </p:cNvPr>
+          <p:cNvSpPr>
+            <a:spLocks noGrp="1"/>
+          </p:cNvSpPr>
+          <p:nvPr>
+            <p:ph type="sldNum" sz="quarter" idx="5"/>
+          </p:nvPr>
+        </p:nvSpPr>
+        <p:spPr/>
+        <p:txBody>
+          <a:bodyPr/>
+          <a:lstStyle/>
+          <a:p>
+            <a:fld id="{C1392EEC-5A43-47B9-BD96-D1C08A9714A4}" type="slidenum">
+              <a:rPr lang="zh-CN" altLang="en-US" smtClean="0"/>
+              <a:t>3</a:t>
+            </a:fld>
+            <a:endParaRPr lang="zh-CN" altLang="en-US"/>
+          </a:p>
+        </p:txBody>
+      </p:sp>
+    </p:spTree>
+    <p:extLst>
+      <p:ext uri="{BB962C8B-B14F-4D97-AF65-F5344CB8AC3E}">
+        <p14:creationId xmlns:p14="http://schemas.microsoft.com/office/powerpoint/2010/main" val="508033519"/>
+      </p:ext>
+    </p:extLst>
+  </p:cSld>
+  <p:clrMapOvr>
+    <a:masterClrMapping/>
+  </p:clrMapOvr>
+</p:notes>
+</file>
+
+<file path=ppt/notesSlides/notesSlide3.xml><?xml version="1.0" encoding="utf-8"?>
+<p:notes xmlns:a="http://schemas.openxmlformats.org/drawingml/2006/main" xmlns:r="http://schemas.openxmlformats.org/officeDocument/2006/relationships" xmlns:p="http://schemas.openxmlformats.org/presentationml/2006/main">
+  <p:cSld>
+    <p:spTree>
+      <p:nvGrpSpPr>
+        <p:cNvPr id="1" name="">
+          <a:extLst>
+            <a:ext uri="{FF2B5EF4-FFF2-40B4-BE49-F238E27FC236}">
+              <a16:creationId xmlns:a16="http://schemas.microsoft.com/office/drawing/2014/main" id="{D41354B1-1F07-3741-03ED-5B4C3E9DFA45}"/>
+            </a:ext>
+          </a:extLst>
+        </p:cNvPr>
+        <p:cNvGrpSpPr/>
+        <p:nvPr/>
+      </p:nvGrpSpPr>
+      <p:grpSpPr>
+        <a:xfrm>
+          <a:off x="0" y="0"/>
+          <a:ext cx="0" cy="0"/>
+          <a:chOff x="0" y="0"/>
+          <a:chExt cx="0" cy="0"/>
+        </a:xfrm>
+      </p:grpSpPr>
+      <p:sp>
+        <p:nvSpPr>
+          <p:cNvPr id="2" name="幻灯片图像占位符 1">
+            <a:extLst>
+              <a:ext uri="{FF2B5EF4-FFF2-40B4-BE49-F238E27FC236}">
+                <a16:creationId xmlns:a16="http://schemas.microsoft.com/office/drawing/2014/main" id="{65DC755F-2C2F-3127-46EE-DFE9935D920B}"/>
+              </a:ext>
+            </a:extLst>
+          </p:cNvPr>
+          <p:cNvSpPr>
+            <a:spLocks noGrp="1" noRot="1" noChangeAspect="1"/>
+          </p:cNvSpPr>
+          <p:nvPr>
+            <p:ph type="sldImg"/>
+          </p:nvPr>
+        </p:nvSpPr>
+        <p:spPr/>
+        <p:txBody>
+          <a:bodyPr/>
+          <a:lstStyle/>
+          <a:p>
+            <a:endParaRPr lang="zh-CN" altLang="en-US"/>
+          </a:p>
+        </p:txBody>
+      </p:sp>
+      <p:sp>
+        <p:nvSpPr>
+          <p:cNvPr id="3" name="备注占位符 2">
+            <a:extLst>
+              <a:ext uri="{FF2B5EF4-FFF2-40B4-BE49-F238E27FC236}">
+                <a16:creationId xmlns:a16="http://schemas.microsoft.com/office/drawing/2014/main" id="{CCC93559-CD16-BDB8-4FF7-14DEA5C67512}"/>
+              </a:ext>
+            </a:extLst>
+          </p:cNvPr>
+          <p:cNvSpPr>
+            <a:spLocks noGrp="1"/>
+          </p:cNvSpPr>
+          <p:nvPr>
+            <p:ph type="body" idx="1"/>
+          </p:nvPr>
+        </p:nvSpPr>
+        <p:spPr/>
+        <p:txBody>
+          <a:bodyPr/>
+          <a:lstStyle/>
+          <a:p>
+            <a:endParaRPr lang="zh-CN" altLang="en-US" dirty="0"/>
+          </a:p>
+        </p:txBody>
+      </p:sp>
+      <p:sp>
+        <p:nvSpPr>
+          <p:cNvPr id="4" name="灯片编号占位符 3">
+            <a:extLst>
+              <a:ext uri="{FF2B5EF4-FFF2-40B4-BE49-F238E27FC236}">
+                <a16:creationId xmlns:a16="http://schemas.microsoft.com/office/drawing/2014/main" id="{B6B3A0CD-E0F8-7B3C-85E3-5152ECDDA69D}"/>
+              </a:ext>
+            </a:extLst>
+          </p:cNvPr>
+          <p:cNvSpPr>
+            <a:spLocks noGrp="1"/>
+          </p:cNvSpPr>
+          <p:nvPr>
+            <p:ph type="sldNum" sz="quarter" idx="5"/>
+          </p:nvPr>
+        </p:nvSpPr>
+        <p:spPr/>
+        <p:txBody>
+          <a:bodyPr/>
+          <a:lstStyle/>
+          <a:p>
+            <a:fld id="{C1392EEC-5A43-47B9-BD96-D1C08A9714A4}" type="slidenum">
+              <a:rPr lang="zh-CN" altLang="en-US" smtClean="0"/>
+              <a:t>4</a:t>
+            </a:fld>
+            <a:endParaRPr lang="zh-CN" altLang="en-US"/>
+          </a:p>
+        </p:txBody>
+      </p:sp>
+    </p:spTree>
+    <p:extLst>
+      <p:ext uri="{BB962C8B-B14F-4D97-AF65-F5344CB8AC3E}">
+        <p14:creationId xmlns:p14="http://schemas.microsoft.com/office/powerpoint/2010/main" val="2771145864"/>
+      </p:ext>
+    </p:extLst>
+  </p:cSld>
+  <p:clrMapOvr>
+    <a:masterClrMapping/>
+  </p:clrMapOvr>
+</p:notes>
+</file>
+
+<file path=ppt/notesSlides/notesSlide4.xml><?xml version="1.0" encoding="utf-8"?>
+<p:notes xmlns:a="http://schemas.openxmlformats.org/drawingml/2006/main" xmlns:r="http://schemas.openxmlformats.org/officeDocument/2006/relationships" xmlns:p="http://schemas.openxmlformats.org/presentationml/2006/main">
+  <p:cSld>
+    <p:spTree>
+      <p:nvGrpSpPr>
+        <p:cNvPr id="1" name="">
+          <a:extLst>
+            <a:ext uri="{FF2B5EF4-FFF2-40B4-BE49-F238E27FC236}">
+              <a16:creationId xmlns:a16="http://schemas.microsoft.com/office/drawing/2014/main" id="{771223CB-975A-9AA1-CD26-60104DEF1709}"/>
+            </a:ext>
+          </a:extLst>
+        </p:cNvPr>
+        <p:cNvGrpSpPr/>
+        <p:nvPr/>
+      </p:nvGrpSpPr>
+      <p:grpSpPr>
+        <a:xfrm>
+          <a:off x="0" y="0"/>
+          <a:ext cx="0" cy="0"/>
+          <a:chOff x="0" y="0"/>
+          <a:chExt cx="0" cy="0"/>
+        </a:xfrm>
+      </p:grpSpPr>
+      <p:sp>
+        <p:nvSpPr>
+          <p:cNvPr id="2" name="幻灯片图像占位符 1">
+            <a:extLst>
+              <a:ext uri="{FF2B5EF4-FFF2-40B4-BE49-F238E27FC236}">
+                <a16:creationId xmlns:a16="http://schemas.microsoft.com/office/drawing/2014/main" id="{A04495D4-BDE8-3013-A821-04FC987EBD11}"/>
+              </a:ext>
+            </a:extLst>
+          </p:cNvPr>
+          <p:cNvSpPr>
+            <a:spLocks noGrp="1" noRot="1" noChangeAspect="1"/>
+          </p:cNvSpPr>
+          <p:nvPr>
+            <p:ph type="sldImg"/>
+          </p:nvPr>
+        </p:nvSpPr>
+        <p:spPr/>
+        <p:txBody>
+          <a:bodyPr/>
+          <a:lstStyle/>
+          <a:p>
+            <a:endParaRPr lang="zh-CN" altLang="en-US"/>
+          </a:p>
+        </p:txBody>
+      </p:sp>
+      <p:sp>
+        <p:nvSpPr>
+          <p:cNvPr id="3" name="备注占位符 2">
+            <a:extLst>
+              <a:ext uri="{FF2B5EF4-FFF2-40B4-BE49-F238E27FC236}">
+                <a16:creationId xmlns:a16="http://schemas.microsoft.com/office/drawing/2014/main" id="{543F1AE5-8A88-6E7A-8A3E-A7CD8C7A27E8}"/>
+              </a:ext>
+            </a:extLst>
+          </p:cNvPr>
+          <p:cNvSpPr>
+            <a:spLocks noGrp="1"/>
+          </p:cNvSpPr>
+          <p:nvPr>
+            <p:ph type="body" idx="1"/>
+          </p:nvPr>
+        </p:nvSpPr>
+        <p:spPr/>
+        <p:txBody>
+          <a:bodyPr/>
+          <a:lstStyle/>
+          <a:p>
+            <a:endParaRPr lang="zh-CN" altLang="en-US" dirty="0"/>
+          </a:p>
+        </p:txBody>
+      </p:sp>
+      <p:sp>
+        <p:nvSpPr>
+          <p:cNvPr id="4" name="灯片编号占位符 3">
+            <a:extLst>
+              <a:ext uri="{FF2B5EF4-FFF2-40B4-BE49-F238E27FC236}">
+                <a16:creationId xmlns:a16="http://schemas.microsoft.com/office/drawing/2014/main" id="{69A98E39-98D1-2710-80DA-A20D0195DD7B}"/>
+              </a:ext>
+            </a:extLst>
+          </p:cNvPr>
+          <p:cNvSpPr>
+            <a:spLocks noGrp="1"/>
+          </p:cNvSpPr>
+          <p:nvPr>
+            <p:ph type="sldNum" sz="quarter" idx="5"/>
+          </p:nvPr>
+        </p:nvSpPr>
+        <p:spPr/>
+        <p:txBody>
+          <a:bodyPr/>
+          <a:lstStyle/>
+          <a:p>
+            <a:fld id="{C1392EEC-5A43-47B9-BD96-D1C08A9714A4}" type="slidenum">
+              <a:rPr lang="zh-CN" altLang="en-US" smtClean="0"/>
+              <a:t>5</a:t>
+            </a:fld>
+            <a:endParaRPr lang="zh-CN" altLang="en-US"/>
+          </a:p>
+        </p:txBody>
+      </p:sp>
+    </p:spTree>
+    <p:extLst>
+      <p:ext uri="{BB962C8B-B14F-4D97-AF65-F5344CB8AC3E}">
+        <p14:creationId xmlns:p14="http://schemas.microsoft.com/office/powerpoint/2010/main" val="2251352491"/>
+      </p:ext>
+    </p:extLst>
+  </p:cSld>
+  <p:clrMapOvr>
+    <a:masterClrMapping/>
+  </p:clrMapOvr>
+</p:notes>
+</file>
+
+<file path=ppt/notesSlides/notesSlide5.xml><?xml version="1.0" encoding="utf-8"?>
+<p:notes xmlns:a="http://schemas.openxmlformats.org/drawingml/2006/main" xmlns:r="http://schemas.openxmlformats.org/officeDocument/2006/relationships" xmlns:p="http://schemas.openxmlformats.org/presentationml/2006/main">
+  <p:cSld>
+    <p:spTree>
+      <p:nvGrpSpPr>
+        <p:cNvPr id="1" name="">
+          <a:extLst>
+            <a:ext uri="{FF2B5EF4-FFF2-40B4-BE49-F238E27FC236}">
+              <a16:creationId xmlns:a16="http://schemas.microsoft.com/office/drawing/2014/main" id="{D186E7E9-4ED6-9717-EB01-1BBE32231AE6}"/>
+            </a:ext>
+          </a:extLst>
+        </p:cNvPr>
+        <p:cNvGrpSpPr/>
+        <p:nvPr/>
+      </p:nvGrpSpPr>
+      <p:grpSpPr>
+        <a:xfrm>
+          <a:off x="0" y="0"/>
+          <a:ext cx="0" cy="0"/>
+          <a:chOff x="0" y="0"/>
+          <a:chExt cx="0" cy="0"/>
+        </a:xfrm>
+      </p:grpSpPr>
+      <p:sp>
+        <p:nvSpPr>
+          <p:cNvPr id="2" name="幻灯片图像占位符 1">
+            <a:extLst>
+              <a:ext uri="{FF2B5EF4-FFF2-40B4-BE49-F238E27FC236}">
+                <a16:creationId xmlns:a16="http://schemas.microsoft.com/office/drawing/2014/main" id="{163E46C6-7BB7-2430-65CA-9619CF71E01D}"/>
+              </a:ext>
+            </a:extLst>
+          </p:cNvPr>
+          <p:cNvSpPr>
+            <a:spLocks noGrp="1" noRot="1" noChangeAspect="1"/>
+          </p:cNvSpPr>
+          <p:nvPr>
+            <p:ph type="sldImg"/>
+          </p:nvPr>
+        </p:nvSpPr>
+        <p:spPr/>
+        <p:txBody>
+          <a:bodyPr/>
+          <a:lstStyle/>
+          <a:p>
+            <a:endParaRPr lang="zh-CN" altLang="en-US"/>
+          </a:p>
+        </p:txBody>
+      </p:sp>
+      <p:sp>
+        <p:nvSpPr>
+          <p:cNvPr id="3" name="备注占位符 2">
+            <a:extLst>
+              <a:ext uri="{FF2B5EF4-FFF2-40B4-BE49-F238E27FC236}">
+                <a16:creationId xmlns:a16="http://schemas.microsoft.com/office/drawing/2014/main" id="{82F2E898-206F-3F1E-A399-DC4C89FDDC77}"/>
+              </a:ext>
+            </a:extLst>
+          </p:cNvPr>
+          <p:cNvSpPr>
+            <a:spLocks noGrp="1"/>
+          </p:cNvSpPr>
+          <p:nvPr>
+            <p:ph type="body" idx="1"/>
+          </p:nvPr>
+        </p:nvSpPr>
+        <p:spPr/>
+        <p:txBody>
+          <a:bodyPr/>
+          <a:lstStyle/>
+          <a:p>
+            <a:endParaRPr lang="zh-CN" altLang="en-US" dirty="0"/>
+          </a:p>
+        </p:txBody>
+      </p:sp>
+      <p:sp>
+        <p:nvSpPr>
+          <p:cNvPr id="4" name="灯片编号占位符 3">
+            <a:extLst>
+              <a:ext uri="{FF2B5EF4-FFF2-40B4-BE49-F238E27FC236}">
+                <a16:creationId xmlns:a16="http://schemas.microsoft.com/office/drawing/2014/main" id="{FBA0D94D-A560-605E-D8E9-FD68C1FD36EE}"/>
+              </a:ext>
+            </a:extLst>
+          </p:cNvPr>
+          <p:cNvSpPr>
+            <a:spLocks noGrp="1"/>
+          </p:cNvSpPr>
+          <p:nvPr>
+            <p:ph type="sldNum" sz="quarter" idx="5"/>
+          </p:nvPr>
+        </p:nvSpPr>
+        <p:spPr/>
+        <p:txBody>
+          <a:bodyPr/>
+          <a:lstStyle/>
+          <a:p>
+            <a:fld id="{C1392EEC-5A43-47B9-BD96-D1C08A9714A4}" type="slidenum">
+              <a:rPr lang="zh-CN" altLang="en-US" smtClean="0"/>
+              <a:t>6</a:t>
+            </a:fld>
+            <a:endParaRPr lang="zh-CN" altLang="en-US"/>
+          </a:p>
+        </p:txBody>
+      </p:sp>
+    </p:spTree>
+    <p:extLst>
+      <p:ext uri="{BB962C8B-B14F-4D97-AF65-F5344CB8AC3E}">
+        <p14:creationId xmlns:p14="http://schemas.microsoft.com/office/powerpoint/2010/main" val="3055626756"/>
+      </p:ext>
+    </p:extLst>
+  </p:cSld>
+  <p:clrMapOvr>
+    <a:masterClrMapping/>
+  </p:clrMapOvr>
+</p:notes>
+</file>
+
+<file path=ppt/notesSlides/notesSlide6.xml><?xml version="1.0" encoding="utf-8"?>
+<p:notes xmlns:a="http://schemas.openxmlformats.org/drawingml/2006/main" xmlns:r="http://schemas.openxmlformats.org/officeDocument/2006/relationships" xmlns:p="http://schemas.openxmlformats.org/presentationml/2006/main">
+  <p:cSld>
+    <p:spTree>
+      <p:nvGrpSpPr>
         <p:cNvPr id="1" name=""/>
         <p:cNvGrpSpPr/>
         <p:nvPr/>
@@ -646,7 +1110,7 @@
           <a:p>
             <a:fld id="{C1392EEC-5A43-47B9-BD96-D1C08A9714A4}" type="slidenum">
               <a:rPr lang="zh-CN" altLang="en-US" smtClean="0"/>
-              <a:t>3</a:t>
+              <a:t>7</a:t>
             </a:fld>
             <a:endParaRPr lang="zh-CN" altLang="en-US"/>
           </a:p>
@@ -665,7 +1129,7 @@
 </p:notes>
 </file>
 
-<file path=ppt/notesSlides/notesSlide3.xml><?xml version="1.0" encoding="utf-8"?>
+<file path=ppt/notesSlides/notesSlide7.xml><?xml version="1.0" encoding="utf-8"?>
 <p:notes xmlns:a="http://schemas.openxmlformats.org/drawingml/2006/main" xmlns:r="http://schemas.openxmlformats.org/officeDocument/2006/relationships" xmlns:p="http://schemas.openxmlformats.org/presentationml/2006/main">
   <p:cSld>
     <p:spTree>
@@ -761,7 +1225,7 @@
           <a:p>
             <a:fld id="{C1392EEC-5A43-47B9-BD96-D1C08A9714A4}" type="slidenum">
               <a:rPr lang="zh-CN" altLang="en-US" smtClean="0"/>
-              <a:t>5</a:t>
+              <a:t>9</a:t>
             </a:fld>
             <a:endParaRPr lang="zh-CN" altLang="en-US"/>
           </a:p>
@@ -780,7 +1244,7 @@
 </p:notes>
 </file>
 
-<file path=ppt/notesSlides/notesSlide4.xml><?xml version="1.0" encoding="utf-8"?>
+<file path=ppt/notesSlides/notesSlide8.xml><?xml version="1.0" encoding="utf-8"?>
 <p:notes xmlns:a="http://schemas.openxmlformats.org/drawingml/2006/main" xmlns:r="http://schemas.openxmlformats.org/officeDocument/2006/relationships" xmlns:p="http://schemas.openxmlformats.org/presentationml/2006/main">
   <p:cSld>
     <p:spTree>
@@ -788,7 +1252,7 @@
         <p:cNvPr id="1" name="">
           <a:extLst>
             <a:ext uri="{FF2B5EF4-FFF2-40B4-BE49-F238E27FC236}">
-              <a16:creationId xmlns:a16="http://schemas.microsoft.com/office/drawing/2014/main" id="{D41354B1-1F07-3741-03ED-5B4C3E9DFA45}"/>
+              <a16:creationId xmlns:a16="http://schemas.microsoft.com/office/drawing/2014/main" id="{9B1EA895-866B-98B3-BEA9-34330ADDC7E6}"/>
             </a:ext>
           </a:extLst>
         </p:cNvPr>
@@ -808,7 +1272,7 @@
           <p:cNvPr id="2" name="幻灯片图像占位符 1">
             <a:extLst>
               <a:ext uri="{FF2B5EF4-FFF2-40B4-BE49-F238E27FC236}">
-                <a16:creationId xmlns:a16="http://schemas.microsoft.com/office/drawing/2014/main" id="{65DC755F-2C2F-3127-46EE-DFE9935D920B}"/>
+                <a16:creationId xmlns:a16="http://schemas.microsoft.com/office/drawing/2014/main" id="{B66F5E1E-3042-E8B0-74BD-DCBAFAF8A0A7}"/>
               </a:ext>
             </a:extLst>
           </p:cNvPr>
@@ -833,7 +1297,7 @@
           <p:cNvPr id="3" name="备注占位符 2">
             <a:extLst>
               <a:ext uri="{FF2B5EF4-FFF2-40B4-BE49-F238E27FC236}">
-                <a16:creationId xmlns:a16="http://schemas.microsoft.com/office/drawing/2014/main" id="{CCC93559-CD16-BDB8-4FF7-14DEA5C67512}"/>
+                <a16:creationId xmlns:a16="http://schemas.microsoft.com/office/drawing/2014/main" id="{B2A238BE-A037-194B-1FE8-617A3D7EE39D}"/>
               </a:ext>
             </a:extLst>
           </p:cNvPr>
@@ -858,7 +1322,7 @@
           <p:cNvPr id="4" name="灯片编号占位符 3">
             <a:extLst>
               <a:ext uri="{FF2B5EF4-FFF2-40B4-BE49-F238E27FC236}">
-                <a16:creationId xmlns:a16="http://schemas.microsoft.com/office/drawing/2014/main" id="{B6B3A0CD-E0F8-7B3C-85E3-5152ECDDA69D}"/>
+                <a16:creationId xmlns:a16="http://schemas.microsoft.com/office/drawing/2014/main" id="{125161AC-0C62-08A9-4A8E-CF37B84C7675}"/>
               </a:ext>
             </a:extLst>
           </p:cNvPr>
@@ -876,7 +1340,7 @@
           <a:p>
             <a:fld id="{C1392EEC-5A43-47B9-BD96-D1C08A9714A4}" type="slidenum">
               <a:rPr lang="zh-CN" altLang="en-US" smtClean="0"/>
-              <a:t>9</a:t>
+              <a:t>13</a:t>
             </a:fld>
             <a:endParaRPr lang="zh-CN" altLang="en-US"/>
           </a:p>
@@ -885,7 +1349,7 @@
     </p:spTree>
     <p:extLst>
       <p:ext uri="{BB962C8B-B14F-4D97-AF65-F5344CB8AC3E}">
-        <p14:creationId xmlns:p14="http://schemas.microsoft.com/office/powerpoint/2010/main" val="2771145864"/>
+        <p14:creationId xmlns:p14="http://schemas.microsoft.com/office/powerpoint/2010/main" val="2026231553"/>
       </p:ext>
     </p:extLst>
   </p:cSld>
@@ -1042,7 +1506,7 @@
           <a:p>
             <a:fld id="{CC37D159-D846-43FD-8AE1-DC0896E64EB2}" type="datetimeFigureOut">
               <a:rPr lang="zh-CN" altLang="en-US" smtClean="0"/>
-              <a:t>2026/4/27</a:t>
+              <a:t>2026/4/29</a:t>
             </a:fld>
             <a:endParaRPr lang="zh-CN" altLang="en-US"/>
           </a:p>
@@ -1240,7 +1704,7 @@
           <a:p>
             <a:fld id="{CC37D159-D846-43FD-8AE1-DC0896E64EB2}" type="datetimeFigureOut">
               <a:rPr lang="zh-CN" altLang="en-US" smtClean="0"/>
-              <a:t>2026/4/27</a:t>
+              <a:t>2026/4/29</a:t>
             </a:fld>
             <a:endParaRPr lang="zh-CN" altLang="en-US"/>
           </a:p>
@@ -1448,7 +1912,7 @@
           <a:p>
             <a:fld id="{CC37D159-D846-43FD-8AE1-DC0896E64EB2}" type="datetimeFigureOut">
               <a:rPr lang="zh-CN" altLang="en-US" smtClean="0"/>
-              <a:t>2026/4/27</a:t>
+              <a:t>2026/4/29</a:t>
             </a:fld>
             <a:endParaRPr lang="zh-CN" altLang="en-US"/>
           </a:p>
@@ -1646,7 +2110,7 @@
           <a:p>
             <a:fld id="{CC37D159-D846-43FD-8AE1-DC0896E64EB2}" type="datetimeFigureOut">
               <a:rPr lang="zh-CN" altLang="en-US" smtClean="0"/>
-              <a:t>2026/4/27</a:t>
+              <a:t>2026/4/29</a:t>
             </a:fld>
             <a:endParaRPr lang="zh-CN" altLang="en-US"/>
           </a:p>
@@ -1921,7 +2385,7 @@
           <a:p>
             <a:fld id="{CC37D159-D846-43FD-8AE1-DC0896E64EB2}" type="datetimeFigureOut">
               <a:rPr lang="zh-CN" altLang="en-US" smtClean="0"/>
-              <a:t>2026/4/27</a:t>
+              <a:t>2026/4/29</a:t>
             </a:fld>
             <a:endParaRPr lang="zh-CN" altLang="en-US"/>
           </a:p>
@@ -2186,7 +2650,7 @@
           <a:p>
             <a:fld id="{CC37D159-D846-43FD-8AE1-DC0896E64EB2}" type="datetimeFigureOut">
               <a:rPr lang="zh-CN" altLang="en-US" smtClean="0"/>
-              <a:t>2026/4/27</a:t>
+              <a:t>2026/4/29</a:t>
             </a:fld>
             <a:endParaRPr lang="zh-CN" altLang="en-US"/>
           </a:p>
@@ -2598,7 +3062,7 @@
           <a:p>
             <a:fld id="{CC37D159-D846-43FD-8AE1-DC0896E64EB2}" type="datetimeFigureOut">
               <a:rPr lang="zh-CN" altLang="en-US" smtClean="0"/>
-              <a:t>2026/4/27</a:t>
+              <a:t>2026/4/29</a:t>
             </a:fld>
             <a:endParaRPr lang="zh-CN" altLang="en-US"/>
           </a:p>
@@ -2739,7 +3203,7 @@
           <a:p>
             <a:fld id="{CC37D159-D846-43FD-8AE1-DC0896E64EB2}" type="datetimeFigureOut">
               <a:rPr lang="zh-CN" altLang="en-US" smtClean="0"/>
-              <a:t>2026/4/27</a:t>
+              <a:t>2026/4/29</a:t>
             </a:fld>
             <a:endParaRPr lang="zh-CN" altLang="en-US"/>
           </a:p>
@@ -2852,7 +3316,7 @@
           <a:p>
             <a:fld id="{CC37D159-D846-43FD-8AE1-DC0896E64EB2}" type="datetimeFigureOut">
               <a:rPr lang="zh-CN" altLang="en-US" smtClean="0"/>
-              <a:t>2026/4/27</a:t>
+              <a:t>2026/4/29</a:t>
             </a:fld>
             <a:endParaRPr lang="zh-CN" altLang="en-US"/>
           </a:p>
@@ -3163,7 +3627,7 @@
           <a:p>
             <a:fld id="{CC37D159-D846-43FD-8AE1-DC0896E64EB2}" type="datetimeFigureOut">
               <a:rPr lang="zh-CN" altLang="en-US" smtClean="0"/>
-              <a:t>2026/4/27</a:t>
+              <a:t>2026/4/29</a:t>
             </a:fld>
             <a:endParaRPr lang="zh-CN" altLang="en-US"/>
           </a:p>
@@ -3451,7 +3915,7 @@
           <a:p>
             <a:fld id="{CC37D159-D846-43FD-8AE1-DC0896E64EB2}" type="datetimeFigureOut">
               <a:rPr lang="zh-CN" altLang="en-US" smtClean="0"/>
-              <a:t>2026/4/27</a:t>
+              <a:t>2026/4/29</a:t>
             </a:fld>
             <a:endParaRPr lang="zh-CN" altLang="en-US"/>
           </a:p>
@@ -3692,7 +4156,7 @@
           <a:p>
             <a:fld id="{CC37D159-D846-43FD-8AE1-DC0896E64EB2}" type="datetimeFigureOut">
               <a:rPr lang="zh-CN" altLang="en-US" smtClean="0"/>
-              <a:t>2026/4/27</a:t>
+              <a:t>2026/4/29</a:t>
             </a:fld>
             <a:endParaRPr lang="zh-CN" altLang="en-US"/>
           </a:p>
@@ -4111,10 +4575,10 @@
       </p:grpSpPr>
       <p:sp>
         <p:nvSpPr>
-          <p:cNvPr id="4" name="左大括号 3">
-            <a:extLst>
-              <a:ext uri="{FF2B5EF4-FFF2-40B4-BE49-F238E27FC236}">
-                <a16:creationId xmlns:a16="http://schemas.microsoft.com/office/drawing/2014/main" id="{7C33A173-BBF1-57DC-3EB4-AFA7A23FFD43}"/>
+          <p:cNvPr id="5" name="矩形 4">
+            <a:extLst>
+              <a:ext uri="{FF2B5EF4-FFF2-40B4-BE49-F238E27FC236}">
+                <a16:creationId xmlns:a16="http://schemas.microsoft.com/office/drawing/2014/main" id="{D8DFAFF4-6E41-E6DF-2CCE-3D5FEB9D2187}"/>
               </a:ext>
             </a:extLst>
           </p:cNvPr>
@@ -4123,57 +4587,8 @@
         </p:nvSpPr>
         <p:spPr>
           <a:xfrm>
-            <a:off x="4188692" y="1620982"/>
-            <a:ext cx="1560946" cy="3860800"/>
-          </a:xfrm>
-          <a:prstGeom prst="leftBrace">
-            <a:avLst/>
-          </a:prstGeom>
-          <a:ln>
-            <a:solidFill>
-              <a:schemeClr val="tx1"/>
-            </a:solidFill>
-          </a:ln>
-        </p:spPr>
-        <p:style>
-          <a:lnRef idx="2">
-            <a:schemeClr val="accent1"/>
-          </a:lnRef>
-          <a:fillRef idx="0">
-            <a:schemeClr val="accent1"/>
-          </a:fillRef>
-          <a:effectRef idx="1">
-            <a:schemeClr val="accent1"/>
-          </a:effectRef>
-          <a:fontRef idx="minor">
-            <a:schemeClr val="tx1"/>
-          </a:fontRef>
-        </p:style>
-        <p:txBody>
-          <a:bodyPr rtlCol="0" anchor="ctr"/>
-          <a:lstStyle/>
-          <a:p>
-            <a:pPr algn="ctr"/>
-            <a:endParaRPr lang="zh-CN" altLang="en-US"/>
-          </a:p>
-        </p:txBody>
-      </p:sp>
-      <p:sp>
-        <p:nvSpPr>
-          <p:cNvPr id="5" name="矩形 4">
-            <a:extLst>
-              <a:ext uri="{FF2B5EF4-FFF2-40B4-BE49-F238E27FC236}">
-                <a16:creationId xmlns:a16="http://schemas.microsoft.com/office/drawing/2014/main" id="{D8DFAFF4-6E41-E6DF-2CCE-3D5FEB9D2187}"/>
-              </a:ext>
-            </a:extLst>
-          </p:cNvPr>
-          <p:cNvSpPr/>
-          <p:nvPr/>
-        </p:nvSpPr>
-        <p:spPr>
-          <a:xfrm>
-            <a:off x="2636981" y="3158836"/>
-            <a:ext cx="1463964" cy="785091"/>
+            <a:off x="4949988" y="1926384"/>
+            <a:ext cx="2292023" cy="785091"/>
           </a:xfrm>
           <a:prstGeom prst="rect">
             <a:avLst/>
@@ -4216,24 +4631,121 @@
                 <a:latin typeface="Times New Roman" panose="02020603050405020304" pitchFamily="18" charset="0"/>
                 <a:cs typeface="Times New Roman" panose="02020603050405020304" pitchFamily="18" charset="0"/>
               </a:rPr>
-              <a:t>Yolo</a:t>
-            </a:r>
-            <a:endParaRPr lang="zh-CN" altLang="en-US" sz="2400" b="1" dirty="0">
-              <a:solidFill>
-                <a:schemeClr val="tx1"/>
-              </a:solidFill>
+              <a:t>RL</a:t>
+            </a:r>
+            <a:r>
+              <a:rPr lang="zh-CN" altLang="en-US" sz="2400" b="1" dirty="0">
+                <a:solidFill>
+                  <a:schemeClr val="tx1"/>
+                </a:solidFill>
+                <a:latin typeface="Times New Roman" panose="02020603050405020304" pitchFamily="18" charset="0"/>
+                <a:cs typeface="Times New Roman" panose="02020603050405020304" pitchFamily="18" charset="0"/>
+              </a:rPr>
+              <a:t>结合大模型</a:t>
+            </a:r>
+          </a:p>
+        </p:txBody>
+      </p:sp>
+      <p:sp>
+        <p:nvSpPr>
+          <p:cNvPr id="8" name="文本框 7">
+            <a:extLst>
+              <a:ext uri="{FF2B5EF4-FFF2-40B4-BE49-F238E27FC236}">
+                <a16:creationId xmlns:a16="http://schemas.microsoft.com/office/drawing/2014/main" id="{F00A2E51-F5B0-85BB-D1F7-EA6056F3C66B}"/>
+              </a:ext>
+            </a:extLst>
+          </p:cNvPr>
+          <p:cNvSpPr txBox="1"/>
+          <p:nvPr/>
+        </p:nvSpPr>
+        <p:spPr>
+          <a:xfrm>
+            <a:off x="5307495" y="3255570"/>
+            <a:ext cx="1769165" cy="892552"/>
+          </a:xfrm>
+          <a:prstGeom prst="rect">
+            <a:avLst/>
+          </a:prstGeom>
+          <a:noFill/>
+        </p:spPr>
+        <p:txBody>
+          <a:bodyPr wrap="square" rtlCol="0">
+            <a:spAutoFit/>
+          </a:bodyPr>
+          <a:lstStyle/>
+          <a:p>
+            <a:r>
+              <a:rPr lang="zh-CN" altLang="en-US" sz="2600" b="1" dirty="0">
+                <a:latin typeface="Times New Roman" panose="02020603050405020304" pitchFamily="18" charset="0"/>
+                <a:ea typeface="SimSun" panose="02010600030101010101" pitchFamily="2" charset="-122"/>
+              </a:rPr>
+              <a:t>     张波</a:t>
+            </a:r>
+            <a:endParaRPr lang="en-US" altLang="zh-CN" sz="2600" b="1" dirty="0">
               <a:latin typeface="Times New Roman" panose="02020603050405020304" pitchFamily="18" charset="0"/>
-              <a:cs typeface="Times New Roman" panose="02020603050405020304" pitchFamily="18" charset="0"/>
+              <a:ea typeface="SimSun" panose="02010600030101010101" pitchFamily="2" charset="-122"/>
             </a:endParaRPr>
           </a:p>
-        </p:txBody>
-      </p:sp>
-      <p:sp>
-        <p:nvSpPr>
-          <p:cNvPr id="6" name="矩形 5">
-            <a:extLst>
-              <a:ext uri="{FF2B5EF4-FFF2-40B4-BE49-F238E27FC236}">
-                <a16:creationId xmlns:a16="http://schemas.microsoft.com/office/drawing/2014/main" id="{C301BE84-C950-B79F-BE45-5BD93E1EB277}"/>
+          <a:p>
+            <a:r>
+              <a:rPr lang="en-US" altLang="zh-CN" sz="2600" b="1" dirty="0">
+                <a:latin typeface="Times New Roman" panose="02020603050405020304" pitchFamily="18" charset="0"/>
+                <a:ea typeface="SimSun" panose="02010600030101010101" pitchFamily="2" charset="-122"/>
+              </a:rPr>
+              <a:t>  2026.4.29</a:t>
+            </a:r>
+            <a:r>
+              <a:rPr lang="zh-CN" altLang="en-US" sz="2600" b="1" dirty="0">
+                <a:latin typeface="Times New Roman" panose="02020603050405020304" pitchFamily="18" charset="0"/>
+                <a:ea typeface="SimSun" panose="02010600030101010101" pitchFamily="2" charset="-122"/>
+              </a:rPr>
+              <a:t> </a:t>
+            </a:r>
+          </a:p>
+        </p:txBody>
+      </p:sp>
+    </p:spTree>
+    <p:extLst>
+      <p:ext uri="{BB962C8B-B14F-4D97-AF65-F5344CB8AC3E}">
+        <p14:creationId xmlns:p14="http://schemas.microsoft.com/office/powerpoint/2010/main" val="3418504963"/>
+      </p:ext>
+    </p:extLst>
+  </p:cSld>
+  <p:clrMapOvr>
+    <a:masterClrMapping/>
+  </p:clrMapOvr>
+</p:sld>
+</file>
+
+<file path=ppt/slides/slide10.xml><?xml version="1.0" encoding="utf-8"?>
+<p:sld xmlns:a="http://schemas.openxmlformats.org/drawingml/2006/main" xmlns:r="http://schemas.openxmlformats.org/officeDocument/2006/relationships" xmlns:p="http://schemas.openxmlformats.org/presentationml/2006/main">
+  <p:cSld>
+    <p:spTree>
+      <p:nvGrpSpPr>
+        <p:cNvPr id="1" name="">
+          <a:extLst>
+            <a:ext uri="{FF2B5EF4-FFF2-40B4-BE49-F238E27FC236}">
+              <a16:creationId xmlns:a16="http://schemas.microsoft.com/office/drawing/2014/main" id="{E817489A-C7F8-FF9B-3EDC-641B9123E6AC}"/>
+            </a:ext>
+          </a:extLst>
+        </p:cNvPr>
+        <p:cNvGrpSpPr/>
+        <p:nvPr/>
+      </p:nvGrpSpPr>
+      <p:grpSpPr>
+        <a:xfrm>
+          <a:off x="0" y="0"/>
+          <a:ext cx="0" cy="0"/>
+          <a:chOff x="0" y="0"/>
+          <a:chExt cx="0" cy="0"/>
+        </a:xfrm>
+      </p:grpSpPr>
+      <p:sp>
+        <p:nvSpPr>
+          <p:cNvPr id="5" name="矩形 4">
+            <a:extLst>
+              <a:ext uri="{FF2B5EF4-FFF2-40B4-BE49-F238E27FC236}">
+                <a16:creationId xmlns:a16="http://schemas.microsoft.com/office/drawing/2014/main" id="{747952CB-A7B0-09A4-6B09-7EA699090AA5}"/>
               </a:ext>
             </a:extLst>
           </p:cNvPr>
@@ -4242,8 +4754,8 @@
         </p:nvSpPr>
         <p:spPr>
           <a:xfrm>
-            <a:off x="5929745" y="4999181"/>
-            <a:ext cx="1884218" cy="965201"/>
+            <a:off x="0" y="105878"/>
+            <a:ext cx="10430933" cy="651933"/>
           </a:xfrm>
           <a:prstGeom prst="rect">
             <a:avLst/>
@@ -4251,6 +4763,11 @@
           <a:solidFill>
             <a:schemeClr val="bg1"/>
           </a:solidFill>
+          <a:ln>
+            <a:solidFill>
+              <a:schemeClr val="bg1"/>
+            </a:solidFill>
+          </a:ln>
         </p:spPr>
         <p:style>
           <a:lnRef idx="2">
@@ -4272,26 +4789,575 @@
           <a:bodyPr rtlCol="0" anchor="ctr"/>
           <a:lstStyle/>
           <a:p>
-            <a:pPr algn="ctr"/>
-            <a:r>
-              <a:rPr lang="zh-CN" altLang="en-US" sz="2400" dirty="0">
+            <a:r>
+              <a:rPr lang="en-US" altLang="zh-CN" sz="3000" dirty="0">
                 <a:solidFill>
                   <a:schemeClr val="tx1"/>
                 </a:solidFill>
-                <a:latin typeface="SimSun" panose="02010600030101010101" pitchFamily="2" charset="-122"/>
-                <a:ea typeface="SimSun" panose="02010600030101010101" pitchFamily="2" charset="-122"/>
-              </a:rPr>
-              <a:t>算法应用</a:t>
-            </a:r>
-          </a:p>
-        </p:txBody>
-      </p:sp>
-      <p:sp>
-        <p:nvSpPr>
-          <p:cNvPr id="7" name="矩形 6">
-            <a:extLst>
-              <a:ext uri="{FF2B5EF4-FFF2-40B4-BE49-F238E27FC236}">
-                <a16:creationId xmlns:a16="http://schemas.microsoft.com/office/drawing/2014/main" id="{122E2A22-3B29-1216-9D99-9C33AE854680}"/>
+                <a:latin typeface="Times New Roman" panose="02020603050405020304" pitchFamily="18" charset="0"/>
+                <a:cs typeface="Times New Roman" panose="02020603050405020304" pitchFamily="18" charset="0"/>
+              </a:rPr>
+              <a:t>DeepSeekMath: Pushing the Limits of Mathematical Reasoning in Open Language Models</a:t>
+            </a:r>
+          </a:p>
+        </p:txBody>
+      </p:sp>
+      <p:sp>
+        <p:nvSpPr>
+          <p:cNvPr id="7" name="文本框 6">
+            <a:extLst>
+              <a:ext uri="{FF2B5EF4-FFF2-40B4-BE49-F238E27FC236}">
+                <a16:creationId xmlns:a16="http://schemas.microsoft.com/office/drawing/2014/main" id="{8CB5EDC4-8EAC-4C8C-9E6C-9DEECE258BDD}"/>
+              </a:ext>
+            </a:extLst>
+          </p:cNvPr>
+          <p:cNvSpPr txBox="1"/>
+          <p:nvPr/>
+        </p:nvSpPr>
+        <p:spPr>
+          <a:xfrm>
+            <a:off x="-4635" y="1338311"/>
+            <a:ext cx="12192000" cy="5632311"/>
+          </a:xfrm>
+          <a:prstGeom prst="rect">
+            <a:avLst/>
+          </a:prstGeom>
+          <a:noFill/>
+        </p:spPr>
+        <p:txBody>
+          <a:bodyPr wrap="square" rtlCol="0">
+            <a:spAutoFit/>
+          </a:bodyPr>
+          <a:lstStyle/>
+          <a:p>
+            <a:r>
+              <a:rPr lang="en-US" altLang="zh-CN" sz="2400" dirty="0">
+                <a:latin typeface="Times New Roman" panose="02020603050405020304" pitchFamily="18" charset="0"/>
+                <a:ea typeface="SimSun" panose="02010600030101010101" pitchFamily="2" charset="-122"/>
+                <a:cs typeface="Times New Roman" panose="02020603050405020304" pitchFamily="18" charset="0"/>
+              </a:rPr>
+              <a:t>PPO</a:t>
+            </a:r>
+            <a:r>
+              <a:rPr lang="zh-CN" altLang="en-US" sz="2400" dirty="0">
+                <a:latin typeface="Times New Roman" panose="02020603050405020304" pitchFamily="18" charset="0"/>
+                <a:ea typeface="SimSun" panose="02010600030101010101" pitchFamily="2" charset="-122"/>
+                <a:cs typeface="Times New Roman" panose="02020603050405020304" pitchFamily="18" charset="0"/>
+              </a:rPr>
+              <a:t>的问题：</a:t>
+            </a:r>
+            <a:r>
+              <a:rPr lang="en-US" altLang="zh-CN" sz="2400" dirty="0">
+                <a:latin typeface="Times New Roman" panose="02020603050405020304" pitchFamily="18" charset="0"/>
+                <a:ea typeface="SimSun" panose="02010600030101010101" pitchFamily="2" charset="-122"/>
+                <a:cs typeface="Times New Roman" panose="02020603050405020304" pitchFamily="18" charset="0"/>
+              </a:rPr>
+              <a:t>1. </a:t>
+            </a:r>
+            <a:r>
+              <a:rPr lang="zh-CN" altLang="en-US" sz="2400" dirty="0">
+                <a:latin typeface="Times New Roman" panose="02020603050405020304" pitchFamily="18" charset="0"/>
+                <a:ea typeface="SimSun" panose="02010600030101010101" pitchFamily="2" charset="-122"/>
+                <a:cs typeface="Times New Roman" panose="02020603050405020304" pitchFamily="18" charset="0"/>
+              </a:rPr>
+              <a:t>同时训练一个价值函数与策略模型，导致计算量太大。</a:t>
+            </a:r>
+            <a:endParaRPr lang="en-US" altLang="zh-CN" sz="2400" dirty="0">
+              <a:latin typeface="Times New Roman" panose="02020603050405020304" pitchFamily="18" charset="0"/>
+              <a:ea typeface="SimSun" panose="02010600030101010101" pitchFamily="2" charset="-122"/>
+              <a:cs typeface="Times New Roman" panose="02020603050405020304" pitchFamily="18" charset="0"/>
+            </a:endParaRPr>
+          </a:p>
+          <a:p>
+            <a:r>
+              <a:rPr lang="en-US" altLang="zh-CN" sz="2400" dirty="0">
+                <a:latin typeface="Times New Roman" panose="02020603050405020304" pitchFamily="18" charset="0"/>
+                <a:ea typeface="SimSun" panose="02010600030101010101" pitchFamily="2" charset="-122"/>
+                <a:cs typeface="Times New Roman" panose="02020603050405020304" pitchFamily="18" charset="0"/>
+              </a:rPr>
+              <a:t>		2. </a:t>
+            </a:r>
+            <a:r>
+              <a:rPr lang="zh-CN" altLang="en-US" sz="2400" dirty="0">
+                <a:latin typeface="Times New Roman" panose="02020603050405020304" pitchFamily="18" charset="0"/>
+                <a:ea typeface="SimSun" panose="02010600030101010101" pitchFamily="2" charset="-122"/>
+                <a:cs typeface="Times New Roman" panose="02020603050405020304" pitchFamily="18" charset="0"/>
+              </a:rPr>
+              <a:t>价值函数难以迁移到</a:t>
+            </a:r>
+            <a:r>
+              <a:rPr lang="en-US" altLang="zh-CN" sz="2400" dirty="0">
+                <a:latin typeface="Times New Roman" panose="02020603050405020304" pitchFamily="18" charset="0"/>
+                <a:ea typeface="SimSun" panose="02010600030101010101" pitchFamily="2" charset="-122"/>
+                <a:cs typeface="Times New Roman" panose="02020603050405020304" pitchFamily="18" charset="0"/>
+              </a:rPr>
+              <a:t>LLM</a:t>
+            </a:r>
+            <a:r>
+              <a:rPr lang="zh-CN" altLang="en-US" sz="2400" dirty="0">
+                <a:latin typeface="Times New Roman" panose="02020603050405020304" pitchFamily="18" charset="0"/>
+                <a:ea typeface="SimSun" panose="02010600030101010101" pitchFamily="2" charset="-122"/>
+                <a:cs typeface="Times New Roman" panose="02020603050405020304" pitchFamily="18" charset="0"/>
+              </a:rPr>
+              <a:t>场景中，因为通常只有最后一个 </a:t>
+            </a:r>
+            <a:r>
+              <a:rPr lang="en-US" altLang="zh-CN" sz="2400" dirty="0">
+                <a:latin typeface="Times New Roman" panose="02020603050405020304" pitchFamily="18" charset="0"/>
+                <a:ea typeface="SimSun" panose="02010600030101010101" pitchFamily="2" charset="-122"/>
+                <a:cs typeface="Times New Roman" panose="02020603050405020304" pitchFamily="18" charset="0"/>
+              </a:rPr>
+              <a:t>token </a:t>
+            </a:r>
+            <a:r>
+              <a:rPr lang="zh-CN" altLang="en-US" sz="2400" dirty="0">
+                <a:latin typeface="Times New Roman" panose="02020603050405020304" pitchFamily="18" charset="0"/>
+                <a:ea typeface="SimSun" panose="02010600030101010101" pitchFamily="2" charset="-122"/>
+                <a:cs typeface="Times New Roman" panose="02020603050405020304" pitchFamily="18" charset="0"/>
+              </a:rPr>
+              <a:t>会被奖励</a:t>
+            </a:r>
+            <a:r>
+              <a:rPr lang="en-US" altLang="zh-CN" sz="2400" dirty="0">
+                <a:latin typeface="Times New Roman" panose="02020603050405020304" pitchFamily="18" charset="0"/>
+                <a:ea typeface="SimSun" panose="02010600030101010101" pitchFamily="2" charset="-122"/>
+                <a:cs typeface="Times New Roman" panose="02020603050405020304" pitchFamily="18" charset="0"/>
+              </a:rPr>
+              <a:t>			</a:t>
+            </a:r>
+            <a:r>
+              <a:rPr lang="zh-CN" altLang="en-US" sz="2400" dirty="0">
+                <a:latin typeface="Times New Roman" panose="02020603050405020304" pitchFamily="18" charset="0"/>
+                <a:ea typeface="SimSun" panose="02010600030101010101" pitchFamily="2" charset="-122"/>
+                <a:cs typeface="Times New Roman" panose="02020603050405020304" pitchFamily="18" charset="0"/>
+              </a:rPr>
+              <a:t>模型赋予奖励，这使得在每个 </a:t>
+            </a:r>
+            <a:r>
+              <a:rPr lang="en-US" altLang="zh-CN" sz="2400" dirty="0">
+                <a:latin typeface="Times New Roman" panose="02020603050405020304" pitchFamily="18" charset="0"/>
+                <a:ea typeface="SimSun" panose="02010600030101010101" pitchFamily="2" charset="-122"/>
+                <a:cs typeface="Times New Roman" panose="02020603050405020304" pitchFamily="18" charset="0"/>
+              </a:rPr>
+              <a:t>token </a:t>
+            </a:r>
+            <a:r>
+              <a:rPr lang="zh-CN" altLang="en-US" sz="2400" dirty="0">
+                <a:latin typeface="Times New Roman" panose="02020603050405020304" pitchFamily="18" charset="0"/>
+                <a:ea typeface="SimSun" panose="02010600030101010101" pitchFamily="2" charset="-122"/>
+                <a:cs typeface="Times New Roman" panose="02020603050405020304" pitchFamily="18" charset="0"/>
+              </a:rPr>
+              <a:t>上学习价值函数变得更加困难。</a:t>
+            </a:r>
+            <a:endParaRPr lang="en-US" altLang="zh-CN" sz="2400" dirty="0">
+              <a:latin typeface="Times New Roman" panose="02020603050405020304" pitchFamily="18" charset="0"/>
+              <a:ea typeface="SimSun" panose="02010600030101010101" pitchFamily="2" charset="-122"/>
+              <a:cs typeface="Times New Roman" panose="02020603050405020304" pitchFamily="18" charset="0"/>
+            </a:endParaRPr>
+          </a:p>
+          <a:p>
+            <a:r>
+              <a:rPr lang="zh-CN" altLang="en-US" sz="2400" dirty="0">
+                <a:latin typeface="Times New Roman" panose="02020603050405020304" pitchFamily="18" charset="0"/>
+                <a:ea typeface="SimSun" panose="02010600030101010101" pitchFamily="2" charset="-122"/>
+                <a:cs typeface="Times New Roman" panose="02020603050405020304" pitchFamily="18" charset="0"/>
+              </a:rPr>
+              <a:t>因此在</a:t>
+            </a:r>
+            <a:r>
+              <a:rPr lang="en-US" altLang="zh-CN" sz="2400" dirty="0">
+                <a:latin typeface="Times New Roman" panose="02020603050405020304" pitchFamily="18" charset="0"/>
+                <a:ea typeface="SimSun" panose="02010600030101010101" pitchFamily="2" charset="-122"/>
+                <a:cs typeface="Times New Roman" panose="02020603050405020304" pitchFamily="18" charset="0"/>
+              </a:rPr>
+              <a:t>PPO</a:t>
+            </a:r>
+            <a:r>
+              <a:rPr lang="zh-CN" altLang="en-US" sz="2400" dirty="0">
+                <a:latin typeface="Times New Roman" panose="02020603050405020304" pitchFamily="18" charset="0"/>
+                <a:ea typeface="SimSun" panose="02010600030101010101" pitchFamily="2" charset="-122"/>
+                <a:cs typeface="Times New Roman" panose="02020603050405020304" pitchFamily="18" charset="0"/>
+              </a:rPr>
+              <a:t>的基础上进行更改得到了</a:t>
+            </a:r>
+            <a:r>
+              <a:rPr lang="en-US" altLang="zh-CN" sz="2400" dirty="0">
+                <a:latin typeface="Times New Roman" panose="02020603050405020304" pitchFamily="18" charset="0"/>
+                <a:ea typeface="SimSun" panose="02010600030101010101" pitchFamily="2" charset="-122"/>
+                <a:cs typeface="Times New Roman" panose="02020603050405020304" pitchFamily="18" charset="0"/>
+              </a:rPr>
+              <a:t>GRPO</a:t>
+            </a:r>
+          </a:p>
+          <a:p>
+            <a:endParaRPr lang="en-US" altLang="zh-CN" sz="2400" dirty="0">
+              <a:latin typeface="Times New Roman" panose="02020603050405020304" pitchFamily="18" charset="0"/>
+              <a:ea typeface="SimSun" panose="02010600030101010101" pitchFamily="2" charset="-122"/>
+              <a:cs typeface="Times New Roman" panose="02020603050405020304" pitchFamily="18" charset="0"/>
+            </a:endParaRPr>
+          </a:p>
+          <a:p>
+            <a:endParaRPr lang="en-US" altLang="zh-CN" sz="2400" dirty="0">
+              <a:latin typeface="Times New Roman" panose="02020603050405020304" pitchFamily="18" charset="0"/>
+              <a:ea typeface="SimSun" panose="02010600030101010101" pitchFamily="2" charset="-122"/>
+              <a:cs typeface="Times New Roman" panose="02020603050405020304" pitchFamily="18" charset="0"/>
+            </a:endParaRPr>
+          </a:p>
+          <a:p>
+            <a:endParaRPr lang="en-US" altLang="zh-CN" sz="2400" dirty="0">
+              <a:latin typeface="Times New Roman" panose="02020603050405020304" pitchFamily="18" charset="0"/>
+              <a:ea typeface="SimSun" panose="02010600030101010101" pitchFamily="2" charset="-122"/>
+              <a:cs typeface="Times New Roman" panose="02020603050405020304" pitchFamily="18" charset="0"/>
+            </a:endParaRPr>
+          </a:p>
+          <a:p>
+            <a:endParaRPr lang="en-US" altLang="zh-CN" sz="2400" dirty="0">
+              <a:latin typeface="Times New Roman" panose="02020603050405020304" pitchFamily="18" charset="0"/>
+              <a:ea typeface="SimSun" panose="02010600030101010101" pitchFamily="2" charset="-122"/>
+              <a:cs typeface="Times New Roman" panose="02020603050405020304" pitchFamily="18" charset="0"/>
+            </a:endParaRPr>
+          </a:p>
+          <a:p>
+            <a:endParaRPr lang="en-US" altLang="zh-CN" sz="2400" dirty="0">
+              <a:latin typeface="Times New Roman" panose="02020603050405020304" pitchFamily="18" charset="0"/>
+              <a:ea typeface="SimSun" panose="02010600030101010101" pitchFamily="2" charset="-122"/>
+              <a:cs typeface="Times New Roman" panose="02020603050405020304" pitchFamily="18" charset="0"/>
+            </a:endParaRPr>
+          </a:p>
+          <a:p>
+            <a:endParaRPr lang="en-US" altLang="zh-CN" sz="2400" dirty="0">
+              <a:latin typeface="Times New Roman" panose="02020603050405020304" pitchFamily="18" charset="0"/>
+              <a:ea typeface="SimSun" panose="02010600030101010101" pitchFamily="2" charset="-122"/>
+              <a:cs typeface="Times New Roman" panose="02020603050405020304" pitchFamily="18" charset="0"/>
+            </a:endParaRPr>
+          </a:p>
+          <a:p>
+            <a:endParaRPr lang="en-US" altLang="zh-CN" sz="2400" dirty="0">
+              <a:latin typeface="Times New Roman" panose="02020603050405020304" pitchFamily="18" charset="0"/>
+              <a:ea typeface="SimSun" panose="02010600030101010101" pitchFamily="2" charset="-122"/>
+              <a:cs typeface="Times New Roman" panose="02020603050405020304" pitchFamily="18" charset="0"/>
+            </a:endParaRPr>
+          </a:p>
+          <a:p>
+            <a:endParaRPr lang="en-US" altLang="zh-CN" sz="2400" dirty="0">
+              <a:latin typeface="Times New Roman" panose="02020603050405020304" pitchFamily="18" charset="0"/>
+              <a:ea typeface="SimSun" panose="02010600030101010101" pitchFamily="2" charset="-122"/>
+              <a:cs typeface="Times New Roman" panose="02020603050405020304" pitchFamily="18" charset="0"/>
+            </a:endParaRPr>
+          </a:p>
+          <a:p>
+            <a:endParaRPr lang="en-US" altLang="zh-CN" sz="2400" dirty="0">
+              <a:latin typeface="Times New Roman" panose="02020603050405020304" pitchFamily="18" charset="0"/>
+              <a:ea typeface="SimSun" panose="02010600030101010101" pitchFamily="2" charset="-122"/>
+              <a:cs typeface="Times New Roman" panose="02020603050405020304" pitchFamily="18" charset="0"/>
+            </a:endParaRPr>
+          </a:p>
+          <a:p>
+            <a:endParaRPr lang="en-US" altLang="zh-CN" sz="2400" dirty="0">
+              <a:latin typeface="Times New Roman" panose="02020603050405020304" pitchFamily="18" charset="0"/>
+              <a:ea typeface="SimSun" panose="02010600030101010101" pitchFamily="2" charset="-122"/>
+              <a:cs typeface="Times New Roman" panose="02020603050405020304" pitchFamily="18" charset="0"/>
+            </a:endParaRPr>
+          </a:p>
+          <a:p>
+            <a:r>
+              <a:rPr lang="en-US" altLang="zh-CN" sz="2400" dirty="0">
+                <a:latin typeface="Times New Roman" panose="02020603050405020304" pitchFamily="18" charset="0"/>
+                <a:ea typeface="SimSun" panose="02010600030101010101" pitchFamily="2" charset="-122"/>
+                <a:cs typeface="Times New Roman" panose="02020603050405020304" pitchFamily="18" charset="0"/>
+              </a:rPr>
+              <a:t>		PPO</a:t>
+            </a:r>
+            <a:r>
+              <a:rPr lang="zh-CN" altLang="en-US" sz="2400" dirty="0">
+                <a:latin typeface="Times New Roman" panose="02020603050405020304" pitchFamily="18" charset="0"/>
+                <a:ea typeface="SimSun" panose="02010600030101010101" pitchFamily="2" charset="-122"/>
+                <a:cs typeface="Times New Roman" panose="02020603050405020304" pitchFamily="18" charset="0"/>
+              </a:rPr>
+              <a:t>与</a:t>
+            </a:r>
+            <a:r>
+              <a:rPr lang="en-US" altLang="zh-CN" sz="2400" dirty="0">
+                <a:latin typeface="Times New Roman" panose="02020603050405020304" pitchFamily="18" charset="0"/>
+                <a:ea typeface="SimSun" panose="02010600030101010101" pitchFamily="2" charset="-122"/>
+                <a:cs typeface="Times New Roman" panose="02020603050405020304" pitchFamily="18" charset="0"/>
+              </a:rPr>
+              <a:t>GRPO</a:t>
+            </a:r>
+            <a:r>
+              <a:rPr lang="zh-CN" altLang="en-US" sz="2400" dirty="0">
+                <a:latin typeface="Times New Roman" panose="02020603050405020304" pitchFamily="18" charset="0"/>
+                <a:ea typeface="SimSun" panose="02010600030101010101" pitchFamily="2" charset="-122"/>
+                <a:cs typeface="Times New Roman" panose="02020603050405020304" pitchFamily="18" charset="0"/>
+              </a:rPr>
+              <a:t>结合</a:t>
+            </a:r>
+            <a:r>
+              <a:rPr lang="en-US" altLang="zh-CN" sz="2400" dirty="0">
+                <a:latin typeface="Times New Roman" panose="02020603050405020304" pitchFamily="18" charset="0"/>
+                <a:ea typeface="SimSun" panose="02010600030101010101" pitchFamily="2" charset="-122"/>
+                <a:cs typeface="Times New Roman" panose="02020603050405020304" pitchFamily="18" charset="0"/>
+              </a:rPr>
+              <a:t>LLM</a:t>
+            </a:r>
+            <a:r>
+              <a:rPr lang="zh-CN" altLang="en-US" sz="2400" dirty="0">
+                <a:latin typeface="Times New Roman" panose="02020603050405020304" pitchFamily="18" charset="0"/>
+                <a:ea typeface="SimSun" panose="02010600030101010101" pitchFamily="2" charset="-122"/>
+                <a:cs typeface="Times New Roman" panose="02020603050405020304" pitchFamily="18" charset="0"/>
+              </a:rPr>
+              <a:t>更新图</a:t>
+            </a:r>
+            <a:endParaRPr lang="en-US" altLang="zh-CN" sz="2400" dirty="0">
+              <a:latin typeface="Times New Roman" panose="02020603050405020304" pitchFamily="18" charset="0"/>
+              <a:ea typeface="SimSun" panose="02010600030101010101" pitchFamily="2" charset="-122"/>
+              <a:cs typeface="Times New Roman" panose="02020603050405020304" pitchFamily="18" charset="0"/>
+            </a:endParaRPr>
+          </a:p>
+        </p:txBody>
+      </p:sp>
+      <p:pic>
+        <p:nvPicPr>
+          <p:cNvPr id="2" name="图片 1">
+            <a:extLst>
+              <a:ext uri="{FF2B5EF4-FFF2-40B4-BE49-F238E27FC236}">
+                <a16:creationId xmlns:a16="http://schemas.microsoft.com/office/drawing/2014/main" id="{732B7AFF-8347-2898-3555-07765125613E}"/>
+              </a:ext>
+            </a:extLst>
+          </p:cNvPr>
+          <p:cNvPicPr>
+            <a:picLocks noChangeAspect="1"/>
+          </p:cNvPicPr>
+          <p:nvPr/>
+        </p:nvPicPr>
+        <p:blipFill>
+          <a:blip r:embed="rId2"/>
+          <a:stretch>
+            <a:fillRect/>
+          </a:stretch>
+        </p:blipFill>
+        <p:spPr>
+          <a:xfrm>
+            <a:off x="-4635" y="2893275"/>
+            <a:ext cx="8114047" cy="3429484"/>
+          </a:xfrm>
+          <a:prstGeom prst="rect">
+            <a:avLst/>
+          </a:prstGeom>
+        </p:spPr>
+      </p:pic>
+      <p:sp>
+        <p:nvSpPr>
+          <p:cNvPr id="3" name="文本框 2">
+            <a:extLst>
+              <a:ext uri="{FF2B5EF4-FFF2-40B4-BE49-F238E27FC236}">
+                <a16:creationId xmlns:a16="http://schemas.microsoft.com/office/drawing/2014/main" id="{E4B298B2-1948-84F1-2A26-D3517B9080E9}"/>
+              </a:ext>
+            </a:extLst>
+          </p:cNvPr>
+          <p:cNvSpPr txBox="1"/>
+          <p:nvPr/>
+        </p:nvSpPr>
+        <p:spPr>
+          <a:xfrm>
+            <a:off x="8082504" y="2893275"/>
+            <a:ext cx="4104861" cy="3046988"/>
+          </a:xfrm>
+          <a:prstGeom prst="rect">
+            <a:avLst/>
+          </a:prstGeom>
+          <a:noFill/>
+        </p:spPr>
+        <p:txBody>
+          <a:bodyPr wrap="square" rtlCol="0">
+            <a:spAutoFit/>
+          </a:bodyPr>
+          <a:lstStyle/>
+          <a:p>
+            <a:r>
+              <a:rPr lang="zh-CN" altLang="en-US" sz="2400" dirty="0">
+                <a:latin typeface="Times New Roman" panose="02020603050405020304" pitchFamily="18" charset="0"/>
+                <a:ea typeface="SimSun" panose="02010600030101010101" pitchFamily="2" charset="-122"/>
+                <a:cs typeface="Times New Roman" panose="02020603050405020304" pitchFamily="18" charset="0"/>
+              </a:rPr>
+              <a:t>我认为，这两种方法有一条共同的线：</a:t>
+            </a:r>
+            <a:endParaRPr lang="en-US" altLang="zh-CN" sz="2400" dirty="0">
+              <a:latin typeface="Times New Roman" panose="02020603050405020304" pitchFamily="18" charset="0"/>
+              <a:ea typeface="SimSun" panose="02010600030101010101" pitchFamily="2" charset="-122"/>
+              <a:cs typeface="Times New Roman" panose="02020603050405020304" pitchFamily="18" charset="0"/>
+            </a:endParaRPr>
+          </a:p>
+          <a:p>
+            <a:r>
+              <a:rPr lang="en-US" altLang="zh-CN" sz="2400" dirty="0">
+                <a:latin typeface="Times New Roman" panose="02020603050405020304" pitchFamily="18" charset="0"/>
+                <a:ea typeface="SimSun" panose="02010600030101010101" pitchFamily="2" charset="-122"/>
+                <a:cs typeface="Times New Roman" panose="02020603050405020304" pitchFamily="18" charset="0"/>
+              </a:rPr>
+              <a:t>1.</a:t>
+            </a:r>
+            <a:r>
+              <a:rPr lang="zh-CN" altLang="en-US" sz="2400" dirty="0">
+                <a:latin typeface="Times New Roman" panose="02020603050405020304" pitchFamily="18" charset="0"/>
+                <a:ea typeface="SimSun" panose="02010600030101010101" pitchFamily="2" charset="-122"/>
+                <a:cs typeface="Times New Roman" panose="02020603050405020304" pitchFamily="18" charset="0"/>
+              </a:rPr>
+              <a:t>对于问题，通过当前</a:t>
+            </a:r>
+            <a:r>
+              <a:rPr lang="en-US" altLang="zh-CN" sz="2400" dirty="0">
+                <a:latin typeface="Times New Roman" panose="02020603050405020304" pitchFamily="18" charset="0"/>
+                <a:ea typeface="SimSun" panose="02010600030101010101" pitchFamily="2" charset="-122"/>
+                <a:cs typeface="Times New Roman" panose="02020603050405020304" pitchFamily="18" charset="0"/>
+              </a:rPr>
+              <a:t>policy</a:t>
+            </a:r>
+            <a:r>
+              <a:rPr lang="zh-CN" altLang="en-US" sz="2400" dirty="0">
+                <a:latin typeface="Times New Roman" panose="02020603050405020304" pitchFamily="18" charset="0"/>
+                <a:ea typeface="SimSun" panose="02010600030101010101" pitchFamily="2" charset="-122"/>
+                <a:cs typeface="Times New Roman" panose="02020603050405020304" pitchFamily="18" charset="0"/>
+              </a:rPr>
+              <a:t>回答答案。</a:t>
+            </a:r>
+            <a:endParaRPr lang="en-US" altLang="zh-CN" sz="2400" dirty="0">
+              <a:latin typeface="Times New Roman" panose="02020603050405020304" pitchFamily="18" charset="0"/>
+              <a:ea typeface="SimSun" panose="02010600030101010101" pitchFamily="2" charset="-122"/>
+              <a:cs typeface="Times New Roman" panose="02020603050405020304" pitchFamily="18" charset="0"/>
+            </a:endParaRPr>
+          </a:p>
+          <a:p>
+            <a:r>
+              <a:rPr lang="en-US" altLang="zh-CN" sz="2400" dirty="0">
+                <a:latin typeface="Times New Roman" panose="02020603050405020304" pitchFamily="18" charset="0"/>
+                <a:ea typeface="SimSun" panose="02010600030101010101" pitchFamily="2" charset="-122"/>
+                <a:cs typeface="Times New Roman" panose="02020603050405020304" pitchFamily="18" charset="0"/>
+              </a:rPr>
+              <a:t>2.</a:t>
+            </a:r>
+            <a:r>
+              <a:rPr lang="zh-CN" altLang="en-US" sz="2400" dirty="0">
+                <a:latin typeface="Times New Roman" panose="02020603050405020304" pitchFamily="18" charset="0"/>
+                <a:ea typeface="SimSun" panose="02010600030101010101" pitchFamily="2" charset="-122"/>
+                <a:cs typeface="Times New Roman" panose="02020603050405020304" pitchFamily="18" charset="0"/>
+              </a:rPr>
+              <a:t>然后对答案打分获得</a:t>
+            </a:r>
+            <a:r>
+              <a:rPr lang="en-US" altLang="zh-CN" sz="2400" dirty="0">
+                <a:latin typeface="Times New Roman" panose="02020603050405020304" pitchFamily="18" charset="0"/>
+                <a:ea typeface="SimSun" panose="02010600030101010101" pitchFamily="2" charset="-122"/>
+                <a:cs typeface="Times New Roman" panose="02020603050405020304" pitchFamily="18" charset="0"/>
+              </a:rPr>
+              <a:t>reward</a:t>
+            </a:r>
+            <a:r>
+              <a:rPr lang="zh-CN" altLang="en-US" sz="2400" dirty="0">
+                <a:latin typeface="Times New Roman" panose="02020603050405020304" pitchFamily="18" charset="0"/>
+                <a:ea typeface="SimSun" panose="02010600030101010101" pitchFamily="2" charset="-122"/>
+                <a:cs typeface="Times New Roman" panose="02020603050405020304" pitchFamily="18" charset="0"/>
+              </a:rPr>
+              <a:t>。</a:t>
+            </a:r>
+            <a:r>
+              <a:rPr lang="en-US" altLang="zh-CN" sz="2400" dirty="0">
+                <a:latin typeface="Times New Roman" panose="02020603050405020304" pitchFamily="18" charset="0"/>
+                <a:ea typeface="SimSun" panose="02010600030101010101" pitchFamily="2" charset="-122"/>
+                <a:cs typeface="Times New Roman" panose="02020603050405020304" pitchFamily="18" charset="0"/>
+              </a:rPr>
+              <a:t>3.</a:t>
+            </a:r>
+            <a:r>
+              <a:rPr lang="zh-CN" altLang="en-US" sz="2400" dirty="0">
+                <a:latin typeface="Times New Roman" panose="02020603050405020304" pitchFamily="18" charset="0"/>
+                <a:ea typeface="SimSun" panose="02010600030101010101" pitchFamily="2" charset="-122"/>
+                <a:cs typeface="Times New Roman" panose="02020603050405020304" pitchFamily="18" charset="0"/>
+              </a:rPr>
+              <a:t>接着去生成</a:t>
+            </a:r>
+            <a:r>
+              <a:rPr lang="en-US" altLang="zh-CN" sz="2400" dirty="0">
+                <a:latin typeface="Times New Roman" panose="02020603050405020304" pitchFamily="18" charset="0"/>
+                <a:ea typeface="SimSun" panose="02010600030101010101" pitchFamily="2" charset="-122"/>
+                <a:cs typeface="Times New Roman" panose="02020603050405020304" pitchFamily="18" charset="0"/>
+              </a:rPr>
+              <a:t>advantage value </a:t>
+            </a:r>
+            <a:r>
+              <a:rPr lang="zh-CN" altLang="en-US" sz="2400" dirty="0">
+                <a:latin typeface="Times New Roman" panose="02020603050405020304" pitchFamily="18" charset="0"/>
+                <a:ea typeface="SimSun" panose="02010600030101010101" pitchFamily="2" charset="-122"/>
+                <a:cs typeface="Times New Roman" panose="02020603050405020304" pitchFamily="18" charset="0"/>
+              </a:rPr>
+              <a:t>，再反馈到</a:t>
+            </a:r>
+            <a:r>
+              <a:rPr lang="en-US" altLang="zh-CN" sz="2400" dirty="0">
+                <a:latin typeface="Times New Roman" panose="02020603050405020304" pitchFamily="18" charset="0"/>
+                <a:ea typeface="SimSun" panose="02010600030101010101" pitchFamily="2" charset="-122"/>
+                <a:cs typeface="Times New Roman" panose="02020603050405020304" pitchFamily="18" charset="0"/>
+              </a:rPr>
+              <a:t>policy model</a:t>
+            </a:r>
+            <a:r>
+              <a:rPr lang="zh-CN" altLang="en-US" sz="2400" dirty="0">
+                <a:latin typeface="Times New Roman" panose="02020603050405020304" pitchFamily="18" charset="0"/>
+                <a:ea typeface="SimSun" panose="02010600030101010101" pitchFamily="2" charset="-122"/>
+                <a:cs typeface="Times New Roman" panose="02020603050405020304" pitchFamily="18" charset="0"/>
+              </a:rPr>
+              <a:t>更新策略。</a:t>
+            </a:r>
+            <a:endParaRPr lang="en-US" altLang="zh-CN" sz="2400" dirty="0">
+              <a:latin typeface="Times New Roman" panose="02020603050405020304" pitchFamily="18" charset="0"/>
+              <a:ea typeface="SimSun" panose="02010600030101010101" pitchFamily="2" charset="-122"/>
+              <a:cs typeface="Times New Roman" panose="02020603050405020304" pitchFamily="18" charset="0"/>
+            </a:endParaRPr>
+          </a:p>
+        </p:txBody>
+      </p:sp>
+    </p:spTree>
+    <p:extLst>
+      <p:ext uri="{BB962C8B-B14F-4D97-AF65-F5344CB8AC3E}">
+        <p14:creationId xmlns:p14="http://schemas.microsoft.com/office/powerpoint/2010/main" val="573784222"/>
+      </p:ext>
+    </p:extLst>
+  </p:cSld>
+  <p:clrMapOvr>
+    <a:masterClrMapping/>
+  </p:clrMapOvr>
+</p:sld>
+</file>
+
+<file path=ppt/slides/slide11.xml><?xml version="1.0" encoding="utf-8"?>
+<p:sld xmlns:a="http://schemas.openxmlformats.org/drawingml/2006/main" xmlns:r="http://schemas.openxmlformats.org/officeDocument/2006/relationships" xmlns:p="http://schemas.openxmlformats.org/presentationml/2006/main">
+  <p:cSld>
+    <p:spTree>
+      <p:nvGrpSpPr>
+        <p:cNvPr id="1" name="">
+          <a:extLst>
+            <a:ext uri="{FF2B5EF4-FFF2-40B4-BE49-F238E27FC236}">
+              <a16:creationId xmlns:a16="http://schemas.microsoft.com/office/drawing/2014/main" id="{CAE03897-52A2-6F6A-47B0-78A8DEDBFBE6}"/>
+            </a:ext>
+          </a:extLst>
+        </p:cNvPr>
+        <p:cNvGrpSpPr/>
+        <p:nvPr/>
+      </p:nvGrpSpPr>
+      <p:grpSpPr>
+        <a:xfrm>
+          <a:off x="0" y="0"/>
+          <a:ext cx="0" cy="0"/>
+          <a:chOff x="0" y="0"/>
+          <a:chExt cx="0" cy="0"/>
+        </a:xfrm>
+      </p:grpSpPr>
+      <p:sp>
+        <p:nvSpPr>
+          <p:cNvPr id="5" name="矩形 4">
+            <a:extLst>
+              <a:ext uri="{FF2B5EF4-FFF2-40B4-BE49-F238E27FC236}">
+                <a16:creationId xmlns:a16="http://schemas.microsoft.com/office/drawing/2014/main" id="{9E3C8BFD-2B36-227E-912E-F76384AD5EF6}"/>
               </a:ext>
             </a:extLst>
           </p:cNvPr>
@@ -4300,8 +5366,8 @@
         </p:nvSpPr>
         <p:spPr>
           <a:xfrm>
-            <a:off x="5935136" y="1237673"/>
-            <a:ext cx="1884218" cy="840509"/>
+            <a:off x="0" y="105878"/>
+            <a:ext cx="10430933" cy="651933"/>
           </a:xfrm>
           <a:prstGeom prst="rect">
             <a:avLst/>
@@ -4309,6 +5375,11 @@
           <a:solidFill>
             <a:schemeClr val="bg1"/>
           </a:solidFill>
+          <a:ln>
+            <a:solidFill>
+              <a:schemeClr val="bg1"/>
+            </a:solidFill>
+          </a:ln>
         </p:spPr>
         <p:style>
           <a:lnRef idx="2">
@@ -4330,26 +5401,25 @@
           <a:bodyPr rtlCol="0" anchor="ctr"/>
           <a:lstStyle/>
           <a:p>
-            <a:pPr algn="ctr"/>
-            <a:r>
-              <a:rPr lang="zh-CN" altLang="en-US" sz="2400" dirty="0">
+            <a:r>
+              <a:rPr lang="en-US" altLang="zh-CN" sz="3000" dirty="0">
                 <a:solidFill>
                   <a:schemeClr val="tx1"/>
                 </a:solidFill>
-                <a:latin typeface="SimSun" panose="02010600030101010101" pitchFamily="2" charset="-122"/>
-                <a:ea typeface="SimSun" panose="02010600030101010101" pitchFamily="2" charset="-122"/>
-              </a:rPr>
-              <a:t>理论知识</a:t>
-            </a:r>
-          </a:p>
-        </p:txBody>
-      </p:sp>
-      <p:sp>
-        <p:nvSpPr>
-          <p:cNvPr id="8" name="文本框 7">
-            <a:extLst>
-              <a:ext uri="{FF2B5EF4-FFF2-40B4-BE49-F238E27FC236}">
-                <a16:creationId xmlns:a16="http://schemas.microsoft.com/office/drawing/2014/main" id="{F00A2E51-F5B0-85BB-D1F7-EA6056F3C66B}"/>
+                <a:latin typeface="Times New Roman" panose="02020603050405020304" pitchFamily="18" charset="0"/>
+                <a:cs typeface="Times New Roman" panose="02020603050405020304" pitchFamily="18" charset="0"/>
+              </a:rPr>
+              <a:t>DeepSeekMath: Pushing the Limits of Mathematical Reasoning in Open Language Models</a:t>
+            </a:r>
+          </a:p>
+        </p:txBody>
+      </p:sp>
+      <p:sp>
+        <p:nvSpPr>
+          <p:cNvPr id="7" name="文本框 6">
+            <a:extLst>
+              <a:ext uri="{FF2B5EF4-FFF2-40B4-BE49-F238E27FC236}">
+                <a16:creationId xmlns:a16="http://schemas.microsoft.com/office/drawing/2014/main" id="{736C4C3F-4DEC-AE96-5A5A-4199C258F795}"/>
               </a:ext>
             </a:extLst>
           </p:cNvPr>
@@ -4358,8 +5428,8 @@
         </p:nvSpPr>
         <p:spPr>
           <a:xfrm>
-            <a:off x="9740348" y="6396335"/>
-            <a:ext cx="2493360" cy="461665"/>
+            <a:off x="-4635" y="1338311"/>
+            <a:ext cx="12192000" cy="1200329"/>
           </a:xfrm>
           <a:prstGeom prst="rect">
             <a:avLst/>
@@ -4373,26 +5443,1519 @@
           <a:lstStyle/>
           <a:p>
             <a:r>
-              <a:rPr lang="en-US" altLang="zh-CN" sz="2400" b="1" dirty="0">
-                <a:latin typeface="Times New Roman" panose="02020603050405020304" pitchFamily="18" charset="0"/>
-                <a:ea typeface="SimSun" panose="02010600030101010101" pitchFamily="2" charset="-122"/>
-              </a:rPr>
-              <a:t>2026.4.28   </a:t>
-            </a:r>
-            <a:r>
-              <a:rPr lang="zh-CN" altLang="en-US" sz="2400" b="1" dirty="0">
-                <a:latin typeface="Times New Roman" panose="02020603050405020304" pitchFamily="18" charset="0"/>
-                <a:ea typeface="SimSun" panose="02010600030101010101" pitchFamily="2" charset="-122"/>
-              </a:rPr>
-              <a:t>张波 </a:t>
-            </a:r>
+              <a:rPr lang="zh-CN" altLang="en-US" sz="2400" dirty="0">
+                <a:latin typeface="Times New Roman" panose="02020603050405020304" pitchFamily="18" charset="0"/>
+                <a:ea typeface="SimSun" panose="02010600030101010101" pitchFamily="2" charset="-122"/>
+                <a:cs typeface="Times New Roman" panose="02020603050405020304" pitchFamily="18" charset="0"/>
+              </a:rPr>
+              <a:t>核心公式：</a:t>
+            </a:r>
+            <a:endParaRPr lang="en-US" altLang="zh-CN" sz="2400" dirty="0">
+              <a:latin typeface="Times New Roman" panose="02020603050405020304" pitchFamily="18" charset="0"/>
+              <a:ea typeface="SimSun" panose="02010600030101010101" pitchFamily="2" charset="-122"/>
+              <a:cs typeface="Times New Roman" panose="02020603050405020304" pitchFamily="18" charset="0"/>
+            </a:endParaRPr>
+          </a:p>
+          <a:p>
+            <a:endParaRPr lang="en-US" altLang="zh-CN" sz="2400" dirty="0">
+              <a:latin typeface="Times New Roman" panose="02020603050405020304" pitchFamily="18" charset="0"/>
+              <a:ea typeface="SimSun" panose="02010600030101010101" pitchFamily="2" charset="-122"/>
+              <a:cs typeface="Times New Roman" panose="02020603050405020304" pitchFamily="18" charset="0"/>
+            </a:endParaRPr>
+          </a:p>
+          <a:p>
+            <a:endParaRPr lang="en-US" altLang="zh-CN" sz="2400" dirty="0">
+              <a:latin typeface="Times New Roman" panose="02020603050405020304" pitchFamily="18" charset="0"/>
+              <a:ea typeface="SimSun" panose="02010600030101010101" pitchFamily="2" charset="-122"/>
+              <a:cs typeface="Times New Roman" panose="02020603050405020304" pitchFamily="18" charset="0"/>
+            </a:endParaRPr>
+          </a:p>
+        </p:txBody>
+      </p:sp>
+      <p:pic>
+        <p:nvPicPr>
+          <p:cNvPr id="4" name="图片 3">
+            <a:extLst>
+              <a:ext uri="{FF2B5EF4-FFF2-40B4-BE49-F238E27FC236}">
+                <a16:creationId xmlns:a16="http://schemas.microsoft.com/office/drawing/2014/main" id="{776EDB3F-583F-E721-6881-151893DC1B41}"/>
+              </a:ext>
+            </a:extLst>
+          </p:cNvPr>
+          <p:cNvPicPr>
+            <a:picLocks noChangeAspect="1"/>
+          </p:cNvPicPr>
+          <p:nvPr/>
+        </p:nvPicPr>
+        <p:blipFill>
+          <a:blip r:embed="rId2"/>
+          <a:stretch>
+            <a:fillRect/>
+          </a:stretch>
+        </p:blipFill>
+        <p:spPr>
+          <a:xfrm>
+            <a:off x="1546475" y="1338311"/>
+            <a:ext cx="6948956" cy="858237"/>
+          </a:xfrm>
+          <a:prstGeom prst="rect">
+            <a:avLst/>
+          </a:prstGeom>
+        </p:spPr>
+      </p:pic>
+      <p:sp>
+        <p:nvSpPr>
+          <p:cNvPr id="6" name="文本框 5">
+            <a:extLst>
+              <a:ext uri="{FF2B5EF4-FFF2-40B4-BE49-F238E27FC236}">
+                <a16:creationId xmlns:a16="http://schemas.microsoft.com/office/drawing/2014/main" id="{FD521D96-1E9A-C1A0-F651-28A0F43A6BEC}"/>
+              </a:ext>
+            </a:extLst>
+          </p:cNvPr>
+          <p:cNvSpPr txBox="1"/>
+          <p:nvPr/>
+        </p:nvSpPr>
+        <p:spPr>
+          <a:xfrm>
+            <a:off x="88130" y="2282183"/>
+            <a:ext cx="12192000" cy="1569660"/>
+          </a:xfrm>
+          <a:prstGeom prst="rect">
+            <a:avLst/>
+          </a:prstGeom>
+          <a:noFill/>
+        </p:spPr>
+        <p:txBody>
+          <a:bodyPr wrap="square" rtlCol="0">
+            <a:spAutoFit/>
+          </a:bodyPr>
+          <a:lstStyle/>
+          <a:p>
+            <a:r>
+              <a:rPr lang="zh-CN" altLang="en-US" sz="2400" dirty="0">
+                <a:latin typeface="Times New Roman" panose="02020603050405020304" pitchFamily="18" charset="0"/>
+                <a:ea typeface="SimSun" panose="02010600030101010101" pitchFamily="2" charset="-122"/>
+                <a:cs typeface="Times New Roman" panose="02020603050405020304" pitchFamily="18" charset="0"/>
+              </a:rPr>
+              <a:t>首先，</a:t>
+            </a:r>
+            <a:r>
+              <a:rPr lang="en-US" altLang="zh-CN" sz="2400" dirty="0">
+                <a:latin typeface="Times New Roman" panose="02020603050405020304" pitchFamily="18" charset="0"/>
+                <a:ea typeface="SimSun" panose="02010600030101010101" pitchFamily="2" charset="-122"/>
+                <a:cs typeface="Times New Roman" panose="02020603050405020304" pitchFamily="18" charset="0"/>
+              </a:rPr>
+              <a:t>GRPO</a:t>
+            </a:r>
+            <a:r>
+              <a:rPr lang="zh-CN" altLang="en-US" sz="2400" dirty="0">
+                <a:latin typeface="Times New Roman" panose="02020603050405020304" pitchFamily="18" charset="0"/>
+                <a:ea typeface="SimSun" panose="02010600030101010101" pitchFamily="2" charset="-122"/>
+                <a:cs typeface="Times New Roman" panose="02020603050405020304" pitchFamily="18" charset="0"/>
+              </a:rPr>
+              <a:t>将</a:t>
+            </a:r>
+            <a:r>
+              <a:rPr lang="en-US" altLang="zh-CN" sz="2400" dirty="0">
+                <a:latin typeface="Times New Roman" panose="02020603050405020304" pitchFamily="18" charset="0"/>
+                <a:ea typeface="SimSun" panose="02010600030101010101" pitchFamily="2" charset="-122"/>
+                <a:cs typeface="Times New Roman" panose="02020603050405020304" pitchFamily="18" charset="0"/>
+              </a:rPr>
+              <a:t>KL</a:t>
+            </a:r>
+            <a:r>
+              <a:rPr lang="zh-CN" altLang="en-US" sz="2400" dirty="0">
+                <a:latin typeface="Times New Roman" panose="02020603050405020304" pitchFamily="18" charset="0"/>
+                <a:ea typeface="SimSun" panose="02010600030101010101" pitchFamily="2" charset="-122"/>
+                <a:cs typeface="Times New Roman" panose="02020603050405020304" pitchFamily="18" charset="0"/>
+              </a:rPr>
+              <a:t>惩罚项直接用到</a:t>
+            </a:r>
+            <a:r>
+              <a:rPr lang="en-US" altLang="zh-CN" sz="2400" dirty="0">
+                <a:latin typeface="Times New Roman" panose="02020603050405020304" pitchFamily="18" charset="0"/>
+                <a:ea typeface="SimSun" panose="02010600030101010101" pitchFamily="2" charset="-122"/>
+                <a:cs typeface="Times New Roman" panose="02020603050405020304" pitchFamily="18" charset="0"/>
+              </a:rPr>
+              <a:t>Policy</a:t>
+            </a:r>
+            <a:r>
+              <a:rPr lang="zh-CN" altLang="en-US" sz="2400" dirty="0">
+                <a:latin typeface="Times New Roman" panose="02020603050405020304" pitchFamily="18" charset="0"/>
+                <a:ea typeface="SimSun" panose="02010600030101010101" pitchFamily="2" charset="-122"/>
+                <a:cs typeface="Times New Roman" panose="02020603050405020304" pitchFamily="18" charset="0"/>
+              </a:rPr>
+              <a:t>的更新中。</a:t>
+            </a:r>
+            <a:endParaRPr lang="en-US" altLang="zh-CN" sz="2400" dirty="0">
+              <a:latin typeface="Times New Roman" panose="02020603050405020304" pitchFamily="18" charset="0"/>
+              <a:ea typeface="SimSun" panose="02010600030101010101" pitchFamily="2" charset="-122"/>
+              <a:cs typeface="Times New Roman" panose="02020603050405020304" pitchFamily="18" charset="0"/>
+            </a:endParaRPr>
+          </a:p>
+          <a:p>
+            <a:r>
+              <a:rPr lang="zh-CN" altLang="en-US" sz="2400" dirty="0">
+                <a:latin typeface="Times New Roman" panose="02020603050405020304" pitchFamily="18" charset="0"/>
+                <a:ea typeface="SimSun" panose="02010600030101010101" pitchFamily="2" charset="-122"/>
+                <a:cs typeface="Times New Roman" panose="02020603050405020304" pitchFamily="18" charset="0"/>
+              </a:rPr>
+              <a:t>其次，因为不需要训练</a:t>
+            </a:r>
+            <a:r>
+              <a:rPr lang="en-US" altLang="zh-CN" sz="2400" dirty="0">
+                <a:latin typeface="Times New Roman" panose="02020603050405020304" pitchFamily="18" charset="0"/>
+                <a:ea typeface="SimSun" panose="02010600030101010101" pitchFamily="2" charset="-122"/>
+                <a:cs typeface="Times New Roman" panose="02020603050405020304" pitchFamily="18" charset="0"/>
+              </a:rPr>
+              <a:t>value</a:t>
+            </a:r>
+            <a:r>
+              <a:rPr lang="zh-CN" altLang="en-US" sz="2400" dirty="0">
+                <a:latin typeface="Times New Roman" panose="02020603050405020304" pitchFamily="18" charset="0"/>
+                <a:ea typeface="SimSun" panose="02010600030101010101" pitchFamily="2" charset="-122"/>
+                <a:cs typeface="Times New Roman" panose="02020603050405020304" pitchFamily="18" charset="0"/>
+              </a:rPr>
+              <a:t>模型，因此</a:t>
+            </a:r>
+            <a:r>
+              <a:rPr lang="en-US" altLang="zh-CN" sz="2400" dirty="0">
+                <a:latin typeface="Times New Roman" panose="02020603050405020304" pitchFamily="18" charset="0"/>
+                <a:ea typeface="SimSun" panose="02010600030101010101" pitchFamily="2" charset="-122"/>
+                <a:cs typeface="Times New Roman" panose="02020603050405020304" pitchFamily="18" charset="0"/>
+              </a:rPr>
+              <a:t>advantage value </a:t>
+            </a:r>
+            <a:r>
+              <a:rPr lang="zh-CN" altLang="en-US" sz="2400" dirty="0">
+                <a:latin typeface="Times New Roman" panose="02020603050405020304" pitchFamily="18" charset="0"/>
+                <a:ea typeface="SimSun" panose="02010600030101010101" pitchFamily="2" charset="-122"/>
+                <a:cs typeface="Times New Roman" panose="02020603050405020304" pitchFamily="18" charset="0"/>
+              </a:rPr>
+              <a:t>的求解也与</a:t>
+            </a:r>
+            <a:r>
+              <a:rPr lang="en-US" altLang="zh-CN" sz="2400" dirty="0">
+                <a:latin typeface="Times New Roman" panose="02020603050405020304" pitchFamily="18" charset="0"/>
+                <a:ea typeface="SimSun" panose="02010600030101010101" pitchFamily="2" charset="-122"/>
+                <a:cs typeface="Times New Roman" panose="02020603050405020304" pitchFamily="18" charset="0"/>
+              </a:rPr>
+              <a:t>PPO</a:t>
+            </a:r>
+            <a:r>
+              <a:rPr lang="zh-CN" altLang="en-US" sz="2400" dirty="0">
+                <a:latin typeface="Times New Roman" panose="02020603050405020304" pitchFamily="18" charset="0"/>
+                <a:ea typeface="SimSun" panose="02010600030101010101" pitchFamily="2" charset="-122"/>
+                <a:cs typeface="Times New Roman" panose="02020603050405020304" pitchFamily="18" charset="0"/>
+              </a:rPr>
+              <a:t>不同，</a:t>
+            </a:r>
+            <a:r>
+              <a:rPr lang="en-US" altLang="zh-CN" sz="2400" dirty="0">
+                <a:latin typeface="Times New Roman" panose="02020603050405020304" pitchFamily="18" charset="0"/>
+                <a:ea typeface="SimSun" panose="02010600030101010101" pitchFamily="2" charset="-122"/>
+                <a:cs typeface="Times New Roman" panose="02020603050405020304" pitchFamily="18" charset="0"/>
+              </a:rPr>
+              <a:t>GRPO</a:t>
+            </a:r>
+            <a:r>
+              <a:rPr lang="zh-CN" altLang="en-US" sz="2400" dirty="0">
+                <a:latin typeface="Times New Roman" panose="02020603050405020304" pitchFamily="18" charset="0"/>
+                <a:ea typeface="SimSun" panose="02010600030101010101" pitchFamily="2" charset="-122"/>
+                <a:cs typeface="Times New Roman" panose="02020603050405020304" pitchFamily="18" charset="0"/>
+              </a:rPr>
+              <a:t>用的是组内比较的方式。</a:t>
+            </a:r>
+            <a:r>
+              <a:rPr lang="en-US" altLang="zh-CN" sz="2400" dirty="0">
+                <a:latin typeface="Times New Roman" panose="02020603050405020304" pitchFamily="18" charset="0"/>
+                <a:ea typeface="SimSun" panose="02010600030101010101" pitchFamily="2" charset="-122"/>
+                <a:cs typeface="Times New Roman" panose="02020603050405020304" pitchFamily="18" charset="0"/>
+              </a:rPr>
+              <a:t>(</a:t>
+            </a:r>
+            <a:r>
+              <a:rPr lang="zh-CN" altLang="en-US" sz="2400" dirty="0">
+                <a:latin typeface="Times New Roman" panose="02020603050405020304" pitchFamily="18" charset="0"/>
+                <a:ea typeface="SimSun" panose="02010600030101010101" pitchFamily="2" charset="-122"/>
+                <a:cs typeface="Times New Roman" panose="02020603050405020304" pitchFamily="18" charset="0"/>
+              </a:rPr>
+              <a:t>注：</a:t>
+            </a:r>
+            <a:r>
+              <a:rPr lang="en-US" altLang="zh-CN" sz="2400" dirty="0">
+                <a:latin typeface="Times New Roman" panose="02020603050405020304" pitchFamily="18" charset="0"/>
+                <a:ea typeface="SimSun" panose="02010600030101010101" pitchFamily="2" charset="-122"/>
+                <a:cs typeface="Times New Roman" panose="02020603050405020304" pitchFamily="18" charset="0"/>
+              </a:rPr>
+              <a:t>GRPO</a:t>
+            </a:r>
+            <a:r>
+              <a:rPr lang="zh-CN" altLang="en-US" sz="2400" dirty="0">
+                <a:latin typeface="Times New Roman" panose="02020603050405020304" pitchFamily="18" charset="0"/>
+                <a:ea typeface="SimSun" panose="02010600030101010101" pitchFamily="2" charset="-122"/>
+                <a:cs typeface="Times New Roman" panose="02020603050405020304" pitchFamily="18" charset="0"/>
+              </a:rPr>
+              <a:t>三个变体的计算方式不同</a:t>
+            </a:r>
+            <a:r>
+              <a:rPr lang="en-US" altLang="zh-CN" sz="2400" dirty="0">
+                <a:latin typeface="Times New Roman" panose="02020603050405020304" pitchFamily="18" charset="0"/>
+                <a:ea typeface="SimSun" panose="02010600030101010101" pitchFamily="2" charset="-122"/>
+                <a:cs typeface="Times New Roman" panose="02020603050405020304" pitchFamily="18" charset="0"/>
+              </a:rPr>
+              <a:t>)</a:t>
+            </a:r>
+          </a:p>
+          <a:p>
+            <a:r>
+              <a:rPr lang="zh-CN" altLang="en-US" sz="2400" dirty="0">
+                <a:latin typeface="Times New Roman" panose="02020603050405020304" pitchFamily="18" charset="0"/>
+                <a:ea typeface="SimSun" panose="02010600030101010101" pitchFamily="2" charset="-122"/>
+                <a:cs typeface="Times New Roman" panose="02020603050405020304" pitchFamily="18" charset="0"/>
+              </a:rPr>
+              <a:t>最后，因为不需要再训练</a:t>
+            </a:r>
+            <a:r>
+              <a:rPr lang="en-US" altLang="zh-CN" sz="2400" dirty="0">
+                <a:latin typeface="Times New Roman" panose="02020603050405020304" pitchFamily="18" charset="0"/>
+                <a:ea typeface="SimSun" panose="02010600030101010101" pitchFamily="2" charset="-122"/>
+                <a:cs typeface="Times New Roman" panose="02020603050405020304" pitchFamily="18" charset="0"/>
+              </a:rPr>
+              <a:t>value model </a:t>
+            </a:r>
+            <a:r>
+              <a:rPr lang="zh-CN" altLang="en-US" sz="2400" dirty="0">
+                <a:latin typeface="Times New Roman" panose="02020603050405020304" pitchFamily="18" charset="0"/>
+                <a:ea typeface="SimSun" panose="02010600030101010101" pitchFamily="2" charset="-122"/>
+                <a:cs typeface="Times New Roman" panose="02020603050405020304" pitchFamily="18" charset="0"/>
+              </a:rPr>
+              <a:t>因此直接训练</a:t>
+            </a:r>
+            <a:r>
+              <a:rPr lang="en-US" altLang="zh-CN" sz="2400" dirty="0">
+                <a:latin typeface="Times New Roman" panose="02020603050405020304" pitchFamily="18" charset="0"/>
+                <a:ea typeface="SimSun" panose="02010600030101010101" pitchFamily="2" charset="-122"/>
+                <a:cs typeface="Times New Roman" panose="02020603050405020304" pitchFamily="18" charset="0"/>
+              </a:rPr>
+              <a:t>policy model</a:t>
+            </a:r>
+            <a:r>
+              <a:rPr lang="zh-CN" altLang="en-US" sz="2400" dirty="0">
+                <a:latin typeface="Times New Roman" panose="02020603050405020304" pitchFamily="18" charset="0"/>
+                <a:ea typeface="SimSun" panose="02010600030101010101" pitchFamily="2" charset="-122"/>
+                <a:cs typeface="Times New Roman" panose="02020603050405020304" pitchFamily="18" charset="0"/>
+              </a:rPr>
+              <a:t>就行。</a:t>
+            </a:r>
+            <a:endParaRPr lang="en-US" altLang="zh-CN" sz="2400" dirty="0">
+              <a:latin typeface="Times New Roman" panose="02020603050405020304" pitchFamily="18" charset="0"/>
+              <a:ea typeface="SimSun" panose="02010600030101010101" pitchFamily="2" charset="-122"/>
+              <a:cs typeface="Times New Roman" panose="02020603050405020304" pitchFamily="18" charset="0"/>
+            </a:endParaRPr>
+          </a:p>
+        </p:txBody>
+      </p:sp>
+      <p:sp>
+        <p:nvSpPr>
+          <p:cNvPr id="9" name="文本框 8">
+            <a:extLst>
+              <a:ext uri="{FF2B5EF4-FFF2-40B4-BE49-F238E27FC236}">
+                <a16:creationId xmlns:a16="http://schemas.microsoft.com/office/drawing/2014/main" id="{277FDE94-3772-4A90-60D8-BFCA38309B27}"/>
+              </a:ext>
+            </a:extLst>
+          </p:cNvPr>
+          <p:cNvSpPr txBox="1"/>
+          <p:nvPr/>
+        </p:nvSpPr>
+        <p:spPr>
+          <a:xfrm>
+            <a:off x="88130" y="5104190"/>
+            <a:ext cx="12192000" cy="830997"/>
+          </a:xfrm>
+          <a:prstGeom prst="rect">
+            <a:avLst/>
+          </a:prstGeom>
+          <a:noFill/>
+        </p:spPr>
+        <p:txBody>
+          <a:bodyPr wrap="square" rtlCol="0">
+            <a:spAutoFit/>
+          </a:bodyPr>
+          <a:lstStyle/>
+          <a:p>
+            <a:r>
+              <a:rPr lang="zh-CN" altLang="en-US" sz="2400" dirty="0">
+                <a:latin typeface="Times New Roman" panose="02020603050405020304" pitchFamily="18" charset="0"/>
+                <a:ea typeface="SimSun" panose="02010600030101010101" pitchFamily="2" charset="-122"/>
+                <a:cs typeface="Times New Roman" panose="02020603050405020304" pitchFamily="18" charset="0"/>
+              </a:rPr>
+              <a:t>注意这个范式很有意思，他将如</a:t>
+            </a:r>
+            <a:r>
+              <a:rPr lang="en-US" altLang="zh-CN" sz="2400" dirty="0">
+                <a:latin typeface="Times New Roman" panose="02020603050405020304" pitchFamily="18" charset="0"/>
+                <a:ea typeface="SimSun" panose="02010600030101010101" pitchFamily="2" charset="-122"/>
+                <a:cs typeface="Times New Roman" panose="02020603050405020304" pitchFamily="18" charset="0"/>
+              </a:rPr>
+              <a:t>PPO,GRPO</a:t>
+            </a:r>
+            <a:r>
+              <a:rPr lang="zh-CN" altLang="en-US" sz="2400" dirty="0">
+                <a:latin typeface="Times New Roman" panose="02020603050405020304" pitchFamily="18" charset="0"/>
+                <a:ea typeface="SimSun" panose="02010600030101010101" pitchFamily="2" charset="-122"/>
+                <a:cs typeface="Times New Roman" panose="02020603050405020304" pitchFamily="18" charset="0"/>
+              </a:rPr>
+              <a:t>这些方法按照数据来源，算法和奖励模型划分，但感觉</a:t>
+            </a:r>
+            <a:r>
+              <a:rPr lang="zh-CN" altLang="en-US" sz="2400" dirty="0">
+                <a:solidFill>
+                  <a:srgbClr val="FF0000"/>
+                </a:solidFill>
+                <a:latin typeface="Times New Roman" panose="02020603050405020304" pitchFamily="18" charset="0"/>
+                <a:ea typeface="SimSun" panose="02010600030101010101" pitchFamily="2" charset="-122"/>
+                <a:cs typeface="Times New Roman" panose="02020603050405020304" pitchFamily="18" charset="0"/>
+              </a:rPr>
+              <a:t>核心就是数据与梯度系数</a:t>
+            </a:r>
+            <a:r>
+              <a:rPr lang="zh-CN" altLang="en-US" sz="2400" dirty="0">
+                <a:latin typeface="Times New Roman" panose="02020603050405020304" pitchFamily="18" charset="0"/>
+                <a:ea typeface="SimSun" panose="02010600030101010101" pitchFamily="2" charset="-122"/>
+                <a:cs typeface="Times New Roman" panose="02020603050405020304" pitchFamily="18" charset="0"/>
+              </a:rPr>
+              <a:t>。</a:t>
+            </a:r>
+            <a:endParaRPr lang="en-US" altLang="zh-CN" sz="2400" dirty="0">
+              <a:latin typeface="Times New Roman" panose="02020603050405020304" pitchFamily="18" charset="0"/>
+              <a:ea typeface="SimSun" panose="02010600030101010101" pitchFamily="2" charset="-122"/>
+              <a:cs typeface="Times New Roman" panose="02020603050405020304" pitchFamily="18" charset="0"/>
+            </a:endParaRPr>
+          </a:p>
+        </p:txBody>
+      </p:sp>
+      <p:pic>
+        <p:nvPicPr>
+          <p:cNvPr id="10" name="图片 9">
+            <a:extLst>
+              <a:ext uri="{FF2B5EF4-FFF2-40B4-BE49-F238E27FC236}">
+                <a16:creationId xmlns:a16="http://schemas.microsoft.com/office/drawing/2014/main" id="{E2D02411-1AB7-A16D-F957-57AD1F8011E9}"/>
+              </a:ext>
+            </a:extLst>
+          </p:cNvPr>
+          <p:cNvPicPr>
+            <a:picLocks noChangeAspect="1"/>
+          </p:cNvPicPr>
+          <p:nvPr/>
+        </p:nvPicPr>
+        <p:blipFill>
+          <a:blip r:embed="rId3"/>
+          <a:stretch>
+            <a:fillRect/>
+          </a:stretch>
+        </p:blipFill>
+        <p:spPr>
+          <a:xfrm>
+            <a:off x="1449087" y="3881268"/>
+            <a:ext cx="5016758" cy="914447"/>
+          </a:xfrm>
+          <a:prstGeom prst="rect">
+            <a:avLst/>
+          </a:prstGeom>
+        </p:spPr>
+      </p:pic>
+      <p:sp>
+        <p:nvSpPr>
+          <p:cNvPr id="11" name="文本框 10">
+            <a:extLst>
+              <a:ext uri="{FF2B5EF4-FFF2-40B4-BE49-F238E27FC236}">
+                <a16:creationId xmlns:a16="http://schemas.microsoft.com/office/drawing/2014/main" id="{FBF4C9A0-B4D2-34E4-785C-B34FAD9E55B4}"/>
+              </a:ext>
+            </a:extLst>
+          </p:cNvPr>
+          <p:cNvSpPr txBox="1"/>
+          <p:nvPr/>
+        </p:nvSpPr>
+        <p:spPr>
+          <a:xfrm>
+            <a:off x="88130" y="4022171"/>
+            <a:ext cx="12192000" cy="1200329"/>
+          </a:xfrm>
+          <a:prstGeom prst="rect">
+            <a:avLst/>
+          </a:prstGeom>
+          <a:noFill/>
+        </p:spPr>
+        <p:txBody>
+          <a:bodyPr wrap="square" rtlCol="0">
+            <a:spAutoFit/>
+          </a:bodyPr>
+          <a:lstStyle/>
+          <a:p>
+            <a:r>
+              <a:rPr lang="zh-CN" altLang="en-US" sz="2400" dirty="0">
+                <a:latin typeface="Times New Roman" panose="02020603050405020304" pitchFamily="18" charset="0"/>
+                <a:ea typeface="SimSun" panose="02010600030101010101" pitchFamily="2" charset="-122"/>
+                <a:cs typeface="Times New Roman" panose="02020603050405020304" pitchFamily="18" charset="0"/>
+              </a:rPr>
+              <a:t>统一范式：</a:t>
+            </a:r>
+            <a:endParaRPr lang="en-US" altLang="zh-CN" sz="2400" dirty="0">
+              <a:latin typeface="Times New Roman" panose="02020603050405020304" pitchFamily="18" charset="0"/>
+              <a:ea typeface="SimSun" panose="02010600030101010101" pitchFamily="2" charset="-122"/>
+              <a:cs typeface="Times New Roman" panose="02020603050405020304" pitchFamily="18" charset="0"/>
+            </a:endParaRPr>
+          </a:p>
+          <a:p>
+            <a:endParaRPr lang="en-US" altLang="zh-CN" sz="2400" dirty="0">
+              <a:latin typeface="Times New Roman" panose="02020603050405020304" pitchFamily="18" charset="0"/>
+              <a:ea typeface="SimSun" panose="02010600030101010101" pitchFamily="2" charset="-122"/>
+              <a:cs typeface="Times New Roman" panose="02020603050405020304" pitchFamily="18" charset="0"/>
+            </a:endParaRPr>
+          </a:p>
+          <a:p>
+            <a:endParaRPr lang="en-US" altLang="zh-CN" sz="2400" dirty="0">
+              <a:latin typeface="Times New Roman" panose="02020603050405020304" pitchFamily="18" charset="0"/>
+              <a:ea typeface="SimSun" panose="02010600030101010101" pitchFamily="2" charset="-122"/>
+              <a:cs typeface="Times New Roman" panose="02020603050405020304" pitchFamily="18" charset="0"/>
+            </a:endParaRPr>
           </a:p>
         </p:txBody>
       </p:sp>
     </p:spTree>
     <p:extLst>
       <p:ext uri="{BB962C8B-B14F-4D97-AF65-F5344CB8AC3E}">
-        <p14:creationId xmlns:p14="http://schemas.microsoft.com/office/powerpoint/2010/main" val="3418504963"/>
+        <p14:creationId xmlns:p14="http://schemas.microsoft.com/office/powerpoint/2010/main" val="474358115"/>
+      </p:ext>
+    </p:extLst>
+  </p:cSld>
+  <p:clrMapOvr>
+    <a:masterClrMapping/>
+  </p:clrMapOvr>
+</p:sld>
+</file>
+
+<file path=ppt/slides/slide12.xml><?xml version="1.0" encoding="utf-8"?>
+<p:sld xmlns:a="http://schemas.openxmlformats.org/drawingml/2006/main" xmlns:r="http://schemas.openxmlformats.org/officeDocument/2006/relationships" xmlns:p="http://schemas.openxmlformats.org/presentationml/2006/main">
+  <p:cSld>
+    <p:spTree>
+      <p:nvGrpSpPr>
+        <p:cNvPr id="1" name="">
+          <a:extLst>
+            <a:ext uri="{FF2B5EF4-FFF2-40B4-BE49-F238E27FC236}">
+              <a16:creationId xmlns:a16="http://schemas.microsoft.com/office/drawing/2014/main" id="{B06E950A-B995-9658-0F19-6F224B3D0193}"/>
+            </a:ext>
+          </a:extLst>
+        </p:cNvPr>
+        <p:cNvGrpSpPr/>
+        <p:nvPr/>
+      </p:nvGrpSpPr>
+      <p:grpSpPr>
+        <a:xfrm>
+          <a:off x="0" y="0"/>
+          <a:ext cx="0" cy="0"/>
+          <a:chOff x="0" y="0"/>
+          <a:chExt cx="0" cy="0"/>
+        </a:xfrm>
+      </p:grpSpPr>
+      <p:sp>
+        <p:nvSpPr>
+          <p:cNvPr id="5" name="矩形 4">
+            <a:extLst>
+              <a:ext uri="{FF2B5EF4-FFF2-40B4-BE49-F238E27FC236}">
+                <a16:creationId xmlns:a16="http://schemas.microsoft.com/office/drawing/2014/main" id="{E7119C40-C6A8-2E90-F055-90F7CCBB0BB1}"/>
+              </a:ext>
+            </a:extLst>
+          </p:cNvPr>
+          <p:cNvSpPr/>
+          <p:nvPr/>
+        </p:nvSpPr>
+        <p:spPr>
+          <a:xfrm>
+            <a:off x="9939" y="0"/>
+            <a:ext cx="10430933" cy="651933"/>
+          </a:xfrm>
+          <a:prstGeom prst="rect">
+            <a:avLst/>
+          </a:prstGeom>
+          <a:solidFill>
+            <a:schemeClr val="bg1"/>
+          </a:solidFill>
+          <a:ln>
+            <a:solidFill>
+              <a:schemeClr val="bg1"/>
+            </a:solidFill>
+          </a:ln>
+        </p:spPr>
+        <p:style>
+          <a:lnRef idx="2">
+            <a:schemeClr val="accent1">
+              <a:shade val="15000"/>
+            </a:schemeClr>
+          </a:lnRef>
+          <a:fillRef idx="1">
+            <a:schemeClr val="accent1"/>
+          </a:fillRef>
+          <a:effectRef idx="0">
+            <a:schemeClr val="accent1"/>
+          </a:effectRef>
+          <a:fontRef idx="minor">
+            <a:schemeClr val="lt1"/>
+          </a:fontRef>
+        </p:style>
+        <p:txBody>
+          <a:bodyPr rtlCol="0" anchor="ctr"/>
+          <a:lstStyle/>
+          <a:p>
+            <a:r>
+              <a:rPr lang="zh-CN" altLang="en-US" sz="3200" b="1" dirty="0">
+                <a:solidFill>
+                  <a:schemeClr val="tx1"/>
+                </a:solidFill>
+                <a:latin typeface="Times New Roman" panose="02020603050405020304" pitchFamily="18" charset="0"/>
+                <a:ea typeface="SimSun" panose="02010600030101010101" pitchFamily="2" charset="-122"/>
+                <a:cs typeface="Times New Roman" panose="02020603050405020304" pitchFamily="18" charset="0"/>
+              </a:rPr>
+              <a:t>思考</a:t>
+            </a:r>
+            <a:r>
+              <a:rPr lang="en-US" altLang="zh-CN" sz="3200" b="1" dirty="0">
+                <a:solidFill>
+                  <a:schemeClr val="tx1"/>
+                </a:solidFill>
+                <a:latin typeface="Times New Roman" panose="02020603050405020304" pitchFamily="18" charset="0"/>
+                <a:ea typeface="SimSun" panose="02010600030101010101" pitchFamily="2" charset="-122"/>
+                <a:cs typeface="Times New Roman" panose="02020603050405020304" pitchFamily="18" charset="0"/>
+              </a:rPr>
+              <a:t>(</a:t>
+            </a:r>
+            <a:r>
+              <a:rPr lang="zh-CN" altLang="en-US" sz="3200" b="1" dirty="0">
+                <a:solidFill>
+                  <a:schemeClr val="tx1"/>
+                </a:solidFill>
+                <a:latin typeface="Times New Roman" panose="02020603050405020304" pitchFamily="18" charset="0"/>
+                <a:ea typeface="SimSun" panose="02010600030101010101" pitchFamily="2" charset="-122"/>
+                <a:cs typeface="Times New Roman" panose="02020603050405020304" pitchFamily="18" charset="0"/>
+              </a:rPr>
+              <a:t>结合</a:t>
+            </a:r>
+            <a:r>
+              <a:rPr lang="en-US" altLang="zh-CN" sz="3200" b="1" dirty="0">
+                <a:solidFill>
+                  <a:schemeClr val="tx1"/>
+                </a:solidFill>
+                <a:latin typeface="Times New Roman" panose="02020603050405020304" pitchFamily="18" charset="0"/>
+                <a:ea typeface="SimSun" panose="02010600030101010101" pitchFamily="2" charset="-122"/>
+                <a:cs typeface="Times New Roman" panose="02020603050405020304" pitchFamily="18" charset="0"/>
+              </a:rPr>
+              <a:t>PPO)</a:t>
+            </a:r>
+          </a:p>
+        </p:txBody>
+      </p:sp>
+      <p:sp>
+        <p:nvSpPr>
+          <p:cNvPr id="6" name="文本框 5">
+            <a:extLst>
+              <a:ext uri="{FF2B5EF4-FFF2-40B4-BE49-F238E27FC236}">
+                <a16:creationId xmlns:a16="http://schemas.microsoft.com/office/drawing/2014/main" id="{21C1B415-2A6D-6E16-6B55-76791E5CEF11}"/>
+              </a:ext>
+            </a:extLst>
+          </p:cNvPr>
+          <p:cNvSpPr txBox="1"/>
+          <p:nvPr/>
+        </p:nvSpPr>
+        <p:spPr>
+          <a:xfrm>
+            <a:off x="0" y="850949"/>
+            <a:ext cx="12192000" cy="6001643"/>
+          </a:xfrm>
+          <a:prstGeom prst="rect">
+            <a:avLst/>
+          </a:prstGeom>
+          <a:noFill/>
+        </p:spPr>
+        <p:txBody>
+          <a:bodyPr wrap="square" rtlCol="0">
+            <a:spAutoFit/>
+          </a:bodyPr>
+          <a:lstStyle/>
+          <a:p>
+            <a:r>
+              <a:rPr lang="en-US" altLang="zh-CN" sz="2400" dirty="0">
+                <a:latin typeface="Times New Roman" panose="02020603050405020304" pitchFamily="18" charset="0"/>
+                <a:ea typeface="SimSun" panose="02010600030101010101" pitchFamily="2" charset="-122"/>
+                <a:cs typeface="Times New Roman" panose="02020603050405020304" pitchFamily="18" charset="0"/>
+              </a:rPr>
+              <a:t>1. </a:t>
+            </a:r>
+            <a:r>
+              <a:rPr lang="zh-CN" altLang="en-US" sz="2400" dirty="0">
+                <a:latin typeface="Times New Roman" panose="02020603050405020304" pitchFamily="18" charset="0"/>
+                <a:ea typeface="SimSun" panose="02010600030101010101" pitchFamily="2" charset="-122"/>
+                <a:cs typeface="Times New Roman" panose="02020603050405020304" pitchFamily="18" charset="0"/>
+              </a:rPr>
+              <a:t>这个</a:t>
+            </a:r>
+            <a:r>
+              <a:rPr lang="en-US" altLang="zh-CN" sz="2400" dirty="0">
+                <a:latin typeface="Times New Roman" panose="02020603050405020304" pitchFamily="18" charset="0"/>
+                <a:ea typeface="SimSun" panose="02010600030101010101" pitchFamily="2" charset="-122"/>
+                <a:cs typeface="Times New Roman" panose="02020603050405020304" pitchFamily="18" charset="0"/>
+              </a:rPr>
+              <a:t>Reward</a:t>
+            </a:r>
+            <a:r>
+              <a:rPr lang="zh-CN" altLang="en-US" sz="2400" dirty="0">
+                <a:latin typeface="Times New Roman" panose="02020603050405020304" pitchFamily="18" charset="0"/>
+                <a:ea typeface="SimSun" panose="02010600030101010101" pitchFamily="2" charset="-122"/>
+                <a:cs typeface="Times New Roman" panose="02020603050405020304" pitchFamily="18" charset="0"/>
+              </a:rPr>
+              <a:t> </a:t>
+            </a:r>
+            <a:r>
+              <a:rPr lang="en-US" altLang="zh-CN" sz="2400" dirty="0">
+                <a:latin typeface="Times New Roman" panose="02020603050405020304" pitchFamily="18" charset="0"/>
+                <a:ea typeface="SimSun" panose="02010600030101010101" pitchFamily="2" charset="-122"/>
+                <a:cs typeface="Times New Roman" panose="02020603050405020304" pitchFamily="18" charset="0"/>
+              </a:rPr>
+              <a:t>model</a:t>
+            </a:r>
+            <a:r>
+              <a:rPr lang="zh-CN" altLang="en-US" sz="2400" dirty="0">
+                <a:latin typeface="Times New Roman" panose="02020603050405020304" pitchFamily="18" charset="0"/>
+                <a:ea typeface="SimSun" panose="02010600030101010101" pitchFamily="2" charset="-122"/>
+                <a:cs typeface="Times New Roman" panose="02020603050405020304" pitchFamily="18" charset="0"/>
+              </a:rPr>
+              <a:t>如何构建？这是我们模型的基础之一</a:t>
+            </a:r>
+            <a:endParaRPr lang="en-US" altLang="zh-CN" sz="2400" dirty="0">
+              <a:latin typeface="Times New Roman" panose="02020603050405020304" pitchFamily="18" charset="0"/>
+              <a:ea typeface="SimSun" panose="02010600030101010101" pitchFamily="2" charset="-122"/>
+              <a:cs typeface="Times New Roman" panose="02020603050405020304" pitchFamily="18" charset="0"/>
+            </a:endParaRPr>
+          </a:p>
+          <a:p>
+            <a:r>
+              <a:rPr lang="zh-CN" altLang="en-US" sz="2400" dirty="0">
+                <a:latin typeface="Times New Roman" panose="02020603050405020304" pitchFamily="18" charset="0"/>
+                <a:ea typeface="SimSun" panose="02010600030101010101" pitchFamily="2" charset="-122"/>
+                <a:cs typeface="Times New Roman" panose="02020603050405020304" pitchFamily="18" charset="0"/>
+              </a:rPr>
+              <a:t>答：目前我了解到的分为三大类</a:t>
+            </a:r>
+            <a:r>
+              <a:rPr lang="en-US" altLang="zh-CN" sz="2400" dirty="0">
+                <a:latin typeface="Times New Roman" panose="02020603050405020304" pitchFamily="18" charset="0"/>
+                <a:ea typeface="SimSun" panose="02010600030101010101" pitchFamily="2" charset="-122"/>
+                <a:cs typeface="Times New Roman" panose="02020603050405020304" pitchFamily="18" charset="0"/>
+              </a:rPr>
+              <a:t>:1.RLHF 2.RLVR 3. Process Reward</a:t>
+            </a:r>
+          </a:p>
+          <a:p>
+            <a:endParaRPr lang="en-US" altLang="zh-CN" sz="2400" dirty="0">
+              <a:latin typeface="Times New Roman" panose="02020603050405020304" pitchFamily="18" charset="0"/>
+              <a:ea typeface="SimSun" panose="02010600030101010101" pitchFamily="2" charset="-122"/>
+              <a:cs typeface="Times New Roman" panose="02020603050405020304" pitchFamily="18" charset="0"/>
+            </a:endParaRPr>
+          </a:p>
+          <a:p>
+            <a:r>
+              <a:rPr lang="en-US" altLang="zh-CN" sz="2400" dirty="0">
+                <a:latin typeface="Times New Roman" panose="02020603050405020304" pitchFamily="18" charset="0"/>
+                <a:ea typeface="SimSun" panose="02010600030101010101" pitchFamily="2" charset="-122"/>
+                <a:cs typeface="Times New Roman" panose="02020603050405020304" pitchFamily="18" charset="0"/>
+              </a:rPr>
+              <a:t>2. Reference Model</a:t>
+            </a:r>
+            <a:r>
+              <a:rPr lang="zh-CN" altLang="en-US" sz="2400" dirty="0">
+                <a:latin typeface="Times New Roman" panose="02020603050405020304" pitchFamily="18" charset="0"/>
+                <a:ea typeface="SimSun" panose="02010600030101010101" pitchFamily="2" charset="-122"/>
+                <a:cs typeface="Times New Roman" panose="02020603050405020304" pitchFamily="18" charset="0"/>
+              </a:rPr>
+              <a:t>从哪来的？</a:t>
+            </a:r>
+            <a:endParaRPr lang="en-US" altLang="zh-CN" sz="2400" dirty="0">
+              <a:latin typeface="Times New Roman" panose="02020603050405020304" pitchFamily="18" charset="0"/>
+              <a:ea typeface="SimSun" panose="02010600030101010101" pitchFamily="2" charset="-122"/>
+              <a:cs typeface="Times New Roman" panose="02020603050405020304" pitchFamily="18" charset="0"/>
+            </a:endParaRPr>
+          </a:p>
+          <a:p>
+            <a:r>
+              <a:rPr lang="zh-CN" altLang="en-US" sz="2400" dirty="0">
+                <a:latin typeface="Times New Roman" panose="02020603050405020304" pitchFamily="18" charset="0"/>
+                <a:ea typeface="SimSun" panose="02010600030101010101" pitchFamily="2" charset="-122"/>
+                <a:cs typeface="Times New Roman" panose="02020603050405020304" pitchFamily="18" charset="0"/>
+              </a:rPr>
+              <a:t>答： 使用在后训练第一步监督微调的</a:t>
+            </a:r>
+            <a:r>
+              <a:rPr lang="en-US" altLang="zh-CN" sz="2400" dirty="0">
+                <a:latin typeface="Times New Roman" panose="02020603050405020304" pitchFamily="18" charset="0"/>
+                <a:ea typeface="SimSun" panose="02010600030101010101" pitchFamily="2" charset="-122"/>
+                <a:cs typeface="Times New Roman" panose="02020603050405020304" pitchFamily="18" charset="0"/>
+              </a:rPr>
+              <a:t>SFT</a:t>
+            </a:r>
+            <a:r>
+              <a:rPr lang="zh-CN" altLang="en-US" sz="2400" dirty="0">
+                <a:latin typeface="Times New Roman" panose="02020603050405020304" pitchFamily="18" charset="0"/>
+                <a:ea typeface="SimSun" panose="02010600030101010101" pitchFamily="2" charset="-122"/>
+                <a:cs typeface="Times New Roman" panose="02020603050405020304" pitchFamily="18" charset="0"/>
+              </a:rPr>
+              <a:t>，注意在使用时冻结参数，目的是用于计算新策略与老策略的差异。</a:t>
+            </a:r>
+            <a:endParaRPr lang="en-US" altLang="zh-CN" sz="2400" dirty="0">
+              <a:latin typeface="Times New Roman" panose="02020603050405020304" pitchFamily="18" charset="0"/>
+              <a:ea typeface="SimSun" panose="02010600030101010101" pitchFamily="2" charset="-122"/>
+              <a:cs typeface="Times New Roman" panose="02020603050405020304" pitchFamily="18" charset="0"/>
+            </a:endParaRPr>
+          </a:p>
+          <a:p>
+            <a:r>
+              <a:rPr lang="en-US" altLang="zh-CN" sz="2400" dirty="0">
+                <a:latin typeface="Times New Roman" panose="02020603050405020304" pitchFamily="18" charset="0"/>
+                <a:ea typeface="SimSun" panose="02010600030101010101" pitchFamily="2" charset="-122"/>
+                <a:cs typeface="Times New Roman" panose="02020603050405020304" pitchFamily="18" charset="0"/>
+              </a:rPr>
+              <a:t>(</a:t>
+            </a:r>
+            <a:r>
+              <a:rPr lang="zh-CN" altLang="en-US" sz="2400" dirty="0">
+                <a:latin typeface="Times New Roman" panose="02020603050405020304" pitchFamily="18" charset="0"/>
+                <a:ea typeface="SimSun" panose="02010600030101010101" pitchFamily="2" charset="-122"/>
+                <a:cs typeface="Times New Roman" panose="02020603050405020304" pitchFamily="18" charset="0"/>
+              </a:rPr>
+              <a:t>注：在</a:t>
+            </a:r>
+            <a:r>
+              <a:rPr lang="en-US" altLang="zh-CN" sz="2400" dirty="0">
+                <a:latin typeface="Times New Roman" panose="02020603050405020304" pitchFamily="18" charset="0"/>
+                <a:ea typeface="SimSun" panose="02010600030101010101" pitchFamily="2" charset="-122"/>
+                <a:cs typeface="Times New Roman" panose="02020603050405020304" pitchFamily="18" charset="0"/>
+              </a:rPr>
+              <a:t>PPO</a:t>
+            </a:r>
+            <a:r>
+              <a:rPr lang="zh-CN" altLang="en-US" sz="2400" dirty="0">
+                <a:latin typeface="Times New Roman" panose="02020603050405020304" pitchFamily="18" charset="0"/>
+                <a:ea typeface="SimSun" panose="02010600030101010101" pitchFamily="2" charset="-122"/>
+                <a:cs typeface="Times New Roman" panose="02020603050405020304" pitchFamily="18" charset="0"/>
+              </a:rPr>
+              <a:t>与</a:t>
+            </a:r>
+            <a:r>
+              <a:rPr lang="en-US" altLang="zh-CN" sz="2400" dirty="0">
+                <a:latin typeface="Times New Roman" panose="02020603050405020304" pitchFamily="18" charset="0"/>
+                <a:ea typeface="SimSun" panose="02010600030101010101" pitchFamily="2" charset="-122"/>
+                <a:cs typeface="Times New Roman" panose="02020603050405020304" pitchFamily="18" charset="0"/>
+              </a:rPr>
+              <a:t>GRPO</a:t>
+            </a:r>
+            <a:r>
+              <a:rPr lang="zh-CN" altLang="en-US" sz="2400" dirty="0">
+                <a:latin typeface="Times New Roman" panose="02020603050405020304" pitchFamily="18" charset="0"/>
+                <a:ea typeface="SimSun" panose="02010600030101010101" pitchFamily="2" charset="-122"/>
+                <a:cs typeface="Times New Roman" panose="02020603050405020304" pitchFamily="18" charset="0"/>
+              </a:rPr>
+              <a:t>中</a:t>
+            </a:r>
+            <a:r>
+              <a:rPr lang="en-US" altLang="zh-CN" sz="2400" dirty="0">
+                <a:latin typeface="Times New Roman" panose="02020603050405020304" pitchFamily="18" charset="0"/>
+                <a:ea typeface="SimSun" panose="02010600030101010101" pitchFamily="2" charset="-122"/>
+                <a:cs typeface="Times New Roman" panose="02020603050405020304" pitchFamily="18" charset="0"/>
+              </a:rPr>
+              <a:t>,KL</a:t>
+            </a:r>
+            <a:r>
+              <a:rPr lang="zh-CN" altLang="en-US" sz="2400" dirty="0">
+                <a:latin typeface="Times New Roman" panose="02020603050405020304" pitchFamily="18" charset="0"/>
+                <a:ea typeface="SimSun" panose="02010600030101010101" pitchFamily="2" charset="-122"/>
+                <a:cs typeface="Times New Roman" panose="02020603050405020304" pitchFamily="18" charset="0"/>
+              </a:rPr>
+              <a:t>一个用于</a:t>
+            </a:r>
+            <a:r>
+              <a:rPr lang="en-US" altLang="zh-CN" sz="2400" dirty="0">
+                <a:latin typeface="Times New Roman" panose="02020603050405020304" pitchFamily="18" charset="0"/>
+                <a:ea typeface="SimSun" panose="02010600030101010101" pitchFamily="2" charset="-122"/>
+                <a:cs typeface="Times New Roman" panose="02020603050405020304" pitchFamily="18" charset="0"/>
+              </a:rPr>
+              <a:t>reward</a:t>
+            </a:r>
+            <a:r>
+              <a:rPr lang="zh-CN" altLang="en-US" sz="2400" dirty="0">
+                <a:latin typeface="Times New Roman" panose="02020603050405020304" pitchFamily="18" charset="0"/>
+                <a:ea typeface="SimSun" panose="02010600030101010101" pitchFamily="2" charset="-122"/>
+                <a:cs typeface="Times New Roman" panose="02020603050405020304" pitchFamily="18" charset="0"/>
+              </a:rPr>
+              <a:t>，一个用于</a:t>
+            </a:r>
+            <a:r>
+              <a:rPr lang="en-US" altLang="zh-CN" sz="2400" dirty="0">
+                <a:latin typeface="Times New Roman" panose="02020603050405020304" pitchFamily="18" charset="0"/>
+                <a:ea typeface="SimSun" panose="02010600030101010101" pitchFamily="2" charset="-122"/>
+                <a:cs typeface="Times New Roman" panose="02020603050405020304" pitchFamily="18" charset="0"/>
+              </a:rPr>
+              <a:t>policy update)</a:t>
+            </a:r>
+          </a:p>
+          <a:p>
+            <a:endParaRPr lang="en-US" altLang="zh-CN" sz="2400" dirty="0">
+              <a:latin typeface="Times New Roman" panose="02020603050405020304" pitchFamily="18" charset="0"/>
+              <a:ea typeface="SimSun" panose="02010600030101010101" pitchFamily="2" charset="-122"/>
+              <a:cs typeface="Times New Roman" panose="02020603050405020304" pitchFamily="18" charset="0"/>
+            </a:endParaRPr>
+          </a:p>
+          <a:p>
+            <a:r>
+              <a:rPr lang="en-US" altLang="zh-CN" sz="2400" dirty="0">
+                <a:latin typeface="Times New Roman" panose="02020603050405020304" pitchFamily="18" charset="0"/>
+                <a:ea typeface="SimSun" panose="02010600030101010101" pitchFamily="2" charset="-122"/>
+                <a:cs typeface="Times New Roman" panose="02020603050405020304" pitchFamily="18" charset="0"/>
+              </a:rPr>
+              <a:t>3. PPO</a:t>
+            </a:r>
+            <a:r>
+              <a:rPr lang="zh-CN" altLang="en-US" sz="2400" dirty="0">
+                <a:latin typeface="Times New Roman" panose="02020603050405020304" pitchFamily="18" charset="0"/>
+                <a:ea typeface="SimSun" panose="02010600030101010101" pitchFamily="2" charset="-122"/>
+                <a:cs typeface="Times New Roman" panose="02020603050405020304" pitchFamily="18" charset="0"/>
+              </a:rPr>
+              <a:t>与</a:t>
+            </a:r>
+            <a:r>
+              <a:rPr lang="en-US" altLang="zh-CN" sz="2400" dirty="0">
+                <a:latin typeface="Times New Roman" panose="02020603050405020304" pitchFamily="18" charset="0"/>
+                <a:ea typeface="SimSun" panose="02010600030101010101" pitchFamily="2" charset="-122"/>
+                <a:cs typeface="Times New Roman" panose="02020603050405020304" pitchFamily="18" charset="0"/>
+              </a:rPr>
+              <a:t>GRPO</a:t>
+            </a:r>
+            <a:r>
+              <a:rPr lang="zh-CN" altLang="en-US" sz="2400" dirty="0">
+                <a:latin typeface="Times New Roman" panose="02020603050405020304" pitchFamily="18" charset="0"/>
+                <a:ea typeface="SimSun" panose="02010600030101010101" pitchFamily="2" charset="-122"/>
+                <a:cs typeface="Times New Roman" panose="02020603050405020304" pitchFamily="18" charset="0"/>
+              </a:rPr>
+              <a:t>中</a:t>
+            </a:r>
+            <a:r>
+              <a:rPr lang="en-US" altLang="zh-CN" sz="2400" dirty="0">
+                <a:latin typeface="Times New Roman" panose="02020603050405020304" pitchFamily="18" charset="0"/>
+                <a:ea typeface="SimSun" panose="02010600030101010101" pitchFamily="2" charset="-122"/>
+                <a:cs typeface="Times New Roman" panose="02020603050405020304" pitchFamily="18" charset="0"/>
+              </a:rPr>
+              <a:t>Advantage function</a:t>
+            </a:r>
+            <a:r>
+              <a:rPr lang="zh-CN" altLang="en-US" sz="2400" dirty="0">
+                <a:latin typeface="Times New Roman" panose="02020603050405020304" pitchFamily="18" charset="0"/>
+                <a:ea typeface="SimSun" panose="02010600030101010101" pitchFamily="2" charset="-122"/>
+                <a:cs typeface="Times New Roman" panose="02020603050405020304" pitchFamily="18" charset="0"/>
+              </a:rPr>
+              <a:t>是如何确定的？</a:t>
+            </a:r>
+            <a:endParaRPr lang="en-US" altLang="zh-CN" sz="2400" dirty="0">
+              <a:latin typeface="Times New Roman" panose="02020603050405020304" pitchFamily="18" charset="0"/>
+              <a:ea typeface="SimSun" panose="02010600030101010101" pitchFamily="2" charset="-122"/>
+              <a:cs typeface="Times New Roman" panose="02020603050405020304" pitchFamily="18" charset="0"/>
+            </a:endParaRPr>
+          </a:p>
+          <a:p>
+            <a:r>
+              <a:rPr lang="zh-CN" altLang="en-US" sz="2400" dirty="0">
+                <a:latin typeface="Times New Roman" panose="02020603050405020304" pitchFamily="18" charset="0"/>
+                <a:ea typeface="SimSun" panose="02010600030101010101" pitchFamily="2" charset="-122"/>
+                <a:cs typeface="Times New Roman" panose="02020603050405020304" pitchFamily="18" charset="0"/>
+              </a:rPr>
+              <a:t>答：</a:t>
+            </a:r>
+            <a:r>
+              <a:rPr lang="en-US" altLang="zh-CN" sz="2400" dirty="0">
+                <a:latin typeface="Times New Roman" panose="02020603050405020304" pitchFamily="18" charset="0"/>
+                <a:ea typeface="SimSun" panose="02010600030101010101" pitchFamily="2" charset="-122"/>
+                <a:cs typeface="Times New Roman" panose="02020603050405020304" pitchFamily="18" charset="0"/>
+              </a:rPr>
+              <a:t>PPO</a:t>
+            </a:r>
+            <a:r>
+              <a:rPr lang="zh-CN" altLang="en-US" sz="2400" dirty="0">
+                <a:latin typeface="Times New Roman" panose="02020603050405020304" pitchFamily="18" charset="0"/>
+                <a:ea typeface="SimSun" panose="02010600030101010101" pitchFamily="2" charset="-122"/>
+                <a:cs typeface="Times New Roman" panose="02020603050405020304" pitchFamily="18" charset="0"/>
+              </a:rPr>
+              <a:t>使用</a:t>
+            </a:r>
+            <a:r>
+              <a:rPr lang="en-US" altLang="zh-CN" sz="2400" dirty="0">
+                <a:latin typeface="Times New Roman" panose="02020603050405020304" pitchFamily="18" charset="0"/>
+                <a:ea typeface="SimSun" panose="02010600030101010101" pitchFamily="2" charset="-122"/>
+                <a:cs typeface="Times New Roman" panose="02020603050405020304" pitchFamily="18" charset="0"/>
+              </a:rPr>
+              <a:t>TD</a:t>
+            </a:r>
+            <a:r>
+              <a:rPr lang="zh-CN" altLang="en-US" sz="2400" dirty="0">
+                <a:latin typeface="Times New Roman" panose="02020603050405020304" pitchFamily="18" charset="0"/>
+                <a:ea typeface="SimSun" panose="02010600030101010101" pitchFamily="2" charset="-122"/>
+                <a:cs typeface="Times New Roman" panose="02020603050405020304" pitchFamily="18" charset="0"/>
+              </a:rPr>
+              <a:t>确定，</a:t>
+            </a:r>
+            <a:r>
+              <a:rPr lang="en-US" altLang="zh-CN" sz="2400" dirty="0">
+                <a:latin typeface="Times New Roman" panose="02020603050405020304" pitchFamily="18" charset="0"/>
+                <a:ea typeface="SimSun" panose="02010600030101010101" pitchFamily="2" charset="-122"/>
+                <a:cs typeface="Times New Roman" panose="02020603050405020304" pitchFamily="18" charset="0"/>
+              </a:rPr>
+              <a:t>GRPO</a:t>
+            </a:r>
+            <a:r>
+              <a:rPr lang="zh-CN" altLang="en-US" sz="2400" dirty="0">
+                <a:latin typeface="Times New Roman" panose="02020603050405020304" pitchFamily="18" charset="0"/>
+                <a:ea typeface="SimSun" panose="02010600030101010101" pitchFamily="2" charset="-122"/>
+                <a:cs typeface="Times New Roman" panose="02020603050405020304" pitchFamily="18" charset="0"/>
+              </a:rPr>
+              <a:t>使用组内比较。</a:t>
+            </a:r>
+            <a:endParaRPr lang="en-US" altLang="zh-CN" sz="2400" dirty="0">
+              <a:latin typeface="Times New Roman" panose="02020603050405020304" pitchFamily="18" charset="0"/>
+              <a:ea typeface="SimSun" panose="02010600030101010101" pitchFamily="2" charset="-122"/>
+              <a:cs typeface="Times New Roman" panose="02020603050405020304" pitchFamily="18" charset="0"/>
+            </a:endParaRPr>
+          </a:p>
+          <a:p>
+            <a:endParaRPr lang="en-US" altLang="zh-CN" sz="2400" dirty="0">
+              <a:latin typeface="Times New Roman" panose="02020603050405020304" pitchFamily="18" charset="0"/>
+              <a:ea typeface="SimSun" panose="02010600030101010101" pitchFamily="2" charset="-122"/>
+              <a:cs typeface="Times New Roman" panose="02020603050405020304" pitchFamily="18" charset="0"/>
+            </a:endParaRPr>
+          </a:p>
+          <a:p>
+            <a:r>
+              <a:rPr lang="en-US" altLang="zh-CN" sz="2400" dirty="0">
+                <a:latin typeface="Times New Roman" panose="02020603050405020304" pitchFamily="18" charset="0"/>
+                <a:ea typeface="SimSun" panose="02010600030101010101" pitchFamily="2" charset="-122"/>
+                <a:cs typeface="Times New Roman" panose="02020603050405020304" pitchFamily="18" charset="0"/>
+              </a:rPr>
+              <a:t>4. PPO</a:t>
+            </a:r>
+            <a:r>
+              <a:rPr lang="zh-CN" altLang="en-US" sz="2400" dirty="0">
+                <a:latin typeface="Times New Roman" panose="02020603050405020304" pitchFamily="18" charset="0"/>
+                <a:ea typeface="SimSun" panose="02010600030101010101" pitchFamily="2" charset="-122"/>
+                <a:cs typeface="Times New Roman" panose="02020603050405020304" pitchFamily="18" charset="0"/>
+              </a:rPr>
+              <a:t>与</a:t>
+            </a:r>
+            <a:r>
+              <a:rPr lang="en-US" altLang="zh-CN" sz="2400" dirty="0">
+                <a:latin typeface="Times New Roman" panose="02020603050405020304" pitchFamily="18" charset="0"/>
+                <a:ea typeface="SimSun" panose="02010600030101010101" pitchFamily="2" charset="-122"/>
+                <a:cs typeface="Times New Roman" panose="02020603050405020304" pitchFamily="18" charset="0"/>
+              </a:rPr>
+              <a:t>GRPO</a:t>
+            </a:r>
+            <a:r>
+              <a:rPr lang="zh-CN" altLang="en-US" sz="2400" dirty="0">
+                <a:latin typeface="Times New Roman" panose="02020603050405020304" pitchFamily="18" charset="0"/>
+                <a:ea typeface="SimSun" panose="02010600030101010101" pitchFamily="2" charset="-122"/>
+                <a:cs typeface="Times New Roman" panose="02020603050405020304" pitchFamily="18" charset="0"/>
+              </a:rPr>
+              <a:t>的损失函数是如何构建的？</a:t>
+            </a:r>
+            <a:endParaRPr lang="en-US" altLang="zh-CN" sz="2400" dirty="0">
+              <a:latin typeface="Times New Roman" panose="02020603050405020304" pitchFamily="18" charset="0"/>
+              <a:ea typeface="SimSun" panose="02010600030101010101" pitchFamily="2" charset="-122"/>
+              <a:cs typeface="Times New Roman" panose="02020603050405020304" pitchFamily="18" charset="0"/>
+            </a:endParaRPr>
+          </a:p>
+          <a:p>
+            <a:r>
+              <a:rPr lang="zh-CN" altLang="en-US" sz="2400" dirty="0">
+                <a:latin typeface="Times New Roman" panose="02020603050405020304" pitchFamily="18" charset="0"/>
+                <a:ea typeface="SimSun" panose="02010600030101010101" pitchFamily="2" charset="-122"/>
+                <a:cs typeface="Times New Roman" panose="02020603050405020304" pitchFamily="18" charset="0"/>
+              </a:rPr>
+              <a:t>答：在</a:t>
+            </a:r>
+            <a:r>
+              <a:rPr lang="en-US" altLang="zh-CN" sz="2400" dirty="0">
+                <a:latin typeface="Times New Roman" panose="02020603050405020304" pitchFamily="18" charset="0"/>
+                <a:ea typeface="SimSun" panose="02010600030101010101" pitchFamily="2" charset="-122"/>
+                <a:cs typeface="Times New Roman" panose="02020603050405020304" pitchFamily="18" charset="0"/>
+              </a:rPr>
+              <a:t>PPO</a:t>
+            </a:r>
+            <a:r>
+              <a:rPr lang="zh-CN" altLang="en-US" sz="2400" dirty="0">
+                <a:latin typeface="Times New Roman" panose="02020603050405020304" pitchFamily="18" charset="0"/>
+                <a:ea typeface="SimSun" panose="02010600030101010101" pitchFamily="2" charset="-122"/>
+                <a:cs typeface="Times New Roman" panose="02020603050405020304" pitchFamily="18" charset="0"/>
+              </a:rPr>
+              <a:t>中我们考虑</a:t>
+            </a:r>
+            <a:r>
+              <a:rPr lang="en-US" altLang="zh-CN" sz="2400" dirty="0">
+                <a:latin typeface="Times New Roman" panose="02020603050405020304" pitchFamily="18" charset="0"/>
+                <a:ea typeface="SimSun" panose="02010600030101010101" pitchFamily="2" charset="-122"/>
+                <a:cs typeface="Times New Roman" panose="02020603050405020304" pitchFamily="18" charset="0"/>
+              </a:rPr>
+              <a:t>policy</a:t>
+            </a:r>
+            <a:r>
+              <a:rPr lang="zh-CN" altLang="en-US" sz="2400" dirty="0">
+                <a:latin typeface="Times New Roman" panose="02020603050405020304" pitchFamily="18" charset="0"/>
+                <a:ea typeface="SimSun" panose="02010600030101010101" pitchFamily="2" charset="-122"/>
+                <a:cs typeface="Times New Roman" panose="02020603050405020304" pitchFamily="18" charset="0"/>
+              </a:rPr>
+              <a:t>损失，</a:t>
+            </a:r>
+            <a:r>
+              <a:rPr lang="en-US" altLang="zh-CN" sz="2400" dirty="0">
+                <a:latin typeface="Times New Roman" panose="02020603050405020304" pitchFamily="18" charset="0"/>
+                <a:ea typeface="SimSun" panose="02010600030101010101" pitchFamily="2" charset="-122"/>
+                <a:cs typeface="Times New Roman" panose="02020603050405020304" pitchFamily="18" charset="0"/>
+              </a:rPr>
+              <a:t>value</a:t>
+            </a:r>
+            <a:r>
+              <a:rPr lang="zh-CN" altLang="en-US" sz="2400" dirty="0">
+                <a:latin typeface="Times New Roman" panose="02020603050405020304" pitchFamily="18" charset="0"/>
+                <a:ea typeface="SimSun" panose="02010600030101010101" pitchFamily="2" charset="-122"/>
+                <a:cs typeface="Times New Roman" panose="02020603050405020304" pitchFamily="18" charset="0"/>
+              </a:rPr>
+              <a:t>损失以及惩罚损失</a:t>
+            </a:r>
+            <a:r>
+              <a:rPr lang="en-US" altLang="zh-CN" sz="2400" dirty="0">
+                <a:latin typeface="Times New Roman" panose="02020603050405020304" pitchFamily="18" charset="0"/>
+                <a:ea typeface="SimSun" panose="02010600030101010101" pitchFamily="2" charset="-122"/>
+                <a:cs typeface="Times New Roman" panose="02020603050405020304" pitchFamily="18" charset="0"/>
+              </a:rPr>
+              <a:t>(</a:t>
+            </a:r>
+            <a:r>
+              <a:rPr lang="zh-CN" altLang="en-US" sz="2400" dirty="0">
+                <a:latin typeface="Times New Roman" panose="02020603050405020304" pitchFamily="18" charset="0"/>
+                <a:ea typeface="SimSun" panose="02010600030101010101" pitchFamily="2" charset="-122"/>
+                <a:cs typeface="Times New Roman" panose="02020603050405020304" pitchFamily="18" charset="0"/>
+              </a:rPr>
+              <a:t>通过权重合成为总体损失</a:t>
+            </a:r>
+            <a:r>
+              <a:rPr lang="en-US" altLang="zh-CN" sz="2400" dirty="0">
+                <a:latin typeface="Times New Roman" panose="02020603050405020304" pitchFamily="18" charset="0"/>
+                <a:ea typeface="SimSun" panose="02010600030101010101" pitchFamily="2" charset="-122"/>
+                <a:cs typeface="Times New Roman" panose="02020603050405020304" pitchFamily="18" charset="0"/>
+              </a:rPr>
+              <a:t>)</a:t>
+            </a:r>
+          </a:p>
+          <a:p>
+            <a:r>
+              <a:rPr lang="en-US" altLang="zh-CN" sz="2400" dirty="0">
+                <a:latin typeface="Times New Roman" panose="02020603050405020304" pitchFamily="18" charset="0"/>
+                <a:ea typeface="SimSun" panose="02010600030101010101" pitchFamily="2" charset="-122"/>
+                <a:cs typeface="Times New Roman" panose="02020603050405020304" pitchFamily="18" charset="0"/>
+              </a:rPr>
+              <a:t>        </a:t>
+            </a:r>
+            <a:r>
+              <a:rPr lang="zh-CN" altLang="en-US" sz="2400" dirty="0">
+                <a:latin typeface="Times New Roman" panose="02020603050405020304" pitchFamily="18" charset="0"/>
+                <a:ea typeface="SimSun" panose="02010600030101010101" pitchFamily="2" charset="-122"/>
+                <a:cs typeface="Times New Roman" panose="02020603050405020304" pitchFamily="18" charset="0"/>
+              </a:rPr>
+              <a:t>在</a:t>
+            </a:r>
+            <a:r>
+              <a:rPr lang="en-US" altLang="zh-CN" sz="2400" dirty="0">
+                <a:latin typeface="Times New Roman" panose="02020603050405020304" pitchFamily="18" charset="0"/>
+                <a:ea typeface="SimSun" panose="02010600030101010101" pitchFamily="2" charset="-122"/>
+                <a:cs typeface="Times New Roman" panose="02020603050405020304" pitchFamily="18" charset="0"/>
+              </a:rPr>
+              <a:t>GRPO</a:t>
+            </a:r>
+            <a:r>
+              <a:rPr lang="zh-CN" altLang="en-US" sz="2400" dirty="0">
+                <a:latin typeface="Times New Roman" panose="02020603050405020304" pitchFamily="18" charset="0"/>
+                <a:ea typeface="SimSun" panose="02010600030101010101" pitchFamily="2" charset="-122"/>
+                <a:cs typeface="Times New Roman" panose="02020603050405020304" pitchFamily="18" charset="0"/>
+              </a:rPr>
+              <a:t>中就较为简便，因为没有</a:t>
+            </a:r>
+            <a:r>
+              <a:rPr lang="en-US" altLang="zh-CN" sz="2400" dirty="0">
+                <a:latin typeface="Times New Roman" panose="02020603050405020304" pitchFamily="18" charset="0"/>
+                <a:ea typeface="SimSun" panose="02010600030101010101" pitchFamily="2" charset="-122"/>
+                <a:cs typeface="Times New Roman" panose="02020603050405020304" pitchFamily="18" charset="0"/>
+              </a:rPr>
+              <a:t>value model </a:t>
+            </a:r>
+            <a:r>
+              <a:rPr lang="zh-CN" altLang="en-US" sz="2400" dirty="0">
+                <a:latin typeface="Times New Roman" panose="02020603050405020304" pitchFamily="18" charset="0"/>
+                <a:ea typeface="SimSun" panose="02010600030101010101" pitchFamily="2" charset="-122"/>
+                <a:cs typeface="Times New Roman" panose="02020603050405020304" pitchFamily="18" charset="0"/>
+              </a:rPr>
+              <a:t>所以直接优化</a:t>
+            </a:r>
+            <a:r>
+              <a:rPr lang="en-US" altLang="zh-CN" sz="2400" dirty="0">
+                <a:latin typeface="Times New Roman" panose="02020603050405020304" pitchFamily="18" charset="0"/>
+                <a:ea typeface="SimSun" panose="02010600030101010101" pitchFamily="2" charset="-122"/>
+                <a:cs typeface="Times New Roman" panose="02020603050405020304" pitchFamily="18" charset="0"/>
+              </a:rPr>
+              <a:t>policy</a:t>
+            </a:r>
+            <a:r>
+              <a:rPr lang="zh-CN" altLang="en-US" sz="2400" dirty="0">
+                <a:latin typeface="Times New Roman" panose="02020603050405020304" pitchFamily="18" charset="0"/>
+                <a:ea typeface="SimSun" panose="02010600030101010101" pitchFamily="2" charset="-122"/>
+                <a:cs typeface="Times New Roman" panose="02020603050405020304" pitchFamily="18" charset="0"/>
+              </a:rPr>
+              <a:t>损失。</a:t>
+            </a:r>
+            <a:endParaRPr lang="en-US" altLang="zh-CN" sz="2400" dirty="0">
+              <a:latin typeface="Times New Roman" panose="02020603050405020304" pitchFamily="18" charset="0"/>
+              <a:ea typeface="SimSun" panose="02010600030101010101" pitchFamily="2" charset="-122"/>
+              <a:cs typeface="Times New Roman" panose="02020603050405020304" pitchFamily="18" charset="0"/>
+            </a:endParaRPr>
+          </a:p>
+          <a:p>
+            <a:endParaRPr lang="en-US" altLang="zh-CN" sz="2400" dirty="0">
+              <a:latin typeface="Times New Roman" panose="02020603050405020304" pitchFamily="18" charset="0"/>
+              <a:ea typeface="SimSun" panose="02010600030101010101" pitchFamily="2" charset="-122"/>
+              <a:cs typeface="Times New Roman" panose="02020603050405020304" pitchFamily="18" charset="0"/>
+            </a:endParaRPr>
+          </a:p>
+          <a:p>
+            <a:endParaRPr lang="en-US" altLang="zh-CN" sz="2400" dirty="0">
+              <a:latin typeface="Times New Roman" panose="02020603050405020304" pitchFamily="18" charset="0"/>
+              <a:ea typeface="SimSun" panose="02010600030101010101" pitchFamily="2" charset="-122"/>
+              <a:cs typeface="Times New Roman" panose="02020603050405020304" pitchFamily="18" charset="0"/>
+            </a:endParaRPr>
+          </a:p>
+        </p:txBody>
+      </p:sp>
+    </p:spTree>
+    <p:extLst>
+      <p:ext uri="{BB962C8B-B14F-4D97-AF65-F5344CB8AC3E}">
+        <p14:creationId xmlns:p14="http://schemas.microsoft.com/office/powerpoint/2010/main" val="4277722123"/>
+      </p:ext>
+    </p:extLst>
+  </p:cSld>
+  <p:clrMapOvr>
+    <a:masterClrMapping/>
+  </p:clrMapOvr>
+</p:sld>
+</file>
+
+<file path=ppt/slides/slide13.xml><?xml version="1.0" encoding="utf-8"?>
+<p:sld xmlns:a="http://schemas.openxmlformats.org/drawingml/2006/main" xmlns:r="http://schemas.openxmlformats.org/officeDocument/2006/relationships" xmlns:p="http://schemas.openxmlformats.org/presentationml/2006/main">
+  <p:cSld>
+    <p:spTree>
+      <p:nvGrpSpPr>
+        <p:cNvPr id="1" name="">
+          <a:extLst>
+            <a:ext uri="{FF2B5EF4-FFF2-40B4-BE49-F238E27FC236}">
+              <a16:creationId xmlns:a16="http://schemas.microsoft.com/office/drawing/2014/main" id="{A2585C83-4C7E-D0C4-1B16-F11830C3E262}"/>
+            </a:ext>
+          </a:extLst>
+        </p:cNvPr>
+        <p:cNvGrpSpPr/>
+        <p:nvPr/>
+      </p:nvGrpSpPr>
+      <p:grpSpPr>
+        <a:xfrm>
+          <a:off x="0" y="0"/>
+          <a:ext cx="0" cy="0"/>
+          <a:chOff x="0" y="0"/>
+          <a:chExt cx="0" cy="0"/>
+        </a:xfrm>
+      </p:grpSpPr>
+      <p:sp>
+        <p:nvSpPr>
+          <p:cNvPr id="5" name="矩形 4">
+            <a:extLst>
+              <a:ext uri="{FF2B5EF4-FFF2-40B4-BE49-F238E27FC236}">
+                <a16:creationId xmlns:a16="http://schemas.microsoft.com/office/drawing/2014/main" id="{0308A8E0-AC5E-ED84-0DB9-CBA5F1C76C95}"/>
+              </a:ext>
+            </a:extLst>
+          </p:cNvPr>
+          <p:cNvSpPr/>
+          <p:nvPr/>
+        </p:nvSpPr>
+        <p:spPr>
+          <a:xfrm>
+            <a:off x="19251" y="205583"/>
+            <a:ext cx="12172749" cy="651933"/>
+          </a:xfrm>
+          <a:prstGeom prst="rect">
+            <a:avLst/>
+          </a:prstGeom>
+          <a:solidFill>
+            <a:schemeClr val="bg1"/>
+          </a:solidFill>
+          <a:ln>
+            <a:solidFill>
+              <a:schemeClr val="bg1"/>
+            </a:solidFill>
+          </a:ln>
+        </p:spPr>
+        <p:style>
+          <a:lnRef idx="2">
+            <a:schemeClr val="accent1">
+              <a:shade val="15000"/>
+            </a:schemeClr>
+          </a:lnRef>
+          <a:fillRef idx="1">
+            <a:schemeClr val="accent1"/>
+          </a:fillRef>
+          <a:effectRef idx="0">
+            <a:schemeClr val="accent1"/>
+          </a:effectRef>
+          <a:fontRef idx="minor">
+            <a:schemeClr val="lt1"/>
+          </a:fontRef>
+        </p:style>
+        <p:txBody>
+          <a:bodyPr rtlCol="0" anchor="ctr"/>
+          <a:lstStyle/>
+          <a:p>
+            <a:pPr algn="just" latinLnBrk="1"/>
+            <a:r>
+              <a:rPr lang="en-US" altLang="zh-CN" sz="3000" dirty="0">
+                <a:solidFill>
+                  <a:schemeClr val="tx1"/>
+                </a:solidFill>
+                <a:latin typeface="Times New Roman" panose="02020603050405020304" pitchFamily="18" charset="0"/>
+                <a:cs typeface="Times New Roman" panose="02020603050405020304" pitchFamily="18" charset="0"/>
+              </a:rPr>
+              <a:t>Does Reinforcement Learning Really Incentivize Reasoning Capacity in LLMs Beyond the Base Model?</a:t>
+            </a:r>
+          </a:p>
+        </p:txBody>
+      </p:sp>
+      <p:sp>
+        <p:nvSpPr>
+          <p:cNvPr id="7" name="文本框 6">
+            <a:extLst>
+              <a:ext uri="{FF2B5EF4-FFF2-40B4-BE49-F238E27FC236}">
+                <a16:creationId xmlns:a16="http://schemas.microsoft.com/office/drawing/2014/main" id="{A9733F5F-2B8E-DCD3-8839-9B4DECF296B9}"/>
+              </a:ext>
+            </a:extLst>
+          </p:cNvPr>
+          <p:cNvSpPr txBox="1"/>
+          <p:nvPr/>
+        </p:nvSpPr>
+        <p:spPr>
+          <a:xfrm>
+            <a:off x="129208" y="2150816"/>
+            <a:ext cx="12192000" cy="3416320"/>
+          </a:xfrm>
+          <a:prstGeom prst="rect">
+            <a:avLst/>
+          </a:prstGeom>
+          <a:noFill/>
+        </p:spPr>
+        <p:txBody>
+          <a:bodyPr wrap="square" rtlCol="0">
+            <a:spAutoFit/>
+          </a:bodyPr>
+          <a:lstStyle/>
+          <a:p>
+            <a:r>
+              <a:rPr lang="zh-CN" altLang="en-US" sz="2400" dirty="0">
+                <a:latin typeface="Times New Roman" panose="02020603050405020304" pitchFamily="18" charset="0"/>
+                <a:ea typeface="SimSun" panose="02010600030101010101" pitchFamily="2" charset="-122"/>
+                <a:cs typeface="Times New Roman" panose="02020603050405020304" pitchFamily="18" charset="0"/>
+              </a:rPr>
+              <a:t>问题：当前 </a:t>
+            </a:r>
+            <a:r>
+              <a:rPr lang="de-DE" altLang="zh-CN" sz="2400" dirty="0">
+                <a:latin typeface="Times New Roman" panose="02020603050405020304" pitchFamily="18" charset="0"/>
+                <a:ea typeface="SimSun" panose="02010600030101010101" pitchFamily="2" charset="-122"/>
+                <a:cs typeface="Times New Roman" panose="02020603050405020304" pitchFamily="18" charset="0"/>
+              </a:rPr>
+              <a:t>RLVR </a:t>
+            </a:r>
+            <a:r>
+              <a:rPr lang="zh-CN" altLang="en-US" sz="2400" dirty="0">
+                <a:latin typeface="Times New Roman" panose="02020603050405020304" pitchFamily="18" charset="0"/>
+                <a:ea typeface="SimSun" panose="02010600030101010101" pitchFamily="2" charset="-122"/>
+                <a:cs typeface="Times New Roman" panose="02020603050405020304" pitchFamily="18" charset="0"/>
+              </a:rPr>
+              <a:t>是否真正使 </a:t>
+            </a:r>
+            <a:r>
+              <a:rPr lang="de-DE" altLang="zh-CN" sz="2400" dirty="0">
+                <a:latin typeface="Times New Roman" panose="02020603050405020304" pitchFamily="18" charset="0"/>
+                <a:ea typeface="SimSun" panose="02010600030101010101" pitchFamily="2" charset="-122"/>
+                <a:cs typeface="Times New Roman" panose="02020603050405020304" pitchFamily="18" charset="0"/>
+              </a:rPr>
+              <a:t>LLM </a:t>
+            </a:r>
+            <a:r>
+              <a:rPr lang="zh-CN" altLang="en-US" sz="2400" dirty="0">
+                <a:latin typeface="Times New Roman" panose="02020603050405020304" pitchFamily="18" charset="0"/>
+                <a:ea typeface="SimSun" panose="02010600030101010101" pitchFamily="2" charset="-122"/>
+                <a:cs typeface="Times New Roman" panose="02020603050405020304" pitchFamily="18" charset="0"/>
+              </a:rPr>
+              <a:t>获得了新的推理能力，还是仅仅利用基础模型中已经存在的推理模式？</a:t>
+            </a:r>
+            <a:endParaRPr lang="en-US" altLang="zh-CN" sz="2400" dirty="0">
+              <a:latin typeface="Times New Roman" panose="02020603050405020304" pitchFamily="18" charset="0"/>
+              <a:ea typeface="SimSun" panose="02010600030101010101" pitchFamily="2" charset="-122"/>
+              <a:cs typeface="Times New Roman" panose="02020603050405020304" pitchFamily="18" charset="0"/>
+            </a:endParaRPr>
+          </a:p>
+          <a:p>
+            <a:endParaRPr lang="en-US" altLang="zh-CN" sz="2400" dirty="0">
+              <a:latin typeface="Times New Roman" panose="02020603050405020304" pitchFamily="18" charset="0"/>
+              <a:ea typeface="SimSun" panose="02010600030101010101" pitchFamily="2" charset="-122"/>
+              <a:cs typeface="Times New Roman" panose="02020603050405020304" pitchFamily="18" charset="0"/>
+            </a:endParaRPr>
+          </a:p>
+          <a:p>
+            <a:r>
+              <a:rPr lang="zh-CN" altLang="en-US" sz="2400" dirty="0">
+                <a:latin typeface="Times New Roman" panose="02020603050405020304" pitchFamily="18" charset="0"/>
+                <a:ea typeface="SimSun" panose="02010600030101010101" pitchFamily="2" charset="-122"/>
+                <a:cs typeface="Times New Roman" panose="02020603050405020304" pitchFamily="18" charset="0"/>
+              </a:rPr>
+              <a:t>动机：没有找到整篇论文的动机</a:t>
+            </a:r>
+            <a:endParaRPr lang="en-US" altLang="zh-CN" sz="2400" dirty="0">
+              <a:latin typeface="Times New Roman" panose="02020603050405020304" pitchFamily="18" charset="0"/>
+              <a:ea typeface="SimSun" panose="02010600030101010101" pitchFamily="2" charset="-122"/>
+              <a:cs typeface="Times New Roman" panose="02020603050405020304" pitchFamily="18" charset="0"/>
+            </a:endParaRPr>
+          </a:p>
+          <a:p>
+            <a:r>
+              <a:rPr lang="en-US" altLang="zh-CN" sz="2400" dirty="0">
+                <a:latin typeface="Times New Roman" panose="02020603050405020304" pitchFamily="18" charset="0"/>
+                <a:ea typeface="SimSun" panose="02010600030101010101" pitchFamily="2" charset="-122"/>
+                <a:cs typeface="Times New Roman" panose="02020603050405020304" pitchFamily="18" charset="0"/>
+              </a:rPr>
+              <a:t>(</a:t>
+            </a:r>
+            <a:r>
+              <a:rPr lang="zh-CN" altLang="en-US" sz="2400" dirty="0">
+                <a:latin typeface="Times New Roman" panose="02020603050405020304" pitchFamily="18" charset="0"/>
+                <a:ea typeface="SimSun" panose="02010600030101010101" pitchFamily="2" charset="-122"/>
+                <a:cs typeface="Times New Roman" panose="02020603050405020304" pitchFamily="18" charset="0"/>
+              </a:rPr>
+              <a:t>注：但是对于具体阶段中每个地方的小动机能看出来</a:t>
+            </a:r>
+            <a:r>
+              <a:rPr lang="en-US" altLang="zh-CN" sz="2400" dirty="0">
+                <a:latin typeface="Times New Roman" panose="02020603050405020304" pitchFamily="18" charset="0"/>
+                <a:ea typeface="SimSun" panose="02010600030101010101" pitchFamily="2" charset="-122"/>
+                <a:cs typeface="Times New Roman" panose="02020603050405020304" pitchFamily="18" charset="0"/>
+              </a:rPr>
+              <a:t>)</a:t>
+            </a:r>
+          </a:p>
+          <a:p>
+            <a:endParaRPr lang="en-US" altLang="zh-CN" sz="2400" dirty="0">
+              <a:latin typeface="Times New Roman" panose="02020603050405020304" pitchFamily="18" charset="0"/>
+              <a:ea typeface="SimSun" panose="02010600030101010101" pitchFamily="2" charset="-122"/>
+              <a:cs typeface="Times New Roman" panose="02020603050405020304" pitchFamily="18" charset="0"/>
+            </a:endParaRPr>
+          </a:p>
+          <a:p>
+            <a:r>
+              <a:rPr lang="zh-CN" altLang="en-US" sz="2400" dirty="0">
+                <a:latin typeface="Times New Roman" panose="02020603050405020304" pitchFamily="18" charset="0"/>
+                <a:ea typeface="SimSun" panose="02010600030101010101" pitchFamily="2" charset="-122"/>
+                <a:cs typeface="Times New Roman" panose="02020603050405020304" pitchFamily="18" charset="0"/>
+              </a:rPr>
+              <a:t>方法：用 </a:t>
+            </a:r>
+            <a:r>
+              <a:rPr lang="de-DE" altLang="zh-CN" sz="2400" dirty="0">
+                <a:latin typeface="Times New Roman" panose="02020603050405020304" pitchFamily="18" charset="0"/>
+                <a:ea typeface="SimSun" panose="02010600030101010101" pitchFamily="2" charset="-122"/>
+                <a:cs typeface="Times New Roman" panose="02020603050405020304" pitchFamily="18" charset="0"/>
+              </a:rPr>
+              <a:t>pass@k </a:t>
+            </a:r>
+            <a:r>
+              <a:rPr lang="zh-CN" altLang="en-US" sz="2400" dirty="0">
+                <a:latin typeface="Times New Roman" panose="02020603050405020304" pitchFamily="18" charset="0"/>
+                <a:ea typeface="SimSun" panose="02010600030101010101" pitchFamily="2" charset="-122"/>
+                <a:cs typeface="Times New Roman" panose="02020603050405020304" pitchFamily="18" charset="0"/>
+              </a:rPr>
+              <a:t>测推理能力，再用 </a:t>
+            </a:r>
+            <a:r>
+              <a:rPr lang="de-DE" altLang="zh-CN" sz="2400" dirty="0">
+                <a:latin typeface="Times New Roman" panose="02020603050405020304" pitchFamily="18" charset="0"/>
+                <a:ea typeface="SimSun" panose="02010600030101010101" pitchFamily="2" charset="-122"/>
+                <a:cs typeface="Times New Roman" panose="02020603050405020304" pitchFamily="18" charset="0"/>
+              </a:rPr>
+              <a:t>coverage/perplexity </a:t>
+            </a:r>
+            <a:r>
+              <a:rPr lang="zh-CN" altLang="en-US" sz="2400" dirty="0">
+                <a:latin typeface="Times New Roman" panose="02020603050405020304" pitchFamily="18" charset="0"/>
+                <a:ea typeface="SimSun" panose="02010600030101010101" pitchFamily="2" charset="-122"/>
+                <a:cs typeface="Times New Roman" panose="02020603050405020304" pitchFamily="18" charset="0"/>
+              </a:rPr>
+              <a:t>判断 </a:t>
+            </a:r>
+            <a:r>
+              <a:rPr lang="de-DE" altLang="zh-CN" sz="2400" dirty="0">
+                <a:latin typeface="Times New Roman" panose="02020603050405020304" pitchFamily="18" charset="0"/>
+                <a:ea typeface="SimSun" panose="02010600030101010101" pitchFamily="2" charset="-122"/>
+                <a:cs typeface="Times New Roman" panose="02020603050405020304" pitchFamily="18" charset="0"/>
+              </a:rPr>
+              <a:t>RLVR </a:t>
+            </a:r>
+            <a:r>
+              <a:rPr lang="zh-CN" altLang="en-US" sz="2400" dirty="0">
+                <a:latin typeface="Times New Roman" panose="02020603050405020304" pitchFamily="18" charset="0"/>
+                <a:ea typeface="SimSun" panose="02010600030101010101" pitchFamily="2" charset="-122"/>
+                <a:cs typeface="Times New Roman" panose="02020603050405020304" pitchFamily="18" charset="0"/>
+              </a:rPr>
+              <a:t>是否产生新的推理路径。</a:t>
+            </a:r>
+            <a:endParaRPr lang="en-US" altLang="zh-CN" sz="2400" dirty="0">
+              <a:latin typeface="Times New Roman" panose="02020603050405020304" pitchFamily="18" charset="0"/>
+              <a:ea typeface="SimSun" panose="02010600030101010101" pitchFamily="2" charset="-122"/>
+              <a:cs typeface="Times New Roman" panose="02020603050405020304" pitchFamily="18" charset="0"/>
+            </a:endParaRPr>
+          </a:p>
+          <a:p>
+            <a:endParaRPr lang="en-US" altLang="zh-CN" sz="2400" dirty="0">
+              <a:latin typeface="Times New Roman" panose="02020603050405020304" pitchFamily="18" charset="0"/>
+              <a:ea typeface="SimSun" panose="02010600030101010101" pitchFamily="2" charset="-122"/>
+              <a:cs typeface="Times New Roman" panose="02020603050405020304" pitchFamily="18" charset="0"/>
+            </a:endParaRPr>
+          </a:p>
+          <a:p>
+            <a:endParaRPr lang="en-US" altLang="zh-CN" sz="2400" dirty="0">
+              <a:latin typeface="Times New Roman" panose="02020603050405020304" pitchFamily="18" charset="0"/>
+              <a:ea typeface="SimSun" panose="02010600030101010101" pitchFamily="2" charset="-122"/>
+              <a:cs typeface="Times New Roman" panose="02020603050405020304" pitchFamily="18" charset="0"/>
+            </a:endParaRPr>
+          </a:p>
+        </p:txBody>
+      </p:sp>
+    </p:spTree>
+    <p:extLst>
+      <p:ext uri="{BB962C8B-B14F-4D97-AF65-F5344CB8AC3E}">
+        <p14:creationId xmlns:p14="http://schemas.microsoft.com/office/powerpoint/2010/main" val="1966091771"/>
       </p:ext>
     </p:extLst>
   </p:cSld>
@@ -4495,8 +7058,8 @@
         </p:nvSpPr>
         <p:spPr>
           <a:xfrm>
-            <a:off x="16934" y="1165056"/>
-            <a:ext cx="12175066" cy="4524315"/>
+            <a:off x="-2944" y="886761"/>
+            <a:ext cx="12175066" cy="5632311"/>
           </a:xfrm>
           <a:prstGeom prst="rect">
             <a:avLst/>
@@ -4512,103 +7075,232 @@
             <a:r>
               <a:rPr lang="en-US" altLang="zh-CN" sz="2400" dirty="0">
                 <a:latin typeface="Times New Roman" panose="02020603050405020304" pitchFamily="18" charset="0"/>
-                <a:cs typeface="Times New Roman" panose="02020603050405020304" pitchFamily="18" charset="0"/>
-              </a:rPr>
-              <a:t>1. Proximal Policy Optimization Algorithm</a:t>
-            </a:r>
-          </a:p>
-          <a:p>
-            <a:r>
-              <a:rPr lang="en-US" altLang="zh-CN" sz="2400" dirty="0">
-                <a:latin typeface="Times New Roman" panose="02020603050405020304" pitchFamily="18" charset="0"/>
-                <a:cs typeface="Times New Roman" panose="02020603050405020304" pitchFamily="18" charset="0"/>
-              </a:rPr>
-              <a:t>(Author: John Schulman et al, arXiv 2017)</a:t>
-            </a:r>
-          </a:p>
-          <a:p>
-            <a:endParaRPr lang="zh-CN" altLang="en-US" sz="2400" dirty="0">
-              <a:latin typeface="Times New Roman" panose="02020603050405020304" pitchFamily="18" charset="0"/>
-              <a:cs typeface="Times New Roman" panose="02020603050405020304" pitchFamily="18" charset="0"/>
-            </a:endParaRPr>
-          </a:p>
-          <a:p>
-            <a:r>
-              <a:rPr lang="en-US" altLang="zh-CN" sz="2400" dirty="0">
-                <a:latin typeface="Times New Roman" panose="02020603050405020304" pitchFamily="18" charset="0"/>
-                <a:cs typeface="Times New Roman" panose="02020603050405020304" pitchFamily="18" charset="0"/>
-              </a:rPr>
-              <a:t>2. DeepSeekMath: Pushing the Limits of Mathematical Reasoning in Open Language Models</a:t>
-            </a:r>
-          </a:p>
-          <a:p>
-            <a:r>
-              <a:rPr lang="en-US" altLang="zh-CN" sz="2400" dirty="0">
-                <a:latin typeface="Times New Roman" panose="02020603050405020304" pitchFamily="18" charset="0"/>
-                <a:cs typeface="Times New Roman" panose="02020603050405020304" pitchFamily="18" charset="0"/>
-              </a:rPr>
-              <a:t>(Author: Zhihong Shao et al, arXiv 2024)</a:t>
+                <a:ea typeface="SimSun" panose="02010600030101010101" pitchFamily="2" charset="-122"/>
+                <a:cs typeface="Times New Roman" panose="02020603050405020304" pitchFamily="18" charset="0"/>
+              </a:rPr>
+              <a:t>1. Reinforcement Learning Meets Large Language Models: A Survey of Advancements and Applications Across the LLM Lifecycle</a:t>
+            </a:r>
+          </a:p>
+          <a:p>
+            <a:r>
+              <a:rPr lang="en-US" altLang="zh-CN" sz="2400" dirty="0">
+                <a:latin typeface="Times New Roman" panose="02020603050405020304" pitchFamily="18" charset="0"/>
+                <a:ea typeface="SimSun" panose="02010600030101010101" pitchFamily="2" charset="-122"/>
+                <a:cs typeface="Times New Roman" panose="02020603050405020304" pitchFamily="18" charset="0"/>
+              </a:rPr>
+              <a:t>(Author: </a:t>
+            </a:r>
+            <a:r>
+              <a:rPr lang="en-US" altLang="zh-CN" sz="2400" dirty="0" err="1">
+                <a:latin typeface="Times New Roman" panose="02020603050405020304" pitchFamily="18" charset="0"/>
+                <a:ea typeface="SimSun" panose="02010600030101010101" pitchFamily="2" charset="-122"/>
+                <a:cs typeface="Times New Roman" panose="02020603050405020304" pitchFamily="18" charset="0"/>
+              </a:rPr>
+              <a:t>Keliang</a:t>
+            </a:r>
+            <a:r>
+              <a:rPr lang="en-US" altLang="zh-CN" sz="2400" dirty="0">
+                <a:latin typeface="Times New Roman" panose="02020603050405020304" pitchFamily="18" charset="0"/>
+                <a:ea typeface="SimSun" panose="02010600030101010101" pitchFamily="2" charset="-122"/>
+                <a:cs typeface="Times New Roman" panose="02020603050405020304" pitchFamily="18" charset="0"/>
+              </a:rPr>
+              <a:t> Liu et al, </a:t>
+            </a:r>
+            <a:r>
+              <a:rPr lang="en-US" altLang="zh-CN" sz="2400" dirty="0" err="1">
+                <a:latin typeface="Times New Roman" panose="02020603050405020304" pitchFamily="18" charset="0"/>
+                <a:ea typeface="SimSun" panose="02010600030101010101" pitchFamily="2" charset="-122"/>
+                <a:cs typeface="Times New Roman" panose="02020603050405020304" pitchFamily="18" charset="0"/>
+              </a:rPr>
+              <a:t>arXiv</a:t>
+            </a:r>
+            <a:r>
+              <a:rPr lang="en-US" altLang="zh-CN" sz="2400" dirty="0">
+                <a:latin typeface="Times New Roman" panose="02020603050405020304" pitchFamily="18" charset="0"/>
+                <a:ea typeface="SimSun" panose="02010600030101010101" pitchFamily="2" charset="-122"/>
+                <a:cs typeface="Times New Roman" panose="02020603050405020304" pitchFamily="18" charset="0"/>
+              </a:rPr>
+              <a:t> 2025)</a:t>
             </a:r>
           </a:p>
           <a:p>
             <a:endParaRPr lang="en-US" altLang="zh-CN" sz="2400" dirty="0">
               <a:latin typeface="Times New Roman" panose="02020603050405020304" pitchFamily="18" charset="0"/>
-              <a:cs typeface="Times New Roman" panose="02020603050405020304" pitchFamily="18" charset="0"/>
-            </a:endParaRPr>
-          </a:p>
-          <a:p>
-            <a:r>
-              <a:rPr lang="en-US" altLang="zh-CN" sz="2400" dirty="0">
-                <a:latin typeface="Times New Roman" panose="02020603050405020304" pitchFamily="18" charset="0"/>
-                <a:cs typeface="Times New Roman" panose="02020603050405020304" pitchFamily="18" charset="0"/>
-              </a:rPr>
-              <a:t>3. Reinforcement Learning Meets Large Language Models: A Survey of Advancements and Applications Across the LLM Lifecycle</a:t>
-            </a:r>
-          </a:p>
-          <a:p>
-            <a:r>
-              <a:rPr lang="en-US" altLang="zh-CN" sz="2400" dirty="0">
-                <a:latin typeface="Times New Roman" panose="02020603050405020304" pitchFamily="18" charset="0"/>
-                <a:cs typeface="Times New Roman" panose="02020603050405020304" pitchFamily="18" charset="0"/>
-              </a:rPr>
-              <a:t>(Author: </a:t>
-            </a:r>
-            <a:r>
-              <a:rPr lang="en-US" altLang="zh-CN" sz="2400" dirty="0" err="1">
-                <a:latin typeface="Times New Roman" panose="02020603050405020304" pitchFamily="18" charset="0"/>
-                <a:cs typeface="Times New Roman" panose="02020603050405020304" pitchFamily="18" charset="0"/>
-              </a:rPr>
-              <a:t>Keliang</a:t>
-            </a:r>
-            <a:r>
-              <a:rPr lang="en-US" altLang="zh-CN" sz="2400" dirty="0">
-                <a:latin typeface="Times New Roman" panose="02020603050405020304" pitchFamily="18" charset="0"/>
-                <a:cs typeface="Times New Roman" panose="02020603050405020304" pitchFamily="18" charset="0"/>
-              </a:rPr>
-              <a:t> Liu et al, arXiv 2025)</a:t>
-            </a:r>
-          </a:p>
-          <a:p>
-            <a:endParaRPr lang="en-US" altLang="zh-CN" sz="2400" dirty="0">
-              <a:latin typeface="Times New Roman" panose="02020603050405020304" pitchFamily="18" charset="0"/>
-              <a:cs typeface="Times New Roman" panose="02020603050405020304" pitchFamily="18" charset="0"/>
-            </a:endParaRPr>
-          </a:p>
-          <a:p>
-            <a:r>
-              <a:rPr lang="en-US" altLang="zh-CN" sz="2400" dirty="0">
-                <a:latin typeface="Times New Roman" panose="02020603050405020304" pitchFamily="18" charset="0"/>
-                <a:cs typeface="Times New Roman" panose="02020603050405020304" pitchFamily="18" charset="0"/>
-              </a:rPr>
-              <a:t>4.</a:t>
-            </a:r>
-          </a:p>
-          <a:p>
-            <a:endParaRPr lang="en-US" altLang="zh-CN" sz="2400" dirty="0">
-              <a:latin typeface="SimSun" panose="02010600030101010101" pitchFamily="2" charset="-122"/>
               <a:ea typeface="SimSun" panose="02010600030101010101" pitchFamily="2" charset="-122"/>
               <a:cs typeface="Times New Roman" panose="02020603050405020304" pitchFamily="18" charset="0"/>
             </a:endParaRPr>
+          </a:p>
+          <a:p>
+            <a:r>
+              <a:rPr lang="en-US" altLang="zh-CN" sz="2400" dirty="0">
+                <a:latin typeface="Times New Roman" panose="02020603050405020304" pitchFamily="18" charset="0"/>
+                <a:ea typeface="SimSun" panose="02010600030101010101" pitchFamily="2" charset="-122"/>
+                <a:cs typeface="Times New Roman" panose="02020603050405020304" pitchFamily="18" charset="0"/>
+              </a:rPr>
+              <a:t>2. Proximal Policy Optimization Algorithm</a:t>
+            </a:r>
+          </a:p>
+          <a:p>
+            <a:r>
+              <a:rPr lang="en-US" altLang="zh-CN" sz="2400" dirty="0">
+                <a:latin typeface="Times New Roman" panose="02020603050405020304" pitchFamily="18" charset="0"/>
+                <a:ea typeface="SimSun" panose="02010600030101010101" pitchFamily="2" charset="-122"/>
+                <a:cs typeface="Times New Roman" panose="02020603050405020304" pitchFamily="18" charset="0"/>
+              </a:rPr>
+              <a:t>(Author: John Schulman et al, arXiv 2017)</a:t>
+            </a:r>
+          </a:p>
+          <a:p>
+            <a:endParaRPr lang="zh-CN" altLang="en-US" sz="2400" dirty="0">
+              <a:latin typeface="Times New Roman" panose="02020603050405020304" pitchFamily="18" charset="0"/>
+              <a:ea typeface="SimSun" panose="02010600030101010101" pitchFamily="2" charset="-122"/>
+              <a:cs typeface="Times New Roman" panose="02020603050405020304" pitchFamily="18" charset="0"/>
+            </a:endParaRPr>
+          </a:p>
+          <a:p>
+            <a:r>
+              <a:rPr lang="en-US" altLang="zh-CN" sz="2400" dirty="0">
+                <a:latin typeface="Times New Roman" panose="02020603050405020304" pitchFamily="18" charset="0"/>
+                <a:ea typeface="SimSun" panose="02010600030101010101" pitchFamily="2" charset="-122"/>
+                <a:cs typeface="Times New Roman" panose="02020603050405020304" pitchFamily="18" charset="0"/>
+              </a:rPr>
+              <a:t>3. DeepSeekMath: Pushing the Limits of Mathematical Reasoning in Open Language Models</a:t>
+            </a:r>
+          </a:p>
+          <a:p>
+            <a:r>
+              <a:rPr lang="en-US" altLang="zh-CN" sz="2400" dirty="0">
+                <a:latin typeface="Times New Roman" panose="02020603050405020304" pitchFamily="18" charset="0"/>
+                <a:ea typeface="SimSun" panose="02010600030101010101" pitchFamily="2" charset="-122"/>
+                <a:cs typeface="Times New Roman" panose="02020603050405020304" pitchFamily="18" charset="0"/>
+              </a:rPr>
+              <a:t>(Author: Zhihong Shao et al, arXiv 2024)</a:t>
+            </a:r>
+          </a:p>
+          <a:p>
+            <a:endParaRPr lang="en-US" altLang="zh-CN" sz="2400" dirty="0">
+              <a:latin typeface="Times New Roman" panose="02020603050405020304" pitchFamily="18" charset="0"/>
+              <a:ea typeface="SimSun" panose="02010600030101010101" pitchFamily="2" charset="-122"/>
+              <a:cs typeface="Times New Roman" panose="02020603050405020304" pitchFamily="18" charset="0"/>
+            </a:endParaRPr>
+          </a:p>
+          <a:p>
+            <a:r>
+              <a:rPr lang="en-US" altLang="zh-CN" sz="2400" dirty="0">
+                <a:latin typeface="Times New Roman" panose="02020603050405020304" pitchFamily="18" charset="0"/>
+                <a:ea typeface="SimSun" panose="02010600030101010101" pitchFamily="2" charset="-122"/>
+                <a:cs typeface="Times New Roman" panose="02020603050405020304" pitchFamily="18" charset="0"/>
+              </a:rPr>
+              <a:t>4. Does Reinforcement Learning Really Incentivize Reasoning Capacity in LLMs Beyond the Base Model?</a:t>
+            </a:r>
+          </a:p>
+          <a:p>
+            <a:endParaRPr lang="en-US" altLang="zh-CN" sz="2400" dirty="0">
+              <a:latin typeface="Times New Roman" panose="02020603050405020304" pitchFamily="18" charset="0"/>
+              <a:ea typeface="SimSun" panose="02010600030101010101" pitchFamily="2" charset="-122"/>
+              <a:cs typeface="Times New Roman" panose="02020603050405020304" pitchFamily="18" charset="0"/>
+            </a:endParaRPr>
+          </a:p>
+          <a:p>
+            <a:r>
+              <a:rPr lang="en-US" altLang="zh-CN" sz="2400" dirty="0">
+                <a:latin typeface="Times New Roman" panose="02020603050405020304" pitchFamily="18" charset="0"/>
+                <a:ea typeface="SimSun" panose="02010600030101010101" pitchFamily="2" charset="-122"/>
+                <a:cs typeface="Times New Roman" panose="02020603050405020304" pitchFamily="18" charset="0"/>
+              </a:rPr>
+              <a:t>(</a:t>
+            </a:r>
+            <a:r>
+              <a:rPr lang="zh-CN" altLang="en-US" sz="2400" dirty="0">
+                <a:solidFill>
+                  <a:srgbClr val="C00000"/>
+                </a:solidFill>
+                <a:latin typeface="Times New Roman" panose="02020603050405020304" pitchFamily="18" charset="0"/>
+                <a:ea typeface="SimSun" panose="02010600030101010101" pitchFamily="2" charset="-122"/>
+                <a:cs typeface="Times New Roman" panose="02020603050405020304" pitchFamily="18" charset="0"/>
+              </a:rPr>
+              <a:t>注：</a:t>
+            </a:r>
+            <a:r>
+              <a:rPr lang="zh-CN" altLang="en-US" sz="2400" dirty="0">
+                <a:latin typeface="Times New Roman" panose="02020603050405020304" pitchFamily="18" charset="0"/>
+                <a:ea typeface="SimSun" panose="02010600030101010101" pitchFamily="2" charset="-122"/>
+                <a:cs typeface="Times New Roman" panose="02020603050405020304" pitchFamily="18" charset="0"/>
+              </a:rPr>
+              <a:t>按照先建立框架，再从推理阶段入手，推理阶段中先建立</a:t>
+            </a:r>
+            <a:r>
+              <a:rPr lang="en-US" altLang="zh-CN" sz="2400" dirty="0">
+                <a:latin typeface="Times New Roman" panose="02020603050405020304" pitchFamily="18" charset="0"/>
+                <a:ea typeface="SimSun" panose="02010600030101010101" pitchFamily="2" charset="-122"/>
+                <a:cs typeface="Times New Roman" panose="02020603050405020304" pitchFamily="18" charset="0"/>
+              </a:rPr>
+              <a:t>PPO</a:t>
+            </a:r>
+            <a:r>
+              <a:rPr lang="zh-CN" altLang="en-US" sz="2400" dirty="0">
+                <a:latin typeface="Times New Roman" panose="02020603050405020304" pitchFamily="18" charset="0"/>
+                <a:ea typeface="SimSun" panose="02010600030101010101" pitchFamily="2" charset="-122"/>
+                <a:cs typeface="Times New Roman" panose="02020603050405020304" pitchFamily="18" charset="0"/>
+              </a:rPr>
+              <a:t>基础知识，再进一步入手</a:t>
+            </a:r>
+            <a:r>
+              <a:rPr lang="en-US" altLang="zh-CN" sz="2400" dirty="0">
+                <a:latin typeface="Times New Roman" panose="02020603050405020304" pitchFamily="18" charset="0"/>
+                <a:ea typeface="SimSun" panose="02010600030101010101" pitchFamily="2" charset="-122"/>
+                <a:cs typeface="Times New Roman" panose="02020603050405020304" pitchFamily="18" charset="0"/>
+              </a:rPr>
+              <a:t>GRPO</a:t>
+            </a:r>
+            <a:r>
+              <a:rPr lang="zh-CN" altLang="en-US" sz="2400" dirty="0">
+                <a:latin typeface="Times New Roman" panose="02020603050405020304" pitchFamily="18" charset="0"/>
+                <a:ea typeface="SimSun" panose="02010600030101010101" pitchFamily="2" charset="-122"/>
+                <a:cs typeface="Times New Roman" panose="02020603050405020304" pitchFamily="18" charset="0"/>
+              </a:rPr>
+              <a:t>，随后关注推理阶段</a:t>
+            </a:r>
+            <a:r>
+              <a:rPr lang="en-US" altLang="zh-CN" sz="2400" dirty="0">
+                <a:latin typeface="Times New Roman" panose="02020603050405020304" pitchFamily="18" charset="0"/>
+                <a:ea typeface="SimSun" panose="02010600030101010101" pitchFamily="2" charset="-122"/>
+                <a:cs typeface="Times New Roman" panose="02020603050405020304" pitchFamily="18" charset="0"/>
+              </a:rPr>
+              <a:t>RL</a:t>
+            </a:r>
+            <a:r>
+              <a:rPr lang="zh-CN" altLang="en-US" sz="2400" dirty="0">
+                <a:latin typeface="Times New Roman" panose="02020603050405020304" pitchFamily="18" charset="0"/>
+                <a:ea typeface="SimSun" panose="02010600030101010101" pitchFamily="2" charset="-122"/>
+                <a:cs typeface="Times New Roman" panose="02020603050405020304" pitchFamily="18" charset="0"/>
+              </a:rPr>
+              <a:t>对</a:t>
+            </a:r>
+            <a:r>
+              <a:rPr lang="en-US" altLang="zh-CN" sz="2400" dirty="0">
+                <a:latin typeface="Times New Roman" panose="02020603050405020304" pitchFamily="18" charset="0"/>
+                <a:ea typeface="SimSun" panose="02010600030101010101" pitchFamily="2" charset="-122"/>
+                <a:cs typeface="Times New Roman" panose="02020603050405020304" pitchFamily="18" charset="0"/>
+              </a:rPr>
+              <a:t>LLM</a:t>
+            </a:r>
+            <a:r>
+              <a:rPr lang="zh-CN" altLang="en-US" sz="2400" dirty="0">
+                <a:latin typeface="Times New Roman" panose="02020603050405020304" pitchFamily="18" charset="0"/>
+                <a:ea typeface="SimSun" panose="02010600030101010101" pitchFamily="2" charset="-122"/>
+                <a:cs typeface="Times New Roman" panose="02020603050405020304" pitchFamily="18" charset="0"/>
+              </a:rPr>
+              <a:t>提升的是什么</a:t>
+            </a:r>
+            <a:r>
+              <a:rPr lang="en-US" altLang="zh-CN" sz="2400" dirty="0">
+                <a:latin typeface="Times New Roman" panose="02020603050405020304" pitchFamily="18" charset="0"/>
+                <a:ea typeface="SimSun" panose="02010600030101010101" pitchFamily="2" charset="-122"/>
+                <a:cs typeface="Times New Roman" panose="02020603050405020304" pitchFamily="18" charset="0"/>
+              </a:rPr>
+              <a:t>)</a:t>
+            </a:r>
           </a:p>
         </p:txBody>
       </p:sp>
@@ -4626,6 +7318,1916 @@
 </file>
 
 <file path=ppt/slides/slide3.xml><?xml version="1.0" encoding="utf-8"?>
+<p:sld xmlns:a="http://schemas.openxmlformats.org/drawingml/2006/main" xmlns:r="http://schemas.openxmlformats.org/officeDocument/2006/relationships" xmlns:p="http://schemas.openxmlformats.org/presentationml/2006/main">
+  <p:cSld>
+    <p:spTree>
+      <p:nvGrpSpPr>
+        <p:cNvPr id="1" name="">
+          <a:extLst>
+            <a:ext uri="{FF2B5EF4-FFF2-40B4-BE49-F238E27FC236}">
+              <a16:creationId xmlns:a16="http://schemas.microsoft.com/office/drawing/2014/main" id="{5E545E97-9867-22E8-81B1-81D4D2692563}"/>
+            </a:ext>
+          </a:extLst>
+        </p:cNvPr>
+        <p:cNvGrpSpPr/>
+        <p:nvPr/>
+      </p:nvGrpSpPr>
+      <p:grpSpPr>
+        <a:xfrm>
+          <a:off x="0" y="0"/>
+          <a:ext cx="0" cy="0"/>
+          <a:chOff x="0" y="0"/>
+          <a:chExt cx="0" cy="0"/>
+        </a:xfrm>
+      </p:grpSpPr>
+      <p:sp>
+        <p:nvSpPr>
+          <p:cNvPr id="5" name="矩形 4">
+            <a:extLst>
+              <a:ext uri="{FF2B5EF4-FFF2-40B4-BE49-F238E27FC236}">
+                <a16:creationId xmlns:a16="http://schemas.microsoft.com/office/drawing/2014/main" id="{1534BB7C-466E-9CC7-B3AD-85A6C2D8CEBE}"/>
+              </a:ext>
+            </a:extLst>
+          </p:cNvPr>
+          <p:cNvSpPr/>
+          <p:nvPr/>
+        </p:nvSpPr>
+        <p:spPr>
+          <a:xfrm>
+            <a:off x="-9939" y="404366"/>
+            <a:ext cx="12172749" cy="651933"/>
+          </a:xfrm>
+          <a:prstGeom prst="rect">
+            <a:avLst/>
+          </a:prstGeom>
+          <a:solidFill>
+            <a:schemeClr val="bg1"/>
+          </a:solidFill>
+          <a:ln>
+            <a:solidFill>
+              <a:schemeClr val="bg1"/>
+            </a:solidFill>
+          </a:ln>
+        </p:spPr>
+        <p:style>
+          <a:lnRef idx="2">
+            <a:schemeClr val="accent1">
+              <a:shade val="15000"/>
+            </a:schemeClr>
+          </a:lnRef>
+          <a:fillRef idx="1">
+            <a:schemeClr val="accent1"/>
+          </a:fillRef>
+          <a:effectRef idx="0">
+            <a:schemeClr val="accent1"/>
+          </a:effectRef>
+          <a:fontRef idx="minor">
+            <a:schemeClr val="lt1"/>
+          </a:fontRef>
+        </p:style>
+        <p:txBody>
+          <a:bodyPr rtlCol="0" anchor="ctr"/>
+          <a:lstStyle/>
+          <a:p>
+            <a:pPr algn="just" latinLnBrk="1"/>
+            <a:r>
+              <a:rPr lang="en-US" altLang="zh-CN" sz="3000" dirty="0">
+                <a:solidFill>
+                  <a:schemeClr val="tx1"/>
+                </a:solidFill>
+                <a:latin typeface="Times New Roman" panose="02020603050405020304" pitchFamily="18" charset="0"/>
+                <a:cs typeface="Times New Roman" panose="02020603050405020304" pitchFamily="18" charset="0"/>
+              </a:rPr>
+              <a:t>Reinforcement Learning Meets Large Language Models: A Survey of Advancements and Applications Across the LLM Lifecycle</a:t>
+            </a:r>
+          </a:p>
+        </p:txBody>
+      </p:sp>
+      <p:sp>
+        <p:nvSpPr>
+          <p:cNvPr id="7" name="文本框 6">
+            <a:extLst>
+              <a:ext uri="{FF2B5EF4-FFF2-40B4-BE49-F238E27FC236}">
+                <a16:creationId xmlns:a16="http://schemas.microsoft.com/office/drawing/2014/main" id="{A52BD2AF-E217-862C-652F-7D3085C9ACF7}"/>
+              </a:ext>
+            </a:extLst>
+          </p:cNvPr>
+          <p:cNvSpPr txBox="1"/>
+          <p:nvPr/>
+        </p:nvSpPr>
+        <p:spPr>
+          <a:xfrm>
+            <a:off x="-19878" y="1586913"/>
+            <a:ext cx="12192000" cy="4524315"/>
+          </a:xfrm>
+          <a:prstGeom prst="rect">
+            <a:avLst/>
+          </a:prstGeom>
+          <a:noFill/>
+        </p:spPr>
+        <p:txBody>
+          <a:bodyPr wrap="square" rtlCol="0">
+            <a:spAutoFit/>
+          </a:bodyPr>
+          <a:lstStyle/>
+          <a:p>
+            <a:r>
+              <a:rPr lang="zh-CN" altLang="en-US" sz="2400" dirty="0">
+                <a:latin typeface="Times New Roman" panose="02020603050405020304" pitchFamily="18" charset="0"/>
+                <a:ea typeface="SimSun" panose="02010600030101010101" pitchFamily="2" charset="-122"/>
+                <a:cs typeface="Times New Roman" panose="02020603050405020304" pitchFamily="18" charset="0"/>
+              </a:rPr>
+              <a:t>问题：现有综述对强化学习增强的大语言模型进行了概述，但其覆盖范围往往较为有限，未能全面总结强化学习在大语言模型整个生命周期中的作用机制。</a:t>
+            </a:r>
+            <a:endParaRPr lang="en-US" altLang="zh-CN" sz="2400" dirty="0">
+              <a:latin typeface="Times New Roman" panose="02020603050405020304" pitchFamily="18" charset="0"/>
+              <a:ea typeface="SimSun" panose="02010600030101010101" pitchFamily="2" charset="-122"/>
+              <a:cs typeface="Times New Roman" panose="02020603050405020304" pitchFamily="18" charset="0"/>
+            </a:endParaRPr>
+          </a:p>
+          <a:p>
+            <a:endParaRPr lang="en-US" altLang="zh-CN" sz="2400" dirty="0">
+              <a:latin typeface="Times New Roman" panose="02020603050405020304" pitchFamily="18" charset="0"/>
+              <a:ea typeface="SimSun" panose="02010600030101010101" pitchFamily="2" charset="-122"/>
+              <a:cs typeface="Times New Roman" panose="02020603050405020304" pitchFamily="18" charset="0"/>
+            </a:endParaRPr>
+          </a:p>
+          <a:p>
+            <a:r>
+              <a:rPr lang="zh-CN" altLang="en-US" sz="2400" dirty="0">
+                <a:latin typeface="Times New Roman" panose="02020603050405020304" pitchFamily="18" charset="0"/>
+                <a:ea typeface="SimSun" panose="02010600030101010101" pitchFamily="2" charset="-122"/>
+                <a:cs typeface="Times New Roman" panose="02020603050405020304" pitchFamily="18" charset="0"/>
+              </a:rPr>
+              <a:t>动机：没有找到整篇论文的动机</a:t>
+            </a:r>
+            <a:endParaRPr lang="en-US" altLang="zh-CN" sz="2400" dirty="0">
+              <a:latin typeface="Times New Roman" panose="02020603050405020304" pitchFamily="18" charset="0"/>
+              <a:ea typeface="SimSun" panose="02010600030101010101" pitchFamily="2" charset="-122"/>
+              <a:cs typeface="Times New Roman" panose="02020603050405020304" pitchFamily="18" charset="0"/>
+            </a:endParaRPr>
+          </a:p>
+          <a:p>
+            <a:r>
+              <a:rPr lang="en-US" altLang="zh-CN" sz="2400" dirty="0">
+                <a:latin typeface="Times New Roman" panose="02020603050405020304" pitchFamily="18" charset="0"/>
+                <a:ea typeface="SimSun" panose="02010600030101010101" pitchFamily="2" charset="-122"/>
+                <a:cs typeface="Times New Roman" panose="02020603050405020304" pitchFamily="18" charset="0"/>
+              </a:rPr>
+              <a:t>(</a:t>
+            </a:r>
+            <a:r>
+              <a:rPr lang="zh-CN" altLang="en-US" sz="2400" dirty="0">
+                <a:latin typeface="Times New Roman" panose="02020603050405020304" pitchFamily="18" charset="0"/>
+                <a:ea typeface="SimSun" panose="02010600030101010101" pitchFamily="2" charset="-122"/>
+                <a:cs typeface="Times New Roman" panose="02020603050405020304" pitchFamily="18" charset="0"/>
+              </a:rPr>
+              <a:t>注：但是对于具体阶段中每个地方的小动机能看出来</a:t>
+            </a:r>
+            <a:r>
+              <a:rPr lang="en-US" altLang="zh-CN" sz="2400" dirty="0">
+                <a:latin typeface="Times New Roman" panose="02020603050405020304" pitchFamily="18" charset="0"/>
+                <a:ea typeface="SimSun" panose="02010600030101010101" pitchFamily="2" charset="-122"/>
+                <a:cs typeface="Times New Roman" panose="02020603050405020304" pitchFamily="18" charset="0"/>
+              </a:rPr>
+              <a:t>)</a:t>
+            </a:r>
+          </a:p>
+          <a:p>
+            <a:endParaRPr lang="en-US" altLang="zh-CN" sz="2400" dirty="0">
+              <a:latin typeface="Times New Roman" panose="02020603050405020304" pitchFamily="18" charset="0"/>
+              <a:ea typeface="SimSun" panose="02010600030101010101" pitchFamily="2" charset="-122"/>
+              <a:cs typeface="Times New Roman" panose="02020603050405020304" pitchFamily="18" charset="0"/>
+            </a:endParaRPr>
+          </a:p>
+          <a:p>
+            <a:r>
+              <a:rPr lang="zh-CN" altLang="en-US" sz="2400" dirty="0">
+                <a:latin typeface="Times New Roman" panose="02020603050405020304" pitchFamily="18" charset="0"/>
+                <a:ea typeface="SimSun" panose="02010600030101010101" pitchFamily="2" charset="-122"/>
+                <a:cs typeface="Times New Roman" panose="02020603050405020304" pitchFamily="18" charset="0"/>
+              </a:rPr>
+              <a:t>贡献：</a:t>
+            </a:r>
+            <a:r>
+              <a:rPr lang="en-US" altLang="zh-CN" sz="2400" dirty="0">
+                <a:latin typeface="Times New Roman" panose="02020603050405020304" pitchFamily="18" charset="0"/>
+                <a:ea typeface="SimSun" panose="02010600030101010101" pitchFamily="2" charset="-122"/>
+                <a:cs typeface="Times New Roman" panose="02020603050405020304" pitchFamily="18" charset="0"/>
+              </a:rPr>
+              <a:t>1. </a:t>
+            </a:r>
+            <a:r>
+              <a:rPr lang="zh-CN" altLang="en-US" sz="2400" dirty="0">
+                <a:latin typeface="Times New Roman" panose="02020603050405020304" pitchFamily="18" charset="0"/>
+                <a:ea typeface="SimSun" panose="02010600030101010101" pitchFamily="2" charset="-122"/>
+                <a:cs typeface="Times New Roman" panose="02020603050405020304" pitchFamily="18" charset="0"/>
+              </a:rPr>
+              <a:t>构建了</a:t>
+            </a:r>
+            <a:r>
+              <a:rPr lang="en-US" altLang="zh-CN" sz="2400" dirty="0">
+                <a:latin typeface="Times New Roman" panose="02020603050405020304" pitchFamily="18" charset="0"/>
+                <a:ea typeface="SimSun" panose="02010600030101010101" pitchFamily="2" charset="-122"/>
+                <a:cs typeface="Times New Roman" panose="02020603050405020304" pitchFamily="18" charset="0"/>
+              </a:rPr>
+              <a:t>RL</a:t>
+            </a:r>
+            <a:r>
+              <a:rPr lang="zh-CN" altLang="en-US" sz="2400" dirty="0">
+                <a:latin typeface="Times New Roman" panose="02020603050405020304" pitchFamily="18" charset="0"/>
+                <a:ea typeface="SimSun" panose="02010600030101010101" pitchFamily="2" charset="-122"/>
+                <a:cs typeface="Times New Roman" panose="02020603050405020304" pitchFamily="18" charset="0"/>
+              </a:rPr>
+              <a:t>在</a:t>
+            </a:r>
+            <a:r>
+              <a:rPr lang="de-DE" altLang="zh-CN" sz="2400" dirty="0">
+                <a:latin typeface="Times New Roman" panose="02020603050405020304" pitchFamily="18" charset="0"/>
+                <a:ea typeface="SimSun" panose="02010600030101010101" pitchFamily="2" charset="-122"/>
+                <a:cs typeface="Times New Roman" panose="02020603050405020304" pitchFamily="18" charset="0"/>
+              </a:rPr>
+              <a:t>pretraining</a:t>
+            </a:r>
+            <a:r>
+              <a:rPr lang="zh-CN" altLang="de-DE" sz="2400" dirty="0">
+                <a:latin typeface="Times New Roman" panose="02020603050405020304" pitchFamily="18" charset="0"/>
+                <a:ea typeface="SimSun" panose="02010600030101010101" pitchFamily="2" charset="-122"/>
+                <a:cs typeface="Times New Roman" panose="02020603050405020304" pitchFamily="18" charset="0"/>
+              </a:rPr>
+              <a:t>、</a:t>
+            </a:r>
+            <a:r>
+              <a:rPr lang="de-DE" altLang="zh-CN" sz="2400" dirty="0">
+                <a:latin typeface="Times New Roman" panose="02020603050405020304" pitchFamily="18" charset="0"/>
+                <a:ea typeface="SimSun" panose="02010600030101010101" pitchFamily="2" charset="-122"/>
+                <a:cs typeface="Times New Roman" panose="02020603050405020304" pitchFamily="18" charset="0"/>
+              </a:rPr>
+              <a:t>alignment</a:t>
+            </a:r>
+            <a:r>
+              <a:rPr lang="zh-CN" altLang="de-DE" sz="2400" dirty="0">
+                <a:latin typeface="Times New Roman" panose="02020603050405020304" pitchFamily="18" charset="0"/>
+                <a:ea typeface="SimSun" panose="02010600030101010101" pitchFamily="2" charset="-122"/>
+                <a:cs typeface="Times New Roman" panose="02020603050405020304" pitchFamily="18" charset="0"/>
+              </a:rPr>
+              <a:t>、</a:t>
+            </a:r>
+            <a:r>
+              <a:rPr lang="de-DE" altLang="zh-CN" sz="2400" dirty="0">
+                <a:latin typeface="Times New Roman" panose="02020603050405020304" pitchFamily="18" charset="0"/>
+                <a:ea typeface="SimSun" panose="02010600030101010101" pitchFamily="2" charset="-122"/>
+                <a:cs typeface="Times New Roman" panose="02020603050405020304" pitchFamily="18" charset="0"/>
+              </a:rPr>
+              <a:t>reinforced reasoning</a:t>
+            </a:r>
+            <a:r>
+              <a:rPr lang="zh-CN" altLang="en-US" sz="2400" dirty="0">
+                <a:latin typeface="Times New Roman" panose="02020603050405020304" pitchFamily="18" charset="0"/>
+                <a:ea typeface="SimSun" panose="02010600030101010101" pitchFamily="2" charset="-122"/>
+                <a:cs typeface="Times New Roman" panose="02020603050405020304" pitchFamily="18" charset="0"/>
+              </a:rPr>
+              <a:t>中的作用。</a:t>
+            </a:r>
+            <a:endParaRPr lang="en-US" altLang="zh-CN" sz="2400" dirty="0">
+              <a:latin typeface="Times New Roman" panose="02020603050405020304" pitchFamily="18" charset="0"/>
+              <a:ea typeface="SimSun" panose="02010600030101010101" pitchFamily="2" charset="-122"/>
+              <a:cs typeface="Times New Roman" panose="02020603050405020304" pitchFamily="18" charset="0"/>
+            </a:endParaRPr>
+          </a:p>
+          <a:p>
+            <a:r>
+              <a:rPr lang="en-US" altLang="zh-CN" sz="2400" dirty="0">
+                <a:latin typeface="Times New Roman" panose="02020603050405020304" pitchFamily="18" charset="0"/>
+                <a:ea typeface="SimSun" panose="02010600030101010101" pitchFamily="2" charset="-122"/>
+                <a:cs typeface="Times New Roman" panose="02020603050405020304" pitchFamily="18" charset="0"/>
+              </a:rPr>
+              <a:t>	2.</a:t>
+            </a:r>
+            <a:r>
+              <a:rPr lang="zh-CN" altLang="en-US" sz="2400" dirty="0">
+                <a:latin typeface="Times New Roman" panose="02020603050405020304" pitchFamily="18" charset="0"/>
+                <a:ea typeface="SimSun" panose="02010600030101010101" pitchFamily="2" charset="-122"/>
+                <a:cs typeface="Times New Roman" panose="02020603050405020304" pitchFamily="18" charset="0"/>
+              </a:rPr>
+              <a:t>同时整理了相关数据，指标以及开源工具与平台</a:t>
+            </a:r>
+            <a:r>
+              <a:rPr lang="de-DE" altLang="zh-CN" sz="2400" dirty="0">
+                <a:latin typeface="Times New Roman" panose="02020603050405020304" pitchFamily="18" charset="0"/>
+                <a:ea typeface="SimSun" panose="02010600030101010101" pitchFamily="2" charset="-122"/>
+                <a:cs typeface="Times New Roman" panose="02020603050405020304" pitchFamily="18" charset="0"/>
+              </a:rPr>
+              <a:t> </a:t>
+            </a:r>
+          </a:p>
+          <a:p>
+            <a:r>
+              <a:rPr lang="en-US" altLang="zh-CN" sz="2400" dirty="0">
+                <a:latin typeface="Times New Roman" panose="02020603050405020304" pitchFamily="18" charset="0"/>
+                <a:ea typeface="SimSun" panose="02010600030101010101" pitchFamily="2" charset="-122"/>
+                <a:cs typeface="Times New Roman" panose="02020603050405020304" pitchFamily="18" charset="0"/>
+              </a:rPr>
+              <a:t>(</a:t>
+            </a:r>
+            <a:r>
+              <a:rPr lang="zh-CN" altLang="en-US" sz="2400" dirty="0">
+                <a:solidFill>
+                  <a:srgbClr val="FF0000"/>
+                </a:solidFill>
+                <a:latin typeface="Times New Roman" panose="02020603050405020304" pitchFamily="18" charset="0"/>
+                <a:ea typeface="SimSun" panose="02010600030101010101" pitchFamily="2" charset="-122"/>
+                <a:cs typeface="Times New Roman" panose="02020603050405020304" pitchFamily="18" charset="0"/>
+              </a:rPr>
+              <a:t>注：</a:t>
+            </a:r>
+            <a:r>
+              <a:rPr lang="zh-CN" altLang="en-US" sz="2400" dirty="0">
+                <a:latin typeface="Times New Roman" panose="02020603050405020304" pitchFamily="18" charset="0"/>
+                <a:ea typeface="SimSun" panose="02010600030101010101" pitchFamily="2" charset="-122"/>
+                <a:cs typeface="Times New Roman" panose="02020603050405020304" pitchFamily="18" charset="0"/>
+              </a:rPr>
+              <a:t>接下来我将把重点放在</a:t>
+            </a:r>
+            <a:r>
+              <a:rPr lang="en-US" altLang="zh-CN" sz="2400" b="1" dirty="0">
+                <a:latin typeface="Times New Roman" panose="02020603050405020304" pitchFamily="18" charset="0"/>
+                <a:ea typeface="SimSun" panose="02010600030101010101" pitchFamily="2" charset="-122"/>
+                <a:cs typeface="Times New Roman" panose="02020603050405020304" pitchFamily="18" charset="0"/>
+              </a:rPr>
+              <a:t>RL</a:t>
+            </a:r>
+            <a:r>
+              <a:rPr lang="zh-CN" altLang="en-US" sz="2400" b="1" dirty="0">
+                <a:latin typeface="Times New Roman" panose="02020603050405020304" pitchFamily="18" charset="0"/>
+                <a:ea typeface="SimSun" panose="02010600030101010101" pitchFamily="2" charset="-122"/>
+                <a:cs typeface="Times New Roman" panose="02020603050405020304" pitchFamily="18" charset="0"/>
+              </a:rPr>
+              <a:t>用于推理阶段</a:t>
+            </a:r>
+            <a:r>
+              <a:rPr lang="en-US" altLang="zh-CN" sz="2400" dirty="0">
+                <a:latin typeface="Times New Roman" panose="02020603050405020304" pitchFamily="18" charset="0"/>
+                <a:ea typeface="SimSun" panose="02010600030101010101" pitchFamily="2" charset="-122"/>
+                <a:cs typeface="Times New Roman" panose="02020603050405020304" pitchFamily="18" charset="0"/>
+              </a:rPr>
+              <a:t>)</a:t>
+            </a:r>
+          </a:p>
+          <a:p>
+            <a:endParaRPr lang="en-US" altLang="zh-CN" sz="2400" dirty="0">
+              <a:latin typeface="Times New Roman" panose="02020603050405020304" pitchFamily="18" charset="0"/>
+              <a:ea typeface="SimSun" panose="02010600030101010101" pitchFamily="2" charset="-122"/>
+              <a:cs typeface="Times New Roman" panose="02020603050405020304" pitchFamily="18" charset="0"/>
+            </a:endParaRPr>
+          </a:p>
+          <a:p>
+            <a:endParaRPr lang="en-US" altLang="zh-CN" sz="2400" dirty="0">
+              <a:latin typeface="Times New Roman" panose="02020603050405020304" pitchFamily="18" charset="0"/>
+              <a:ea typeface="SimSun" panose="02010600030101010101" pitchFamily="2" charset="-122"/>
+              <a:cs typeface="Times New Roman" panose="02020603050405020304" pitchFamily="18" charset="0"/>
+            </a:endParaRPr>
+          </a:p>
+          <a:p>
+            <a:endParaRPr lang="en-US" altLang="zh-CN" sz="2400" dirty="0">
+              <a:latin typeface="Times New Roman" panose="02020603050405020304" pitchFamily="18" charset="0"/>
+              <a:ea typeface="SimSun" panose="02010600030101010101" pitchFamily="2" charset="-122"/>
+              <a:cs typeface="Times New Roman" panose="02020603050405020304" pitchFamily="18" charset="0"/>
+            </a:endParaRPr>
+          </a:p>
+        </p:txBody>
+      </p:sp>
+    </p:spTree>
+    <p:extLst>
+      <p:ext uri="{BB962C8B-B14F-4D97-AF65-F5344CB8AC3E}">
+        <p14:creationId xmlns:p14="http://schemas.microsoft.com/office/powerpoint/2010/main" val="4261492451"/>
+      </p:ext>
+    </p:extLst>
+  </p:cSld>
+  <p:clrMapOvr>
+    <a:masterClrMapping/>
+  </p:clrMapOvr>
+</p:sld>
+</file>
+
+<file path=ppt/slides/slide4.xml><?xml version="1.0" encoding="utf-8"?>
+<p:sld xmlns:a="http://schemas.openxmlformats.org/drawingml/2006/main" xmlns:r="http://schemas.openxmlformats.org/officeDocument/2006/relationships" xmlns:p="http://schemas.openxmlformats.org/presentationml/2006/main">
+  <p:cSld>
+    <p:spTree>
+      <p:nvGrpSpPr>
+        <p:cNvPr id="1" name="">
+          <a:extLst>
+            <a:ext uri="{FF2B5EF4-FFF2-40B4-BE49-F238E27FC236}">
+              <a16:creationId xmlns:a16="http://schemas.microsoft.com/office/drawing/2014/main" id="{3F0071F7-F652-E961-B8F6-AE4551B004C2}"/>
+            </a:ext>
+          </a:extLst>
+        </p:cNvPr>
+        <p:cNvGrpSpPr/>
+        <p:nvPr/>
+      </p:nvGrpSpPr>
+      <p:grpSpPr>
+        <a:xfrm>
+          <a:off x="0" y="0"/>
+          <a:ext cx="0" cy="0"/>
+          <a:chOff x="0" y="0"/>
+          <a:chExt cx="0" cy="0"/>
+        </a:xfrm>
+      </p:grpSpPr>
+      <p:sp>
+        <p:nvSpPr>
+          <p:cNvPr id="5" name="矩形 4">
+            <a:extLst>
+              <a:ext uri="{FF2B5EF4-FFF2-40B4-BE49-F238E27FC236}">
+                <a16:creationId xmlns:a16="http://schemas.microsoft.com/office/drawing/2014/main" id="{0B2C9B09-1D45-2B4D-CAC0-2541E76042C4}"/>
+              </a:ext>
+            </a:extLst>
+          </p:cNvPr>
+          <p:cNvSpPr/>
+          <p:nvPr/>
+        </p:nvSpPr>
+        <p:spPr>
+          <a:xfrm>
+            <a:off x="17560" y="96253"/>
+            <a:ext cx="12172749" cy="651933"/>
+          </a:xfrm>
+          <a:prstGeom prst="rect">
+            <a:avLst/>
+          </a:prstGeom>
+          <a:solidFill>
+            <a:schemeClr val="bg1"/>
+          </a:solidFill>
+          <a:ln>
+            <a:solidFill>
+              <a:schemeClr val="bg1"/>
+            </a:solidFill>
+          </a:ln>
+        </p:spPr>
+        <p:style>
+          <a:lnRef idx="2">
+            <a:schemeClr val="accent1">
+              <a:shade val="15000"/>
+            </a:schemeClr>
+          </a:lnRef>
+          <a:fillRef idx="1">
+            <a:schemeClr val="accent1"/>
+          </a:fillRef>
+          <a:effectRef idx="0">
+            <a:schemeClr val="accent1"/>
+          </a:effectRef>
+          <a:fontRef idx="minor">
+            <a:schemeClr val="lt1"/>
+          </a:fontRef>
+        </p:style>
+        <p:txBody>
+          <a:bodyPr rtlCol="0" anchor="ctr"/>
+          <a:lstStyle/>
+          <a:p>
+            <a:pPr algn="just" latinLnBrk="1"/>
+            <a:r>
+              <a:rPr lang="en-US" altLang="zh-CN" sz="3000" dirty="0">
+                <a:solidFill>
+                  <a:schemeClr val="tx1"/>
+                </a:solidFill>
+                <a:latin typeface="Times New Roman" panose="02020603050405020304" pitchFamily="18" charset="0"/>
+                <a:cs typeface="Times New Roman" panose="02020603050405020304" pitchFamily="18" charset="0"/>
+              </a:rPr>
+              <a:t>Reinforcement Learning Meets Large Language Models: A Survey of Advancements and Applications Across the LLM Lifecycle</a:t>
+            </a:r>
+          </a:p>
+        </p:txBody>
+      </p:sp>
+      <p:pic>
+        <p:nvPicPr>
+          <p:cNvPr id="2" name="图片 1">
+            <a:extLst>
+              <a:ext uri="{FF2B5EF4-FFF2-40B4-BE49-F238E27FC236}">
+                <a16:creationId xmlns:a16="http://schemas.microsoft.com/office/drawing/2014/main" id="{F2624C71-CDDB-1017-5BDA-51195DC9E38A}"/>
+              </a:ext>
+            </a:extLst>
+          </p:cNvPr>
+          <p:cNvPicPr>
+            <a:picLocks noChangeAspect="1"/>
+          </p:cNvPicPr>
+          <p:nvPr/>
+        </p:nvPicPr>
+        <p:blipFill>
+          <a:blip r:embed="rId3"/>
+          <a:stretch>
+            <a:fillRect/>
+          </a:stretch>
+        </p:blipFill>
+        <p:spPr>
+          <a:xfrm>
+            <a:off x="0" y="956579"/>
+            <a:ext cx="5623857" cy="5884489"/>
+          </a:xfrm>
+          <a:prstGeom prst="rect">
+            <a:avLst/>
+          </a:prstGeom>
+        </p:spPr>
+      </p:pic>
+      <p:sp>
+        <p:nvSpPr>
+          <p:cNvPr id="4" name="文本框 3">
+            <a:extLst>
+              <a:ext uri="{FF2B5EF4-FFF2-40B4-BE49-F238E27FC236}">
+                <a16:creationId xmlns:a16="http://schemas.microsoft.com/office/drawing/2014/main" id="{93E053EF-6633-E3B9-BDBE-210EEBB79A22}"/>
+              </a:ext>
+            </a:extLst>
+          </p:cNvPr>
+          <p:cNvSpPr txBox="1"/>
+          <p:nvPr/>
+        </p:nvSpPr>
+        <p:spPr>
+          <a:xfrm>
+            <a:off x="5218584" y="2917814"/>
+            <a:ext cx="6973416" cy="2308324"/>
+          </a:xfrm>
+          <a:prstGeom prst="rect">
+            <a:avLst/>
+          </a:prstGeom>
+          <a:noFill/>
+        </p:spPr>
+        <p:txBody>
+          <a:bodyPr wrap="square" rtlCol="0">
+            <a:spAutoFit/>
+          </a:bodyPr>
+          <a:lstStyle/>
+          <a:p>
+            <a:r>
+              <a:rPr lang="zh-CN" altLang="en-US" sz="2400" dirty="0">
+                <a:latin typeface="Times New Roman" panose="02020603050405020304" pitchFamily="18" charset="0"/>
+                <a:ea typeface="SimSun" panose="02010600030101010101" pitchFamily="2" charset="-122"/>
+                <a:cs typeface="Times New Roman" panose="02020603050405020304" pitchFamily="18" charset="0"/>
+              </a:rPr>
+              <a:t>这图表明了一条基于</a:t>
+            </a:r>
+            <a:r>
+              <a:rPr lang="en-US" altLang="zh-CN" sz="2400" dirty="0">
+                <a:latin typeface="Times New Roman" panose="02020603050405020304" pitchFamily="18" charset="0"/>
+                <a:ea typeface="SimSun" panose="02010600030101010101" pitchFamily="2" charset="-122"/>
+                <a:cs typeface="Times New Roman" panose="02020603050405020304" pitchFamily="18" charset="0"/>
+              </a:rPr>
+              <a:t>GRPO</a:t>
+            </a:r>
+            <a:r>
+              <a:rPr lang="zh-CN" altLang="en-US" sz="2400" dirty="0">
+                <a:latin typeface="Times New Roman" panose="02020603050405020304" pitchFamily="18" charset="0"/>
+                <a:ea typeface="SimSun" panose="02010600030101010101" pitchFamily="2" charset="-122"/>
+                <a:cs typeface="Times New Roman" panose="02020603050405020304" pitchFamily="18" charset="0"/>
+              </a:rPr>
+              <a:t>架构完整的</a:t>
+            </a:r>
+            <a:r>
+              <a:rPr lang="en-US" altLang="zh-CN" sz="2400" dirty="0">
+                <a:latin typeface="Times New Roman" panose="02020603050405020304" pitchFamily="18" charset="0"/>
+                <a:ea typeface="SimSun" panose="02010600030101010101" pitchFamily="2" charset="-122"/>
+                <a:cs typeface="Times New Roman" panose="02020603050405020304" pitchFamily="18" charset="0"/>
+              </a:rPr>
+              <a:t>RL</a:t>
+            </a:r>
+            <a:r>
+              <a:rPr lang="zh-CN" altLang="en-US" sz="2400" dirty="0">
+                <a:latin typeface="Times New Roman" panose="02020603050405020304" pitchFamily="18" charset="0"/>
+                <a:ea typeface="SimSun" panose="02010600030101010101" pitchFamily="2" charset="-122"/>
+                <a:cs typeface="Times New Roman" panose="02020603050405020304" pitchFamily="18" charset="0"/>
+              </a:rPr>
+              <a:t>用于推理阶段的路线</a:t>
+            </a:r>
+            <a:endParaRPr lang="en-US" altLang="zh-CN" sz="2400" dirty="0">
+              <a:latin typeface="Times New Roman" panose="02020603050405020304" pitchFamily="18" charset="0"/>
+              <a:ea typeface="SimSun" panose="02010600030101010101" pitchFamily="2" charset="-122"/>
+              <a:cs typeface="Times New Roman" panose="02020603050405020304" pitchFamily="18" charset="0"/>
+            </a:endParaRPr>
+          </a:p>
+          <a:p>
+            <a:r>
+              <a:rPr lang="en-US" altLang="zh-CN" sz="2400" dirty="0">
+                <a:latin typeface="Times New Roman" panose="02020603050405020304" pitchFamily="18" charset="0"/>
+                <a:ea typeface="SimSun" panose="02010600030101010101" pitchFamily="2" charset="-122"/>
+                <a:cs typeface="Times New Roman" panose="02020603050405020304" pitchFamily="18" charset="0"/>
+              </a:rPr>
+              <a:t>(</a:t>
+            </a:r>
+            <a:r>
+              <a:rPr lang="zh-CN" altLang="en-US" sz="2400" dirty="0">
+                <a:solidFill>
+                  <a:srgbClr val="C00000"/>
+                </a:solidFill>
+                <a:latin typeface="Times New Roman" panose="02020603050405020304" pitchFamily="18" charset="0"/>
+                <a:ea typeface="SimSun" panose="02010600030101010101" pitchFamily="2" charset="-122"/>
+                <a:cs typeface="Times New Roman" panose="02020603050405020304" pitchFamily="18" charset="0"/>
+              </a:rPr>
+              <a:t>注：</a:t>
+            </a:r>
+            <a:r>
+              <a:rPr lang="zh-CN" altLang="en-US" sz="2400" dirty="0">
+                <a:latin typeface="Times New Roman" panose="02020603050405020304" pitchFamily="18" charset="0"/>
+                <a:ea typeface="SimSun" panose="02010600030101010101" pitchFamily="2" charset="-122"/>
+                <a:cs typeface="Times New Roman" panose="02020603050405020304" pitchFamily="18" charset="0"/>
+              </a:rPr>
+              <a:t>也表明了各个部分需要注意的问题以及相关方法</a:t>
+            </a:r>
+            <a:r>
+              <a:rPr lang="en-US" altLang="zh-CN" sz="2400" dirty="0">
+                <a:latin typeface="Times New Roman" panose="02020603050405020304" pitchFamily="18" charset="0"/>
+                <a:ea typeface="SimSun" panose="02010600030101010101" pitchFamily="2" charset="-122"/>
+                <a:cs typeface="Times New Roman" panose="02020603050405020304" pitchFamily="18" charset="0"/>
+              </a:rPr>
+              <a:t>)</a:t>
+            </a:r>
+          </a:p>
+          <a:p>
+            <a:endParaRPr lang="en-US" altLang="zh-CN" sz="2400" dirty="0">
+              <a:latin typeface="Times New Roman" panose="02020603050405020304" pitchFamily="18" charset="0"/>
+              <a:ea typeface="SimSun" panose="02010600030101010101" pitchFamily="2" charset="-122"/>
+              <a:cs typeface="Times New Roman" panose="02020603050405020304" pitchFamily="18" charset="0"/>
+            </a:endParaRPr>
+          </a:p>
+          <a:p>
+            <a:endParaRPr lang="en-US" altLang="zh-CN" sz="2400" dirty="0">
+              <a:latin typeface="Times New Roman" panose="02020603050405020304" pitchFamily="18" charset="0"/>
+              <a:ea typeface="SimSun" panose="02010600030101010101" pitchFamily="2" charset="-122"/>
+              <a:cs typeface="Times New Roman" panose="02020603050405020304" pitchFamily="18" charset="0"/>
+            </a:endParaRPr>
+          </a:p>
+        </p:txBody>
+      </p:sp>
+    </p:spTree>
+    <p:extLst>
+      <p:ext uri="{BB962C8B-B14F-4D97-AF65-F5344CB8AC3E}">
+        <p14:creationId xmlns:p14="http://schemas.microsoft.com/office/powerpoint/2010/main" val="2039586319"/>
+      </p:ext>
+    </p:extLst>
+  </p:cSld>
+  <p:clrMapOvr>
+    <a:masterClrMapping/>
+  </p:clrMapOvr>
+</p:sld>
+</file>
+
+<file path=ppt/slides/slide5.xml><?xml version="1.0" encoding="utf-8"?>
+<p:sld xmlns:a="http://schemas.openxmlformats.org/drawingml/2006/main" xmlns:r="http://schemas.openxmlformats.org/officeDocument/2006/relationships" xmlns:p="http://schemas.openxmlformats.org/presentationml/2006/main">
+  <p:cSld>
+    <p:spTree>
+      <p:nvGrpSpPr>
+        <p:cNvPr id="1" name="">
+          <a:extLst>
+            <a:ext uri="{FF2B5EF4-FFF2-40B4-BE49-F238E27FC236}">
+              <a16:creationId xmlns:a16="http://schemas.microsoft.com/office/drawing/2014/main" id="{A69E8D88-822D-CE5B-0D31-EFD36129EA0A}"/>
+            </a:ext>
+          </a:extLst>
+        </p:cNvPr>
+        <p:cNvGrpSpPr/>
+        <p:nvPr/>
+      </p:nvGrpSpPr>
+      <p:grpSpPr>
+        <a:xfrm>
+          <a:off x="0" y="0"/>
+          <a:ext cx="0" cy="0"/>
+          <a:chOff x="0" y="0"/>
+          <a:chExt cx="0" cy="0"/>
+        </a:xfrm>
+      </p:grpSpPr>
+      <p:sp>
+        <p:nvSpPr>
+          <p:cNvPr id="5" name="矩形 4">
+            <a:extLst>
+              <a:ext uri="{FF2B5EF4-FFF2-40B4-BE49-F238E27FC236}">
+                <a16:creationId xmlns:a16="http://schemas.microsoft.com/office/drawing/2014/main" id="{EB44EB1E-07B7-4AA1-F9A2-7BD2EF435FE3}"/>
+              </a:ext>
+            </a:extLst>
+          </p:cNvPr>
+          <p:cNvSpPr/>
+          <p:nvPr/>
+        </p:nvSpPr>
+        <p:spPr>
+          <a:xfrm>
+            <a:off x="6367" y="0"/>
+            <a:ext cx="12172749" cy="651933"/>
+          </a:xfrm>
+          <a:prstGeom prst="rect">
+            <a:avLst/>
+          </a:prstGeom>
+          <a:solidFill>
+            <a:schemeClr val="bg1"/>
+          </a:solidFill>
+          <a:ln>
+            <a:solidFill>
+              <a:schemeClr val="bg1"/>
+            </a:solidFill>
+          </a:ln>
+        </p:spPr>
+        <p:style>
+          <a:lnRef idx="2">
+            <a:schemeClr val="accent1">
+              <a:shade val="15000"/>
+            </a:schemeClr>
+          </a:lnRef>
+          <a:fillRef idx="1">
+            <a:schemeClr val="accent1"/>
+          </a:fillRef>
+          <a:effectRef idx="0">
+            <a:schemeClr val="accent1"/>
+          </a:effectRef>
+          <a:fontRef idx="minor">
+            <a:schemeClr val="lt1"/>
+          </a:fontRef>
+        </p:style>
+        <p:txBody>
+          <a:bodyPr rtlCol="0" anchor="ctr"/>
+          <a:lstStyle/>
+          <a:p>
+            <a:r>
+              <a:rPr lang="zh-CN" altLang="en-US" sz="3200" b="1" dirty="0">
+                <a:solidFill>
+                  <a:schemeClr val="tx1"/>
+                </a:solidFill>
+                <a:latin typeface="Times New Roman" panose="02020603050405020304" pitchFamily="18" charset="0"/>
+                <a:ea typeface="SimSun" panose="02010600030101010101" pitchFamily="2" charset="-122"/>
+                <a:cs typeface="Times New Roman" panose="02020603050405020304" pitchFamily="18" charset="0"/>
+              </a:rPr>
+              <a:t>相关问题</a:t>
+            </a:r>
+            <a:r>
+              <a:rPr lang="en-US" altLang="zh-CN" sz="3200" b="1" dirty="0">
+                <a:solidFill>
+                  <a:schemeClr val="tx1"/>
+                </a:solidFill>
+                <a:latin typeface="Times New Roman" panose="02020603050405020304" pitchFamily="18" charset="0"/>
+                <a:ea typeface="SimSun" panose="02010600030101010101" pitchFamily="2" charset="-122"/>
+                <a:cs typeface="Times New Roman" panose="02020603050405020304" pitchFamily="18" charset="0"/>
+              </a:rPr>
+              <a:t>(</a:t>
+            </a:r>
+            <a:r>
+              <a:rPr lang="zh-CN" altLang="en-US" sz="3200" b="1" dirty="0">
+                <a:solidFill>
+                  <a:schemeClr val="tx1"/>
+                </a:solidFill>
+                <a:latin typeface="Times New Roman" panose="02020603050405020304" pitchFamily="18" charset="0"/>
+                <a:ea typeface="SimSun" panose="02010600030101010101" pitchFamily="2" charset="-122"/>
+                <a:cs typeface="Times New Roman" panose="02020603050405020304" pitchFamily="18" charset="0"/>
+              </a:rPr>
+              <a:t>或者说可能的方向</a:t>
+            </a:r>
+            <a:r>
+              <a:rPr lang="en-US" altLang="zh-CN" sz="3200" b="1" dirty="0">
+                <a:solidFill>
+                  <a:schemeClr val="tx1"/>
+                </a:solidFill>
+                <a:latin typeface="Times New Roman" panose="02020603050405020304" pitchFamily="18" charset="0"/>
+                <a:ea typeface="SimSun" panose="02010600030101010101" pitchFamily="2" charset="-122"/>
+                <a:cs typeface="Times New Roman" panose="02020603050405020304" pitchFamily="18" charset="0"/>
+              </a:rPr>
+              <a:t>)</a:t>
+            </a:r>
+          </a:p>
+        </p:txBody>
+      </p:sp>
+      <p:sp>
+        <p:nvSpPr>
+          <p:cNvPr id="7" name="文本框 6">
+            <a:extLst>
+              <a:ext uri="{FF2B5EF4-FFF2-40B4-BE49-F238E27FC236}">
+                <a16:creationId xmlns:a16="http://schemas.microsoft.com/office/drawing/2014/main" id="{73DCE6A7-C305-F397-1F42-DF54DFE3FD46}"/>
+              </a:ext>
+            </a:extLst>
+          </p:cNvPr>
+          <p:cNvSpPr txBox="1"/>
+          <p:nvPr/>
+        </p:nvSpPr>
+        <p:spPr>
+          <a:xfrm>
+            <a:off x="6367" y="527061"/>
+            <a:ext cx="12192000" cy="6740307"/>
+          </a:xfrm>
+          <a:prstGeom prst="rect">
+            <a:avLst/>
+          </a:prstGeom>
+          <a:noFill/>
+        </p:spPr>
+        <p:txBody>
+          <a:bodyPr wrap="square" rtlCol="0">
+            <a:spAutoFit/>
+          </a:bodyPr>
+          <a:lstStyle/>
+          <a:p>
+            <a:r>
+              <a:rPr lang="en-US" altLang="zh-CN" sz="2400" dirty="0">
+                <a:latin typeface="Times New Roman" panose="02020603050405020304" pitchFamily="18" charset="0"/>
+                <a:ea typeface="SimSun" panose="02010600030101010101" pitchFamily="2" charset="-122"/>
+                <a:cs typeface="Times New Roman" panose="02020603050405020304" pitchFamily="18" charset="0"/>
+              </a:rPr>
+              <a:t>1. </a:t>
+            </a:r>
+            <a:r>
+              <a:rPr lang="en-US" altLang="zh-CN" sz="2400" b="1" dirty="0">
+                <a:latin typeface="Times New Roman" panose="02020603050405020304" pitchFamily="18" charset="0"/>
+                <a:ea typeface="SimSun" panose="02010600030101010101" pitchFamily="2" charset="-122"/>
+                <a:cs typeface="Times New Roman" panose="02020603050405020304" pitchFamily="18" charset="0"/>
+              </a:rPr>
+              <a:t>RLVR</a:t>
+            </a:r>
+            <a:r>
+              <a:rPr lang="zh-CN" altLang="en-US" sz="2400" b="1" dirty="0">
+                <a:latin typeface="Times New Roman" panose="02020603050405020304" pitchFamily="18" charset="0"/>
+                <a:ea typeface="SimSun" panose="02010600030101010101" pitchFamily="2" charset="-122"/>
+                <a:cs typeface="Times New Roman" panose="02020603050405020304" pitchFamily="18" charset="0"/>
+              </a:rPr>
+              <a:t>在</a:t>
+            </a:r>
+            <a:r>
+              <a:rPr lang="de-DE" altLang="zh-CN" sz="2400" b="1" dirty="0">
+                <a:latin typeface="Times New Roman" panose="02020603050405020304" pitchFamily="18" charset="0"/>
+                <a:ea typeface="SimSun" panose="02010600030101010101" pitchFamily="2" charset="-122"/>
+                <a:cs typeface="Times New Roman" panose="02020603050405020304" pitchFamily="18" charset="0"/>
+              </a:rPr>
+              <a:t>Reasoning</a:t>
+            </a:r>
+            <a:r>
+              <a:rPr lang="zh-CN" altLang="en-US" sz="2400" b="1" dirty="0">
+                <a:latin typeface="Times New Roman" panose="02020603050405020304" pitchFamily="18" charset="0"/>
+                <a:ea typeface="SimSun" panose="02010600030101010101" pitchFamily="2" charset="-122"/>
+                <a:cs typeface="Times New Roman" panose="02020603050405020304" pitchFamily="18" charset="0"/>
+              </a:rPr>
+              <a:t>中：</a:t>
+            </a:r>
+            <a:endParaRPr lang="en-US" altLang="zh-CN" sz="2400" b="1" dirty="0">
+              <a:latin typeface="Times New Roman" panose="02020603050405020304" pitchFamily="18" charset="0"/>
+              <a:ea typeface="SimSun" panose="02010600030101010101" pitchFamily="2" charset="-122"/>
+              <a:cs typeface="Times New Roman" panose="02020603050405020304" pitchFamily="18" charset="0"/>
+            </a:endParaRPr>
+          </a:p>
+          <a:p>
+            <a:r>
+              <a:rPr lang="en-US" altLang="zh-CN" sz="2400" dirty="0">
+                <a:latin typeface="Times New Roman" panose="02020603050405020304" pitchFamily="18" charset="0"/>
+                <a:ea typeface="SimSun" panose="02010600030101010101" pitchFamily="2" charset="-122"/>
+                <a:cs typeface="Times New Roman" panose="02020603050405020304" pitchFamily="18" charset="0"/>
+              </a:rPr>
+              <a:t>(1). RLVR </a:t>
+            </a:r>
+            <a:r>
+              <a:rPr lang="zh-CN" altLang="en-US" sz="2400" dirty="0">
+                <a:latin typeface="Times New Roman" panose="02020603050405020304" pitchFamily="18" charset="0"/>
+                <a:ea typeface="SimSun" panose="02010600030101010101" pitchFamily="2" charset="-122"/>
+                <a:cs typeface="Times New Roman" panose="02020603050405020304" pitchFamily="18" charset="0"/>
+              </a:rPr>
+              <a:t>技术通过在测试阶段消耗更多计算资源、生成更长的思维链，从而提升了性能。</a:t>
+            </a:r>
+          </a:p>
+          <a:p>
+            <a:r>
+              <a:rPr lang="zh-CN" altLang="en-US" sz="2400" dirty="0">
+                <a:latin typeface="Times New Roman" panose="02020603050405020304" pitchFamily="18" charset="0"/>
+                <a:ea typeface="SimSun" panose="02010600030101010101" pitchFamily="2" charset="-122"/>
+                <a:cs typeface="Times New Roman" panose="02020603050405020304" pitchFamily="18" charset="0"/>
+              </a:rPr>
+              <a:t>但是有个问题是，这个思维链的长度是不可控的。</a:t>
+            </a:r>
+            <a:endParaRPr lang="en-US" altLang="zh-CN" sz="2400" dirty="0">
+              <a:latin typeface="Times New Roman" panose="02020603050405020304" pitchFamily="18" charset="0"/>
+              <a:ea typeface="SimSun" panose="02010600030101010101" pitchFamily="2" charset="-122"/>
+              <a:cs typeface="Times New Roman" panose="02020603050405020304" pitchFamily="18" charset="0"/>
+            </a:endParaRPr>
+          </a:p>
+          <a:p>
+            <a:r>
+              <a:rPr lang="en-US" altLang="zh-CN" sz="2400" dirty="0">
+                <a:latin typeface="Times New Roman" panose="02020603050405020304" pitchFamily="18" charset="0"/>
+                <a:ea typeface="SimSun" panose="02010600030101010101" pitchFamily="2" charset="-122"/>
+                <a:cs typeface="Times New Roman" panose="02020603050405020304" pitchFamily="18" charset="0"/>
+              </a:rPr>
+              <a:t>(</a:t>
+            </a:r>
+            <a:r>
+              <a:rPr lang="zh-CN" altLang="en-US" sz="2400" dirty="0">
+                <a:solidFill>
+                  <a:srgbClr val="C00000"/>
+                </a:solidFill>
+                <a:latin typeface="Times New Roman" panose="02020603050405020304" pitchFamily="18" charset="0"/>
+                <a:ea typeface="SimSun" panose="02010600030101010101" pitchFamily="2" charset="-122"/>
+                <a:cs typeface="Times New Roman" panose="02020603050405020304" pitchFamily="18" charset="0"/>
+              </a:rPr>
+              <a:t>注：</a:t>
+            </a:r>
+            <a:r>
+              <a:rPr lang="zh-CN" altLang="en-US" sz="2400" dirty="0">
+                <a:latin typeface="Times New Roman" panose="02020603050405020304" pitchFamily="18" charset="0"/>
+                <a:ea typeface="SimSun" panose="02010600030101010101" pitchFamily="2" charset="-122"/>
+                <a:cs typeface="Times New Roman" panose="02020603050405020304" pitchFamily="18" charset="0"/>
+              </a:rPr>
+              <a:t>也就是对于简单的问题可能使用更多的资源，对于复杂的问题可能使用较少的资源</a:t>
+            </a:r>
+            <a:r>
+              <a:rPr lang="en-US" altLang="zh-CN" sz="2400" dirty="0">
+                <a:latin typeface="Times New Roman" panose="02020603050405020304" pitchFamily="18" charset="0"/>
+                <a:ea typeface="SimSun" panose="02010600030101010101" pitchFamily="2" charset="-122"/>
+                <a:cs typeface="Times New Roman" panose="02020603050405020304" pitchFamily="18" charset="0"/>
+              </a:rPr>
+              <a:t>)</a:t>
+            </a:r>
+          </a:p>
+          <a:p>
+            <a:endParaRPr lang="en-US" altLang="zh-CN" sz="2400" dirty="0">
+              <a:latin typeface="Times New Roman" panose="02020603050405020304" pitchFamily="18" charset="0"/>
+              <a:ea typeface="SimSun" panose="02010600030101010101" pitchFamily="2" charset="-122"/>
+              <a:cs typeface="Times New Roman" panose="02020603050405020304" pitchFamily="18" charset="0"/>
+            </a:endParaRPr>
+          </a:p>
+          <a:p>
+            <a:r>
+              <a:rPr lang="en-US" altLang="zh-CN" sz="2400" dirty="0">
+                <a:latin typeface="Times New Roman" panose="02020603050405020304" pitchFamily="18" charset="0"/>
+                <a:ea typeface="SimSun" panose="02010600030101010101" pitchFamily="2" charset="-122"/>
+                <a:cs typeface="Times New Roman" panose="02020603050405020304" pitchFamily="18" charset="0"/>
+              </a:rPr>
+              <a:t>2. </a:t>
+            </a:r>
+            <a:r>
+              <a:rPr lang="en-US" altLang="zh-CN" sz="2400" b="1" dirty="0">
+                <a:latin typeface="Times New Roman" panose="02020603050405020304" pitchFamily="18" charset="0"/>
+                <a:ea typeface="SimSun" panose="02010600030101010101" pitchFamily="2" charset="-122"/>
+                <a:cs typeface="Times New Roman" panose="02020603050405020304" pitchFamily="18" charset="0"/>
+              </a:rPr>
+              <a:t>RLVR</a:t>
+            </a:r>
+            <a:r>
+              <a:rPr lang="zh-CN" altLang="en-US" sz="2400" b="1" dirty="0">
+                <a:latin typeface="Times New Roman" panose="02020603050405020304" pitchFamily="18" charset="0"/>
+                <a:ea typeface="SimSun" panose="02010600030101010101" pitchFamily="2" charset="-122"/>
+                <a:cs typeface="Times New Roman" panose="02020603050405020304" pitchFamily="18" charset="0"/>
+              </a:rPr>
+              <a:t>在</a:t>
+            </a:r>
+            <a:r>
+              <a:rPr lang="de-DE" altLang="zh-CN" sz="2400" b="1" dirty="0">
+                <a:latin typeface="Times New Roman" panose="02020603050405020304" pitchFamily="18" charset="0"/>
+                <a:ea typeface="SimSun" panose="02010600030101010101" pitchFamily="2" charset="-122"/>
+                <a:cs typeface="Times New Roman" panose="02020603050405020304" pitchFamily="18" charset="0"/>
+              </a:rPr>
+              <a:t>Multimodal Reasoning</a:t>
+            </a:r>
+            <a:r>
+              <a:rPr lang="zh-CN" altLang="en-US" sz="2400" b="1" dirty="0">
+                <a:latin typeface="Times New Roman" panose="02020603050405020304" pitchFamily="18" charset="0"/>
+                <a:ea typeface="SimSun" panose="02010600030101010101" pitchFamily="2" charset="-122"/>
+                <a:cs typeface="Times New Roman" panose="02020603050405020304" pitchFamily="18" charset="0"/>
+              </a:rPr>
+              <a:t>中：</a:t>
+            </a:r>
+            <a:endParaRPr lang="en-US" altLang="zh-CN" sz="2400" b="1" dirty="0">
+              <a:latin typeface="Times New Roman" panose="02020603050405020304" pitchFamily="18" charset="0"/>
+              <a:ea typeface="SimSun" panose="02010600030101010101" pitchFamily="2" charset="-122"/>
+              <a:cs typeface="Times New Roman" panose="02020603050405020304" pitchFamily="18" charset="0"/>
+            </a:endParaRPr>
+          </a:p>
+          <a:p>
+            <a:r>
+              <a:rPr lang="en-US" altLang="zh-CN" sz="2400" dirty="0">
+                <a:latin typeface="Times New Roman" panose="02020603050405020304" pitchFamily="18" charset="0"/>
+                <a:ea typeface="SimSun" panose="02010600030101010101" pitchFamily="2" charset="-122"/>
+                <a:cs typeface="Times New Roman" panose="02020603050405020304" pitchFamily="18" charset="0"/>
+              </a:rPr>
+              <a:t>(1).</a:t>
+            </a:r>
+            <a:r>
+              <a:rPr lang="zh-CN" altLang="en-US" sz="2400" dirty="0">
+                <a:latin typeface="Times New Roman" panose="02020603050405020304" pitchFamily="18" charset="0"/>
+                <a:ea typeface="SimSun" panose="02010600030101010101" pitchFamily="2" charset="-122"/>
+                <a:cs typeface="Times New Roman" panose="02020603050405020304" pitchFamily="18" charset="0"/>
+              </a:rPr>
+              <a:t>在推理过程仍主要局限于文本形式 。在深度整合多模态信息与外部工具的方法方面，仍存在大量探索空间。</a:t>
+            </a:r>
+            <a:endParaRPr lang="en-US" altLang="zh-CN" sz="2400" dirty="0">
+              <a:latin typeface="Times New Roman" panose="02020603050405020304" pitchFamily="18" charset="0"/>
+              <a:ea typeface="SimSun" panose="02010600030101010101" pitchFamily="2" charset="-122"/>
+              <a:cs typeface="Times New Roman" panose="02020603050405020304" pitchFamily="18" charset="0"/>
+            </a:endParaRPr>
+          </a:p>
+          <a:p>
+            <a:r>
+              <a:rPr lang="en-US" altLang="zh-CN" sz="2400" dirty="0">
+                <a:latin typeface="Times New Roman" panose="02020603050405020304" pitchFamily="18" charset="0"/>
+                <a:ea typeface="SimSun" panose="02010600030101010101" pitchFamily="2" charset="-122"/>
+                <a:cs typeface="Times New Roman" panose="02020603050405020304" pitchFamily="18" charset="0"/>
+              </a:rPr>
+              <a:t>(</a:t>
+            </a:r>
+            <a:r>
+              <a:rPr lang="zh-CN" altLang="en-US" sz="2400" dirty="0">
+                <a:solidFill>
+                  <a:srgbClr val="C00000"/>
+                </a:solidFill>
+                <a:latin typeface="Times New Roman" panose="02020603050405020304" pitchFamily="18" charset="0"/>
+                <a:ea typeface="SimSun" panose="02010600030101010101" pitchFamily="2" charset="-122"/>
+                <a:cs typeface="Times New Roman" panose="02020603050405020304" pitchFamily="18" charset="0"/>
+              </a:rPr>
+              <a:t>注：</a:t>
+            </a:r>
+            <a:r>
+              <a:rPr lang="zh-CN" altLang="en-US" sz="2400" dirty="0">
+                <a:latin typeface="Times New Roman" panose="02020603050405020304" pitchFamily="18" charset="0"/>
+                <a:ea typeface="SimSun" panose="02010600030101010101" pitchFamily="2" charset="-122"/>
+                <a:cs typeface="Times New Roman" panose="02020603050405020304" pitchFamily="18" charset="0"/>
+              </a:rPr>
+              <a:t>这篇综述中没有具体说不足点，后续关注这个方向话再具体阅读相关论文</a:t>
+            </a:r>
+            <a:r>
+              <a:rPr lang="en-US" altLang="zh-CN" sz="2400" dirty="0">
+                <a:latin typeface="Times New Roman" panose="02020603050405020304" pitchFamily="18" charset="0"/>
+                <a:ea typeface="SimSun" panose="02010600030101010101" pitchFamily="2" charset="-122"/>
+                <a:cs typeface="Times New Roman" panose="02020603050405020304" pitchFamily="18" charset="0"/>
+              </a:rPr>
+              <a:t>)</a:t>
+            </a:r>
+          </a:p>
+          <a:p>
+            <a:endParaRPr lang="en-US" altLang="zh-CN" sz="2400" dirty="0">
+              <a:latin typeface="Times New Roman" panose="02020603050405020304" pitchFamily="18" charset="0"/>
+              <a:ea typeface="SimSun" panose="02010600030101010101" pitchFamily="2" charset="-122"/>
+              <a:cs typeface="Times New Roman" panose="02020603050405020304" pitchFamily="18" charset="0"/>
+            </a:endParaRPr>
+          </a:p>
+          <a:p>
+            <a:r>
+              <a:rPr lang="en-US" altLang="zh-CN" sz="2400" dirty="0">
+                <a:latin typeface="Times New Roman" panose="02020603050405020304" pitchFamily="18" charset="0"/>
+                <a:ea typeface="SimSun" panose="02010600030101010101" pitchFamily="2" charset="-122"/>
+                <a:cs typeface="Times New Roman" panose="02020603050405020304" pitchFamily="18" charset="0"/>
+              </a:rPr>
+              <a:t>3. </a:t>
+            </a:r>
+            <a:r>
+              <a:rPr lang="en-US" altLang="zh-CN" sz="2400" b="1" dirty="0">
+                <a:latin typeface="Times New Roman" panose="02020603050405020304" pitchFamily="18" charset="0"/>
+                <a:ea typeface="SimSun" panose="02010600030101010101" pitchFamily="2" charset="-122"/>
+                <a:cs typeface="Times New Roman" panose="02020603050405020304" pitchFamily="18" charset="0"/>
+              </a:rPr>
+              <a:t>RLVR</a:t>
+            </a:r>
+            <a:r>
+              <a:rPr lang="zh-CN" altLang="en-US" sz="2400" b="1" dirty="0">
+                <a:latin typeface="Times New Roman" panose="02020603050405020304" pitchFamily="18" charset="0"/>
+                <a:ea typeface="SimSun" panose="02010600030101010101" pitchFamily="2" charset="-122"/>
+                <a:cs typeface="Times New Roman" panose="02020603050405020304" pitchFamily="18" charset="0"/>
+              </a:rPr>
+              <a:t>在</a:t>
+            </a:r>
+            <a:r>
+              <a:rPr lang="en-US" altLang="zh-CN" sz="2400" b="1" dirty="0">
+                <a:latin typeface="Times New Roman" panose="02020603050405020304" pitchFamily="18" charset="0"/>
+                <a:ea typeface="SimSun" panose="02010600030101010101" pitchFamily="2" charset="-122"/>
+                <a:cs typeface="Times New Roman" panose="02020603050405020304" pitchFamily="18" charset="0"/>
+              </a:rPr>
+              <a:t>Agent</a:t>
+            </a:r>
+            <a:r>
+              <a:rPr lang="zh-CN" altLang="en-US" sz="2400" b="1" dirty="0">
+                <a:latin typeface="Times New Roman" panose="02020603050405020304" pitchFamily="18" charset="0"/>
+                <a:ea typeface="SimSun" panose="02010600030101010101" pitchFamily="2" charset="-122"/>
+                <a:cs typeface="Times New Roman" panose="02020603050405020304" pitchFamily="18" charset="0"/>
+              </a:rPr>
+              <a:t>中：</a:t>
+            </a:r>
+            <a:endParaRPr lang="en-US" altLang="zh-CN" sz="2400" b="1" dirty="0">
+              <a:latin typeface="Times New Roman" panose="02020603050405020304" pitchFamily="18" charset="0"/>
+              <a:ea typeface="SimSun" panose="02010600030101010101" pitchFamily="2" charset="-122"/>
+              <a:cs typeface="Times New Roman" panose="02020603050405020304" pitchFamily="18" charset="0"/>
+            </a:endParaRPr>
+          </a:p>
+          <a:p>
+            <a:r>
+              <a:rPr lang="en-US" altLang="zh-CN" sz="2400" dirty="0">
+                <a:latin typeface="Times New Roman" panose="02020603050405020304" pitchFamily="18" charset="0"/>
+                <a:ea typeface="SimSun" panose="02010600030101010101" pitchFamily="2" charset="-122"/>
+                <a:cs typeface="Times New Roman" panose="02020603050405020304" pitchFamily="18" charset="0"/>
+              </a:rPr>
+              <a:t>(1).</a:t>
+            </a:r>
+            <a:r>
+              <a:rPr lang="zh-CN" altLang="en-US" sz="2400" dirty="0">
+                <a:latin typeface="Times New Roman" panose="02020603050405020304" pitchFamily="18" charset="0"/>
+                <a:ea typeface="SimSun" panose="02010600030101010101" pitchFamily="2" charset="-122"/>
+                <a:cs typeface="Times New Roman" panose="02020603050405020304" pitchFamily="18" charset="0"/>
+              </a:rPr>
+              <a:t>上面我们学习的大模型，其使用</a:t>
+            </a:r>
+            <a:r>
+              <a:rPr lang="en-US" altLang="zh-CN" sz="2400" dirty="0">
+                <a:latin typeface="Times New Roman" panose="02020603050405020304" pitchFamily="18" charset="0"/>
+                <a:ea typeface="SimSun" panose="02010600030101010101" pitchFamily="2" charset="-122"/>
+                <a:cs typeface="Times New Roman" panose="02020603050405020304" pitchFamily="18" charset="0"/>
+              </a:rPr>
+              <a:t>RL</a:t>
+            </a:r>
+            <a:r>
+              <a:rPr lang="zh-CN" altLang="en-US" sz="2400" dirty="0">
+                <a:latin typeface="Times New Roman" panose="02020603050405020304" pitchFamily="18" charset="0"/>
+                <a:ea typeface="SimSun" panose="02010600030101010101" pitchFamily="2" charset="-122"/>
+                <a:cs typeface="Times New Roman" panose="02020603050405020304" pitchFamily="18" charset="0"/>
+              </a:rPr>
+              <a:t>通常是单轮交互，但是对于</a:t>
+            </a:r>
+            <a:r>
+              <a:rPr lang="en-US" altLang="zh-CN" sz="2400" dirty="0">
+                <a:latin typeface="Times New Roman" panose="02020603050405020304" pitchFamily="18" charset="0"/>
+                <a:ea typeface="SimSun" panose="02010600030101010101" pitchFamily="2" charset="-122"/>
+                <a:cs typeface="Times New Roman" panose="02020603050405020304" pitchFamily="18" charset="0"/>
+              </a:rPr>
+              <a:t>agent</a:t>
+            </a:r>
+            <a:r>
+              <a:rPr lang="zh-CN" altLang="en-US" sz="2400" dirty="0">
+                <a:latin typeface="Times New Roman" panose="02020603050405020304" pitchFamily="18" charset="0"/>
+                <a:ea typeface="SimSun" panose="02010600030101010101" pitchFamily="2" charset="-122"/>
+                <a:cs typeface="Times New Roman" panose="02020603050405020304" pitchFamily="18" charset="0"/>
+              </a:rPr>
+              <a:t>来说，其不是单一的决策，而是多步决策连在一起，同时还需要考虑与环境的实时交互。</a:t>
+            </a:r>
+            <a:endParaRPr lang="en-US" altLang="zh-CN" sz="2400" dirty="0">
+              <a:latin typeface="Times New Roman" panose="02020603050405020304" pitchFamily="18" charset="0"/>
+              <a:ea typeface="SimSun" panose="02010600030101010101" pitchFamily="2" charset="-122"/>
+              <a:cs typeface="Times New Roman" panose="02020603050405020304" pitchFamily="18" charset="0"/>
+            </a:endParaRPr>
+          </a:p>
+          <a:p>
+            <a:r>
+              <a:rPr lang="en-US" altLang="zh-CN" sz="2400" dirty="0">
+                <a:latin typeface="Times New Roman" panose="02020603050405020304" pitchFamily="18" charset="0"/>
+                <a:ea typeface="SimSun" panose="02010600030101010101" pitchFamily="2" charset="-122"/>
+                <a:cs typeface="Times New Roman" panose="02020603050405020304" pitchFamily="18" charset="0"/>
+              </a:rPr>
+              <a:t>(2).</a:t>
+            </a:r>
+            <a:r>
+              <a:rPr lang="zh-CN" altLang="en-US" sz="2400" dirty="0">
+                <a:latin typeface="Times New Roman" panose="02020603050405020304" pitchFamily="18" charset="0"/>
+                <a:ea typeface="SimSun" panose="02010600030101010101" pitchFamily="2" charset="-122"/>
+                <a:cs typeface="Times New Roman" panose="02020603050405020304" pitchFamily="18" charset="0"/>
+              </a:rPr>
+              <a:t> </a:t>
+            </a:r>
+            <a:r>
+              <a:rPr lang="en-US" altLang="zh-CN" sz="2400" dirty="0">
+                <a:latin typeface="Times New Roman" panose="02020603050405020304" pitchFamily="18" charset="0"/>
+                <a:ea typeface="SimSun" panose="02010600030101010101" pitchFamily="2" charset="-122"/>
+                <a:cs typeface="Times New Roman" panose="02020603050405020304" pitchFamily="18" charset="0"/>
+              </a:rPr>
+              <a:t>Delayed Reward </a:t>
+            </a:r>
+            <a:r>
+              <a:rPr lang="zh-CN" altLang="en-US" sz="2400" dirty="0">
+                <a:latin typeface="Times New Roman" panose="02020603050405020304" pitchFamily="18" charset="0"/>
+                <a:ea typeface="SimSun" panose="02010600030101010101" pitchFamily="2" charset="-122"/>
+                <a:cs typeface="Times New Roman" panose="02020603050405020304" pitchFamily="18" charset="0"/>
+              </a:rPr>
+              <a:t>在</a:t>
+            </a:r>
+            <a:r>
+              <a:rPr lang="en-US" altLang="zh-CN" sz="2400" dirty="0">
+                <a:latin typeface="Times New Roman" panose="02020603050405020304" pitchFamily="18" charset="0"/>
+                <a:ea typeface="SimSun" panose="02010600030101010101" pitchFamily="2" charset="-122"/>
+                <a:cs typeface="Times New Roman" panose="02020603050405020304" pitchFamily="18" charset="0"/>
+              </a:rPr>
+              <a:t>long-horizon decision</a:t>
+            </a:r>
+            <a:r>
+              <a:rPr lang="zh-CN" altLang="en-US" sz="2400" dirty="0">
+                <a:latin typeface="Times New Roman" panose="02020603050405020304" pitchFamily="18" charset="0"/>
+                <a:ea typeface="SimSun" panose="02010600030101010101" pitchFamily="2" charset="-122"/>
+                <a:cs typeface="Times New Roman" panose="02020603050405020304" pitchFamily="18" charset="0"/>
+              </a:rPr>
+              <a:t>中只对最后的结果判断，但这就造成了，不知道内部到底哪个</a:t>
+            </a:r>
+            <a:r>
+              <a:rPr lang="en-US" altLang="zh-CN" sz="2400" dirty="0">
+                <a:latin typeface="Times New Roman" panose="02020603050405020304" pitchFamily="18" charset="0"/>
+                <a:ea typeface="SimSun" panose="02010600030101010101" pitchFamily="2" charset="-122"/>
+                <a:cs typeface="Times New Roman" panose="02020603050405020304" pitchFamily="18" charset="0"/>
+              </a:rPr>
+              <a:t>policy</a:t>
+            </a:r>
+            <a:r>
+              <a:rPr lang="zh-CN" altLang="en-US" sz="2400" dirty="0">
+                <a:latin typeface="Times New Roman" panose="02020603050405020304" pitchFamily="18" charset="0"/>
+                <a:ea typeface="SimSun" panose="02010600030101010101" pitchFamily="2" charset="-122"/>
+                <a:cs typeface="Times New Roman" panose="02020603050405020304" pitchFamily="18" charset="0"/>
+              </a:rPr>
+              <a:t>出了问题。</a:t>
+            </a:r>
+            <a:endParaRPr lang="en-US" altLang="zh-CN" sz="2400" dirty="0">
+              <a:latin typeface="Times New Roman" panose="02020603050405020304" pitchFamily="18" charset="0"/>
+              <a:ea typeface="SimSun" panose="02010600030101010101" pitchFamily="2" charset="-122"/>
+              <a:cs typeface="Times New Roman" panose="02020603050405020304" pitchFamily="18" charset="0"/>
+            </a:endParaRPr>
+          </a:p>
+          <a:p>
+            <a:r>
+              <a:rPr lang="en-US" altLang="zh-CN" sz="2400" dirty="0">
+                <a:latin typeface="Times New Roman" panose="02020603050405020304" pitchFamily="18" charset="0"/>
+                <a:ea typeface="SimSun" panose="02010600030101010101" pitchFamily="2" charset="-122"/>
+                <a:cs typeface="Times New Roman" panose="02020603050405020304" pitchFamily="18" charset="0"/>
+              </a:rPr>
+              <a:t>(</a:t>
+            </a:r>
+            <a:r>
+              <a:rPr lang="zh-CN" altLang="en-US" sz="2400" dirty="0">
+                <a:solidFill>
+                  <a:srgbClr val="C00000"/>
+                </a:solidFill>
+                <a:latin typeface="Times New Roman" panose="02020603050405020304" pitchFamily="18" charset="0"/>
+                <a:ea typeface="SimSun" panose="02010600030101010101" pitchFamily="2" charset="-122"/>
+                <a:cs typeface="Times New Roman" panose="02020603050405020304" pitchFamily="18" charset="0"/>
+              </a:rPr>
+              <a:t>个人感想</a:t>
+            </a:r>
+            <a:r>
+              <a:rPr lang="en-US" altLang="zh-CN" sz="2400" dirty="0">
+                <a:solidFill>
+                  <a:srgbClr val="C00000"/>
+                </a:solidFill>
+                <a:latin typeface="Times New Roman" panose="02020603050405020304" pitchFamily="18" charset="0"/>
+                <a:ea typeface="SimSun" panose="02010600030101010101" pitchFamily="2" charset="-122"/>
+                <a:cs typeface="Times New Roman" panose="02020603050405020304" pitchFamily="18" charset="0"/>
+              </a:rPr>
+              <a:t>: </a:t>
+            </a:r>
+            <a:r>
+              <a:rPr lang="en-US" altLang="zh-CN" sz="2400" dirty="0">
+                <a:latin typeface="Times New Roman" panose="02020603050405020304" pitchFamily="18" charset="0"/>
+                <a:ea typeface="SimSun" panose="02010600030101010101" pitchFamily="2" charset="-122"/>
+                <a:cs typeface="Times New Roman" panose="02020603050405020304" pitchFamily="18" charset="0"/>
+              </a:rPr>
+              <a:t>RL</a:t>
+            </a:r>
+            <a:r>
+              <a:rPr lang="zh-CN" altLang="en-US" sz="2400" dirty="0">
+                <a:latin typeface="Times New Roman" panose="02020603050405020304" pitchFamily="18" charset="0"/>
+                <a:ea typeface="SimSun" panose="02010600030101010101" pitchFamily="2" charset="-122"/>
+                <a:cs typeface="Times New Roman" panose="02020603050405020304" pitchFamily="18" charset="0"/>
+              </a:rPr>
+              <a:t>在</a:t>
+            </a:r>
+            <a:r>
+              <a:rPr lang="en-US" altLang="zh-CN" sz="2400" dirty="0">
+                <a:latin typeface="Times New Roman" panose="02020603050405020304" pitchFamily="18" charset="0"/>
+                <a:ea typeface="SimSun" panose="02010600030101010101" pitchFamily="2" charset="-122"/>
+                <a:cs typeface="Times New Roman" panose="02020603050405020304" pitchFamily="18" charset="0"/>
+              </a:rPr>
+              <a:t>Agent</a:t>
+            </a:r>
+            <a:r>
+              <a:rPr lang="zh-CN" altLang="en-US" sz="2400" dirty="0">
+                <a:latin typeface="Times New Roman" panose="02020603050405020304" pitchFamily="18" charset="0"/>
+                <a:ea typeface="SimSun" panose="02010600030101010101" pitchFamily="2" charset="-122"/>
+                <a:cs typeface="Times New Roman" panose="02020603050405020304" pitchFamily="18" charset="0"/>
+              </a:rPr>
+              <a:t>方向因该很具有前景</a:t>
+            </a:r>
+            <a:r>
+              <a:rPr lang="en-US" altLang="zh-CN" sz="2400" dirty="0">
+                <a:latin typeface="Times New Roman" panose="02020603050405020304" pitchFamily="18" charset="0"/>
+                <a:ea typeface="SimSun" panose="02010600030101010101" pitchFamily="2" charset="-122"/>
+                <a:cs typeface="Times New Roman" panose="02020603050405020304" pitchFamily="18" charset="0"/>
+              </a:rPr>
+              <a:t>, </a:t>
+            </a:r>
+            <a:r>
+              <a:rPr lang="zh-CN" altLang="en-US" sz="2400" dirty="0">
+                <a:latin typeface="Times New Roman" panose="02020603050405020304" pitchFamily="18" charset="0"/>
+                <a:ea typeface="SimSun" panose="02010600030101010101" pitchFamily="2" charset="-122"/>
+                <a:cs typeface="Times New Roman" panose="02020603050405020304" pitchFamily="18" charset="0"/>
+              </a:rPr>
+              <a:t>感觉大模型像脑子一样，只有脑子肯定不行</a:t>
+            </a:r>
+            <a:r>
+              <a:rPr lang="en-US" altLang="zh-CN" sz="2400" dirty="0">
+                <a:latin typeface="Times New Roman" panose="02020603050405020304" pitchFamily="18" charset="0"/>
+                <a:ea typeface="SimSun" panose="02010600030101010101" pitchFamily="2" charset="-122"/>
+                <a:cs typeface="Times New Roman" panose="02020603050405020304" pitchFamily="18" charset="0"/>
+              </a:rPr>
+              <a:t>(</a:t>
+            </a:r>
+            <a:r>
+              <a:rPr lang="zh-CN" altLang="en-US" sz="2400" dirty="0">
+                <a:latin typeface="Times New Roman" panose="02020603050405020304" pitchFamily="18" charset="0"/>
+                <a:ea typeface="SimSun" panose="02010600030101010101" pitchFamily="2" charset="-122"/>
+                <a:cs typeface="Times New Roman" panose="02020603050405020304" pitchFamily="18" charset="0"/>
+              </a:rPr>
+              <a:t>但大脑很重要</a:t>
+            </a:r>
+            <a:r>
+              <a:rPr lang="en-US" altLang="zh-CN" sz="2400" dirty="0">
+                <a:latin typeface="Times New Roman" panose="02020603050405020304" pitchFamily="18" charset="0"/>
+                <a:ea typeface="SimSun" panose="02010600030101010101" pitchFamily="2" charset="-122"/>
+                <a:cs typeface="Times New Roman" panose="02020603050405020304" pitchFamily="18" charset="0"/>
+              </a:rPr>
+              <a:t>)</a:t>
+            </a:r>
+            <a:r>
+              <a:rPr lang="zh-CN" altLang="en-US" sz="2400" dirty="0">
+                <a:latin typeface="Times New Roman" panose="02020603050405020304" pitchFamily="18" charset="0"/>
+                <a:ea typeface="SimSun" panose="02010600030101010101" pitchFamily="2" charset="-122"/>
+                <a:cs typeface="Times New Roman" panose="02020603050405020304" pitchFamily="18" charset="0"/>
+              </a:rPr>
+              <a:t>，具有在实际场景中运用的</a:t>
+            </a:r>
+            <a:r>
+              <a:rPr lang="en-US" altLang="zh-CN" sz="2400" dirty="0">
+                <a:latin typeface="Times New Roman" panose="02020603050405020304" pitchFamily="18" charset="0"/>
+                <a:ea typeface="SimSun" panose="02010600030101010101" pitchFamily="2" charset="-122"/>
+                <a:cs typeface="Times New Roman" panose="02020603050405020304" pitchFamily="18" charset="0"/>
+              </a:rPr>
+              <a:t>agent</a:t>
+            </a:r>
+            <a:r>
+              <a:rPr lang="zh-CN" altLang="en-US" sz="2400" dirty="0">
+                <a:latin typeface="Times New Roman" panose="02020603050405020304" pitchFamily="18" charset="0"/>
+                <a:ea typeface="SimSun" panose="02010600030101010101" pitchFamily="2" charset="-122"/>
+                <a:cs typeface="Times New Roman" panose="02020603050405020304" pitchFamily="18" charset="0"/>
+              </a:rPr>
+              <a:t> </a:t>
+            </a:r>
+            <a:r>
+              <a:rPr lang="en-US" altLang="zh-CN" sz="2400" dirty="0">
+                <a:latin typeface="Times New Roman" panose="02020603050405020304" pitchFamily="18" charset="0"/>
+                <a:ea typeface="SimSun" panose="02010600030101010101" pitchFamily="2" charset="-122"/>
+                <a:cs typeface="Times New Roman" panose="02020603050405020304" pitchFamily="18" charset="0"/>
+              </a:rPr>
+              <a:t>(</a:t>
+            </a:r>
+            <a:r>
+              <a:rPr lang="zh-CN" altLang="en-US" sz="2400" dirty="0">
+                <a:latin typeface="Times New Roman" panose="02020603050405020304" pitchFamily="18" charset="0"/>
+                <a:ea typeface="SimSun" panose="02010600030101010101" pitchFamily="2" charset="-122"/>
+                <a:cs typeface="Times New Roman" panose="02020603050405020304" pitchFamily="18" charset="0"/>
+              </a:rPr>
+              <a:t>就如</a:t>
+            </a:r>
+            <a:r>
+              <a:rPr lang="en-US" altLang="zh-CN" sz="2400" dirty="0">
+                <a:latin typeface="Times New Roman" panose="02020603050405020304" pitchFamily="18" charset="0"/>
+                <a:ea typeface="SimSun" panose="02010600030101010101" pitchFamily="2" charset="-122"/>
+                <a:cs typeface="Times New Roman" panose="02020603050405020304" pitchFamily="18" charset="0"/>
+              </a:rPr>
+              <a:t>codex</a:t>
+            </a:r>
+            <a:r>
+              <a:rPr lang="zh-CN" altLang="en-US" sz="2400" dirty="0">
+                <a:latin typeface="Times New Roman" panose="02020603050405020304" pitchFamily="18" charset="0"/>
+                <a:ea typeface="SimSun" panose="02010600030101010101" pitchFamily="2" charset="-122"/>
+                <a:cs typeface="Times New Roman" panose="02020603050405020304" pitchFamily="18" charset="0"/>
+              </a:rPr>
+              <a:t>一样</a:t>
+            </a:r>
+            <a:r>
+              <a:rPr lang="en-US" altLang="zh-CN" sz="2400" dirty="0">
+                <a:latin typeface="Times New Roman" panose="02020603050405020304" pitchFamily="18" charset="0"/>
+                <a:ea typeface="SimSun" panose="02010600030101010101" pitchFamily="2" charset="-122"/>
+                <a:cs typeface="Times New Roman" panose="02020603050405020304" pitchFamily="18" charset="0"/>
+              </a:rPr>
+              <a:t>)</a:t>
+            </a:r>
+            <a:r>
+              <a:rPr lang="zh-CN" altLang="en-US" sz="2400" dirty="0">
+                <a:latin typeface="Times New Roman" panose="02020603050405020304" pitchFamily="18" charset="0"/>
+                <a:ea typeface="SimSun" panose="02010600030101010101" pitchFamily="2" charset="-122"/>
+                <a:cs typeface="Times New Roman" panose="02020603050405020304" pitchFamily="18" charset="0"/>
+              </a:rPr>
+              <a:t>，才会更好的服务市场</a:t>
+            </a:r>
+            <a:r>
+              <a:rPr lang="en-US" altLang="zh-CN" sz="2400" dirty="0">
+                <a:latin typeface="Times New Roman" panose="02020603050405020304" pitchFamily="18" charset="0"/>
+                <a:ea typeface="SimSun" panose="02010600030101010101" pitchFamily="2" charset="-122"/>
+                <a:cs typeface="Times New Roman" panose="02020603050405020304" pitchFamily="18" charset="0"/>
+              </a:rPr>
+              <a:t>)</a:t>
+            </a:r>
+          </a:p>
+          <a:p>
+            <a:endParaRPr lang="en-US" altLang="zh-CN" sz="2400" dirty="0">
+              <a:latin typeface="Times New Roman" panose="02020603050405020304" pitchFamily="18" charset="0"/>
+              <a:ea typeface="SimSun" panose="02010600030101010101" pitchFamily="2" charset="-122"/>
+              <a:cs typeface="Times New Roman" panose="02020603050405020304" pitchFamily="18" charset="0"/>
+            </a:endParaRPr>
+          </a:p>
+        </p:txBody>
+      </p:sp>
+    </p:spTree>
+    <p:extLst>
+      <p:ext uri="{BB962C8B-B14F-4D97-AF65-F5344CB8AC3E}">
+        <p14:creationId xmlns:p14="http://schemas.microsoft.com/office/powerpoint/2010/main" val="3247850408"/>
+      </p:ext>
+    </p:extLst>
+  </p:cSld>
+  <p:clrMapOvr>
+    <a:masterClrMapping/>
+  </p:clrMapOvr>
+</p:sld>
+</file>
+
+<file path=ppt/slides/slide6.xml><?xml version="1.0" encoding="utf-8"?>
+<p:sld xmlns:a="http://schemas.openxmlformats.org/drawingml/2006/main" xmlns:r="http://schemas.openxmlformats.org/officeDocument/2006/relationships" xmlns:p="http://schemas.openxmlformats.org/presentationml/2006/main">
+  <p:cSld>
+    <p:spTree>
+      <p:nvGrpSpPr>
+        <p:cNvPr id="1" name="">
+          <a:extLst>
+            <a:ext uri="{FF2B5EF4-FFF2-40B4-BE49-F238E27FC236}">
+              <a16:creationId xmlns:a16="http://schemas.microsoft.com/office/drawing/2014/main" id="{76A5827E-0CC9-F1F7-1EC1-E2B5D8862733}"/>
+            </a:ext>
+          </a:extLst>
+        </p:cNvPr>
+        <p:cNvGrpSpPr/>
+        <p:nvPr/>
+      </p:nvGrpSpPr>
+      <p:grpSpPr>
+        <a:xfrm>
+          <a:off x="0" y="0"/>
+          <a:ext cx="0" cy="0"/>
+          <a:chOff x="0" y="0"/>
+          <a:chExt cx="0" cy="0"/>
+        </a:xfrm>
+      </p:grpSpPr>
+      <p:sp>
+        <p:nvSpPr>
+          <p:cNvPr id="5" name="矩形 4">
+            <a:extLst>
+              <a:ext uri="{FF2B5EF4-FFF2-40B4-BE49-F238E27FC236}">
+                <a16:creationId xmlns:a16="http://schemas.microsoft.com/office/drawing/2014/main" id="{B1138996-DA2C-212B-37EF-4632192AC29E}"/>
+              </a:ext>
+            </a:extLst>
+          </p:cNvPr>
+          <p:cNvSpPr/>
+          <p:nvPr/>
+        </p:nvSpPr>
+        <p:spPr>
+          <a:xfrm>
+            <a:off x="6367" y="0"/>
+            <a:ext cx="12172749" cy="651933"/>
+          </a:xfrm>
+          <a:prstGeom prst="rect">
+            <a:avLst/>
+          </a:prstGeom>
+          <a:solidFill>
+            <a:schemeClr val="bg1"/>
+          </a:solidFill>
+          <a:ln>
+            <a:solidFill>
+              <a:schemeClr val="bg1"/>
+            </a:solidFill>
+          </a:ln>
+        </p:spPr>
+        <p:style>
+          <a:lnRef idx="2">
+            <a:schemeClr val="accent1">
+              <a:shade val="15000"/>
+            </a:schemeClr>
+          </a:lnRef>
+          <a:fillRef idx="1">
+            <a:schemeClr val="accent1"/>
+          </a:fillRef>
+          <a:effectRef idx="0">
+            <a:schemeClr val="accent1"/>
+          </a:effectRef>
+          <a:fontRef idx="minor">
+            <a:schemeClr val="lt1"/>
+          </a:fontRef>
+        </p:style>
+        <p:txBody>
+          <a:bodyPr rtlCol="0" anchor="ctr"/>
+          <a:lstStyle/>
+          <a:p>
+            <a:r>
+              <a:rPr lang="zh-CN" altLang="en-US" sz="3200" b="1" dirty="0">
+                <a:solidFill>
+                  <a:schemeClr val="tx1"/>
+                </a:solidFill>
+                <a:latin typeface="Times New Roman" panose="02020603050405020304" pitchFamily="18" charset="0"/>
+                <a:ea typeface="SimSun" panose="02010600030101010101" pitchFamily="2" charset="-122"/>
+                <a:cs typeface="Times New Roman" panose="02020603050405020304" pitchFamily="18" charset="0"/>
+              </a:rPr>
+              <a:t>相关问题</a:t>
+            </a:r>
+            <a:r>
+              <a:rPr lang="en-US" altLang="zh-CN" sz="3200" b="1" dirty="0">
+                <a:solidFill>
+                  <a:schemeClr val="tx1"/>
+                </a:solidFill>
+                <a:latin typeface="Times New Roman" panose="02020603050405020304" pitchFamily="18" charset="0"/>
+                <a:ea typeface="SimSun" panose="02010600030101010101" pitchFamily="2" charset="-122"/>
+                <a:cs typeface="Times New Roman" panose="02020603050405020304" pitchFamily="18" charset="0"/>
+              </a:rPr>
+              <a:t>(</a:t>
+            </a:r>
+            <a:r>
+              <a:rPr lang="zh-CN" altLang="en-US" sz="3200" b="1" dirty="0">
+                <a:solidFill>
+                  <a:schemeClr val="tx1"/>
+                </a:solidFill>
+                <a:latin typeface="Times New Roman" panose="02020603050405020304" pitchFamily="18" charset="0"/>
+                <a:ea typeface="SimSun" panose="02010600030101010101" pitchFamily="2" charset="-122"/>
+                <a:cs typeface="Times New Roman" panose="02020603050405020304" pitchFamily="18" charset="0"/>
+              </a:rPr>
+              <a:t>或者说可能的方向</a:t>
+            </a:r>
+            <a:r>
+              <a:rPr lang="en-US" altLang="zh-CN" sz="3200" b="1" dirty="0">
+                <a:solidFill>
+                  <a:schemeClr val="tx1"/>
+                </a:solidFill>
+                <a:latin typeface="Times New Roman" panose="02020603050405020304" pitchFamily="18" charset="0"/>
+                <a:ea typeface="SimSun" panose="02010600030101010101" pitchFamily="2" charset="-122"/>
+                <a:cs typeface="Times New Roman" panose="02020603050405020304" pitchFamily="18" charset="0"/>
+              </a:rPr>
+              <a:t>)</a:t>
+            </a:r>
+          </a:p>
+        </p:txBody>
+      </p:sp>
+      <p:sp>
+        <p:nvSpPr>
+          <p:cNvPr id="7" name="文本框 6">
+            <a:extLst>
+              <a:ext uri="{FF2B5EF4-FFF2-40B4-BE49-F238E27FC236}">
+                <a16:creationId xmlns:a16="http://schemas.microsoft.com/office/drawing/2014/main" id="{7506CD8A-C3E1-5562-B26B-1FAF62C4AA9E}"/>
+              </a:ext>
+            </a:extLst>
+          </p:cNvPr>
+          <p:cNvSpPr txBox="1"/>
+          <p:nvPr/>
+        </p:nvSpPr>
+        <p:spPr>
+          <a:xfrm>
+            <a:off x="-12884" y="974321"/>
+            <a:ext cx="12192000" cy="4154984"/>
+          </a:xfrm>
+          <a:prstGeom prst="rect">
+            <a:avLst/>
+          </a:prstGeom>
+          <a:noFill/>
+        </p:spPr>
+        <p:txBody>
+          <a:bodyPr wrap="square" rtlCol="0">
+            <a:spAutoFit/>
+          </a:bodyPr>
+          <a:lstStyle/>
+          <a:p>
+            <a:r>
+              <a:rPr lang="en-US" altLang="zh-CN" sz="2400" dirty="0">
+                <a:latin typeface="Times New Roman" panose="02020603050405020304" pitchFamily="18" charset="0"/>
+                <a:ea typeface="SimSun" panose="02010600030101010101" pitchFamily="2" charset="-122"/>
+                <a:cs typeface="Times New Roman" panose="02020603050405020304" pitchFamily="18" charset="0"/>
+              </a:rPr>
+              <a:t>4. Internal Feedback RL</a:t>
+            </a:r>
+          </a:p>
+          <a:p>
+            <a:r>
+              <a:rPr lang="en-US" altLang="zh-CN" sz="2400" dirty="0">
+                <a:latin typeface="Times New Roman" panose="02020603050405020304" pitchFamily="18" charset="0"/>
+                <a:ea typeface="SimSun" panose="02010600030101010101" pitchFamily="2" charset="-122"/>
+                <a:cs typeface="Times New Roman" panose="02020603050405020304" pitchFamily="18" charset="0"/>
+              </a:rPr>
+              <a:t>(1). </a:t>
+            </a:r>
+            <a:r>
+              <a:rPr lang="de-DE" altLang="zh-CN" sz="2400" dirty="0">
+                <a:latin typeface="Times New Roman" panose="02020603050405020304" pitchFamily="18" charset="0"/>
+                <a:ea typeface="SimSun" panose="02010600030101010101" pitchFamily="2" charset="-122"/>
+                <a:cs typeface="Times New Roman" panose="02020603050405020304" pitchFamily="18" charset="0"/>
+              </a:rPr>
+              <a:t>RLHF</a:t>
+            </a:r>
+            <a:r>
+              <a:rPr lang="zh-CN" altLang="en-US" sz="2400" dirty="0">
+                <a:latin typeface="Times New Roman" panose="02020603050405020304" pitchFamily="18" charset="0"/>
+                <a:ea typeface="SimSun" panose="02010600030101010101" pitchFamily="2" charset="-122"/>
+                <a:cs typeface="Times New Roman" panose="02020603050405020304" pitchFamily="18" charset="0"/>
+              </a:rPr>
+              <a:t>与</a:t>
+            </a:r>
+            <a:r>
+              <a:rPr lang="de-DE" altLang="zh-CN" sz="2400" dirty="0">
+                <a:latin typeface="Times New Roman" panose="02020603050405020304" pitchFamily="18" charset="0"/>
+                <a:ea typeface="SimSun" panose="02010600030101010101" pitchFamily="2" charset="-122"/>
+                <a:cs typeface="Times New Roman" panose="02020603050405020304" pitchFamily="18" charset="0"/>
+              </a:rPr>
+              <a:t>RLVR</a:t>
+            </a:r>
+            <a:r>
+              <a:rPr lang="zh-CN" altLang="en-US" sz="2400" dirty="0">
+                <a:latin typeface="Times New Roman" panose="02020603050405020304" pitchFamily="18" charset="0"/>
+                <a:ea typeface="SimSun" panose="02010600030101010101" pitchFamily="2" charset="-122"/>
+                <a:cs typeface="Times New Roman" panose="02020603050405020304" pitchFamily="18" charset="0"/>
+              </a:rPr>
+              <a:t>都需要外部监督这很耗资源</a:t>
+            </a:r>
+            <a:endParaRPr lang="en-US" altLang="zh-CN" sz="2400" dirty="0">
+              <a:latin typeface="Times New Roman" panose="02020603050405020304" pitchFamily="18" charset="0"/>
+              <a:ea typeface="SimSun" panose="02010600030101010101" pitchFamily="2" charset="-122"/>
+              <a:cs typeface="Times New Roman" panose="02020603050405020304" pitchFamily="18" charset="0"/>
+            </a:endParaRPr>
+          </a:p>
+          <a:p>
+            <a:r>
+              <a:rPr lang="en-US" altLang="zh-CN" sz="2400" dirty="0">
+                <a:latin typeface="Times New Roman" panose="02020603050405020304" pitchFamily="18" charset="0"/>
+                <a:ea typeface="SimSun" panose="02010600030101010101" pitchFamily="2" charset="-122"/>
+                <a:cs typeface="Times New Roman" panose="02020603050405020304" pitchFamily="18" charset="0"/>
+              </a:rPr>
+              <a:t>(2). RLVR </a:t>
+            </a:r>
+            <a:r>
+              <a:rPr lang="zh-CN" altLang="en-US" sz="2400" dirty="0">
+                <a:latin typeface="Times New Roman" panose="02020603050405020304" pitchFamily="18" charset="0"/>
+                <a:ea typeface="SimSun" panose="02010600030101010101" pitchFamily="2" charset="-122"/>
+                <a:cs typeface="Times New Roman" panose="02020603050405020304" pitchFamily="18" charset="0"/>
+              </a:rPr>
+              <a:t>并不会激发真正新颖的推理模式；它只是提高了正确推理路径的采样效率</a:t>
+            </a:r>
+            <a:r>
+              <a:rPr lang="en-US" altLang="zh-CN" sz="2400" dirty="0">
+                <a:latin typeface="Times New Roman" panose="02020603050405020304" pitchFamily="18" charset="0"/>
+                <a:ea typeface="SimSun" panose="02010600030101010101" pitchFamily="2" charset="-122"/>
+                <a:cs typeface="Times New Roman" panose="02020603050405020304" pitchFamily="18" charset="0"/>
+              </a:rPr>
+              <a:t>.</a:t>
+            </a:r>
+          </a:p>
+          <a:p>
+            <a:r>
+              <a:rPr lang="en-US" altLang="zh-CN" sz="2400" dirty="0">
+                <a:latin typeface="Times New Roman" panose="02020603050405020304" pitchFamily="18" charset="0"/>
+                <a:ea typeface="SimSun" panose="02010600030101010101" pitchFamily="2" charset="-122"/>
+                <a:cs typeface="Times New Roman" panose="02020603050405020304" pitchFamily="18" charset="0"/>
+              </a:rPr>
+              <a:t>(</a:t>
+            </a:r>
+            <a:r>
+              <a:rPr lang="zh-CN" altLang="en-US" sz="2400" dirty="0">
+                <a:solidFill>
+                  <a:srgbClr val="C00000"/>
+                </a:solidFill>
+                <a:latin typeface="Times New Roman" panose="02020603050405020304" pitchFamily="18" charset="0"/>
+                <a:ea typeface="SimSun" panose="02010600030101010101" pitchFamily="2" charset="-122"/>
+                <a:cs typeface="Times New Roman" panose="02020603050405020304" pitchFamily="18" charset="0"/>
+              </a:rPr>
+              <a:t>注：受上面问题启发，设计无需外部的</a:t>
+            </a:r>
+            <a:r>
+              <a:rPr lang="de-DE" altLang="zh-CN" sz="2400" dirty="0">
+                <a:solidFill>
+                  <a:srgbClr val="C00000"/>
+                </a:solidFill>
+                <a:latin typeface="Times New Roman" panose="02020603050405020304" pitchFamily="18" charset="0"/>
+                <a:ea typeface="SimSun" panose="02010600030101010101" pitchFamily="2" charset="-122"/>
+                <a:cs typeface="Times New Roman" panose="02020603050405020304" pitchFamily="18" charset="0"/>
+              </a:rPr>
+              <a:t>verifier</a:t>
+            </a:r>
+            <a:r>
+              <a:rPr lang="zh-CN" altLang="en-US" sz="2400" dirty="0">
+                <a:solidFill>
+                  <a:srgbClr val="C00000"/>
+                </a:solidFill>
+                <a:latin typeface="Times New Roman" panose="02020603050405020304" pitchFamily="18" charset="0"/>
+                <a:ea typeface="SimSun" panose="02010600030101010101" pitchFamily="2" charset="-122"/>
+                <a:cs typeface="Times New Roman" panose="02020603050405020304" pitchFamily="18" charset="0"/>
+              </a:rPr>
+              <a:t>就能内部产生</a:t>
+            </a:r>
+            <a:r>
+              <a:rPr lang="de-DE" altLang="zh-CN" sz="2400" dirty="0">
+                <a:solidFill>
+                  <a:srgbClr val="C00000"/>
+                </a:solidFill>
+                <a:latin typeface="Times New Roman" panose="02020603050405020304" pitchFamily="18" charset="0"/>
+                <a:ea typeface="SimSun" panose="02010600030101010101" pitchFamily="2" charset="-122"/>
+                <a:cs typeface="Times New Roman" panose="02020603050405020304" pitchFamily="18" charset="0"/>
+              </a:rPr>
+              <a:t>reward </a:t>
+            </a:r>
+            <a:r>
+              <a:rPr lang="zh-CN" altLang="en-US" sz="2400" dirty="0">
+                <a:solidFill>
+                  <a:srgbClr val="C00000"/>
+                </a:solidFill>
+                <a:latin typeface="Times New Roman" panose="02020603050405020304" pitchFamily="18" charset="0"/>
+                <a:ea typeface="SimSun" panose="02010600030101010101" pitchFamily="2" charset="-122"/>
+                <a:cs typeface="Times New Roman" panose="02020603050405020304" pitchFamily="18" charset="0"/>
+              </a:rPr>
+              <a:t>的</a:t>
+            </a:r>
+            <a:r>
+              <a:rPr lang="de-DE" altLang="zh-CN" sz="2400" dirty="0">
+                <a:solidFill>
+                  <a:srgbClr val="C00000"/>
+                </a:solidFill>
+                <a:latin typeface="Times New Roman" panose="02020603050405020304" pitchFamily="18" charset="0"/>
+                <a:ea typeface="SimSun" panose="02010600030101010101" pitchFamily="2" charset="-122"/>
+                <a:cs typeface="Times New Roman" panose="02020603050405020304" pitchFamily="18" charset="0"/>
+              </a:rPr>
+              <a:t>Internal Feedback RL</a:t>
+            </a:r>
+            <a:r>
+              <a:rPr lang="zh-CN" altLang="en-US" sz="2400" dirty="0">
+                <a:solidFill>
+                  <a:srgbClr val="C00000"/>
+                </a:solidFill>
+                <a:latin typeface="Times New Roman" panose="02020603050405020304" pitchFamily="18" charset="0"/>
+                <a:ea typeface="SimSun" panose="02010600030101010101" pitchFamily="2" charset="-122"/>
+                <a:cs typeface="Times New Roman" panose="02020603050405020304" pitchFamily="18" charset="0"/>
+              </a:rPr>
+              <a:t>，但是这个奖励如何设计？</a:t>
+            </a:r>
+            <a:r>
+              <a:rPr lang="en-US" altLang="zh-CN" sz="2400" dirty="0">
+                <a:latin typeface="Times New Roman" panose="02020603050405020304" pitchFamily="18" charset="0"/>
+                <a:ea typeface="SimSun" panose="02010600030101010101" pitchFamily="2" charset="-122"/>
+                <a:cs typeface="Times New Roman" panose="02020603050405020304" pitchFamily="18" charset="0"/>
+              </a:rPr>
+              <a:t>)</a:t>
+            </a:r>
+          </a:p>
+          <a:p>
+            <a:endParaRPr lang="en-US" altLang="zh-CN" sz="2400" dirty="0">
+              <a:latin typeface="Times New Roman" panose="02020603050405020304" pitchFamily="18" charset="0"/>
+              <a:ea typeface="SimSun" panose="02010600030101010101" pitchFamily="2" charset="-122"/>
+              <a:cs typeface="Times New Roman" panose="02020603050405020304" pitchFamily="18" charset="0"/>
+            </a:endParaRPr>
+          </a:p>
+          <a:p>
+            <a:endParaRPr lang="en-US" altLang="zh-CN" sz="2400" dirty="0">
+              <a:latin typeface="Times New Roman" panose="02020603050405020304" pitchFamily="18" charset="0"/>
+              <a:ea typeface="SimSun" panose="02010600030101010101" pitchFamily="2" charset="-122"/>
+              <a:cs typeface="Times New Roman" panose="02020603050405020304" pitchFamily="18" charset="0"/>
+            </a:endParaRPr>
+          </a:p>
+          <a:p>
+            <a:r>
+              <a:rPr lang="zh-CN" altLang="en-US" sz="2400" dirty="0">
+                <a:solidFill>
+                  <a:srgbClr val="C00000"/>
+                </a:solidFill>
+                <a:latin typeface="Times New Roman" panose="02020603050405020304" pitchFamily="18" charset="0"/>
+                <a:ea typeface="SimSun" panose="02010600030101010101" pitchFamily="2" charset="-122"/>
+                <a:cs typeface="Times New Roman" panose="02020603050405020304" pitchFamily="18" charset="0"/>
+              </a:rPr>
+              <a:t>感想</a:t>
+            </a:r>
+            <a:endParaRPr lang="en-US" altLang="zh-CN" sz="2400" dirty="0">
+              <a:solidFill>
+                <a:srgbClr val="C00000"/>
+              </a:solidFill>
+              <a:latin typeface="Times New Roman" panose="02020603050405020304" pitchFamily="18" charset="0"/>
+              <a:ea typeface="SimSun" panose="02010600030101010101" pitchFamily="2" charset="-122"/>
+              <a:cs typeface="Times New Roman" panose="02020603050405020304" pitchFamily="18" charset="0"/>
+            </a:endParaRPr>
+          </a:p>
+          <a:p>
+            <a:r>
+              <a:rPr lang="zh-CN" altLang="en-US" sz="2400" dirty="0">
+                <a:latin typeface="Times New Roman" panose="02020603050405020304" pitchFamily="18" charset="0"/>
+                <a:ea typeface="SimSun" panose="02010600030101010101" pitchFamily="2" charset="-122"/>
+                <a:cs typeface="Times New Roman" panose="02020603050405020304" pitchFamily="18" charset="0"/>
+              </a:rPr>
+              <a:t>之前没学习过</a:t>
+            </a:r>
+            <a:r>
+              <a:rPr lang="en-US" altLang="zh-CN" sz="2400" dirty="0">
+                <a:latin typeface="Times New Roman" panose="02020603050405020304" pitchFamily="18" charset="0"/>
+                <a:ea typeface="SimSun" panose="02010600030101010101" pitchFamily="2" charset="-122"/>
+                <a:cs typeface="Times New Roman" panose="02020603050405020304" pitchFamily="18" charset="0"/>
+              </a:rPr>
+              <a:t>RL</a:t>
+            </a:r>
+            <a:r>
+              <a:rPr lang="zh-CN" altLang="en-US" sz="2400" dirty="0">
+                <a:latin typeface="Times New Roman" panose="02020603050405020304" pitchFamily="18" charset="0"/>
+                <a:ea typeface="SimSun" panose="02010600030101010101" pitchFamily="2" charset="-122"/>
+                <a:cs typeface="Times New Roman" panose="02020603050405020304" pitchFamily="18" charset="0"/>
+              </a:rPr>
+              <a:t>，但是在仔细学习后，再接触</a:t>
+            </a:r>
+            <a:r>
+              <a:rPr lang="en-US" altLang="zh-CN" sz="2400" dirty="0">
+                <a:latin typeface="Times New Roman" panose="02020603050405020304" pitchFamily="18" charset="0"/>
+                <a:ea typeface="SimSun" panose="02010600030101010101" pitchFamily="2" charset="-122"/>
+                <a:cs typeface="Times New Roman" panose="02020603050405020304" pitchFamily="18" charset="0"/>
+              </a:rPr>
+              <a:t>LLM</a:t>
+            </a:r>
+            <a:r>
+              <a:rPr lang="zh-CN" altLang="en-US" sz="2400" dirty="0">
+                <a:latin typeface="Times New Roman" panose="02020603050405020304" pitchFamily="18" charset="0"/>
+                <a:ea typeface="SimSun" panose="02010600030101010101" pitchFamily="2" charset="-122"/>
+                <a:cs typeface="Times New Roman" panose="02020603050405020304" pitchFamily="18" charset="0"/>
+              </a:rPr>
+              <a:t>以及结合自己以前看过的东西，发现</a:t>
+            </a:r>
+            <a:r>
+              <a:rPr lang="en-US" altLang="zh-CN" sz="2400" dirty="0">
+                <a:latin typeface="Times New Roman" panose="02020603050405020304" pitchFamily="18" charset="0"/>
+                <a:ea typeface="SimSun" panose="02010600030101010101" pitchFamily="2" charset="-122"/>
+                <a:cs typeface="Times New Roman" panose="02020603050405020304" pitchFamily="18" charset="0"/>
+              </a:rPr>
+              <a:t>RL</a:t>
+            </a:r>
+            <a:r>
+              <a:rPr lang="zh-CN" altLang="en-US" sz="2400" dirty="0">
+                <a:latin typeface="Times New Roman" panose="02020603050405020304" pitchFamily="18" charset="0"/>
+                <a:ea typeface="SimSun" panose="02010600030101010101" pitchFamily="2" charset="-122"/>
+                <a:cs typeface="Times New Roman" panose="02020603050405020304" pitchFamily="18" charset="0"/>
+              </a:rPr>
+              <a:t>无论在大模型后训练，</a:t>
+            </a:r>
+            <a:r>
+              <a:rPr lang="en-US" altLang="zh-CN" sz="2400" dirty="0">
+                <a:latin typeface="Times New Roman" panose="02020603050405020304" pitchFamily="18" charset="0"/>
+                <a:ea typeface="SimSun" panose="02010600030101010101" pitchFamily="2" charset="-122"/>
+                <a:cs typeface="Times New Roman" panose="02020603050405020304" pitchFamily="18" charset="0"/>
+              </a:rPr>
+              <a:t>agent</a:t>
+            </a:r>
+            <a:r>
+              <a:rPr lang="zh-CN" altLang="en-US" sz="2400" dirty="0">
+                <a:latin typeface="Times New Roman" panose="02020603050405020304" pitchFamily="18" charset="0"/>
+                <a:ea typeface="SimSun" panose="02010600030101010101" pitchFamily="2" charset="-122"/>
+                <a:cs typeface="Times New Roman" panose="02020603050405020304" pitchFamily="18" charset="0"/>
+              </a:rPr>
+              <a:t>，机器人以及</a:t>
+            </a:r>
+            <a:r>
+              <a:rPr lang="en-US" altLang="zh-CN" sz="2400" dirty="0">
+                <a:latin typeface="Times New Roman" panose="02020603050405020304" pitchFamily="18" charset="0"/>
+                <a:ea typeface="SimSun" panose="02010600030101010101" pitchFamily="2" charset="-122"/>
+                <a:cs typeface="Times New Roman" panose="02020603050405020304" pitchFamily="18" charset="0"/>
+              </a:rPr>
+              <a:t>world model</a:t>
+            </a:r>
+            <a:r>
+              <a:rPr lang="zh-CN" altLang="en-US" sz="2400" dirty="0">
+                <a:latin typeface="Times New Roman" panose="02020603050405020304" pitchFamily="18" charset="0"/>
+                <a:ea typeface="SimSun" panose="02010600030101010101" pitchFamily="2" charset="-122"/>
+                <a:cs typeface="Times New Roman" panose="02020603050405020304" pitchFamily="18" charset="0"/>
+              </a:rPr>
+              <a:t>等等方面都有广阔的前景啊。</a:t>
+            </a:r>
+            <a:endParaRPr lang="en-US" altLang="zh-CN" sz="2400" dirty="0">
+              <a:latin typeface="SimSun" panose="02010600030101010101" pitchFamily="2" charset="-122"/>
+              <a:ea typeface="SimSun" panose="02010600030101010101" pitchFamily="2" charset="-122"/>
+              <a:cs typeface="Times New Roman" panose="02020603050405020304" pitchFamily="18" charset="0"/>
+            </a:endParaRPr>
+          </a:p>
+          <a:p>
+            <a:r>
+              <a:rPr lang="en-US" altLang="zh-CN" sz="2400" dirty="0">
+                <a:latin typeface="SimSun" panose="02010600030101010101" pitchFamily="2" charset="-122"/>
+                <a:ea typeface="SimSun" panose="02010600030101010101" pitchFamily="2" charset="-122"/>
+                <a:cs typeface="Times New Roman" panose="02020603050405020304" pitchFamily="18" charset="0"/>
+              </a:rPr>
+              <a:t>(</a:t>
+            </a:r>
+            <a:r>
+              <a:rPr lang="zh-CN" altLang="en-US" sz="2400" dirty="0">
+                <a:solidFill>
+                  <a:srgbClr val="C00000"/>
+                </a:solidFill>
+                <a:latin typeface="SimSun" panose="02010600030101010101" pitchFamily="2" charset="-122"/>
+                <a:ea typeface="SimSun" panose="02010600030101010101" pitchFamily="2" charset="-122"/>
+                <a:cs typeface="Times New Roman" panose="02020603050405020304" pitchFamily="18" charset="0"/>
+              </a:rPr>
+              <a:t>注：当然也有可能是我现在学习的太少，有点想当然了</a:t>
+            </a:r>
+            <a:r>
+              <a:rPr lang="en-US" altLang="zh-CN" sz="2400" dirty="0">
+                <a:latin typeface="SimSun" panose="02010600030101010101" pitchFamily="2" charset="-122"/>
+                <a:ea typeface="SimSun" panose="02010600030101010101" pitchFamily="2" charset="-122"/>
+                <a:cs typeface="Times New Roman" panose="02020603050405020304" pitchFamily="18" charset="0"/>
+              </a:rPr>
+              <a:t>)</a:t>
+            </a:r>
+          </a:p>
+        </p:txBody>
+      </p:sp>
+    </p:spTree>
+    <p:extLst>
+      <p:ext uri="{BB962C8B-B14F-4D97-AF65-F5344CB8AC3E}">
+        <p14:creationId xmlns:p14="http://schemas.microsoft.com/office/powerpoint/2010/main" val="4290440753"/>
+      </p:ext>
+    </p:extLst>
+  </p:cSld>
+  <p:clrMapOvr>
+    <a:masterClrMapping/>
+  </p:clrMapOvr>
+</p:sld>
+</file>
+
+<file path=ppt/slides/slide7.xml><?xml version="1.0" encoding="utf-8"?>
 <p:sld xmlns:a="http://schemas.openxmlformats.org/drawingml/2006/main" xmlns:r="http://schemas.openxmlformats.org/officeDocument/2006/relationships" xmlns:p="http://schemas.openxmlformats.org/presentationml/2006/main">
   <p:cSld>
     <p:spTree>
@@ -4654,6 +9256,347 @@
             <a:extLst>
               <a:ext uri="{FF2B5EF4-FFF2-40B4-BE49-F238E27FC236}">
                 <a16:creationId xmlns:a16="http://schemas.microsoft.com/office/drawing/2014/main" id="{E8F16350-CE2E-E056-0A07-10FFFF8BBAAA}"/>
+              </a:ext>
+            </a:extLst>
+          </p:cNvPr>
+          <p:cNvSpPr/>
+          <p:nvPr/>
+        </p:nvSpPr>
+        <p:spPr>
+          <a:xfrm>
+            <a:off x="0" y="288235"/>
+            <a:ext cx="10430933" cy="651933"/>
+          </a:xfrm>
+          <a:prstGeom prst="rect">
+            <a:avLst/>
+          </a:prstGeom>
+          <a:solidFill>
+            <a:schemeClr val="bg1"/>
+          </a:solidFill>
+          <a:ln>
+            <a:solidFill>
+              <a:schemeClr val="bg1"/>
+            </a:solidFill>
+          </a:ln>
+        </p:spPr>
+        <p:style>
+          <a:lnRef idx="2">
+            <a:schemeClr val="accent1">
+              <a:shade val="15000"/>
+            </a:schemeClr>
+          </a:lnRef>
+          <a:fillRef idx="1">
+            <a:schemeClr val="accent1"/>
+          </a:fillRef>
+          <a:effectRef idx="0">
+            <a:schemeClr val="accent1"/>
+          </a:effectRef>
+          <a:fontRef idx="minor">
+            <a:schemeClr val="lt1"/>
+          </a:fontRef>
+        </p:style>
+        <p:txBody>
+          <a:bodyPr rtlCol="0" anchor="ctr"/>
+          <a:lstStyle/>
+          <a:p>
+            <a:r>
+              <a:rPr lang="en-US" altLang="zh-CN" sz="3000" b="1" dirty="0">
+                <a:solidFill>
+                  <a:schemeClr val="tx1"/>
+                </a:solidFill>
+                <a:latin typeface="Times New Roman" panose="02020603050405020304" pitchFamily="18" charset="0"/>
+                <a:cs typeface="Times New Roman" panose="02020603050405020304" pitchFamily="18" charset="0"/>
+              </a:rPr>
+              <a:t>Proximal Policy Optimization Algorithm</a:t>
+            </a:r>
+          </a:p>
+        </p:txBody>
+      </p:sp>
+      <p:sp>
+        <p:nvSpPr>
+          <p:cNvPr id="7" name="文本框 6">
+            <a:extLst>
+              <a:ext uri="{FF2B5EF4-FFF2-40B4-BE49-F238E27FC236}">
+                <a16:creationId xmlns:a16="http://schemas.microsoft.com/office/drawing/2014/main" id="{A31383C4-994C-7DC7-339F-80F2D84DC619}"/>
+              </a:ext>
+            </a:extLst>
+          </p:cNvPr>
+          <p:cNvSpPr txBox="1"/>
+          <p:nvPr/>
+        </p:nvSpPr>
+        <p:spPr>
+          <a:xfrm>
+            <a:off x="0" y="2029997"/>
+            <a:ext cx="12192000" cy="3046988"/>
+          </a:xfrm>
+          <a:prstGeom prst="rect">
+            <a:avLst/>
+          </a:prstGeom>
+          <a:noFill/>
+        </p:spPr>
+        <p:txBody>
+          <a:bodyPr wrap="square" rtlCol="0">
+            <a:spAutoFit/>
+          </a:bodyPr>
+          <a:lstStyle/>
+          <a:p>
+            <a:r>
+              <a:rPr lang="zh-CN" altLang="en-US" sz="2400" dirty="0">
+                <a:latin typeface="Times New Roman" panose="02020603050405020304" pitchFamily="18" charset="0"/>
+                <a:ea typeface="SimSun" panose="02010600030101010101" pitchFamily="2" charset="-122"/>
+                <a:cs typeface="Times New Roman" panose="02020603050405020304" pitchFamily="18" charset="0"/>
+              </a:rPr>
+              <a:t>问题：如何让策略梯度既稳定，又简单高效的更新？</a:t>
+            </a:r>
+            <a:endParaRPr lang="en-US" altLang="zh-CN" sz="2400" dirty="0">
+              <a:latin typeface="Times New Roman" panose="02020603050405020304" pitchFamily="18" charset="0"/>
+              <a:ea typeface="SimSun" panose="02010600030101010101" pitchFamily="2" charset="-122"/>
+              <a:cs typeface="Times New Roman" panose="02020603050405020304" pitchFamily="18" charset="0"/>
+            </a:endParaRPr>
+          </a:p>
+          <a:p>
+            <a:r>
+              <a:rPr lang="en-US" altLang="zh-CN" sz="2400" dirty="0">
+                <a:latin typeface="Times New Roman" panose="02020603050405020304" pitchFamily="18" charset="0"/>
+                <a:ea typeface="SimSun" panose="02010600030101010101" pitchFamily="2" charset="-122"/>
+                <a:cs typeface="Times New Roman" panose="02020603050405020304" pitchFamily="18" charset="0"/>
+              </a:rPr>
+              <a:t>(</a:t>
+            </a:r>
+            <a:r>
+              <a:rPr lang="zh-CN" altLang="en-US" sz="2400" dirty="0">
+                <a:latin typeface="Times New Roman" panose="02020603050405020304" pitchFamily="18" charset="0"/>
+                <a:ea typeface="SimSun" panose="02010600030101010101" pitchFamily="2" charset="-122"/>
+                <a:cs typeface="Times New Roman" panose="02020603050405020304" pitchFamily="18" charset="0"/>
+              </a:rPr>
+              <a:t>注：这是简要概括地，因为</a:t>
+            </a:r>
+            <a:r>
+              <a:rPr lang="en-US" altLang="zh-CN" sz="2400" dirty="0">
+                <a:latin typeface="Times New Roman" panose="02020603050405020304" pitchFamily="18" charset="0"/>
+                <a:ea typeface="SimSun" panose="02010600030101010101" pitchFamily="2" charset="-122"/>
+                <a:cs typeface="Times New Roman" panose="02020603050405020304" pitchFamily="18" charset="0"/>
+              </a:rPr>
+              <a:t>abstract</a:t>
+            </a:r>
+            <a:r>
+              <a:rPr lang="zh-CN" altLang="en-US" sz="2400" dirty="0">
+                <a:latin typeface="Times New Roman" panose="02020603050405020304" pitchFamily="18" charset="0"/>
+                <a:ea typeface="SimSun" panose="02010600030101010101" pitchFamily="2" charset="-122"/>
+                <a:cs typeface="Times New Roman" panose="02020603050405020304" pitchFamily="18" charset="0"/>
+              </a:rPr>
+              <a:t>没有明确指出，引言中提出的问题又多</a:t>
+            </a:r>
+            <a:r>
+              <a:rPr lang="en-US" altLang="zh-CN" sz="2400" dirty="0">
+                <a:latin typeface="Times New Roman" panose="02020603050405020304" pitchFamily="18" charset="0"/>
+                <a:ea typeface="SimSun" panose="02010600030101010101" pitchFamily="2" charset="-122"/>
+                <a:cs typeface="Times New Roman" panose="02020603050405020304" pitchFamily="18" charset="0"/>
+              </a:rPr>
+              <a:t>)</a:t>
+            </a:r>
+          </a:p>
+          <a:p>
+            <a:endParaRPr lang="en-US" altLang="zh-CN" sz="2400" dirty="0">
+              <a:latin typeface="Times New Roman" panose="02020603050405020304" pitchFamily="18" charset="0"/>
+              <a:ea typeface="SimSun" panose="02010600030101010101" pitchFamily="2" charset="-122"/>
+              <a:cs typeface="Times New Roman" panose="02020603050405020304" pitchFamily="18" charset="0"/>
+            </a:endParaRPr>
+          </a:p>
+          <a:p>
+            <a:r>
+              <a:rPr lang="zh-CN" altLang="en-US" sz="2400" dirty="0">
+                <a:latin typeface="Times New Roman" panose="02020603050405020304" pitchFamily="18" charset="0"/>
+                <a:ea typeface="SimSun" panose="02010600030101010101" pitchFamily="2" charset="-122"/>
+                <a:cs typeface="Times New Roman" panose="02020603050405020304" pitchFamily="18" charset="0"/>
+              </a:rPr>
+              <a:t>动机：能不能保留 </a:t>
+            </a:r>
+            <a:r>
+              <a:rPr lang="en-US" altLang="zh-CN" sz="2400" dirty="0">
+                <a:latin typeface="Times New Roman" panose="02020603050405020304" pitchFamily="18" charset="0"/>
+                <a:ea typeface="SimSun" panose="02010600030101010101" pitchFamily="2" charset="-122"/>
+                <a:cs typeface="Times New Roman" panose="02020603050405020304" pitchFamily="18" charset="0"/>
+              </a:rPr>
+              <a:t>TRPO </a:t>
+            </a:r>
+            <a:r>
+              <a:rPr lang="zh-CN" altLang="en-US" sz="2400" dirty="0">
+                <a:latin typeface="Times New Roman" panose="02020603050405020304" pitchFamily="18" charset="0"/>
+                <a:ea typeface="SimSun" panose="02010600030101010101" pitchFamily="2" charset="-122"/>
+                <a:cs typeface="Times New Roman" panose="02020603050405020304" pitchFamily="18" charset="0"/>
+              </a:rPr>
+              <a:t>稳定更新的优点，同时让算法更简单实现？</a:t>
+            </a:r>
+            <a:endParaRPr lang="en-US" altLang="zh-CN" sz="2400" dirty="0">
+              <a:latin typeface="Times New Roman" panose="02020603050405020304" pitchFamily="18" charset="0"/>
+              <a:ea typeface="SimSun" panose="02010600030101010101" pitchFamily="2" charset="-122"/>
+              <a:cs typeface="Times New Roman" panose="02020603050405020304" pitchFamily="18" charset="0"/>
+            </a:endParaRPr>
+          </a:p>
+          <a:p>
+            <a:r>
+              <a:rPr lang="en-US" altLang="zh-CN" sz="2400" dirty="0">
+                <a:latin typeface="Times New Roman" panose="02020603050405020304" pitchFamily="18" charset="0"/>
+                <a:ea typeface="SimSun" panose="02010600030101010101" pitchFamily="2" charset="-122"/>
+                <a:cs typeface="Times New Roman" panose="02020603050405020304" pitchFamily="18" charset="0"/>
+              </a:rPr>
+              <a:t>(</a:t>
+            </a:r>
+            <a:r>
+              <a:rPr lang="zh-CN" altLang="en-US" sz="2400" dirty="0">
+                <a:latin typeface="Times New Roman" panose="02020603050405020304" pitchFamily="18" charset="0"/>
+                <a:ea typeface="SimSun" panose="02010600030101010101" pitchFamily="2" charset="-122"/>
+                <a:cs typeface="Times New Roman" panose="02020603050405020304" pitchFamily="18" charset="0"/>
+              </a:rPr>
+              <a:t>注：这也是总结的，没有明确找到受什么启发</a:t>
+            </a:r>
+            <a:r>
+              <a:rPr lang="en-US" altLang="zh-CN" sz="2400" dirty="0">
+                <a:latin typeface="Times New Roman" panose="02020603050405020304" pitchFamily="18" charset="0"/>
+                <a:ea typeface="SimSun" panose="02010600030101010101" pitchFamily="2" charset="-122"/>
+                <a:cs typeface="Times New Roman" panose="02020603050405020304" pitchFamily="18" charset="0"/>
+              </a:rPr>
+              <a:t>)</a:t>
+            </a:r>
+          </a:p>
+          <a:p>
+            <a:endParaRPr lang="en-US" altLang="zh-CN" sz="2400" dirty="0">
+              <a:latin typeface="Times New Roman" panose="02020603050405020304" pitchFamily="18" charset="0"/>
+              <a:ea typeface="SimSun" panose="02010600030101010101" pitchFamily="2" charset="-122"/>
+              <a:cs typeface="Times New Roman" panose="02020603050405020304" pitchFamily="18" charset="0"/>
+            </a:endParaRPr>
+          </a:p>
+          <a:p>
+            <a:r>
+              <a:rPr lang="zh-CN" altLang="en-US" sz="2400" dirty="0">
+                <a:latin typeface="Times New Roman" panose="02020603050405020304" pitchFamily="18" charset="0"/>
+                <a:ea typeface="SimSun" panose="02010600030101010101" pitchFamily="2" charset="-122"/>
+                <a:cs typeface="Times New Roman" panose="02020603050405020304" pitchFamily="18" charset="0"/>
+              </a:rPr>
+              <a:t>方法：对于</a:t>
+            </a:r>
+            <a:r>
+              <a:rPr lang="en-US" altLang="zh-CN" sz="2400" dirty="0">
+                <a:latin typeface="Times New Roman" panose="02020603050405020304" pitchFamily="18" charset="0"/>
+                <a:ea typeface="SimSun" panose="02010600030101010101" pitchFamily="2" charset="-122"/>
+                <a:cs typeface="Times New Roman" panose="02020603050405020304" pitchFamily="18" charset="0"/>
+              </a:rPr>
+              <a:t>PPO</a:t>
+            </a:r>
+            <a:r>
+              <a:rPr lang="zh-CN" altLang="en-US" sz="2400" dirty="0">
+                <a:latin typeface="Times New Roman" panose="02020603050405020304" pitchFamily="18" charset="0"/>
+                <a:ea typeface="SimSun" panose="02010600030101010101" pitchFamily="2" charset="-122"/>
+                <a:cs typeface="Times New Roman" panose="02020603050405020304" pitchFamily="18" charset="0"/>
+              </a:rPr>
+              <a:t>其本质就是设计了设计了两个</a:t>
+            </a:r>
+            <a:r>
+              <a:rPr lang="en-US" altLang="zh-CN" sz="2400" dirty="0">
+                <a:latin typeface="Times New Roman" panose="02020603050405020304" pitchFamily="18" charset="0"/>
+                <a:ea typeface="SimSun" panose="02010600030101010101" pitchFamily="2" charset="-122"/>
+                <a:cs typeface="Times New Roman" panose="02020603050405020304" pitchFamily="18" charset="0"/>
+              </a:rPr>
+              <a:t>model(</a:t>
+            </a:r>
+            <a:r>
+              <a:rPr lang="zh-CN" altLang="en-US" sz="2400" dirty="0">
+                <a:latin typeface="Times New Roman" panose="02020603050405020304" pitchFamily="18" charset="0"/>
+                <a:ea typeface="SimSun" panose="02010600030101010101" pitchFamily="2" charset="-122"/>
+                <a:cs typeface="Times New Roman" panose="02020603050405020304" pitchFamily="18" charset="0"/>
+              </a:rPr>
+              <a:t>即</a:t>
+            </a:r>
+            <a:r>
+              <a:rPr lang="en-US" altLang="zh-CN" sz="2400" dirty="0">
+                <a:latin typeface="Times New Roman" panose="02020603050405020304" pitchFamily="18" charset="0"/>
+                <a:ea typeface="SimSun" panose="02010600030101010101" pitchFamily="2" charset="-122"/>
+                <a:cs typeface="Times New Roman" panose="02020603050405020304" pitchFamily="18" charset="0"/>
+              </a:rPr>
+              <a:t>policy</a:t>
+            </a:r>
+            <a:r>
+              <a:rPr lang="zh-CN" altLang="en-US" sz="2400" dirty="0">
+                <a:latin typeface="Times New Roman" panose="02020603050405020304" pitchFamily="18" charset="0"/>
+                <a:ea typeface="SimSun" panose="02010600030101010101" pitchFamily="2" charset="-122"/>
+                <a:cs typeface="Times New Roman" panose="02020603050405020304" pitchFamily="18" charset="0"/>
+              </a:rPr>
+              <a:t>与</a:t>
+            </a:r>
+            <a:r>
+              <a:rPr lang="en-US" altLang="zh-CN" sz="2400" dirty="0">
+                <a:latin typeface="Times New Roman" panose="02020603050405020304" pitchFamily="18" charset="0"/>
+                <a:ea typeface="SimSun" panose="02010600030101010101" pitchFamily="2" charset="-122"/>
+                <a:cs typeface="Times New Roman" panose="02020603050405020304" pitchFamily="18" charset="0"/>
+              </a:rPr>
+              <a:t>value)</a:t>
+            </a:r>
+            <a:r>
+              <a:rPr lang="zh-CN" altLang="en-US" sz="2400" dirty="0">
+                <a:latin typeface="Times New Roman" panose="02020603050405020304" pitchFamily="18" charset="0"/>
+                <a:ea typeface="SimSun" panose="02010600030101010101" pitchFamily="2" charset="-122"/>
+                <a:cs typeface="Times New Roman" panose="02020603050405020304" pitchFamily="18" charset="0"/>
+              </a:rPr>
+              <a:t>。</a:t>
+            </a:r>
+            <a:endParaRPr lang="en-US" altLang="zh-CN" sz="2400" dirty="0">
+              <a:latin typeface="Times New Roman" panose="02020603050405020304" pitchFamily="18" charset="0"/>
+              <a:ea typeface="SimSun" panose="02010600030101010101" pitchFamily="2" charset="-122"/>
+              <a:cs typeface="Times New Roman" panose="02020603050405020304" pitchFamily="18" charset="0"/>
+            </a:endParaRPr>
+          </a:p>
+          <a:p>
+            <a:endParaRPr lang="en-US" altLang="zh-CN" sz="2400" dirty="0">
+              <a:latin typeface="Times New Roman" panose="02020603050405020304" pitchFamily="18" charset="0"/>
+              <a:ea typeface="SimSun" panose="02010600030101010101" pitchFamily="2" charset="-122"/>
+              <a:cs typeface="Times New Roman" panose="02020603050405020304" pitchFamily="18" charset="0"/>
+            </a:endParaRPr>
+          </a:p>
+        </p:txBody>
+      </p:sp>
+    </p:spTree>
+    <p:extLst>
+      <p:ext uri="{BB962C8B-B14F-4D97-AF65-F5344CB8AC3E}">
+        <p14:creationId xmlns:p14="http://schemas.microsoft.com/office/powerpoint/2010/main" val="2414937812"/>
+      </p:ext>
+    </p:extLst>
+  </p:cSld>
+  <p:clrMapOvr>
+    <a:masterClrMapping/>
+  </p:clrMapOvr>
+</p:sld>
+</file>
+
+<file path=ppt/slides/slide8.xml><?xml version="1.0" encoding="utf-8"?>
+<p:sld xmlns:a="http://schemas.openxmlformats.org/drawingml/2006/main" xmlns:r="http://schemas.openxmlformats.org/officeDocument/2006/relationships" xmlns:p="http://schemas.openxmlformats.org/presentationml/2006/main">
+  <p:cSld>
+    <p:spTree>
+      <p:nvGrpSpPr>
+        <p:cNvPr id="1" name="">
+          <a:extLst>
+            <a:ext uri="{FF2B5EF4-FFF2-40B4-BE49-F238E27FC236}">
+              <a16:creationId xmlns:a16="http://schemas.microsoft.com/office/drawing/2014/main" id="{A91BCEE7-BC94-785D-DCCE-795EA61C9D14}"/>
+            </a:ext>
+          </a:extLst>
+        </p:cNvPr>
+        <p:cNvGrpSpPr/>
+        <p:nvPr/>
+      </p:nvGrpSpPr>
+      <p:grpSpPr>
+        <a:xfrm>
+          <a:off x="0" y="0"/>
+          <a:ext cx="0" cy="0"/>
+          <a:chOff x="0" y="0"/>
+          <a:chExt cx="0" cy="0"/>
+        </a:xfrm>
+      </p:grpSpPr>
+      <p:sp>
+        <p:nvSpPr>
+          <p:cNvPr id="5" name="矩形 4">
+            <a:extLst>
+              <a:ext uri="{FF2B5EF4-FFF2-40B4-BE49-F238E27FC236}">
+                <a16:creationId xmlns:a16="http://schemas.microsoft.com/office/drawing/2014/main" id="{B3445B86-1F26-C9D4-203D-BB857FDCC4DC}"/>
               </a:ext>
             </a:extLst>
           </p:cNvPr>
@@ -4710,460 +9653,6 @@
           </a:p>
         </p:txBody>
       </p:sp>
-      <p:sp>
-        <p:nvSpPr>
-          <p:cNvPr id="7" name="文本框 6">
-            <a:extLst>
-              <a:ext uri="{FF2B5EF4-FFF2-40B4-BE49-F238E27FC236}">
-                <a16:creationId xmlns:a16="http://schemas.microsoft.com/office/drawing/2014/main" id="{A31383C4-994C-7DC7-339F-80F2D84DC619}"/>
-              </a:ext>
-            </a:extLst>
-          </p:cNvPr>
-          <p:cNvSpPr txBox="1"/>
-          <p:nvPr/>
-        </p:nvSpPr>
-        <p:spPr>
-          <a:xfrm>
-            <a:off x="-2318" y="851836"/>
-            <a:ext cx="12192000" cy="4524315"/>
-          </a:xfrm>
-          <a:prstGeom prst="rect">
-            <a:avLst/>
-          </a:prstGeom>
-          <a:noFill/>
-        </p:spPr>
-        <p:txBody>
-          <a:bodyPr wrap="square" rtlCol="0">
-            <a:spAutoFit/>
-          </a:bodyPr>
-          <a:lstStyle/>
-          <a:p>
-            <a:r>
-              <a:rPr lang="zh-CN" altLang="en-US" sz="2400" dirty="0">
-                <a:latin typeface="Times New Roman" panose="02020603050405020304" pitchFamily="18" charset="0"/>
-                <a:ea typeface="SimSun" panose="02010600030101010101" pitchFamily="2" charset="-122"/>
-                <a:cs typeface="Times New Roman" panose="02020603050405020304" pitchFamily="18" charset="0"/>
-              </a:rPr>
-              <a:t>问题：如何让策略梯度既稳定，又简单高效的更新？</a:t>
-            </a:r>
-            <a:endParaRPr lang="en-US" altLang="zh-CN" sz="2400" dirty="0">
-              <a:latin typeface="Times New Roman" panose="02020603050405020304" pitchFamily="18" charset="0"/>
-              <a:ea typeface="SimSun" panose="02010600030101010101" pitchFamily="2" charset="-122"/>
-              <a:cs typeface="Times New Roman" panose="02020603050405020304" pitchFamily="18" charset="0"/>
-            </a:endParaRPr>
-          </a:p>
-          <a:p>
-            <a:r>
-              <a:rPr lang="en-US" altLang="zh-CN" sz="2400" dirty="0">
-                <a:latin typeface="Times New Roman" panose="02020603050405020304" pitchFamily="18" charset="0"/>
-                <a:ea typeface="SimSun" panose="02010600030101010101" pitchFamily="2" charset="-122"/>
-                <a:cs typeface="Times New Roman" panose="02020603050405020304" pitchFamily="18" charset="0"/>
-              </a:rPr>
-              <a:t>(</a:t>
-            </a:r>
-            <a:r>
-              <a:rPr lang="zh-CN" altLang="en-US" sz="2400" dirty="0">
-                <a:latin typeface="Times New Roman" panose="02020603050405020304" pitchFamily="18" charset="0"/>
-                <a:ea typeface="SimSun" panose="02010600030101010101" pitchFamily="2" charset="-122"/>
-                <a:cs typeface="Times New Roman" panose="02020603050405020304" pitchFamily="18" charset="0"/>
-              </a:rPr>
-              <a:t>注：这是简要概括地，因为</a:t>
-            </a:r>
-            <a:r>
-              <a:rPr lang="en-US" altLang="zh-CN" sz="2400" dirty="0">
-                <a:latin typeface="Times New Roman" panose="02020603050405020304" pitchFamily="18" charset="0"/>
-                <a:ea typeface="SimSun" panose="02010600030101010101" pitchFamily="2" charset="-122"/>
-                <a:cs typeface="Times New Roman" panose="02020603050405020304" pitchFamily="18" charset="0"/>
-              </a:rPr>
-              <a:t>abstract</a:t>
-            </a:r>
-            <a:r>
-              <a:rPr lang="zh-CN" altLang="en-US" sz="2400" dirty="0">
-                <a:latin typeface="Times New Roman" panose="02020603050405020304" pitchFamily="18" charset="0"/>
-                <a:ea typeface="SimSun" panose="02010600030101010101" pitchFamily="2" charset="-122"/>
-                <a:cs typeface="Times New Roman" panose="02020603050405020304" pitchFamily="18" charset="0"/>
-              </a:rPr>
-              <a:t>没有明确指出，引言中提出的问题又多</a:t>
-            </a:r>
-            <a:r>
-              <a:rPr lang="en-US" altLang="zh-CN" sz="2400" dirty="0">
-                <a:latin typeface="Times New Roman" panose="02020603050405020304" pitchFamily="18" charset="0"/>
-                <a:ea typeface="SimSun" panose="02010600030101010101" pitchFamily="2" charset="-122"/>
-                <a:cs typeface="Times New Roman" panose="02020603050405020304" pitchFamily="18" charset="0"/>
-              </a:rPr>
-              <a:t>)</a:t>
-            </a:r>
-          </a:p>
-          <a:p>
-            <a:endParaRPr lang="en-US" altLang="zh-CN" sz="2400" dirty="0">
-              <a:latin typeface="Times New Roman" panose="02020603050405020304" pitchFamily="18" charset="0"/>
-              <a:ea typeface="SimSun" panose="02010600030101010101" pitchFamily="2" charset="-122"/>
-              <a:cs typeface="Times New Roman" panose="02020603050405020304" pitchFamily="18" charset="0"/>
-            </a:endParaRPr>
-          </a:p>
-          <a:p>
-            <a:r>
-              <a:rPr lang="zh-CN" altLang="en-US" sz="2400" dirty="0">
-                <a:latin typeface="Times New Roman" panose="02020603050405020304" pitchFamily="18" charset="0"/>
-                <a:ea typeface="SimSun" panose="02010600030101010101" pitchFamily="2" charset="-122"/>
-                <a:cs typeface="Times New Roman" panose="02020603050405020304" pitchFamily="18" charset="0"/>
-              </a:rPr>
-              <a:t>动机：引言中没有明确指出受什么启发。</a:t>
-            </a:r>
-            <a:endParaRPr lang="en-US" altLang="zh-CN" sz="2400" dirty="0">
-              <a:latin typeface="Times New Roman" panose="02020603050405020304" pitchFamily="18" charset="0"/>
-              <a:ea typeface="SimSun" panose="02010600030101010101" pitchFamily="2" charset="-122"/>
-              <a:cs typeface="Times New Roman" panose="02020603050405020304" pitchFamily="18" charset="0"/>
-            </a:endParaRPr>
-          </a:p>
-          <a:p>
-            <a:r>
-              <a:rPr lang="en-US" altLang="zh-CN" sz="2400" dirty="0">
-                <a:latin typeface="Times New Roman" panose="02020603050405020304" pitchFamily="18" charset="0"/>
-                <a:ea typeface="SimSun" panose="02010600030101010101" pitchFamily="2" charset="-122"/>
-                <a:cs typeface="Times New Roman" panose="02020603050405020304" pitchFamily="18" charset="0"/>
-              </a:rPr>
-              <a:t>(</a:t>
-            </a:r>
-            <a:r>
-              <a:rPr lang="zh-CN" altLang="en-US" sz="2400" dirty="0">
-                <a:latin typeface="Times New Roman" panose="02020603050405020304" pitchFamily="18" charset="0"/>
-                <a:ea typeface="SimSun" panose="02010600030101010101" pitchFamily="2" charset="-122"/>
-                <a:cs typeface="Times New Roman" panose="02020603050405020304" pitchFamily="18" charset="0"/>
-              </a:rPr>
-              <a:t>但感觉是作者提出的这句</a:t>
-            </a:r>
-            <a:r>
-              <a:rPr lang="en-US" altLang="zh-CN" sz="2400" dirty="0">
-                <a:latin typeface="Times New Roman" panose="02020603050405020304" pitchFamily="18" charset="0"/>
-                <a:ea typeface="SimSun" panose="02010600030101010101" pitchFamily="2" charset="-122"/>
-                <a:cs typeface="Times New Roman" panose="02020603050405020304" pitchFamily="18" charset="0"/>
-              </a:rPr>
-              <a:t>, </a:t>
-            </a:r>
-            <a:r>
-              <a:rPr lang="zh-CN" altLang="en-US" sz="2400" dirty="0">
-                <a:latin typeface="Times New Roman" panose="02020603050405020304" pitchFamily="18" charset="0"/>
-                <a:ea typeface="SimSun" panose="02010600030101010101" pitchFamily="2" charset="-122"/>
-                <a:cs typeface="Times New Roman" panose="02020603050405020304" pitchFamily="18" charset="0"/>
-              </a:rPr>
-              <a:t>把目标检测重新定义为一个单一的回归问题，直接从图像回归到边界框坐标和类别概率</a:t>
-            </a:r>
-            <a:r>
-              <a:rPr lang="en-US" altLang="zh-CN" sz="2400" dirty="0">
-                <a:latin typeface="Times New Roman" panose="02020603050405020304" pitchFamily="18" charset="0"/>
-                <a:ea typeface="SimSun" panose="02010600030101010101" pitchFamily="2" charset="-122"/>
-                <a:cs typeface="Times New Roman" panose="02020603050405020304" pitchFamily="18" charset="0"/>
-              </a:rPr>
-              <a:t>)</a:t>
-            </a:r>
-          </a:p>
-          <a:p>
-            <a:endParaRPr lang="en-US" altLang="zh-CN" sz="2400" dirty="0">
-              <a:latin typeface="SimSun" panose="02010600030101010101" pitchFamily="2" charset="-122"/>
-              <a:ea typeface="SimSun" panose="02010600030101010101" pitchFamily="2" charset="-122"/>
-              <a:cs typeface="Times New Roman" panose="02020603050405020304" pitchFamily="18" charset="0"/>
-            </a:endParaRPr>
-          </a:p>
-          <a:p>
-            <a:r>
-              <a:rPr lang="zh-CN" altLang="en-US" sz="2400" dirty="0">
-                <a:latin typeface="SimSun" panose="02010600030101010101" pitchFamily="2" charset="-122"/>
-                <a:ea typeface="SimSun" panose="02010600030101010101" pitchFamily="2" charset="-122"/>
-                <a:cs typeface="Times New Roman" panose="02020603050405020304" pitchFamily="18" charset="0"/>
-              </a:rPr>
-              <a:t>贡献：最关键的就是提出了一种单阶段检测框架</a:t>
-            </a:r>
-            <a:endParaRPr lang="en-US" altLang="zh-CN" sz="2400" dirty="0">
-              <a:latin typeface="SimSun" panose="02010600030101010101" pitchFamily="2" charset="-122"/>
-              <a:ea typeface="SimSun" panose="02010600030101010101" pitchFamily="2" charset="-122"/>
-              <a:cs typeface="Times New Roman" panose="02020603050405020304" pitchFamily="18" charset="0"/>
-            </a:endParaRPr>
-          </a:p>
-          <a:p>
-            <a:r>
-              <a:rPr lang="zh-CN" altLang="en-US" sz="2400" dirty="0">
-                <a:latin typeface="SimSun" panose="02010600030101010101" pitchFamily="2" charset="-122"/>
-                <a:ea typeface="SimSun" panose="02010600030101010101" pitchFamily="2" charset="-122"/>
-                <a:cs typeface="Times New Roman" panose="02020603050405020304" pitchFamily="18" charset="0"/>
-              </a:rPr>
-              <a:t>这不就说明了</a:t>
-            </a:r>
-            <a:r>
-              <a:rPr lang="en-US" altLang="zh-CN" sz="2400" dirty="0">
-                <a:latin typeface="SimSun" panose="02010600030101010101" pitchFamily="2" charset="-122"/>
-                <a:ea typeface="SimSun" panose="02010600030101010101" pitchFamily="2" charset="-122"/>
-                <a:cs typeface="Times New Roman" panose="02020603050405020304" pitchFamily="18" charset="0"/>
-              </a:rPr>
-              <a:t>PPO</a:t>
-            </a:r>
-            <a:r>
-              <a:rPr lang="zh-CN" altLang="en-US" sz="2400" dirty="0">
-                <a:latin typeface="SimSun" panose="02010600030101010101" pitchFamily="2" charset="-122"/>
-                <a:ea typeface="SimSun" panose="02010600030101010101" pitchFamily="2" charset="-122"/>
-                <a:cs typeface="Times New Roman" panose="02020603050405020304" pitchFamily="18" charset="0"/>
-              </a:rPr>
-              <a:t>的本质就是最大化</a:t>
-            </a:r>
-            <a:r>
-              <a:rPr lang="en-US" altLang="zh-CN" sz="2400" dirty="0">
-                <a:latin typeface="SimSun" panose="02010600030101010101" pitchFamily="2" charset="-122"/>
-                <a:ea typeface="SimSun" panose="02010600030101010101" pitchFamily="2" charset="-122"/>
-                <a:cs typeface="Times New Roman" panose="02020603050405020304" pitchFamily="18" charset="0"/>
-              </a:rPr>
-              <a:t>Policy </a:t>
-            </a:r>
-            <a:r>
-              <a:rPr lang="zh-CN" altLang="en-US" sz="2400" dirty="0">
-                <a:latin typeface="SimSun" panose="02010600030101010101" pitchFamily="2" charset="-122"/>
-                <a:ea typeface="SimSun" panose="02010600030101010101" pitchFamily="2" charset="-122"/>
-                <a:cs typeface="Times New Roman" panose="02020603050405020304" pitchFamily="18" charset="0"/>
-              </a:rPr>
-              <a:t>最小化</a:t>
-            </a:r>
-            <a:r>
-              <a:rPr lang="en-US" altLang="zh-CN" sz="2400" dirty="0" err="1">
-                <a:latin typeface="SimSun" panose="02010600030101010101" pitchFamily="2" charset="-122"/>
-                <a:ea typeface="SimSun" panose="02010600030101010101" pitchFamily="2" charset="-122"/>
-                <a:cs typeface="Times New Roman" panose="02020603050405020304" pitchFamily="18" charset="0"/>
-              </a:rPr>
-              <a:t>crtic</a:t>
-            </a:r>
-            <a:endParaRPr lang="en-US" altLang="zh-CN" sz="2400" dirty="0">
-              <a:latin typeface="SimSun" panose="02010600030101010101" pitchFamily="2" charset="-122"/>
-              <a:ea typeface="SimSun" panose="02010600030101010101" pitchFamily="2" charset="-122"/>
-              <a:cs typeface="Times New Roman" panose="02020603050405020304" pitchFamily="18" charset="0"/>
-            </a:endParaRPr>
-          </a:p>
-          <a:p>
-            <a:r>
-              <a:rPr lang="en-US" altLang="zh-CN" sz="2400" dirty="0">
-                <a:latin typeface="SimSun" panose="02010600030101010101" pitchFamily="2" charset="-122"/>
-                <a:ea typeface="SimSun" panose="02010600030101010101" pitchFamily="2" charset="-122"/>
-                <a:cs typeface="Times New Roman" panose="02020603050405020304" pitchFamily="18" charset="0"/>
-              </a:rPr>
-              <a:t>policy</a:t>
-            </a:r>
-            <a:r>
-              <a:rPr lang="zh-CN" altLang="en-US" sz="2400" dirty="0">
-                <a:latin typeface="SimSun" panose="02010600030101010101" pitchFamily="2" charset="-122"/>
-                <a:ea typeface="SimSun" panose="02010600030101010101" pitchFamily="2" charset="-122"/>
-                <a:cs typeface="Times New Roman" panose="02020603050405020304" pitchFamily="18" charset="0"/>
-              </a:rPr>
-              <a:t>（</a:t>
-            </a:r>
-            <a:r>
-              <a:rPr lang="en-US" altLang="zh-CN" sz="2400" dirty="0">
-                <a:latin typeface="SimSun" panose="02010600030101010101" pitchFamily="2" charset="-122"/>
-                <a:ea typeface="SimSun" panose="02010600030101010101" pitchFamily="2" charset="-122"/>
-                <a:cs typeface="Times New Roman" panose="02020603050405020304" pitchFamily="18" charset="0"/>
-              </a:rPr>
-              <a:t>actor</a:t>
-            </a:r>
-            <a:r>
-              <a:rPr lang="zh-CN" altLang="en-US" sz="2400" dirty="0">
-                <a:latin typeface="SimSun" panose="02010600030101010101" pitchFamily="2" charset="-122"/>
-                <a:ea typeface="SimSun" panose="02010600030101010101" pitchFamily="2" charset="-122"/>
-                <a:cs typeface="Times New Roman" panose="02020603050405020304" pitchFamily="18" charset="0"/>
-              </a:rPr>
-              <a:t>）：</a:t>
-            </a:r>
-            <a:r>
-              <a:rPr lang="en-US" altLang="zh-CN" sz="2400" dirty="0" err="1">
-                <a:latin typeface="SimSun" panose="02010600030101010101" pitchFamily="2" charset="-122"/>
-                <a:ea typeface="SimSun" panose="02010600030101010101" pitchFamily="2" charset="-122"/>
-                <a:cs typeface="Times New Roman" panose="02020603050405020304" pitchFamily="18" charset="0"/>
-              </a:rPr>
-              <a:t>maxE</a:t>
-            </a:r>
-            <a:r>
-              <a:rPr lang="en-US" altLang="zh-CN" sz="2400" dirty="0">
-                <a:latin typeface="SimSun" panose="02010600030101010101" pitchFamily="2" charset="-122"/>
-                <a:ea typeface="SimSun" panose="02010600030101010101" pitchFamily="2" charset="-122"/>
-                <a:cs typeface="Times New Roman" panose="02020603050405020304" pitchFamily="18" charset="0"/>
-              </a:rPr>
-              <a:t>[clip(rt	​At	​)]value</a:t>
-            </a:r>
-            <a:r>
-              <a:rPr lang="zh-CN" altLang="en-US" sz="2400" dirty="0">
-                <a:latin typeface="SimSun" panose="02010600030101010101" pitchFamily="2" charset="-122"/>
-                <a:ea typeface="SimSun" panose="02010600030101010101" pitchFamily="2" charset="-122"/>
-                <a:cs typeface="Times New Roman" panose="02020603050405020304" pitchFamily="18" charset="0"/>
-              </a:rPr>
-              <a:t>（</a:t>
-            </a:r>
-            <a:r>
-              <a:rPr lang="en-US" altLang="zh-CN" sz="2400" dirty="0">
-                <a:latin typeface="SimSun" panose="02010600030101010101" pitchFamily="2" charset="-122"/>
-                <a:ea typeface="SimSun" panose="02010600030101010101" pitchFamily="2" charset="-122"/>
-                <a:cs typeface="Times New Roman" panose="02020603050405020304" pitchFamily="18" charset="0"/>
-              </a:rPr>
-              <a:t>critic</a:t>
-            </a:r>
-            <a:r>
-              <a:rPr lang="zh-CN" altLang="en-US" sz="2400" dirty="0">
-                <a:latin typeface="SimSun" panose="02010600030101010101" pitchFamily="2" charset="-122"/>
-                <a:ea typeface="SimSun" panose="02010600030101010101" pitchFamily="2" charset="-122"/>
-                <a:cs typeface="Times New Roman" panose="02020603050405020304" pitchFamily="18" charset="0"/>
-              </a:rPr>
-              <a:t>）：</a:t>
-            </a:r>
-            <a:r>
-              <a:rPr lang="en-US" altLang="zh-CN" sz="2400" dirty="0">
-                <a:latin typeface="SimSun" panose="02010600030101010101" pitchFamily="2" charset="-122"/>
-                <a:ea typeface="SimSun" panose="02010600030101010101" pitchFamily="2" charset="-122"/>
-                <a:cs typeface="Times New Roman" panose="02020603050405020304" pitchFamily="18" charset="0"/>
-              </a:rPr>
-              <a:t>min(V</a:t>
-            </a:r>
-            <a:r>
-              <a:rPr lang="el-GR" altLang="zh-CN" sz="2400" dirty="0">
-                <a:latin typeface="SimSun" panose="02010600030101010101" pitchFamily="2" charset="-122"/>
-                <a:ea typeface="SimSun" panose="02010600030101010101" pitchFamily="2" charset="-122"/>
-                <a:cs typeface="Times New Roman" panose="02020603050405020304" pitchFamily="18" charset="0"/>
-              </a:rPr>
-              <a:t>ϕ	​(</a:t>
-            </a:r>
-            <a:r>
-              <a:rPr lang="en-US" altLang="zh-CN" sz="2400" dirty="0">
-                <a:latin typeface="SimSun" panose="02010600030101010101" pitchFamily="2" charset="-122"/>
-                <a:ea typeface="SimSun" panose="02010600030101010101" pitchFamily="2" charset="-122"/>
-                <a:cs typeface="Times New Roman" panose="02020603050405020304" pitchFamily="18" charset="0"/>
-              </a:rPr>
-              <a:t>st	​)−</a:t>
-            </a:r>
-            <a:r>
-              <a:rPr lang="en-US" altLang="zh-CN" sz="2400" dirty="0" err="1">
-                <a:latin typeface="SimSun" panose="02010600030101010101" pitchFamily="2" charset="-122"/>
-                <a:ea typeface="SimSun" panose="02010600030101010101" pitchFamily="2" charset="-122"/>
-                <a:cs typeface="Times New Roman" panose="02020603050405020304" pitchFamily="18" charset="0"/>
-              </a:rPr>
-              <a:t>V^t</a:t>
-            </a:r>
-            <a:r>
-              <a:rPr lang="en-US" altLang="zh-CN" sz="2400" dirty="0">
-                <a:latin typeface="SimSun" panose="02010600030101010101" pitchFamily="2" charset="-122"/>
-                <a:ea typeface="SimSun" panose="02010600030101010101" pitchFamily="2" charset="-122"/>
-                <a:cs typeface="Times New Roman" panose="02020603050405020304" pitchFamily="18" charset="0"/>
-              </a:rPr>
-              <a:t>	​)2</a:t>
-            </a:r>
-          </a:p>
-          <a:p>
-            <a:endParaRPr lang="en-US" altLang="zh-CN" sz="2400" dirty="0">
-              <a:latin typeface="SimSun" panose="02010600030101010101" pitchFamily="2" charset="-122"/>
-              <a:ea typeface="SimSun" panose="02010600030101010101" pitchFamily="2" charset="-122"/>
-              <a:cs typeface="Times New Roman" panose="02020603050405020304" pitchFamily="18" charset="0"/>
-            </a:endParaRPr>
-          </a:p>
-        </p:txBody>
-      </p:sp>
-    </p:spTree>
-    <p:extLst>
-      <p:ext uri="{BB962C8B-B14F-4D97-AF65-F5344CB8AC3E}">
-        <p14:creationId xmlns:p14="http://schemas.microsoft.com/office/powerpoint/2010/main" val="2414937812"/>
-      </p:ext>
-    </p:extLst>
-  </p:cSld>
-  <p:clrMapOvr>
-    <a:masterClrMapping/>
-  </p:clrMapOvr>
-</p:sld>
-</file>
-
-<file path=ppt/slides/slide4.xml><?xml version="1.0" encoding="utf-8"?>
-<p:sld xmlns:a="http://schemas.openxmlformats.org/drawingml/2006/main" xmlns:r="http://schemas.openxmlformats.org/officeDocument/2006/relationships" xmlns:p="http://schemas.openxmlformats.org/presentationml/2006/main">
-  <p:cSld>
-    <p:spTree>
-      <p:nvGrpSpPr>
-        <p:cNvPr id="1" name="">
-          <a:extLst>
-            <a:ext uri="{FF2B5EF4-FFF2-40B4-BE49-F238E27FC236}">
-              <a16:creationId xmlns:a16="http://schemas.microsoft.com/office/drawing/2014/main" id="{A91BCEE7-BC94-785D-DCCE-795EA61C9D14}"/>
-            </a:ext>
-          </a:extLst>
-        </p:cNvPr>
-        <p:cNvGrpSpPr/>
-        <p:nvPr/>
-      </p:nvGrpSpPr>
-      <p:grpSpPr>
-        <a:xfrm>
-          <a:off x="0" y="0"/>
-          <a:ext cx="0" cy="0"/>
-          <a:chOff x="0" y="0"/>
-          <a:chExt cx="0" cy="0"/>
-        </a:xfrm>
-      </p:grpSpPr>
-      <p:sp>
-        <p:nvSpPr>
-          <p:cNvPr id="5" name="矩形 4">
-            <a:extLst>
-              <a:ext uri="{FF2B5EF4-FFF2-40B4-BE49-F238E27FC236}">
-                <a16:creationId xmlns:a16="http://schemas.microsoft.com/office/drawing/2014/main" id="{B3445B86-1F26-C9D4-203D-BB857FDCC4DC}"/>
-              </a:ext>
-            </a:extLst>
-          </p:cNvPr>
-          <p:cNvSpPr/>
-          <p:nvPr/>
-        </p:nvSpPr>
-        <p:spPr>
-          <a:xfrm>
-            <a:off x="16933" y="0"/>
-            <a:ext cx="10430933" cy="651933"/>
-          </a:xfrm>
-          <a:prstGeom prst="rect">
-            <a:avLst/>
-          </a:prstGeom>
-          <a:solidFill>
-            <a:schemeClr val="bg1"/>
-          </a:solidFill>
-          <a:ln>
-            <a:solidFill>
-              <a:schemeClr val="bg1"/>
-            </a:solidFill>
-          </a:ln>
-        </p:spPr>
-        <p:style>
-          <a:lnRef idx="2">
-            <a:schemeClr val="accent1">
-              <a:shade val="15000"/>
-            </a:schemeClr>
-          </a:lnRef>
-          <a:fillRef idx="1">
-            <a:schemeClr val="accent1"/>
-          </a:fillRef>
-          <a:effectRef idx="0">
-            <a:schemeClr val="accent1"/>
-          </a:effectRef>
-          <a:fontRef idx="minor">
-            <a:schemeClr val="lt1"/>
-          </a:fontRef>
-        </p:style>
-        <p:txBody>
-          <a:bodyPr rtlCol="0" anchor="ctr"/>
-          <a:lstStyle/>
-          <a:p>
-            <a:r>
-              <a:rPr lang="en-US" altLang="zh-CN" sz="3000" dirty="0">
-                <a:solidFill>
-                  <a:schemeClr val="tx1"/>
-                </a:solidFill>
-                <a:latin typeface="Times New Roman" panose="02020603050405020304" pitchFamily="18" charset="0"/>
-                <a:cs typeface="Times New Roman" panose="02020603050405020304" pitchFamily="18" charset="0"/>
-              </a:rPr>
-              <a:t>You Only Look Once: Unified, Real-Time Object Detection</a:t>
-            </a:r>
-            <a:endParaRPr lang="zh-CN" altLang="en-US" sz="3000" b="1" dirty="0">
-              <a:solidFill>
-                <a:schemeClr val="tx1"/>
-              </a:solidFill>
-              <a:latin typeface="Times New Roman" panose="02020603050405020304" pitchFamily="18" charset="0"/>
-              <a:ea typeface="SimSun" panose="02010600030101010101" pitchFamily="2" charset="-122"/>
-              <a:cs typeface="Times New Roman" panose="02020603050405020304" pitchFamily="18" charset="0"/>
-            </a:endParaRPr>
-          </a:p>
-        </p:txBody>
-      </p:sp>
       <p:pic>
         <p:nvPicPr>
           <p:cNvPr id="2" name="图片 1">
@@ -5186,7 +9675,7 @@
         </p:blipFill>
         <p:spPr>
           <a:xfrm>
-            <a:off x="0" y="1565872"/>
+            <a:off x="119656" y="1184496"/>
             <a:ext cx="4419827" cy="450873"/>
           </a:xfrm>
           <a:prstGeom prst="rect">
@@ -5216,7 +9705,7 @@
         </p:blipFill>
         <p:spPr>
           <a:xfrm>
-            <a:off x="16933" y="2879413"/>
+            <a:off x="5928138" y="1101942"/>
             <a:ext cx="4978656" cy="615982"/>
           </a:xfrm>
           <a:prstGeom prst="rect">
@@ -5224,12 +9713,180 @@
           </a:prstGeom>
         </p:spPr>
       </p:pic>
+      <p:sp>
+        <p:nvSpPr>
+          <p:cNvPr id="12" name="文本框 11">
+            <a:extLst>
+              <a:ext uri="{FF2B5EF4-FFF2-40B4-BE49-F238E27FC236}">
+                <a16:creationId xmlns:a16="http://schemas.microsoft.com/office/drawing/2014/main" id="{171BBBB7-B519-40D5-663E-C66180844A49}"/>
+              </a:ext>
+            </a:extLst>
+          </p:cNvPr>
+          <p:cNvSpPr txBox="1"/>
+          <p:nvPr/>
+        </p:nvSpPr>
+        <p:spPr>
+          <a:xfrm>
+            <a:off x="119656" y="1778500"/>
+            <a:ext cx="12192000" cy="830997"/>
+          </a:xfrm>
+          <a:prstGeom prst="rect">
+            <a:avLst/>
+          </a:prstGeom>
+          <a:noFill/>
+        </p:spPr>
+        <p:txBody>
+          <a:bodyPr wrap="square" rtlCol="0">
+            <a:spAutoFit/>
+          </a:bodyPr>
+          <a:lstStyle/>
+          <a:p>
+            <a:r>
+              <a:rPr lang="zh-CN" altLang="en-US" sz="2400" dirty="0">
+                <a:latin typeface="Times New Roman" panose="02020603050405020304" pitchFamily="18" charset="0"/>
+                <a:ea typeface="SimSun" panose="02010600030101010101" pitchFamily="2" charset="-122"/>
+                <a:cs typeface="Times New Roman" panose="02020603050405020304" pitchFamily="18" charset="0"/>
+              </a:rPr>
+              <a:t>这两个公式是</a:t>
+            </a:r>
+            <a:r>
+              <a:rPr lang="en-US" altLang="zh-CN" sz="2400" dirty="0">
+                <a:latin typeface="Times New Roman" panose="02020603050405020304" pitchFamily="18" charset="0"/>
+                <a:ea typeface="SimSun" panose="02010600030101010101" pitchFamily="2" charset="-122"/>
+                <a:cs typeface="Times New Roman" panose="02020603050405020304" pitchFamily="18" charset="0"/>
+              </a:rPr>
+              <a:t>policy update</a:t>
+            </a:r>
+            <a:r>
+              <a:rPr lang="zh-CN" altLang="en-US" sz="2400" dirty="0">
+                <a:latin typeface="Times New Roman" panose="02020603050405020304" pitchFamily="18" charset="0"/>
+                <a:ea typeface="SimSun" panose="02010600030101010101" pitchFamily="2" charset="-122"/>
+                <a:cs typeface="Times New Roman" panose="02020603050405020304" pitchFamily="18" charset="0"/>
+              </a:rPr>
+              <a:t>时根据不同方法去限制新策略的更新范围，一个是裁剪，一个是</a:t>
+            </a:r>
+            <a:r>
+              <a:rPr lang="en-US" altLang="zh-CN" sz="2400" dirty="0">
+                <a:latin typeface="Times New Roman" panose="02020603050405020304" pitchFamily="18" charset="0"/>
+                <a:ea typeface="SimSun" panose="02010600030101010101" pitchFamily="2" charset="-122"/>
+                <a:cs typeface="Times New Roman" panose="02020603050405020304" pitchFamily="18" charset="0"/>
+              </a:rPr>
+              <a:t>KL</a:t>
+            </a:r>
+            <a:r>
+              <a:rPr lang="zh-CN" altLang="en-US" sz="2400" dirty="0">
+                <a:latin typeface="Times New Roman" panose="02020603050405020304" pitchFamily="18" charset="0"/>
+                <a:ea typeface="SimSun" panose="02010600030101010101" pitchFamily="2" charset="-122"/>
+                <a:cs typeface="Times New Roman" panose="02020603050405020304" pitchFamily="18" charset="0"/>
+              </a:rPr>
+              <a:t>惩罚</a:t>
+            </a:r>
+            <a:endParaRPr lang="en-US" altLang="zh-CN" sz="2400" dirty="0">
+              <a:latin typeface="Times New Roman" panose="02020603050405020304" pitchFamily="18" charset="0"/>
+              <a:ea typeface="SimSun" panose="02010600030101010101" pitchFamily="2" charset="-122"/>
+              <a:cs typeface="Times New Roman" panose="02020603050405020304" pitchFamily="18" charset="0"/>
+            </a:endParaRPr>
+          </a:p>
+        </p:txBody>
+      </p:sp>
+      <p:sp>
+        <p:nvSpPr>
+          <p:cNvPr id="13" name="文本框 12">
+            <a:extLst>
+              <a:ext uri="{FF2B5EF4-FFF2-40B4-BE49-F238E27FC236}">
+                <a16:creationId xmlns:a16="http://schemas.microsoft.com/office/drawing/2014/main" id="{5456C4A1-59FC-281F-AE3C-025A030F47EA}"/>
+              </a:ext>
+            </a:extLst>
+          </p:cNvPr>
+          <p:cNvSpPr txBox="1"/>
+          <p:nvPr/>
+        </p:nvSpPr>
+        <p:spPr>
+          <a:xfrm>
+            <a:off x="50469" y="4490553"/>
+            <a:ext cx="12141531" cy="830997"/>
+          </a:xfrm>
+          <a:prstGeom prst="rect">
+            <a:avLst/>
+          </a:prstGeom>
+          <a:noFill/>
+        </p:spPr>
+        <p:txBody>
+          <a:bodyPr wrap="square" rtlCol="0">
+            <a:spAutoFit/>
+          </a:bodyPr>
+          <a:lstStyle/>
+          <a:p>
+            <a:r>
+              <a:rPr lang="zh-CN" altLang="en-US" sz="2400" dirty="0">
+                <a:latin typeface="Times New Roman" panose="02020603050405020304" pitchFamily="18" charset="0"/>
+                <a:ea typeface="SimSun" panose="02010600030101010101" pitchFamily="2" charset="-122"/>
+                <a:cs typeface="Times New Roman" panose="02020603050405020304" pitchFamily="18" charset="0"/>
+              </a:rPr>
+              <a:t>对于这两个式子，首先通过</a:t>
+            </a:r>
+            <a:r>
+              <a:rPr lang="en-US" altLang="zh-CN" sz="2400" dirty="0">
+                <a:latin typeface="Times New Roman" panose="02020603050405020304" pitchFamily="18" charset="0"/>
+                <a:ea typeface="SimSun" panose="02010600030101010101" pitchFamily="2" charset="-122"/>
+                <a:cs typeface="Times New Roman" panose="02020603050405020304" pitchFamily="18" charset="0"/>
+              </a:rPr>
+              <a:t>GME</a:t>
+            </a:r>
+            <a:r>
+              <a:rPr lang="zh-CN" altLang="en-US" sz="2400" dirty="0">
+                <a:latin typeface="Times New Roman" panose="02020603050405020304" pitchFamily="18" charset="0"/>
+                <a:ea typeface="SimSun" panose="02010600030101010101" pitchFamily="2" charset="-122"/>
+                <a:cs typeface="Times New Roman" panose="02020603050405020304" pitchFamily="18" charset="0"/>
+              </a:rPr>
+              <a:t>求解优势函数，也就是左边的式子。然后反推</a:t>
+            </a:r>
+            <a:r>
+              <a:rPr lang="en-US" altLang="zh-CN" sz="2400" dirty="0">
+                <a:latin typeface="Times New Roman" panose="02020603050405020304" pitchFamily="18" charset="0"/>
+                <a:ea typeface="SimSun" panose="02010600030101010101" pitchFamily="2" charset="-122"/>
+                <a:cs typeface="Times New Roman" panose="02020603050405020304" pitchFamily="18" charset="0"/>
+              </a:rPr>
+              <a:t>V(s)</a:t>
+            </a:r>
+            <a:r>
+              <a:rPr lang="zh-CN" altLang="en-US" sz="2400" dirty="0">
+                <a:latin typeface="Times New Roman" panose="02020603050405020304" pitchFamily="18" charset="0"/>
+                <a:ea typeface="SimSun" panose="02010600030101010101" pitchFamily="2" charset="-122"/>
+                <a:cs typeface="Times New Roman" panose="02020603050405020304" pitchFamily="18" charset="0"/>
+              </a:rPr>
+              <a:t>，也就是右边的式子，其用于</a:t>
+            </a:r>
+            <a:r>
+              <a:rPr lang="en-US" altLang="zh-CN" sz="2400" dirty="0">
+                <a:latin typeface="Times New Roman" panose="02020603050405020304" pitchFamily="18" charset="0"/>
+                <a:ea typeface="SimSun" panose="02010600030101010101" pitchFamily="2" charset="-122"/>
+                <a:cs typeface="Times New Roman" panose="02020603050405020304" pitchFamily="18" charset="0"/>
+              </a:rPr>
+              <a:t>value model</a:t>
+            </a:r>
+            <a:r>
+              <a:rPr lang="zh-CN" altLang="en-US" sz="2400" dirty="0">
+                <a:latin typeface="Times New Roman" panose="02020603050405020304" pitchFamily="18" charset="0"/>
+                <a:ea typeface="SimSun" panose="02010600030101010101" pitchFamily="2" charset="-122"/>
+                <a:cs typeface="Times New Roman" panose="02020603050405020304" pitchFamily="18" charset="0"/>
+              </a:rPr>
+              <a:t>中更新。</a:t>
+            </a:r>
+            <a:endParaRPr lang="en-US" altLang="zh-CN" sz="2400" dirty="0">
+              <a:latin typeface="Times New Roman" panose="02020603050405020304" pitchFamily="18" charset="0"/>
+              <a:ea typeface="SimSun" panose="02010600030101010101" pitchFamily="2" charset="-122"/>
+              <a:cs typeface="Times New Roman" panose="02020603050405020304" pitchFamily="18" charset="0"/>
+            </a:endParaRPr>
+          </a:p>
+        </p:txBody>
+      </p:sp>
       <p:pic>
         <p:nvPicPr>
-          <p:cNvPr id="9" name="图片 8">
-            <a:extLst>
-              <a:ext uri="{FF2B5EF4-FFF2-40B4-BE49-F238E27FC236}">
-                <a16:creationId xmlns:a16="http://schemas.microsoft.com/office/drawing/2014/main" id="{D81C33E5-EAD3-AE4F-FFFE-4D382B08D69B}"/>
+          <p:cNvPr id="3" name="图片 2">
+            <a:extLst>
+              <a:ext uri="{FF2B5EF4-FFF2-40B4-BE49-F238E27FC236}">
+                <a16:creationId xmlns:a16="http://schemas.microsoft.com/office/drawing/2014/main" id="{AF40BFD4-68CF-B84E-CDFD-368A83621323}"/>
               </a:ext>
             </a:extLst>
           </p:cNvPr>
@@ -5246,20 +9903,64 @@
         </p:blipFill>
         <p:spPr>
           <a:xfrm>
-            <a:off x="9327165" y="1602996"/>
-            <a:ext cx="1905098" cy="1276416"/>
+            <a:off x="4935705" y="2565920"/>
+            <a:ext cx="2320589" cy="592668"/>
           </a:xfrm>
           <a:prstGeom prst="rect">
             <a:avLst/>
           </a:prstGeom>
         </p:spPr>
       </p:pic>
+      <p:sp>
+        <p:nvSpPr>
+          <p:cNvPr id="6" name="文本框 5">
+            <a:extLst>
+              <a:ext uri="{FF2B5EF4-FFF2-40B4-BE49-F238E27FC236}">
+                <a16:creationId xmlns:a16="http://schemas.microsoft.com/office/drawing/2014/main" id="{18051C14-B365-489D-E595-2B7FC37AD1BF}"/>
+              </a:ext>
+            </a:extLst>
+          </p:cNvPr>
+          <p:cNvSpPr txBox="1"/>
+          <p:nvPr/>
+        </p:nvSpPr>
+        <p:spPr>
+          <a:xfrm>
+            <a:off x="50469" y="3198167"/>
+            <a:ext cx="12192000" cy="461665"/>
+          </a:xfrm>
+          <a:prstGeom prst="rect">
+            <a:avLst/>
+          </a:prstGeom>
+          <a:noFill/>
+        </p:spPr>
+        <p:txBody>
+          <a:bodyPr wrap="square" rtlCol="0">
+            <a:spAutoFit/>
+          </a:bodyPr>
+          <a:lstStyle/>
+          <a:p>
+            <a:r>
+              <a:rPr lang="zh-CN" altLang="en-US" sz="2400" dirty="0">
+                <a:latin typeface="Times New Roman" panose="02020603050405020304" pitchFamily="18" charset="0"/>
+                <a:ea typeface="SimSun" panose="02010600030101010101" pitchFamily="2" charset="-122"/>
+                <a:cs typeface="Times New Roman" panose="02020603050405020304" pitchFamily="18" charset="0"/>
+              </a:rPr>
+              <a:t>其中这个函数表示概率比，也就是新策略对比老策略的变化幅度</a:t>
+            </a:r>
+            <a:endParaRPr lang="en-US" altLang="zh-CN" sz="2400" dirty="0">
+              <a:latin typeface="Times New Roman" panose="02020603050405020304" pitchFamily="18" charset="0"/>
+              <a:ea typeface="SimSun" panose="02010600030101010101" pitchFamily="2" charset="-122"/>
+              <a:cs typeface="Times New Roman" panose="02020603050405020304" pitchFamily="18" charset="0"/>
+            </a:endParaRPr>
+          </a:p>
+        </p:txBody>
+      </p:sp>
       <p:pic>
         <p:nvPicPr>
-          <p:cNvPr id="10" name="图片 9">
-            <a:extLst>
-              <a:ext uri="{FF2B5EF4-FFF2-40B4-BE49-F238E27FC236}">
-                <a16:creationId xmlns:a16="http://schemas.microsoft.com/office/drawing/2014/main" id="{62F8F65E-7F61-92D1-5281-3D305024E6C7}"/>
+          <p:cNvPr id="7" name="图片 6">
+            <a:extLst>
+              <a:ext uri="{FF2B5EF4-FFF2-40B4-BE49-F238E27FC236}">
+                <a16:creationId xmlns:a16="http://schemas.microsoft.com/office/drawing/2014/main" id="{CB4318A9-6468-42BA-1ED5-E79561D93896}"/>
               </a:ext>
             </a:extLst>
           </p:cNvPr>
@@ -5276,20 +9977,80 @@
         </p:blipFill>
         <p:spPr>
           <a:xfrm>
-            <a:off x="9327165" y="2857475"/>
-            <a:ext cx="1892397" cy="495325"/>
+            <a:off x="7069782" y="3946008"/>
+            <a:ext cx="2404590" cy="367962"/>
           </a:xfrm>
           <a:prstGeom prst="rect">
             <a:avLst/>
           </a:prstGeom>
         </p:spPr>
       </p:pic>
-      <p:sp>
-        <p:nvSpPr>
-          <p:cNvPr id="12" name="文本框 11">
-            <a:extLst>
-              <a:ext uri="{FF2B5EF4-FFF2-40B4-BE49-F238E27FC236}">
-                <a16:creationId xmlns:a16="http://schemas.microsoft.com/office/drawing/2014/main" id="{171BBBB7-B519-40D5-663E-C66180844A49}"/>
+      <p:pic>
+        <p:nvPicPr>
+          <p:cNvPr id="8" name="图片 7">
+            <a:extLst>
+              <a:ext uri="{FF2B5EF4-FFF2-40B4-BE49-F238E27FC236}">
+                <a16:creationId xmlns:a16="http://schemas.microsoft.com/office/drawing/2014/main" id="{F839969A-DEFE-70AE-0FB0-4220E883AA77}"/>
+              </a:ext>
+            </a:extLst>
+          </p:cNvPr>
+          <p:cNvPicPr>
+            <a:picLocks noChangeAspect="1"/>
+          </p:cNvPicPr>
+          <p:nvPr/>
+        </p:nvPicPr>
+        <p:blipFill>
+          <a:blip r:embed="rId6"/>
+          <a:stretch>
+            <a:fillRect/>
+          </a:stretch>
+        </p:blipFill>
+        <p:spPr>
+          <a:xfrm>
+            <a:off x="3007970" y="5406928"/>
+            <a:ext cx="6714429" cy="595788"/>
+          </a:xfrm>
+          <a:prstGeom prst="rect">
+            <a:avLst/>
+          </a:prstGeom>
+        </p:spPr>
+      </p:pic>
+      <p:pic>
+        <p:nvPicPr>
+          <p:cNvPr id="11" name="图片 10">
+            <a:extLst>
+              <a:ext uri="{FF2B5EF4-FFF2-40B4-BE49-F238E27FC236}">
+                <a16:creationId xmlns:a16="http://schemas.microsoft.com/office/drawing/2014/main" id="{89B48803-FAEF-4E2F-3D10-5E51468A6212}"/>
+              </a:ext>
+            </a:extLst>
+          </p:cNvPr>
+          <p:cNvPicPr>
+            <a:picLocks noChangeAspect="1"/>
+          </p:cNvPicPr>
+          <p:nvPr/>
+        </p:nvPicPr>
+        <p:blipFill>
+          <a:blip r:embed="rId7"/>
+          <a:stretch>
+            <a:fillRect/>
+          </a:stretch>
+        </p:blipFill>
+        <p:spPr>
+          <a:xfrm>
+            <a:off x="664609" y="3738933"/>
+            <a:ext cx="4457611" cy="709811"/>
+          </a:xfrm>
+          <a:prstGeom prst="rect">
+            <a:avLst/>
+          </a:prstGeom>
+        </p:spPr>
+      </p:pic>
+      <p:sp>
+        <p:nvSpPr>
+          <p:cNvPr id="14" name="文本框 13">
+            <a:extLst>
+              <a:ext uri="{FF2B5EF4-FFF2-40B4-BE49-F238E27FC236}">
+                <a16:creationId xmlns:a16="http://schemas.microsoft.com/office/drawing/2014/main" id="{9F2B44CA-4B7A-1000-CED1-66A567796762}"/>
               </a:ext>
             </a:extLst>
           </p:cNvPr>
@@ -5298,8 +10059,8 @@
         </p:nvSpPr>
         <p:spPr>
           <a:xfrm>
-            <a:off x="24241" y="3978588"/>
-            <a:ext cx="12192000" cy="461665"/>
+            <a:off x="75703" y="5975233"/>
+            <a:ext cx="12141531" cy="461665"/>
           </a:xfrm>
           <a:prstGeom prst="rect">
             <a:avLst/>
@@ -5318,174 +10079,7 @@
                 <a:ea typeface="SimSun" panose="02010600030101010101" pitchFamily="2" charset="-122"/>
                 <a:cs typeface="Times New Roman" panose="02020603050405020304" pitchFamily="18" charset="0"/>
               </a:rPr>
-              <a:t>在</a:t>
-            </a:r>
-            <a:r>
-              <a:rPr lang="en-US" altLang="zh-CN" sz="2400" dirty="0">
-                <a:latin typeface="Times New Roman" panose="02020603050405020304" pitchFamily="18" charset="0"/>
-                <a:ea typeface="SimSun" panose="02010600030101010101" pitchFamily="2" charset="-122"/>
-                <a:cs typeface="Times New Roman" panose="02020603050405020304" pitchFamily="18" charset="0"/>
-              </a:rPr>
-              <a:t>actor</a:t>
-            </a:r>
-            <a:r>
-              <a:rPr lang="zh-CN" altLang="en-US" sz="2400" dirty="0">
-                <a:latin typeface="Times New Roman" panose="02020603050405020304" pitchFamily="18" charset="0"/>
-                <a:ea typeface="SimSun" panose="02010600030101010101" pitchFamily="2" charset="-122"/>
-                <a:cs typeface="Times New Roman" panose="02020603050405020304" pitchFamily="18" charset="0"/>
-              </a:rPr>
-              <a:t>部分学习策略，在</a:t>
-            </a:r>
-            <a:r>
-              <a:rPr lang="en-US" altLang="zh-CN" sz="2400" dirty="0">
-                <a:latin typeface="Times New Roman" panose="02020603050405020304" pitchFamily="18" charset="0"/>
-                <a:ea typeface="SimSun" panose="02010600030101010101" pitchFamily="2" charset="-122"/>
-                <a:cs typeface="Times New Roman" panose="02020603050405020304" pitchFamily="18" charset="0"/>
-              </a:rPr>
-              <a:t>value</a:t>
-            </a:r>
-            <a:r>
-              <a:rPr lang="zh-CN" altLang="en-US" sz="2400" dirty="0">
-                <a:latin typeface="Times New Roman" panose="02020603050405020304" pitchFamily="18" charset="0"/>
-                <a:ea typeface="SimSun" panose="02010600030101010101" pitchFamily="2" charset="-122"/>
-                <a:cs typeface="Times New Roman" panose="02020603050405020304" pitchFamily="18" charset="0"/>
-              </a:rPr>
-              <a:t>部分中学习</a:t>
-            </a:r>
-            <a:r>
-              <a:rPr lang="en-US" altLang="zh-CN" sz="2400" dirty="0">
-                <a:latin typeface="Times New Roman" panose="02020603050405020304" pitchFamily="18" charset="0"/>
-                <a:ea typeface="SimSun" panose="02010600030101010101" pitchFamily="2" charset="-122"/>
-                <a:cs typeface="Times New Roman" panose="02020603050405020304" pitchFamily="18" charset="0"/>
-              </a:rPr>
-              <a:t>baseline value</a:t>
-            </a:r>
-          </a:p>
-        </p:txBody>
-      </p:sp>
-      <p:sp>
-        <p:nvSpPr>
-          <p:cNvPr id="13" name="文本框 12">
-            <a:extLst>
-              <a:ext uri="{FF2B5EF4-FFF2-40B4-BE49-F238E27FC236}">
-                <a16:creationId xmlns:a16="http://schemas.microsoft.com/office/drawing/2014/main" id="{5456C4A1-59FC-281F-AE3C-025A030F47EA}"/>
-              </a:ext>
-            </a:extLst>
-          </p:cNvPr>
-          <p:cNvSpPr txBox="1"/>
-          <p:nvPr/>
-        </p:nvSpPr>
-        <p:spPr>
-          <a:xfrm>
-            <a:off x="3506802" y="4691963"/>
-            <a:ext cx="7090963" cy="1200329"/>
-          </a:xfrm>
-          <a:prstGeom prst="rect">
-            <a:avLst/>
-          </a:prstGeom>
-          <a:noFill/>
-        </p:spPr>
-        <p:txBody>
-          <a:bodyPr wrap="square" rtlCol="0">
-            <a:spAutoFit/>
-          </a:bodyPr>
-          <a:lstStyle/>
-          <a:p>
-            <a:r>
-              <a:rPr lang="zh-CN" altLang="en-US" sz="2400" dirty="0">
-                <a:latin typeface="Times New Roman" panose="02020603050405020304" pitchFamily="18" charset="0"/>
-                <a:ea typeface="SimSun" panose="02010600030101010101" pitchFamily="2" charset="-122"/>
-                <a:cs typeface="Times New Roman" panose="02020603050405020304" pitchFamily="18" charset="0"/>
-              </a:rPr>
-              <a:t>注意这个公式有一个迷惑的地方就是，用当前策略采样</a:t>
-            </a:r>
-            <a:r>
-              <a:rPr lang="de-DE" altLang="zh-CN" sz="2400" dirty="0">
-                <a:latin typeface="Times New Roman" panose="02020603050405020304" pitchFamily="18" charset="0"/>
-                <a:ea typeface="SimSun" panose="02010600030101010101" pitchFamily="2" charset="-122"/>
-                <a:cs typeface="Times New Roman" panose="02020603050405020304" pitchFamily="18" charset="0"/>
-              </a:rPr>
-              <a:t>trajectory</a:t>
-            </a:r>
-            <a:r>
-              <a:rPr lang="zh-CN" altLang="en-US" sz="2400" dirty="0">
-                <a:latin typeface="Times New Roman" panose="02020603050405020304" pitchFamily="18" charset="0"/>
-                <a:ea typeface="SimSun" panose="02010600030101010101" pitchFamily="2" charset="-122"/>
-                <a:cs typeface="Times New Roman" panose="02020603050405020304" pitchFamily="18" charset="0"/>
-              </a:rPr>
-              <a:t>。</a:t>
-            </a:r>
-            <a:r>
-              <a:rPr lang="de-DE" altLang="zh-CN" sz="2400" dirty="0">
-                <a:latin typeface="Times New Roman" panose="02020603050405020304" pitchFamily="18" charset="0"/>
-                <a:ea typeface="SimSun" panose="02010600030101010101" pitchFamily="2" charset="-122"/>
-                <a:cs typeface="Times New Roman" panose="02020603050405020304" pitchFamily="18" charset="0"/>
-              </a:rPr>
-              <a:t>GAE</a:t>
-            </a:r>
-            <a:r>
-              <a:rPr lang="zh-CN" altLang="en-US" sz="2400" dirty="0">
-                <a:latin typeface="Times New Roman" panose="02020603050405020304" pitchFamily="18" charset="0"/>
-                <a:ea typeface="SimSun" panose="02010600030101010101" pitchFamily="2" charset="-122"/>
-                <a:cs typeface="Times New Roman" panose="02020603050405020304" pitchFamily="18" charset="0"/>
-              </a:rPr>
-              <a:t>使用老数据，构造 </a:t>
-            </a:r>
-            <a:r>
-              <a:rPr lang="de-DE" altLang="zh-CN" sz="2400" dirty="0">
-                <a:latin typeface="Times New Roman" panose="02020603050405020304" pitchFamily="18" charset="0"/>
-                <a:ea typeface="SimSun" panose="02010600030101010101" pitchFamily="2" charset="-122"/>
-                <a:cs typeface="Times New Roman" panose="02020603050405020304" pitchFamily="18" charset="0"/>
-              </a:rPr>
-              <a:t>target</a:t>
-            </a:r>
-            <a:r>
-              <a:rPr lang="zh-CN" altLang="en-US" sz="2400" dirty="0">
-                <a:latin typeface="Times New Roman" panose="02020603050405020304" pitchFamily="18" charset="0"/>
-                <a:ea typeface="SimSun" panose="02010600030101010101" pitchFamily="2" charset="-122"/>
-                <a:cs typeface="Times New Roman" panose="02020603050405020304" pitchFamily="18" charset="0"/>
-              </a:rPr>
-              <a:t>用 </a:t>
-            </a:r>
-            <a:r>
-              <a:rPr lang="de-DE" altLang="zh-CN" sz="2400" dirty="0">
-                <a:latin typeface="Times New Roman" panose="02020603050405020304" pitchFamily="18" charset="0"/>
-                <a:ea typeface="SimSun" panose="02010600030101010101" pitchFamily="2" charset="-122"/>
-                <a:cs typeface="Times New Roman" panose="02020603050405020304" pitchFamily="18" charset="0"/>
-              </a:rPr>
-              <a:t>MSE </a:t>
-            </a:r>
-            <a:r>
-              <a:rPr lang="zh-CN" altLang="en-US" sz="2400" dirty="0">
-                <a:latin typeface="Times New Roman" panose="02020603050405020304" pitchFamily="18" charset="0"/>
-                <a:ea typeface="SimSun" panose="02010600030101010101" pitchFamily="2" charset="-122"/>
-                <a:cs typeface="Times New Roman" panose="02020603050405020304" pitchFamily="18" charset="0"/>
-              </a:rPr>
-              <a:t>更新 </a:t>
-            </a:r>
-            <a:r>
-              <a:rPr lang="de-DE" altLang="zh-CN" sz="2400" dirty="0">
-                <a:latin typeface="Times New Roman" panose="02020603050405020304" pitchFamily="18" charset="0"/>
-                <a:ea typeface="SimSun" panose="02010600030101010101" pitchFamily="2" charset="-122"/>
-                <a:cs typeface="Times New Roman" panose="02020603050405020304" pitchFamily="18" charset="0"/>
-              </a:rPr>
-              <a:t>V</a:t>
-            </a:r>
-            <a:r>
-              <a:rPr lang="el-GR" altLang="zh-CN" sz="2400" dirty="0">
-                <a:latin typeface="Times New Roman" panose="02020603050405020304" pitchFamily="18" charset="0"/>
-                <a:ea typeface="SimSun" panose="02010600030101010101" pitchFamily="2" charset="-122"/>
-                <a:cs typeface="Times New Roman" panose="02020603050405020304" pitchFamily="18" charset="0"/>
-              </a:rPr>
-              <a:t>ϕ	​</a:t>
-            </a:r>
-            <a:r>
-              <a:rPr lang="zh-CN" altLang="en-US" sz="2400" dirty="0">
-                <a:latin typeface="Times New Roman" panose="02020603050405020304" pitchFamily="18" charset="0"/>
-                <a:ea typeface="SimSun" panose="02010600030101010101" pitchFamily="2" charset="-122"/>
-                <a:cs typeface="Times New Roman" panose="02020603050405020304" pitchFamily="18" charset="0"/>
-              </a:rPr>
-              <a:t> </a:t>
+              <a:t>对于这式子也就是最终优化的目标，当然实际中不是优化期望</a:t>
             </a:r>
             <a:endParaRPr lang="en-US" altLang="zh-CN" sz="2400" dirty="0">
               <a:latin typeface="Times New Roman" panose="02020603050405020304" pitchFamily="18" charset="0"/>
@@ -5508,7 +10102,7 @@
 </p:sld>
 </file>
 
-<file path=ppt/slides/slide5.xml><?xml version="1.0" encoding="utf-8"?>
+<file path=ppt/slides/slide9.xml><?xml version="1.0" encoding="utf-8"?>
 <p:sld xmlns:a="http://schemas.openxmlformats.org/drawingml/2006/main" xmlns:r="http://schemas.openxmlformats.org/officeDocument/2006/relationships" xmlns:p="http://schemas.openxmlformats.org/presentationml/2006/main">
   <p:cSld>
     <p:spTree>
@@ -5608,7 +10202,7 @@
         <p:spPr>
           <a:xfrm>
             <a:off x="16933" y="1169470"/>
-            <a:ext cx="12192000" cy="4893647"/>
+            <a:ext cx="12192000" cy="5262979"/>
           </a:xfrm>
           <a:prstGeom prst="rect">
             <a:avLst/>
@@ -5658,6 +10252,64 @@
             </a:endParaRPr>
           </a:p>
           <a:p>
+            <a:r>
+              <a:rPr lang="en-US" altLang="zh-CN" sz="2400" dirty="0">
+                <a:latin typeface="Times New Roman" panose="02020603050405020304" pitchFamily="18" charset="0"/>
+                <a:ea typeface="SimSun" panose="02010600030101010101" pitchFamily="2" charset="-122"/>
+                <a:cs typeface="Times New Roman" panose="02020603050405020304" pitchFamily="18" charset="0"/>
+              </a:rPr>
+              <a:t>(</a:t>
+            </a:r>
+            <a:r>
+              <a:rPr lang="zh-CN" altLang="en-US" sz="2400" dirty="0">
+                <a:latin typeface="Times New Roman" panose="02020603050405020304" pitchFamily="18" charset="0"/>
+                <a:ea typeface="SimSun" panose="02010600030101010101" pitchFamily="2" charset="-122"/>
+                <a:cs typeface="Times New Roman" panose="02020603050405020304" pitchFamily="18" charset="0"/>
+              </a:rPr>
+              <a:t>注：但是在</a:t>
+            </a:r>
+            <a:r>
+              <a:rPr lang="en-US" altLang="zh-CN" sz="2400" dirty="0">
+                <a:latin typeface="Times New Roman" panose="02020603050405020304" pitchFamily="18" charset="0"/>
+                <a:ea typeface="SimSun" panose="02010600030101010101" pitchFamily="2" charset="-122"/>
+                <a:cs typeface="Times New Roman" panose="02020603050405020304" pitchFamily="18" charset="0"/>
+              </a:rPr>
+              <a:t>GRPO</a:t>
+            </a:r>
+            <a:r>
+              <a:rPr lang="zh-CN" altLang="en-US" sz="2400" dirty="0">
+                <a:latin typeface="Times New Roman" panose="02020603050405020304" pitchFamily="18" charset="0"/>
+                <a:ea typeface="SimSun" panose="02010600030101010101" pitchFamily="2" charset="-122"/>
+                <a:cs typeface="Times New Roman" panose="02020603050405020304" pitchFamily="18" charset="0"/>
+              </a:rPr>
+              <a:t>那里提到了如何设计</a:t>
+            </a:r>
+            <a:r>
+              <a:rPr lang="en-US" altLang="zh-CN" sz="2400" dirty="0">
+                <a:latin typeface="Times New Roman" panose="02020603050405020304" pitchFamily="18" charset="0"/>
+                <a:ea typeface="SimSun" panose="02010600030101010101" pitchFamily="2" charset="-122"/>
+                <a:cs typeface="Times New Roman" panose="02020603050405020304" pitchFamily="18" charset="0"/>
+              </a:rPr>
+              <a:t>GRPO</a:t>
+            </a:r>
+            <a:r>
+              <a:rPr lang="zh-CN" altLang="en-US" sz="2400" dirty="0">
+                <a:latin typeface="Times New Roman" panose="02020603050405020304" pitchFamily="18" charset="0"/>
+                <a:ea typeface="SimSun" panose="02010600030101010101" pitchFamily="2" charset="-122"/>
+                <a:cs typeface="Times New Roman" panose="02020603050405020304" pitchFamily="18" charset="0"/>
+              </a:rPr>
+              <a:t>的启发</a:t>
+            </a:r>
+            <a:r>
+              <a:rPr lang="en-US" altLang="zh-CN" sz="2400" dirty="0">
+                <a:latin typeface="Times New Roman" panose="02020603050405020304" pitchFamily="18" charset="0"/>
+                <a:ea typeface="SimSun" panose="02010600030101010101" pitchFamily="2" charset="-122"/>
+                <a:cs typeface="Times New Roman" panose="02020603050405020304" pitchFamily="18" charset="0"/>
+              </a:rPr>
+              <a:t>)</a:t>
+            </a:r>
+          </a:p>
+          <a:p>
             <a:endParaRPr lang="en-US" altLang="zh-CN" sz="2400" dirty="0">
               <a:latin typeface="SimSun" panose="02010600030101010101" pitchFamily="2" charset="-122"/>
               <a:ea typeface="SimSun" panose="02010600030101010101" pitchFamily="2" charset="-122"/>
@@ -5841,1912 +10493,6 @@
     <p:extLst>
       <p:ext uri="{BB962C8B-B14F-4D97-AF65-F5344CB8AC3E}">
         <p14:creationId xmlns:p14="http://schemas.microsoft.com/office/powerpoint/2010/main" val="4249399717"/>
-      </p:ext>
-    </p:extLst>
-  </p:cSld>
-  <p:clrMapOvr>
-    <a:masterClrMapping/>
-  </p:clrMapOvr>
-</p:sld>
-</file>
-
-<file path=ppt/slides/slide6.xml><?xml version="1.0" encoding="utf-8"?>
-<p:sld xmlns:a="http://schemas.openxmlformats.org/drawingml/2006/main" xmlns:r="http://schemas.openxmlformats.org/officeDocument/2006/relationships" xmlns:p="http://schemas.openxmlformats.org/presentationml/2006/main">
-  <p:cSld>
-    <p:spTree>
-      <p:nvGrpSpPr>
-        <p:cNvPr id="1" name="">
-          <a:extLst>
-            <a:ext uri="{FF2B5EF4-FFF2-40B4-BE49-F238E27FC236}">
-              <a16:creationId xmlns:a16="http://schemas.microsoft.com/office/drawing/2014/main" id="{E817489A-C7F8-FF9B-3EDC-641B9123E6AC}"/>
-            </a:ext>
-          </a:extLst>
-        </p:cNvPr>
-        <p:cNvGrpSpPr/>
-        <p:nvPr/>
-      </p:nvGrpSpPr>
-      <p:grpSpPr>
-        <a:xfrm>
-          <a:off x="0" y="0"/>
-          <a:ext cx="0" cy="0"/>
-          <a:chOff x="0" y="0"/>
-          <a:chExt cx="0" cy="0"/>
-        </a:xfrm>
-      </p:grpSpPr>
-      <p:sp>
-        <p:nvSpPr>
-          <p:cNvPr id="5" name="矩形 4">
-            <a:extLst>
-              <a:ext uri="{FF2B5EF4-FFF2-40B4-BE49-F238E27FC236}">
-                <a16:creationId xmlns:a16="http://schemas.microsoft.com/office/drawing/2014/main" id="{747952CB-A7B0-09A4-6B09-7EA699090AA5}"/>
-              </a:ext>
-            </a:extLst>
-          </p:cNvPr>
-          <p:cNvSpPr/>
-          <p:nvPr/>
-        </p:nvSpPr>
-        <p:spPr>
-          <a:xfrm>
-            <a:off x="0" y="105878"/>
-            <a:ext cx="10430933" cy="651933"/>
-          </a:xfrm>
-          <a:prstGeom prst="rect">
-            <a:avLst/>
-          </a:prstGeom>
-          <a:solidFill>
-            <a:schemeClr val="bg1"/>
-          </a:solidFill>
-          <a:ln>
-            <a:solidFill>
-              <a:schemeClr val="bg1"/>
-            </a:solidFill>
-          </a:ln>
-        </p:spPr>
-        <p:style>
-          <a:lnRef idx="2">
-            <a:schemeClr val="accent1">
-              <a:shade val="15000"/>
-            </a:schemeClr>
-          </a:lnRef>
-          <a:fillRef idx="1">
-            <a:schemeClr val="accent1"/>
-          </a:fillRef>
-          <a:effectRef idx="0">
-            <a:schemeClr val="accent1"/>
-          </a:effectRef>
-          <a:fontRef idx="minor">
-            <a:schemeClr val="lt1"/>
-          </a:fontRef>
-        </p:style>
-        <p:txBody>
-          <a:bodyPr rtlCol="0" anchor="ctr"/>
-          <a:lstStyle/>
-          <a:p>
-            <a:r>
-              <a:rPr lang="en-US" altLang="zh-CN" sz="3000" dirty="0">
-                <a:solidFill>
-                  <a:schemeClr val="tx1"/>
-                </a:solidFill>
-                <a:latin typeface="Times New Roman" panose="02020603050405020304" pitchFamily="18" charset="0"/>
-                <a:cs typeface="Times New Roman" panose="02020603050405020304" pitchFamily="18" charset="0"/>
-              </a:rPr>
-              <a:t>DeepSeekMath: Pushing the Limits of Mathematical Reasoning in Open Language Models</a:t>
-            </a:r>
-          </a:p>
-        </p:txBody>
-      </p:sp>
-      <p:sp>
-        <p:nvSpPr>
-          <p:cNvPr id="7" name="文本框 6">
-            <a:extLst>
-              <a:ext uri="{FF2B5EF4-FFF2-40B4-BE49-F238E27FC236}">
-                <a16:creationId xmlns:a16="http://schemas.microsoft.com/office/drawing/2014/main" id="{8CB5EDC4-8EAC-4C8C-9E6C-9DEECE258BDD}"/>
-              </a:ext>
-            </a:extLst>
-          </p:cNvPr>
-          <p:cNvSpPr txBox="1"/>
-          <p:nvPr/>
-        </p:nvSpPr>
-        <p:spPr>
-          <a:xfrm>
-            <a:off x="-4635" y="1338311"/>
-            <a:ext cx="12192000" cy="5632311"/>
-          </a:xfrm>
-          <a:prstGeom prst="rect">
-            <a:avLst/>
-          </a:prstGeom>
-          <a:noFill/>
-        </p:spPr>
-        <p:txBody>
-          <a:bodyPr wrap="square" rtlCol="0">
-            <a:spAutoFit/>
-          </a:bodyPr>
-          <a:lstStyle/>
-          <a:p>
-            <a:r>
-              <a:rPr lang="en-US" altLang="zh-CN" sz="2400" dirty="0">
-                <a:latin typeface="Times New Roman" panose="02020603050405020304" pitchFamily="18" charset="0"/>
-                <a:ea typeface="SimSun" panose="02010600030101010101" pitchFamily="2" charset="-122"/>
-                <a:cs typeface="Times New Roman" panose="02020603050405020304" pitchFamily="18" charset="0"/>
-              </a:rPr>
-              <a:t>PPO</a:t>
-            </a:r>
-            <a:r>
-              <a:rPr lang="zh-CN" altLang="en-US" sz="2400" dirty="0">
-                <a:latin typeface="Times New Roman" panose="02020603050405020304" pitchFamily="18" charset="0"/>
-                <a:ea typeface="SimSun" panose="02010600030101010101" pitchFamily="2" charset="-122"/>
-                <a:cs typeface="Times New Roman" panose="02020603050405020304" pitchFamily="18" charset="0"/>
-              </a:rPr>
-              <a:t>的问题：</a:t>
-            </a:r>
-            <a:r>
-              <a:rPr lang="en-US" altLang="zh-CN" sz="2400" dirty="0">
-                <a:latin typeface="Times New Roman" panose="02020603050405020304" pitchFamily="18" charset="0"/>
-                <a:ea typeface="SimSun" panose="02010600030101010101" pitchFamily="2" charset="-122"/>
-                <a:cs typeface="Times New Roman" panose="02020603050405020304" pitchFamily="18" charset="0"/>
-              </a:rPr>
-              <a:t>1. </a:t>
-            </a:r>
-            <a:r>
-              <a:rPr lang="zh-CN" altLang="en-US" sz="2400" dirty="0">
-                <a:latin typeface="Times New Roman" panose="02020603050405020304" pitchFamily="18" charset="0"/>
-                <a:ea typeface="SimSun" panose="02010600030101010101" pitchFamily="2" charset="-122"/>
-                <a:cs typeface="Times New Roman" panose="02020603050405020304" pitchFamily="18" charset="0"/>
-              </a:rPr>
-              <a:t>同时训练一个价值函数与策略模型，导致计算量太大。</a:t>
-            </a:r>
-            <a:endParaRPr lang="en-US" altLang="zh-CN" sz="2400" dirty="0">
-              <a:latin typeface="Times New Roman" panose="02020603050405020304" pitchFamily="18" charset="0"/>
-              <a:ea typeface="SimSun" panose="02010600030101010101" pitchFamily="2" charset="-122"/>
-              <a:cs typeface="Times New Roman" panose="02020603050405020304" pitchFamily="18" charset="0"/>
-            </a:endParaRPr>
-          </a:p>
-          <a:p>
-            <a:r>
-              <a:rPr lang="en-US" altLang="zh-CN" sz="2400" dirty="0">
-                <a:latin typeface="Times New Roman" panose="02020603050405020304" pitchFamily="18" charset="0"/>
-                <a:ea typeface="SimSun" panose="02010600030101010101" pitchFamily="2" charset="-122"/>
-                <a:cs typeface="Times New Roman" panose="02020603050405020304" pitchFamily="18" charset="0"/>
-              </a:rPr>
-              <a:t>		2. </a:t>
-            </a:r>
-            <a:r>
-              <a:rPr lang="zh-CN" altLang="en-US" sz="2400" dirty="0">
-                <a:latin typeface="Times New Roman" panose="02020603050405020304" pitchFamily="18" charset="0"/>
-                <a:ea typeface="SimSun" panose="02010600030101010101" pitchFamily="2" charset="-122"/>
-                <a:cs typeface="Times New Roman" panose="02020603050405020304" pitchFamily="18" charset="0"/>
-              </a:rPr>
-              <a:t>价值函数难以迁移到</a:t>
-            </a:r>
-            <a:r>
-              <a:rPr lang="en-US" altLang="zh-CN" sz="2400" dirty="0">
-                <a:latin typeface="Times New Roman" panose="02020603050405020304" pitchFamily="18" charset="0"/>
-                <a:ea typeface="SimSun" panose="02010600030101010101" pitchFamily="2" charset="-122"/>
-                <a:cs typeface="Times New Roman" panose="02020603050405020304" pitchFamily="18" charset="0"/>
-              </a:rPr>
-              <a:t>LLM</a:t>
-            </a:r>
-            <a:r>
-              <a:rPr lang="zh-CN" altLang="en-US" sz="2400" dirty="0">
-                <a:latin typeface="Times New Roman" panose="02020603050405020304" pitchFamily="18" charset="0"/>
-                <a:ea typeface="SimSun" panose="02010600030101010101" pitchFamily="2" charset="-122"/>
-                <a:cs typeface="Times New Roman" panose="02020603050405020304" pitchFamily="18" charset="0"/>
-              </a:rPr>
-              <a:t>场景中，因为通常只有最后一个 </a:t>
-            </a:r>
-            <a:r>
-              <a:rPr lang="en-US" altLang="zh-CN" sz="2400" dirty="0">
-                <a:latin typeface="Times New Roman" panose="02020603050405020304" pitchFamily="18" charset="0"/>
-                <a:ea typeface="SimSun" panose="02010600030101010101" pitchFamily="2" charset="-122"/>
-                <a:cs typeface="Times New Roman" panose="02020603050405020304" pitchFamily="18" charset="0"/>
-              </a:rPr>
-              <a:t>token </a:t>
-            </a:r>
-            <a:r>
-              <a:rPr lang="zh-CN" altLang="en-US" sz="2400" dirty="0">
-                <a:latin typeface="Times New Roman" panose="02020603050405020304" pitchFamily="18" charset="0"/>
-                <a:ea typeface="SimSun" panose="02010600030101010101" pitchFamily="2" charset="-122"/>
-                <a:cs typeface="Times New Roman" panose="02020603050405020304" pitchFamily="18" charset="0"/>
-              </a:rPr>
-              <a:t>会被奖励</a:t>
-            </a:r>
-            <a:r>
-              <a:rPr lang="en-US" altLang="zh-CN" sz="2400" dirty="0">
-                <a:latin typeface="Times New Roman" panose="02020603050405020304" pitchFamily="18" charset="0"/>
-                <a:ea typeface="SimSun" panose="02010600030101010101" pitchFamily="2" charset="-122"/>
-                <a:cs typeface="Times New Roman" panose="02020603050405020304" pitchFamily="18" charset="0"/>
-              </a:rPr>
-              <a:t>			</a:t>
-            </a:r>
-            <a:r>
-              <a:rPr lang="zh-CN" altLang="en-US" sz="2400" dirty="0">
-                <a:latin typeface="Times New Roman" panose="02020603050405020304" pitchFamily="18" charset="0"/>
-                <a:ea typeface="SimSun" panose="02010600030101010101" pitchFamily="2" charset="-122"/>
-                <a:cs typeface="Times New Roman" panose="02020603050405020304" pitchFamily="18" charset="0"/>
-              </a:rPr>
-              <a:t>模型赋予奖励，这使得在每个 </a:t>
-            </a:r>
-            <a:r>
-              <a:rPr lang="en-US" altLang="zh-CN" sz="2400" dirty="0">
-                <a:latin typeface="Times New Roman" panose="02020603050405020304" pitchFamily="18" charset="0"/>
-                <a:ea typeface="SimSun" panose="02010600030101010101" pitchFamily="2" charset="-122"/>
-                <a:cs typeface="Times New Roman" panose="02020603050405020304" pitchFamily="18" charset="0"/>
-              </a:rPr>
-              <a:t>token </a:t>
-            </a:r>
-            <a:r>
-              <a:rPr lang="zh-CN" altLang="en-US" sz="2400" dirty="0">
-                <a:latin typeface="Times New Roman" panose="02020603050405020304" pitchFamily="18" charset="0"/>
-                <a:ea typeface="SimSun" panose="02010600030101010101" pitchFamily="2" charset="-122"/>
-                <a:cs typeface="Times New Roman" panose="02020603050405020304" pitchFamily="18" charset="0"/>
-              </a:rPr>
-              <a:t>上学习价值函数变得更加困难。</a:t>
-            </a:r>
-            <a:endParaRPr lang="en-US" altLang="zh-CN" sz="2400" dirty="0">
-              <a:latin typeface="Times New Roman" panose="02020603050405020304" pitchFamily="18" charset="0"/>
-              <a:ea typeface="SimSun" panose="02010600030101010101" pitchFamily="2" charset="-122"/>
-              <a:cs typeface="Times New Roman" panose="02020603050405020304" pitchFamily="18" charset="0"/>
-            </a:endParaRPr>
-          </a:p>
-          <a:p>
-            <a:r>
-              <a:rPr lang="zh-CN" altLang="en-US" sz="2400" dirty="0">
-                <a:latin typeface="Times New Roman" panose="02020603050405020304" pitchFamily="18" charset="0"/>
-                <a:ea typeface="SimSun" panose="02010600030101010101" pitchFamily="2" charset="-122"/>
-                <a:cs typeface="Times New Roman" panose="02020603050405020304" pitchFamily="18" charset="0"/>
-              </a:rPr>
-              <a:t>因此在</a:t>
-            </a:r>
-            <a:r>
-              <a:rPr lang="en-US" altLang="zh-CN" sz="2400" dirty="0">
-                <a:latin typeface="Times New Roman" panose="02020603050405020304" pitchFamily="18" charset="0"/>
-                <a:ea typeface="SimSun" panose="02010600030101010101" pitchFamily="2" charset="-122"/>
-                <a:cs typeface="Times New Roman" panose="02020603050405020304" pitchFamily="18" charset="0"/>
-              </a:rPr>
-              <a:t>PPO</a:t>
-            </a:r>
-            <a:r>
-              <a:rPr lang="zh-CN" altLang="en-US" sz="2400" dirty="0">
-                <a:latin typeface="Times New Roman" panose="02020603050405020304" pitchFamily="18" charset="0"/>
-                <a:ea typeface="SimSun" panose="02010600030101010101" pitchFamily="2" charset="-122"/>
-                <a:cs typeface="Times New Roman" panose="02020603050405020304" pitchFamily="18" charset="0"/>
-              </a:rPr>
-              <a:t>的基础上进行更改得到了</a:t>
-            </a:r>
-            <a:r>
-              <a:rPr lang="en-US" altLang="zh-CN" sz="2400" dirty="0">
-                <a:latin typeface="Times New Roman" panose="02020603050405020304" pitchFamily="18" charset="0"/>
-                <a:ea typeface="SimSun" panose="02010600030101010101" pitchFamily="2" charset="-122"/>
-                <a:cs typeface="Times New Roman" panose="02020603050405020304" pitchFamily="18" charset="0"/>
-              </a:rPr>
-              <a:t>GRPO</a:t>
-            </a:r>
-          </a:p>
-          <a:p>
-            <a:endParaRPr lang="en-US" altLang="zh-CN" sz="2400" dirty="0">
-              <a:latin typeface="Times New Roman" panose="02020603050405020304" pitchFamily="18" charset="0"/>
-              <a:ea typeface="SimSun" panose="02010600030101010101" pitchFamily="2" charset="-122"/>
-              <a:cs typeface="Times New Roman" panose="02020603050405020304" pitchFamily="18" charset="0"/>
-            </a:endParaRPr>
-          </a:p>
-          <a:p>
-            <a:endParaRPr lang="en-US" altLang="zh-CN" sz="2400" dirty="0">
-              <a:latin typeface="Times New Roman" panose="02020603050405020304" pitchFamily="18" charset="0"/>
-              <a:ea typeface="SimSun" panose="02010600030101010101" pitchFamily="2" charset="-122"/>
-              <a:cs typeface="Times New Roman" panose="02020603050405020304" pitchFamily="18" charset="0"/>
-            </a:endParaRPr>
-          </a:p>
-          <a:p>
-            <a:endParaRPr lang="en-US" altLang="zh-CN" sz="2400" dirty="0">
-              <a:latin typeface="Times New Roman" panose="02020603050405020304" pitchFamily="18" charset="0"/>
-              <a:ea typeface="SimSun" panose="02010600030101010101" pitchFamily="2" charset="-122"/>
-              <a:cs typeface="Times New Roman" panose="02020603050405020304" pitchFamily="18" charset="0"/>
-            </a:endParaRPr>
-          </a:p>
-          <a:p>
-            <a:endParaRPr lang="en-US" altLang="zh-CN" sz="2400" dirty="0">
-              <a:latin typeface="Times New Roman" panose="02020603050405020304" pitchFamily="18" charset="0"/>
-              <a:ea typeface="SimSun" panose="02010600030101010101" pitchFamily="2" charset="-122"/>
-              <a:cs typeface="Times New Roman" panose="02020603050405020304" pitchFamily="18" charset="0"/>
-            </a:endParaRPr>
-          </a:p>
-          <a:p>
-            <a:endParaRPr lang="en-US" altLang="zh-CN" sz="2400" dirty="0">
-              <a:latin typeface="Times New Roman" panose="02020603050405020304" pitchFamily="18" charset="0"/>
-              <a:ea typeface="SimSun" panose="02010600030101010101" pitchFamily="2" charset="-122"/>
-              <a:cs typeface="Times New Roman" panose="02020603050405020304" pitchFamily="18" charset="0"/>
-            </a:endParaRPr>
-          </a:p>
-          <a:p>
-            <a:endParaRPr lang="en-US" altLang="zh-CN" sz="2400" dirty="0">
-              <a:latin typeface="Times New Roman" panose="02020603050405020304" pitchFamily="18" charset="0"/>
-              <a:ea typeface="SimSun" panose="02010600030101010101" pitchFamily="2" charset="-122"/>
-              <a:cs typeface="Times New Roman" panose="02020603050405020304" pitchFamily="18" charset="0"/>
-            </a:endParaRPr>
-          </a:p>
-          <a:p>
-            <a:endParaRPr lang="en-US" altLang="zh-CN" sz="2400" dirty="0">
-              <a:latin typeface="Times New Roman" panose="02020603050405020304" pitchFamily="18" charset="0"/>
-              <a:ea typeface="SimSun" panose="02010600030101010101" pitchFamily="2" charset="-122"/>
-              <a:cs typeface="Times New Roman" panose="02020603050405020304" pitchFamily="18" charset="0"/>
-            </a:endParaRPr>
-          </a:p>
-          <a:p>
-            <a:endParaRPr lang="en-US" altLang="zh-CN" sz="2400" dirty="0">
-              <a:latin typeface="Times New Roman" panose="02020603050405020304" pitchFamily="18" charset="0"/>
-              <a:ea typeface="SimSun" panose="02010600030101010101" pitchFamily="2" charset="-122"/>
-              <a:cs typeface="Times New Roman" panose="02020603050405020304" pitchFamily="18" charset="0"/>
-            </a:endParaRPr>
-          </a:p>
-          <a:p>
-            <a:endParaRPr lang="en-US" altLang="zh-CN" sz="2400" dirty="0">
-              <a:latin typeface="Times New Roman" panose="02020603050405020304" pitchFamily="18" charset="0"/>
-              <a:ea typeface="SimSun" panose="02010600030101010101" pitchFamily="2" charset="-122"/>
-              <a:cs typeface="Times New Roman" panose="02020603050405020304" pitchFamily="18" charset="0"/>
-            </a:endParaRPr>
-          </a:p>
-          <a:p>
-            <a:endParaRPr lang="en-US" altLang="zh-CN" sz="2400" dirty="0">
-              <a:latin typeface="Times New Roman" panose="02020603050405020304" pitchFamily="18" charset="0"/>
-              <a:ea typeface="SimSun" panose="02010600030101010101" pitchFamily="2" charset="-122"/>
-              <a:cs typeface="Times New Roman" panose="02020603050405020304" pitchFamily="18" charset="0"/>
-            </a:endParaRPr>
-          </a:p>
-          <a:p>
-            <a:r>
-              <a:rPr lang="en-US" altLang="zh-CN" sz="2400" dirty="0">
-                <a:latin typeface="Times New Roman" panose="02020603050405020304" pitchFamily="18" charset="0"/>
-                <a:ea typeface="SimSun" panose="02010600030101010101" pitchFamily="2" charset="-122"/>
-                <a:cs typeface="Times New Roman" panose="02020603050405020304" pitchFamily="18" charset="0"/>
-              </a:rPr>
-              <a:t>		PPO</a:t>
-            </a:r>
-            <a:r>
-              <a:rPr lang="zh-CN" altLang="en-US" sz="2400" dirty="0">
-                <a:latin typeface="Times New Roman" panose="02020603050405020304" pitchFamily="18" charset="0"/>
-                <a:ea typeface="SimSun" panose="02010600030101010101" pitchFamily="2" charset="-122"/>
-                <a:cs typeface="Times New Roman" panose="02020603050405020304" pitchFamily="18" charset="0"/>
-              </a:rPr>
-              <a:t>与</a:t>
-            </a:r>
-            <a:r>
-              <a:rPr lang="en-US" altLang="zh-CN" sz="2400" dirty="0">
-                <a:latin typeface="Times New Roman" panose="02020603050405020304" pitchFamily="18" charset="0"/>
-                <a:ea typeface="SimSun" panose="02010600030101010101" pitchFamily="2" charset="-122"/>
-                <a:cs typeface="Times New Roman" panose="02020603050405020304" pitchFamily="18" charset="0"/>
-              </a:rPr>
-              <a:t>GRPO</a:t>
-            </a:r>
-            <a:r>
-              <a:rPr lang="zh-CN" altLang="en-US" sz="2400" dirty="0">
-                <a:latin typeface="Times New Roman" panose="02020603050405020304" pitchFamily="18" charset="0"/>
-                <a:ea typeface="SimSun" panose="02010600030101010101" pitchFamily="2" charset="-122"/>
-                <a:cs typeface="Times New Roman" panose="02020603050405020304" pitchFamily="18" charset="0"/>
-              </a:rPr>
-              <a:t>结合</a:t>
-            </a:r>
-            <a:r>
-              <a:rPr lang="en-US" altLang="zh-CN" sz="2400" dirty="0">
-                <a:latin typeface="Times New Roman" panose="02020603050405020304" pitchFamily="18" charset="0"/>
-                <a:ea typeface="SimSun" panose="02010600030101010101" pitchFamily="2" charset="-122"/>
-                <a:cs typeface="Times New Roman" panose="02020603050405020304" pitchFamily="18" charset="0"/>
-              </a:rPr>
-              <a:t>LLM</a:t>
-            </a:r>
-            <a:r>
-              <a:rPr lang="zh-CN" altLang="en-US" sz="2400" dirty="0">
-                <a:latin typeface="Times New Roman" panose="02020603050405020304" pitchFamily="18" charset="0"/>
-                <a:ea typeface="SimSun" panose="02010600030101010101" pitchFamily="2" charset="-122"/>
-                <a:cs typeface="Times New Roman" panose="02020603050405020304" pitchFamily="18" charset="0"/>
-              </a:rPr>
-              <a:t>更新图</a:t>
-            </a:r>
-            <a:endParaRPr lang="en-US" altLang="zh-CN" sz="2400" dirty="0">
-              <a:latin typeface="Times New Roman" panose="02020603050405020304" pitchFamily="18" charset="0"/>
-              <a:ea typeface="SimSun" panose="02010600030101010101" pitchFamily="2" charset="-122"/>
-              <a:cs typeface="Times New Roman" panose="02020603050405020304" pitchFamily="18" charset="0"/>
-            </a:endParaRPr>
-          </a:p>
-        </p:txBody>
-      </p:sp>
-      <p:pic>
-        <p:nvPicPr>
-          <p:cNvPr id="2" name="图片 1">
-            <a:extLst>
-              <a:ext uri="{FF2B5EF4-FFF2-40B4-BE49-F238E27FC236}">
-                <a16:creationId xmlns:a16="http://schemas.microsoft.com/office/drawing/2014/main" id="{732B7AFF-8347-2898-3555-07765125613E}"/>
-              </a:ext>
-            </a:extLst>
-          </p:cNvPr>
-          <p:cNvPicPr>
-            <a:picLocks noChangeAspect="1"/>
-          </p:cNvPicPr>
-          <p:nvPr/>
-        </p:nvPicPr>
-        <p:blipFill>
-          <a:blip r:embed="rId2"/>
-          <a:stretch>
-            <a:fillRect/>
-          </a:stretch>
-        </p:blipFill>
-        <p:spPr>
-          <a:xfrm>
-            <a:off x="-4635" y="2893275"/>
-            <a:ext cx="8114047" cy="3429484"/>
-          </a:xfrm>
-          <a:prstGeom prst="rect">
-            <a:avLst/>
-          </a:prstGeom>
-        </p:spPr>
-      </p:pic>
-      <p:sp>
-        <p:nvSpPr>
-          <p:cNvPr id="3" name="文本框 2">
-            <a:extLst>
-              <a:ext uri="{FF2B5EF4-FFF2-40B4-BE49-F238E27FC236}">
-                <a16:creationId xmlns:a16="http://schemas.microsoft.com/office/drawing/2014/main" id="{E4B298B2-1948-84F1-2A26-D3517B9080E9}"/>
-              </a:ext>
-            </a:extLst>
-          </p:cNvPr>
-          <p:cNvSpPr txBox="1"/>
-          <p:nvPr/>
-        </p:nvSpPr>
-        <p:spPr>
-          <a:xfrm>
-            <a:off x="8082504" y="2893275"/>
-            <a:ext cx="4104861" cy="2308324"/>
-          </a:xfrm>
-          <a:prstGeom prst="rect">
-            <a:avLst/>
-          </a:prstGeom>
-          <a:noFill/>
-        </p:spPr>
-        <p:txBody>
-          <a:bodyPr wrap="square" rtlCol="0">
-            <a:spAutoFit/>
-          </a:bodyPr>
-          <a:lstStyle/>
-          <a:p>
-            <a:r>
-              <a:rPr lang="zh-CN" altLang="en-US" sz="2400" dirty="0">
-                <a:latin typeface="Times New Roman" panose="02020603050405020304" pitchFamily="18" charset="0"/>
-                <a:ea typeface="SimSun" panose="02010600030101010101" pitchFamily="2" charset="-122"/>
-                <a:cs typeface="Times New Roman" panose="02020603050405020304" pitchFamily="18" charset="0"/>
-              </a:rPr>
-              <a:t>我认为，这两种方法有一条共同的线：</a:t>
-            </a:r>
-            <a:r>
-              <a:rPr lang="en-US" altLang="zh-CN" sz="2400" dirty="0">
-                <a:latin typeface="Times New Roman" panose="02020603050405020304" pitchFamily="18" charset="0"/>
-                <a:ea typeface="SimSun" panose="02010600030101010101" pitchFamily="2" charset="-122"/>
-                <a:cs typeface="Times New Roman" panose="02020603050405020304" pitchFamily="18" charset="0"/>
-              </a:rPr>
-              <a:t>1.</a:t>
-            </a:r>
-            <a:r>
-              <a:rPr lang="zh-CN" altLang="en-US" sz="2400" dirty="0">
-                <a:latin typeface="Times New Roman" panose="02020603050405020304" pitchFamily="18" charset="0"/>
-                <a:ea typeface="SimSun" panose="02010600030101010101" pitchFamily="2" charset="-122"/>
-                <a:cs typeface="Times New Roman" panose="02020603050405020304" pitchFamily="18" charset="0"/>
-              </a:rPr>
-              <a:t>对于问题，通过当前</a:t>
-            </a:r>
-            <a:r>
-              <a:rPr lang="en-US" altLang="zh-CN" sz="2400" dirty="0">
-                <a:latin typeface="Times New Roman" panose="02020603050405020304" pitchFamily="18" charset="0"/>
-                <a:ea typeface="SimSun" panose="02010600030101010101" pitchFamily="2" charset="-122"/>
-                <a:cs typeface="Times New Roman" panose="02020603050405020304" pitchFamily="18" charset="0"/>
-              </a:rPr>
-              <a:t>policy</a:t>
-            </a:r>
-            <a:r>
-              <a:rPr lang="zh-CN" altLang="en-US" sz="2400" dirty="0">
-                <a:latin typeface="Times New Roman" panose="02020603050405020304" pitchFamily="18" charset="0"/>
-                <a:ea typeface="SimSun" panose="02010600030101010101" pitchFamily="2" charset="-122"/>
-                <a:cs typeface="Times New Roman" panose="02020603050405020304" pitchFamily="18" charset="0"/>
-              </a:rPr>
-              <a:t>回答答案。</a:t>
-            </a:r>
-            <a:r>
-              <a:rPr lang="en-US" altLang="zh-CN" sz="2400" dirty="0">
-                <a:latin typeface="Times New Roman" panose="02020603050405020304" pitchFamily="18" charset="0"/>
-                <a:ea typeface="SimSun" panose="02010600030101010101" pitchFamily="2" charset="-122"/>
-                <a:cs typeface="Times New Roman" panose="02020603050405020304" pitchFamily="18" charset="0"/>
-              </a:rPr>
-              <a:t>2.</a:t>
-            </a:r>
-            <a:r>
-              <a:rPr lang="zh-CN" altLang="en-US" sz="2400" dirty="0">
-                <a:latin typeface="Times New Roman" panose="02020603050405020304" pitchFamily="18" charset="0"/>
-                <a:ea typeface="SimSun" panose="02010600030101010101" pitchFamily="2" charset="-122"/>
-                <a:cs typeface="Times New Roman" panose="02020603050405020304" pitchFamily="18" charset="0"/>
-              </a:rPr>
-              <a:t>然后对答案打分获得</a:t>
-            </a:r>
-            <a:r>
-              <a:rPr lang="en-US" altLang="zh-CN" sz="2400" dirty="0">
-                <a:latin typeface="Times New Roman" panose="02020603050405020304" pitchFamily="18" charset="0"/>
-                <a:ea typeface="SimSun" panose="02010600030101010101" pitchFamily="2" charset="-122"/>
-                <a:cs typeface="Times New Roman" panose="02020603050405020304" pitchFamily="18" charset="0"/>
-              </a:rPr>
-              <a:t>reward</a:t>
-            </a:r>
-            <a:r>
-              <a:rPr lang="zh-CN" altLang="en-US" sz="2400" dirty="0">
-                <a:latin typeface="Times New Roman" panose="02020603050405020304" pitchFamily="18" charset="0"/>
-                <a:ea typeface="SimSun" panose="02010600030101010101" pitchFamily="2" charset="-122"/>
-                <a:cs typeface="Times New Roman" panose="02020603050405020304" pitchFamily="18" charset="0"/>
-              </a:rPr>
-              <a:t>。</a:t>
-            </a:r>
-            <a:r>
-              <a:rPr lang="en-US" altLang="zh-CN" sz="2400" dirty="0">
-                <a:latin typeface="Times New Roman" panose="02020603050405020304" pitchFamily="18" charset="0"/>
-                <a:ea typeface="SimSun" panose="02010600030101010101" pitchFamily="2" charset="-122"/>
-                <a:cs typeface="Times New Roman" panose="02020603050405020304" pitchFamily="18" charset="0"/>
-              </a:rPr>
-              <a:t>3.</a:t>
-            </a:r>
-            <a:r>
-              <a:rPr lang="zh-CN" altLang="en-US" sz="2400" dirty="0">
-                <a:latin typeface="Times New Roman" panose="02020603050405020304" pitchFamily="18" charset="0"/>
-                <a:ea typeface="SimSun" panose="02010600030101010101" pitchFamily="2" charset="-122"/>
-                <a:cs typeface="Times New Roman" panose="02020603050405020304" pitchFamily="18" charset="0"/>
-              </a:rPr>
-              <a:t>接着去生成</a:t>
-            </a:r>
-            <a:r>
-              <a:rPr lang="en-US" altLang="zh-CN" sz="2400" dirty="0">
-                <a:latin typeface="Times New Roman" panose="02020603050405020304" pitchFamily="18" charset="0"/>
-                <a:ea typeface="SimSun" panose="02010600030101010101" pitchFamily="2" charset="-122"/>
-                <a:cs typeface="Times New Roman" panose="02020603050405020304" pitchFamily="18" charset="0"/>
-              </a:rPr>
-              <a:t>advantage value </a:t>
-            </a:r>
-            <a:r>
-              <a:rPr lang="zh-CN" altLang="en-US" sz="2400" dirty="0">
-                <a:latin typeface="Times New Roman" panose="02020603050405020304" pitchFamily="18" charset="0"/>
-                <a:ea typeface="SimSun" panose="02010600030101010101" pitchFamily="2" charset="-122"/>
-                <a:cs typeface="Times New Roman" panose="02020603050405020304" pitchFamily="18" charset="0"/>
-              </a:rPr>
-              <a:t>，再反馈到</a:t>
-            </a:r>
-            <a:r>
-              <a:rPr lang="en-US" altLang="zh-CN" sz="2400" dirty="0">
-                <a:latin typeface="Times New Roman" panose="02020603050405020304" pitchFamily="18" charset="0"/>
-                <a:ea typeface="SimSun" panose="02010600030101010101" pitchFamily="2" charset="-122"/>
-                <a:cs typeface="Times New Roman" panose="02020603050405020304" pitchFamily="18" charset="0"/>
-              </a:rPr>
-              <a:t>policy model</a:t>
-            </a:r>
-            <a:r>
-              <a:rPr lang="zh-CN" altLang="en-US" sz="2400" dirty="0">
-                <a:latin typeface="Times New Roman" panose="02020603050405020304" pitchFamily="18" charset="0"/>
-                <a:ea typeface="SimSun" panose="02010600030101010101" pitchFamily="2" charset="-122"/>
-                <a:cs typeface="Times New Roman" panose="02020603050405020304" pitchFamily="18" charset="0"/>
-              </a:rPr>
-              <a:t>更新策略。</a:t>
-            </a:r>
-            <a:endParaRPr lang="en-US" altLang="zh-CN" sz="2400" dirty="0">
-              <a:latin typeface="Times New Roman" panose="02020603050405020304" pitchFamily="18" charset="0"/>
-              <a:ea typeface="SimSun" panose="02010600030101010101" pitchFamily="2" charset="-122"/>
-              <a:cs typeface="Times New Roman" panose="02020603050405020304" pitchFamily="18" charset="0"/>
-            </a:endParaRPr>
-          </a:p>
-        </p:txBody>
-      </p:sp>
-    </p:spTree>
-    <p:extLst>
-      <p:ext uri="{BB962C8B-B14F-4D97-AF65-F5344CB8AC3E}">
-        <p14:creationId xmlns:p14="http://schemas.microsoft.com/office/powerpoint/2010/main" val="573784222"/>
-      </p:ext>
-    </p:extLst>
-  </p:cSld>
-  <p:clrMapOvr>
-    <a:masterClrMapping/>
-  </p:clrMapOvr>
-</p:sld>
-</file>
-
-<file path=ppt/slides/slide7.xml><?xml version="1.0" encoding="utf-8"?>
-<p:sld xmlns:a="http://schemas.openxmlformats.org/drawingml/2006/main" xmlns:r="http://schemas.openxmlformats.org/officeDocument/2006/relationships" xmlns:p="http://schemas.openxmlformats.org/presentationml/2006/main">
-  <p:cSld>
-    <p:spTree>
-      <p:nvGrpSpPr>
-        <p:cNvPr id="1" name="">
-          <a:extLst>
-            <a:ext uri="{FF2B5EF4-FFF2-40B4-BE49-F238E27FC236}">
-              <a16:creationId xmlns:a16="http://schemas.microsoft.com/office/drawing/2014/main" id="{CAE03897-52A2-6F6A-47B0-78A8DEDBFBE6}"/>
-            </a:ext>
-          </a:extLst>
-        </p:cNvPr>
-        <p:cNvGrpSpPr/>
-        <p:nvPr/>
-      </p:nvGrpSpPr>
-      <p:grpSpPr>
-        <a:xfrm>
-          <a:off x="0" y="0"/>
-          <a:ext cx="0" cy="0"/>
-          <a:chOff x="0" y="0"/>
-          <a:chExt cx="0" cy="0"/>
-        </a:xfrm>
-      </p:grpSpPr>
-      <p:sp>
-        <p:nvSpPr>
-          <p:cNvPr id="5" name="矩形 4">
-            <a:extLst>
-              <a:ext uri="{FF2B5EF4-FFF2-40B4-BE49-F238E27FC236}">
-                <a16:creationId xmlns:a16="http://schemas.microsoft.com/office/drawing/2014/main" id="{9E3C8BFD-2B36-227E-912E-F76384AD5EF6}"/>
-              </a:ext>
-            </a:extLst>
-          </p:cNvPr>
-          <p:cNvSpPr/>
-          <p:nvPr/>
-        </p:nvSpPr>
-        <p:spPr>
-          <a:xfrm>
-            <a:off x="0" y="105878"/>
-            <a:ext cx="10430933" cy="651933"/>
-          </a:xfrm>
-          <a:prstGeom prst="rect">
-            <a:avLst/>
-          </a:prstGeom>
-          <a:solidFill>
-            <a:schemeClr val="bg1"/>
-          </a:solidFill>
-          <a:ln>
-            <a:solidFill>
-              <a:schemeClr val="bg1"/>
-            </a:solidFill>
-          </a:ln>
-        </p:spPr>
-        <p:style>
-          <a:lnRef idx="2">
-            <a:schemeClr val="accent1">
-              <a:shade val="15000"/>
-            </a:schemeClr>
-          </a:lnRef>
-          <a:fillRef idx="1">
-            <a:schemeClr val="accent1"/>
-          </a:fillRef>
-          <a:effectRef idx="0">
-            <a:schemeClr val="accent1"/>
-          </a:effectRef>
-          <a:fontRef idx="minor">
-            <a:schemeClr val="lt1"/>
-          </a:fontRef>
-        </p:style>
-        <p:txBody>
-          <a:bodyPr rtlCol="0" anchor="ctr"/>
-          <a:lstStyle/>
-          <a:p>
-            <a:r>
-              <a:rPr lang="en-US" altLang="zh-CN" sz="3000" dirty="0">
-                <a:solidFill>
-                  <a:schemeClr val="tx1"/>
-                </a:solidFill>
-                <a:latin typeface="Times New Roman" panose="02020603050405020304" pitchFamily="18" charset="0"/>
-                <a:cs typeface="Times New Roman" panose="02020603050405020304" pitchFamily="18" charset="0"/>
-              </a:rPr>
-              <a:t>DeepSeekMath: Pushing the Limits of Mathematical Reasoning in Open Language Models</a:t>
-            </a:r>
-          </a:p>
-        </p:txBody>
-      </p:sp>
-      <p:sp>
-        <p:nvSpPr>
-          <p:cNvPr id="7" name="文本框 6">
-            <a:extLst>
-              <a:ext uri="{FF2B5EF4-FFF2-40B4-BE49-F238E27FC236}">
-                <a16:creationId xmlns:a16="http://schemas.microsoft.com/office/drawing/2014/main" id="{736C4C3F-4DEC-AE96-5A5A-4199C258F795}"/>
-              </a:ext>
-            </a:extLst>
-          </p:cNvPr>
-          <p:cNvSpPr txBox="1"/>
-          <p:nvPr/>
-        </p:nvSpPr>
-        <p:spPr>
-          <a:xfrm>
-            <a:off x="-4635" y="1338311"/>
-            <a:ext cx="12192000" cy="1200329"/>
-          </a:xfrm>
-          <a:prstGeom prst="rect">
-            <a:avLst/>
-          </a:prstGeom>
-          <a:noFill/>
-        </p:spPr>
-        <p:txBody>
-          <a:bodyPr wrap="square" rtlCol="0">
-            <a:spAutoFit/>
-          </a:bodyPr>
-          <a:lstStyle/>
-          <a:p>
-            <a:r>
-              <a:rPr lang="zh-CN" altLang="en-US" sz="2400" dirty="0">
-                <a:latin typeface="Times New Roman" panose="02020603050405020304" pitchFamily="18" charset="0"/>
-                <a:ea typeface="SimSun" panose="02010600030101010101" pitchFamily="2" charset="-122"/>
-                <a:cs typeface="Times New Roman" panose="02020603050405020304" pitchFamily="18" charset="0"/>
-              </a:rPr>
-              <a:t>核心公式：</a:t>
-            </a:r>
-            <a:endParaRPr lang="en-US" altLang="zh-CN" sz="2400" dirty="0">
-              <a:latin typeface="Times New Roman" panose="02020603050405020304" pitchFamily="18" charset="0"/>
-              <a:ea typeface="SimSun" panose="02010600030101010101" pitchFamily="2" charset="-122"/>
-              <a:cs typeface="Times New Roman" panose="02020603050405020304" pitchFamily="18" charset="0"/>
-            </a:endParaRPr>
-          </a:p>
-          <a:p>
-            <a:endParaRPr lang="en-US" altLang="zh-CN" sz="2400" dirty="0">
-              <a:latin typeface="Times New Roman" panose="02020603050405020304" pitchFamily="18" charset="0"/>
-              <a:ea typeface="SimSun" panose="02010600030101010101" pitchFamily="2" charset="-122"/>
-              <a:cs typeface="Times New Roman" panose="02020603050405020304" pitchFamily="18" charset="0"/>
-            </a:endParaRPr>
-          </a:p>
-          <a:p>
-            <a:endParaRPr lang="en-US" altLang="zh-CN" sz="2400" dirty="0">
-              <a:latin typeface="Times New Roman" panose="02020603050405020304" pitchFamily="18" charset="0"/>
-              <a:ea typeface="SimSun" panose="02010600030101010101" pitchFamily="2" charset="-122"/>
-              <a:cs typeface="Times New Roman" panose="02020603050405020304" pitchFamily="18" charset="0"/>
-            </a:endParaRPr>
-          </a:p>
-        </p:txBody>
-      </p:sp>
-      <p:pic>
-        <p:nvPicPr>
-          <p:cNvPr id="4" name="图片 3">
-            <a:extLst>
-              <a:ext uri="{FF2B5EF4-FFF2-40B4-BE49-F238E27FC236}">
-                <a16:creationId xmlns:a16="http://schemas.microsoft.com/office/drawing/2014/main" id="{776EDB3F-583F-E721-6881-151893DC1B41}"/>
-              </a:ext>
-            </a:extLst>
-          </p:cNvPr>
-          <p:cNvPicPr>
-            <a:picLocks noChangeAspect="1"/>
-          </p:cNvPicPr>
-          <p:nvPr/>
-        </p:nvPicPr>
-        <p:blipFill>
-          <a:blip r:embed="rId2"/>
-          <a:stretch>
-            <a:fillRect/>
-          </a:stretch>
-        </p:blipFill>
-        <p:spPr>
-          <a:xfrm>
-            <a:off x="1546475" y="1338311"/>
-            <a:ext cx="6948956" cy="858237"/>
-          </a:xfrm>
-          <a:prstGeom prst="rect">
-            <a:avLst/>
-          </a:prstGeom>
-        </p:spPr>
-      </p:pic>
-      <p:sp>
-        <p:nvSpPr>
-          <p:cNvPr id="6" name="文本框 5">
-            <a:extLst>
-              <a:ext uri="{FF2B5EF4-FFF2-40B4-BE49-F238E27FC236}">
-                <a16:creationId xmlns:a16="http://schemas.microsoft.com/office/drawing/2014/main" id="{FD521D96-1E9A-C1A0-F651-28A0F43A6BEC}"/>
-              </a:ext>
-            </a:extLst>
-          </p:cNvPr>
-          <p:cNvSpPr txBox="1"/>
-          <p:nvPr/>
-        </p:nvSpPr>
-        <p:spPr>
-          <a:xfrm>
-            <a:off x="88130" y="2282183"/>
-            <a:ext cx="12192000" cy="1569660"/>
-          </a:xfrm>
-          <a:prstGeom prst="rect">
-            <a:avLst/>
-          </a:prstGeom>
-          <a:noFill/>
-        </p:spPr>
-        <p:txBody>
-          <a:bodyPr wrap="square" rtlCol="0">
-            <a:spAutoFit/>
-          </a:bodyPr>
-          <a:lstStyle/>
-          <a:p>
-            <a:r>
-              <a:rPr lang="zh-CN" altLang="en-US" sz="2400" dirty="0">
-                <a:latin typeface="Times New Roman" panose="02020603050405020304" pitchFamily="18" charset="0"/>
-                <a:ea typeface="SimSun" panose="02010600030101010101" pitchFamily="2" charset="-122"/>
-                <a:cs typeface="Times New Roman" panose="02020603050405020304" pitchFamily="18" charset="0"/>
-              </a:rPr>
-              <a:t>首先，</a:t>
-            </a:r>
-            <a:r>
-              <a:rPr lang="en-US" altLang="zh-CN" sz="2400" dirty="0">
-                <a:latin typeface="Times New Roman" panose="02020603050405020304" pitchFamily="18" charset="0"/>
-                <a:ea typeface="SimSun" panose="02010600030101010101" pitchFamily="2" charset="-122"/>
-                <a:cs typeface="Times New Roman" panose="02020603050405020304" pitchFamily="18" charset="0"/>
-              </a:rPr>
-              <a:t>GRPO</a:t>
-            </a:r>
-            <a:r>
-              <a:rPr lang="zh-CN" altLang="en-US" sz="2400" dirty="0">
-                <a:latin typeface="Times New Roman" panose="02020603050405020304" pitchFamily="18" charset="0"/>
-                <a:ea typeface="SimSun" panose="02010600030101010101" pitchFamily="2" charset="-122"/>
-                <a:cs typeface="Times New Roman" panose="02020603050405020304" pitchFamily="18" charset="0"/>
-              </a:rPr>
-              <a:t>将</a:t>
-            </a:r>
-            <a:r>
-              <a:rPr lang="en-US" altLang="zh-CN" sz="2400" dirty="0">
-                <a:latin typeface="Times New Roman" panose="02020603050405020304" pitchFamily="18" charset="0"/>
-                <a:ea typeface="SimSun" panose="02010600030101010101" pitchFamily="2" charset="-122"/>
-                <a:cs typeface="Times New Roman" panose="02020603050405020304" pitchFamily="18" charset="0"/>
-              </a:rPr>
-              <a:t>KL</a:t>
-            </a:r>
-            <a:r>
-              <a:rPr lang="zh-CN" altLang="en-US" sz="2400" dirty="0">
-                <a:latin typeface="Times New Roman" panose="02020603050405020304" pitchFamily="18" charset="0"/>
-                <a:ea typeface="SimSun" panose="02010600030101010101" pitchFamily="2" charset="-122"/>
-                <a:cs typeface="Times New Roman" panose="02020603050405020304" pitchFamily="18" charset="0"/>
-              </a:rPr>
-              <a:t>惩罚项直接用到</a:t>
-            </a:r>
-            <a:r>
-              <a:rPr lang="en-US" altLang="zh-CN" sz="2400" dirty="0">
-                <a:latin typeface="Times New Roman" panose="02020603050405020304" pitchFamily="18" charset="0"/>
-                <a:ea typeface="SimSun" panose="02010600030101010101" pitchFamily="2" charset="-122"/>
-                <a:cs typeface="Times New Roman" panose="02020603050405020304" pitchFamily="18" charset="0"/>
-              </a:rPr>
-              <a:t>Policy</a:t>
-            </a:r>
-            <a:r>
-              <a:rPr lang="zh-CN" altLang="en-US" sz="2400" dirty="0">
-                <a:latin typeface="Times New Roman" panose="02020603050405020304" pitchFamily="18" charset="0"/>
-                <a:ea typeface="SimSun" panose="02010600030101010101" pitchFamily="2" charset="-122"/>
-                <a:cs typeface="Times New Roman" panose="02020603050405020304" pitchFamily="18" charset="0"/>
-              </a:rPr>
-              <a:t>的更新中。</a:t>
-            </a:r>
-            <a:endParaRPr lang="en-US" altLang="zh-CN" sz="2400" dirty="0">
-              <a:latin typeface="Times New Roman" panose="02020603050405020304" pitchFamily="18" charset="0"/>
-              <a:ea typeface="SimSun" panose="02010600030101010101" pitchFamily="2" charset="-122"/>
-              <a:cs typeface="Times New Roman" panose="02020603050405020304" pitchFamily="18" charset="0"/>
-            </a:endParaRPr>
-          </a:p>
-          <a:p>
-            <a:r>
-              <a:rPr lang="zh-CN" altLang="en-US" sz="2400" dirty="0">
-                <a:latin typeface="Times New Roman" panose="02020603050405020304" pitchFamily="18" charset="0"/>
-                <a:ea typeface="SimSun" panose="02010600030101010101" pitchFamily="2" charset="-122"/>
-                <a:cs typeface="Times New Roman" panose="02020603050405020304" pitchFamily="18" charset="0"/>
-              </a:rPr>
-              <a:t>其次，因为不需要训练</a:t>
-            </a:r>
-            <a:r>
-              <a:rPr lang="en-US" altLang="zh-CN" sz="2400" dirty="0">
-                <a:latin typeface="Times New Roman" panose="02020603050405020304" pitchFamily="18" charset="0"/>
-                <a:ea typeface="SimSun" panose="02010600030101010101" pitchFamily="2" charset="-122"/>
-                <a:cs typeface="Times New Roman" panose="02020603050405020304" pitchFamily="18" charset="0"/>
-              </a:rPr>
-              <a:t>value</a:t>
-            </a:r>
-            <a:r>
-              <a:rPr lang="zh-CN" altLang="en-US" sz="2400" dirty="0">
-                <a:latin typeface="Times New Roman" panose="02020603050405020304" pitchFamily="18" charset="0"/>
-                <a:ea typeface="SimSun" panose="02010600030101010101" pitchFamily="2" charset="-122"/>
-                <a:cs typeface="Times New Roman" panose="02020603050405020304" pitchFamily="18" charset="0"/>
-              </a:rPr>
-              <a:t>模型，因此</a:t>
-            </a:r>
-            <a:r>
-              <a:rPr lang="en-US" altLang="zh-CN" sz="2400" dirty="0">
-                <a:latin typeface="Times New Roman" panose="02020603050405020304" pitchFamily="18" charset="0"/>
-                <a:ea typeface="SimSun" panose="02010600030101010101" pitchFamily="2" charset="-122"/>
-                <a:cs typeface="Times New Roman" panose="02020603050405020304" pitchFamily="18" charset="0"/>
-              </a:rPr>
-              <a:t>advantage value </a:t>
-            </a:r>
-            <a:r>
-              <a:rPr lang="zh-CN" altLang="en-US" sz="2400" dirty="0">
-                <a:latin typeface="Times New Roman" panose="02020603050405020304" pitchFamily="18" charset="0"/>
-                <a:ea typeface="SimSun" panose="02010600030101010101" pitchFamily="2" charset="-122"/>
-                <a:cs typeface="Times New Roman" panose="02020603050405020304" pitchFamily="18" charset="0"/>
-              </a:rPr>
-              <a:t>的求解也与</a:t>
-            </a:r>
-            <a:r>
-              <a:rPr lang="en-US" altLang="zh-CN" sz="2400" dirty="0">
-                <a:latin typeface="Times New Roman" panose="02020603050405020304" pitchFamily="18" charset="0"/>
-                <a:ea typeface="SimSun" panose="02010600030101010101" pitchFamily="2" charset="-122"/>
-                <a:cs typeface="Times New Roman" panose="02020603050405020304" pitchFamily="18" charset="0"/>
-              </a:rPr>
-              <a:t>PPO</a:t>
-            </a:r>
-            <a:r>
-              <a:rPr lang="zh-CN" altLang="en-US" sz="2400" dirty="0">
-                <a:latin typeface="Times New Roman" panose="02020603050405020304" pitchFamily="18" charset="0"/>
-                <a:ea typeface="SimSun" panose="02010600030101010101" pitchFamily="2" charset="-122"/>
-                <a:cs typeface="Times New Roman" panose="02020603050405020304" pitchFamily="18" charset="0"/>
-              </a:rPr>
-              <a:t>不同，</a:t>
-            </a:r>
-            <a:r>
-              <a:rPr lang="en-US" altLang="zh-CN" sz="2400" dirty="0">
-                <a:latin typeface="Times New Roman" panose="02020603050405020304" pitchFamily="18" charset="0"/>
-                <a:ea typeface="SimSun" panose="02010600030101010101" pitchFamily="2" charset="-122"/>
-                <a:cs typeface="Times New Roman" panose="02020603050405020304" pitchFamily="18" charset="0"/>
-              </a:rPr>
-              <a:t>GRPO</a:t>
-            </a:r>
-            <a:r>
-              <a:rPr lang="zh-CN" altLang="en-US" sz="2400" dirty="0">
-                <a:latin typeface="Times New Roman" panose="02020603050405020304" pitchFamily="18" charset="0"/>
-                <a:ea typeface="SimSun" panose="02010600030101010101" pitchFamily="2" charset="-122"/>
-                <a:cs typeface="Times New Roman" panose="02020603050405020304" pitchFamily="18" charset="0"/>
-              </a:rPr>
-              <a:t>用的是组内比较的方式。</a:t>
-            </a:r>
-            <a:r>
-              <a:rPr lang="en-US" altLang="zh-CN" sz="2400" dirty="0">
-                <a:latin typeface="Times New Roman" panose="02020603050405020304" pitchFamily="18" charset="0"/>
-                <a:ea typeface="SimSun" panose="02010600030101010101" pitchFamily="2" charset="-122"/>
-                <a:cs typeface="Times New Roman" panose="02020603050405020304" pitchFamily="18" charset="0"/>
-              </a:rPr>
-              <a:t>(</a:t>
-            </a:r>
-            <a:r>
-              <a:rPr lang="zh-CN" altLang="en-US" sz="2400" dirty="0">
-                <a:latin typeface="Times New Roman" panose="02020603050405020304" pitchFamily="18" charset="0"/>
-                <a:ea typeface="SimSun" panose="02010600030101010101" pitchFamily="2" charset="-122"/>
-                <a:cs typeface="Times New Roman" panose="02020603050405020304" pitchFamily="18" charset="0"/>
-              </a:rPr>
-              <a:t>注：</a:t>
-            </a:r>
-            <a:r>
-              <a:rPr lang="en-US" altLang="zh-CN" sz="2400" dirty="0">
-                <a:latin typeface="Times New Roman" panose="02020603050405020304" pitchFamily="18" charset="0"/>
-                <a:ea typeface="SimSun" panose="02010600030101010101" pitchFamily="2" charset="-122"/>
-                <a:cs typeface="Times New Roman" panose="02020603050405020304" pitchFamily="18" charset="0"/>
-              </a:rPr>
-              <a:t>GRPO</a:t>
-            </a:r>
-            <a:r>
-              <a:rPr lang="zh-CN" altLang="en-US" sz="2400" dirty="0">
-                <a:latin typeface="Times New Roman" panose="02020603050405020304" pitchFamily="18" charset="0"/>
-                <a:ea typeface="SimSun" panose="02010600030101010101" pitchFamily="2" charset="-122"/>
-                <a:cs typeface="Times New Roman" panose="02020603050405020304" pitchFamily="18" charset="0"/>
-              </a:rPr>
-              <a:t>三个变体的计算方式不同</a:t>
-            </a:r>
-            <a:r>
-              <a:rPr lang="en-US" altLang="zh-CN" sz="2400" dirty="0">
-                <a:latin typeface="Times New Roman" panose="02020603050405020304" pitchFamily="18" charset="0"/>
-                <a:ea typeface="SimSun" panose="02010600030101010101" pitchFamily="2" charset="-122"/>
-                <a:cs typeface="Times New Roman" panose="02020603050405020304" pitchFamily="18" charset="0"/>
-              </a:rPr>
-              <a:t>)</a:t>
-            </a:r>
-          </a:p>
-          <a:p>
-            <a:r>
-              <a:rPr lang="zh-CN" altLang="en-US" sz="2400" dirty="0">
-                <a:latin typeface="Times New Roman" panose="02020603050405020304" pitchFamily="18" charset="0"/>
-                <a:ea typeface="SimSun" panose="02010600030101010101" pitchFamily="2" charset="-122"/>
-                <a:cs typeface="Times New Roman" panose="02020603050405020304" pitchFamily="18" charset="0"/>
-              </a:rPr>
-              <a:t>最后，因为不需要再训练</a:t>
-            </a:r>
-            <a:r>
-              <a:rPr lang="en-US" altLang="zh-CN" sz="2400" dirty="0">
-                <a:latin typeface="Times New Roman" panose="02020603050405020304" pitchFamily="18" charset="0"/>
-                <a:ea typeface="SimSun" panose="02010600030101010101" pitchFamily="2" charset="-122"/>
-                <a:cs typeface="Times New Roman" panose="02020603050405020304" pitchFamily="18" charset="0"/>
-              </a:rPr>
-              <a:t>value model </a:t>
-            </a:r>
-            <a:r>
-              <a:rPr lang="zh-CN" altLang="en-US" sz="2400" dirty="0">
-                <a:latin typeface="Times New Roman" panose="02020603050405020304" pitchFamily="18" charset="0"/>
-                <a:ea typeface="SimSun" panose="02010600030101010101" pitchFamily="2" charset="-122"/>
-                <a:cs typeface="Times New Roman" panose="02020603050405020304" pitchFamily="18" charset="0"/>
-              </a:rPr>
-              <a:t>因此直接训练</a:t>
-            </a:r>
-            <a:r>
-              <a:rPr lang="en-US" altLang="zh-CN" sz="2400" dirty="0">
-                <a:latin typeface="Times New Roman" panose="02020603050405020304" pitchFamily="18" charset="0"/>
-                <a:ea typeface="SimSun" panose="02010600030101010101" pitchFamily="2" charset="-122"/>
-                <a:cs typeface="Times New Roman" panose="02020603050405020304" pitchFamily="18" charset="0"/>
-              </a:rPr>
-              <a:t>policy model</a:t>
-            </a:r>
-            <a:r>
-              <a:rPr lang="zh-CN" altLang="en-US" sz="2400" dirty="0">
-                <a:latin typeface="Times New Roman" panose="02020603050405020304" pitchFamily="18" charset="0"/>
-                <a:ea typeface="SimSun" panose="02010600030101010101" pitchFamily="2" charset="-122"/>
-                <a:cs typeface="Times New Roman" panose="02020603050405020304" pitchFamily="18" charset="0"/>
-              </a:rPr>
-              <a:t>就行。</a:t>
-            </a:r>
-            <a:endParaRPr lang="en-US" altLang="zh-CN" sz="2400" dirty="0">
-              <a:latin typeface="Times New Roman" panose="02020603050405020304" pitchFamily="18" charset="0"/>
-              <a:ea typeface="SimSun" panose="02010600030101010101" pitchFamily="2" charset="-122"/>
-              <a:cs typeface="Times New Roman" panose="02020603050405020304" pitchFamily="18" charset="0"/>
-            </a:endParaRPr>
-          </a:p>
-        </p:txBody>
-      </p:sp>
-      <p:sp>
-        <p:nvSpPr>
-          <p:cNvPr id="9" name="文本框 8">
-            <a:extLst>
-              <a:ext uri="{FF2B5EF4-FFF2-40B4-BE49-F238E27FC236}">
-                <a16:creationId xmlns:a16="http://schemas.microsoft.com/office/drawing/2014/main" id="{277FDE94-3772-4A90-60D8-BFCA38309B27}"/>
-              </a:ext>
-            </a:extLst>
-          </p:cNvPr>
-          <p:cNvSpPr txBox="1"/>
-          <p:nvPr/>
-        </p:nvSpPr>
-        <p:spPr>
-          <a:xfrm>
-            <a:off x="88130" y="5058024"/>
-            <a:ext cx="12192000" cy="1200329"/>
-          </a:xfrm>
-          <a:prstGeom prst="rect">
-            <a:avLst/>
-          </a:prstGeom>
-          <a:noFill/>
-        </p:spPr>
-        <p:txBody>
-          <a:bodyPr wrap="square" rtlCol="0">
-            <a:spAutoFit/>
-          </a:bodyPr>
-          <a:lstStyle/>
-          <a:p>
-            <a:r>
-              <a:rPr lang="zh-CN" altLang="en-US" sz="2400" dirty="0">
-                <a:latin typeface="Times New Roman" panose="02020603050405020304" pitchFamily="18" charset="0"/>
-                <a:ea typeface="SimSun" panose="02010600030101010101" pitchFamily="2" charset="-122"/>
-                <a:cs typeface="Times New Roman" panose="02020603050405020304" pitchFamily="18" charset="0"/>
-              </a:rPr>
-              <a:t>注意这个范式很有意思，他将如</a:t>
-            </a:r>
-            <a:r>
-              <a:rPr lang="en-US" altLang="zh-CN" sz="2400" dirty="0">
-                <a:latin typeface="Times New Roman" panose="02020603050405020304" pitchFamily="18" charset="0"/>
-                <a:ea typeface="SimSun" panose="02010600030101010101" pitchFamily="2" charset="-122"/>
-                <a:cs typeface="Times New Roman" panose="02020603050405020304" pitchFamily="18" charset="0"/>
-              </a:rPr>
-              <a:t>PPO,GRPO</a:t>
-            </a:r>
-            <a:r>
-              <a:rPr lang="zh-CN" altLang="en-US" sz="2400" dirty="0">
-                <a:latin typeface="Times New Roman" panose="02020603050405020304" pitchFamily="18" charset="0"/>
-                <a:ea typeface="SimSun" panose="02010600030101010101" pitchFamily="2" charset="-122"/>
-                <a:cs typeface="Times New Roman" panose="02020603050405020304" pitchFamily="18" charset="0"/>
-              </a:rPr>
-              <a:t>这些方法按照数据来源，算法和奖励模型划分，但感觉</a:t>
-            </a:r>
-            <a:r>
-              <a:rPr lang="zh-CN" altLang="en-US" sz="2400" dirty="0">
-                <a:solidFill>
-                  <a:srgbClr val="FF0000"/>
-                </a:solidFill>
-                <a:latin typeface="Times New Roman" panose="02020603050405020304" pitchFamily="18" charset="0"/>
-                <a:ea typeface="SimSun" panose="02010600030101010101" pitchFamily="2" charset="-122"/>
-                <a:cs typeface="Times New Roman" panose="02020603050405020304" pitchFamily="18" charset="0"/>
-              </a:rPr>
-              <a:t>核心就是数据与梯度系数</a:t>
-            </a:r>
-            <a:r>
-              <a:rPr lang="zh-CN" altLang="en-US" sz="2400" dirty="0">
-                <a:latin typeface="Times New Roman" panose="02020603050405020304" pitchFamily="18" charset="0"/>
-                <a:ea typeface="SimSun" panose="02010600030101010101" pitchFamily="2" charset="-122"/>
-                <a:cs typeface="Times New Roman" panose="02020603050405020304" pitchFamily="18" charset="0"/>
-              </a:rPr>
-              <a:t>。</a:t>
-            </a:r>
-            <a:endParaRPr lang="en-US" altLang="zh-CN" sz="2400" dirty="0">
-              <a:latin typeface="Times New Roman" panose="02020603050405020304" pitchFamily="18" charset="0"/>
-              <a:ea typeface="SimSun" panose="02010600030101010101" pitchFamily="2" charset="-122"/>
-              <a:cs typeface="Times New Roman" panose="02020603050405020304" pitchFamily="18" charset="0"/>
-            </a:endParaRPr>
-          </a:p>
-          <a:p>
-            <a:r>
-              <a:rPr lang="en-US" altLang="zh-CN" sz="2400" dirty="0">
-                <a:latin typeface="Times New Roman" panose="02020603050405020304" pitchFamily="18" charset="0"/>
-                <a:ea typeface="SimSun" panose="02010600030101010101" pitchFamily="2" charset="-122"/>
-                <a:cs typeface="Times New Roman" panose="02020603050405020304" pitchFamily="18" charset="0"/>
-              </a:rPr>
-              <a:t>(</a:t>
-            </a:r>
-            <a:r>
-              <a:rPr lang="zh-CN" altLang="en-US" sz="2400" dirty="0">
-                <a:latin typeface="Times New Roman" panose="02020603050405020304" pitchFamily="18" charset="0"/>
-                <a:ea typeface="SimSun" panose="02010600030101010101" pitchFamily="2" charset="-122"/>
-                <a:cs typeface="Times New Roman" panose="02020603050405020304" pitchFamily="18" charset="0"/>
-              </a:rPr>
-              <a:t>注：对于</a:t>
-            </a:r>
-            <a:r>
-              <a:rPr lang="en-US" altLang="zh-CN" sz="2400" dirty="0">
-                <a:latin typeface="Times New Roman" panose="02020603050405020304" pitchFamily="18" charset="0"/>
-                <a:ea typeface="SimSun" panose="02010600030101010101" pitchFamily="2" charset="-122"/>
-                <a:cs typeface="Times New Roman" panose="02020603050405020304" pitchFamily="18" charset="0"/>
-              </a:rPr>
-              <a:t>GRPO</a:t>
-            </a:r>
-            <a:r>
-              <a:rPr lang="zh-CN" altLang="en-US" sz="2400" dirty="0">
-                <a:latin typeface="Times New Roman" panose="02020603050405020304" pitchFamily="18" charset="0"/>
-                <a:ea typeface="SimSun" panose="02010600030101010101" pitchFamily="2" charset="-122"/>
-                <a:cs typeface="Times New Roman" panose="02020603050405020304" pitchFamily="18" charset="0"/>
-              </a:rPr>
-              <a:t>和</a:t>
-            </a:r>
-            <a:r>
-              <a:rPr lang="en-US" altLang="zh-CN" sz="2400" dirty="0">
-                <a:latin typeface="Times New Roman" panose="02020603050405020304" pitchFamily="18" charset="0"/>
-                <a:ea typeface="SimSun" panose="02010600030101010101" pitchFamily="2" charset="-122"/>
-                <a:cs typeface="Times New Roman" panose="02020603050405020304" pitchFamily="18" charset="0"/>
-              </a:rPr>
-              <a:t>PPO</a:t>
-            </a:r>
-            <a:r>
-              <a:rPr lang="zh-CN" altLang="en-US" sz="2400" dirty="0">
-                <a:latin typeface="Times New Roman" panose="02020603050405020304" pitchFamily="18" charset="0"/>
-                <a:ea typeface="SimSun" panose="02010600030101010101" pitchFamily="2" charset="-122"/>
-                <a:cs typeface="Times New Roman" panose="02020603050405020304" pitchFamily="18" charset="0"/>
-              </a:rPr>
-              <a:t>在这里的不同，就是一个将惩罚引入了，一个没有</a:t>
-            </a:r>
-            <a:r>
-              <a:rPr lang="en-US" altLang="zh-CN" sz="2400" dirty="0">
-                <a:latin typeface="Times New Roman" panose="02020603050405020304" pitchFamily="18" charset="0"/>
-                <a:ea typeface="SimSun" panose="02010600030101010101" pitchFamily="2" charset="-122"/>
-                <a:cs typeface="Times New Roman" panose="02020603050405020304" pitchFamily="18" charset="0"/>
-              </a:rPr>
-              <a:t>)</a:t>
-            </a:r>
-          </a:p>
-        </p:txBody>
-      </p:sp>
-      <p:pic>
-        <p:nvPicPr>
-          <p:cNvPr id="10" name="图片 9">
-            <a:extLst>
-              <a:ext uri="{FF2B5EF4-FFF2-40B4-BE49-F238E27FC236}">
-                <a16:creationId xmlns:a16="http://schemas.microsoft.com/office/drawing/2014/main" id="{E2D02411-1AB7-A16D-F957-57AD1F8011E9}"/>
-              </a:ext>
-            </a:extLst>
-          </p:cNvPr>
-          <p:cNvPicPr>
-            <a:picLocks noChangeAspect="1"/>
-          </p:cNvPicPr>
-          <p:nvPr/>
-        </p:nvPicPr>
-        <p:blipFill>
-          <a:blip r:embed="rId3"/>
-          <a:stretch>
-            <a:fillRect/>
-          </a:stretch>
-        </p:blipFill>
-        <p:spPr>
-          <a:xfrm>
-            <a:off x="1449087" y="3881268"/>
-            <a:ext cx="5016758" cy="914447"/>
-          </a:xfrm>
-          <a:prstGeom prst="rect">
-            <a:avLst/>
-          </a:prstGeom>
-        </p:spPr>
-      </p:pic>
-      <p:sp>
-        <p:nvSpPr>
-          <p:cNvPr id="11" name="文本框 10">
-            <a:extLst>
-              <a:ext uri="{FF2B5EF4-FFF2-40B4-BE49-F238E27FC236}">
-                <a16:creationId xmlns:a16="http://schemas.microsoft.com/office/drawing/2014/main" id="{FBF4C9A0-B4D2-34E4-785C-B34FAD9E55B4}"/>
-              </a:ext>
-            </a:extLst>
-          </p:cNvPr>
-          <p:cNvSpPr txBox="1"/>
-          <p:nvPr/>
-        </p:nvSpPr>
-        <p:spPr>
-          <a:xfrm>
-            <a:off x="88130" y="4022171"/>
-            <a:ext cx="12192000" cy="1200329"/>
-          </a:xfrm>
-          <a:prstGeom prst="rect">
-            <a:avLst/>
-          </a:prstGeom>
-          <a:noFill/>
-        </p:spPr>
-        <p:txBody>
-          <a:bodyPr wrap="square" rtlCol="0">
-            <a:spAutoFit/>
-          </a:bodyPr>
-          <a:lstStyle/>
-          <a:p>
-            <a:r>
-              <a:rPr lang="zh-CN" altLang="en-US" sz="2400" dirty="0">
-                <a:latin typeface="Times New Roman" panose="02020603050405020304" pitchFamily="18" charset="0"/>
-                <a:ea typeface="SimSun" panose="02010600030101010101" pitchFamily="2" charset="-122"/>
-                <a:cs typeface="Times New Roman" panose="02020603050405020304" pitchFamily="18" charset="0"/>
-              </a:rPr>
-              <a:t>统一范式：</a:t>
-            </a:r>
-            <a:endParaRPr lang="en-US" altLang="zh-CN" sz="2400" dirty="0">
-              <a:latin typeface="Times New Roman" panose="02020603050405020304" pitchFamily="18" charset="0"/>
-              <a:ea typeface="SimSun" panose="02010600030101010101" pitchFamily="2" charset="-122"/>
-              <a:cs typeface="Times New Roman" panose="02020603050405020304" pitchFamily="18" charset="0"/>
-            </a:endParaRPr>
-          </a:p>
-          <a:p>
-            <a:endParaRPr lang="en-US" altLang="zh-CN" sz="2400" dirty="0">
-              <a:latin typeface="Times New Roman" panose="02020603050405020304" pitchFamily="18" charset="0"/>
-              <a:ea typeface="SimSun" panose="02010600030101010101" pitchFamily="2" charset="-122"/>
-              <a:cs typeface="Times New Roman" panose="02020603050405020304" pitchFamily="18" charset="0"/>
-            </a:endParaRPr>
-          </a:p>
-          <a:p>
-            <a:endParaRPr lang="en-US" altLang="zh-CN" sz="2400" dirty="0">
-              <a:latin typeface="Times New Roman" panose="02020603050405020304" pitchFamily="18" charset="0"/>
-              <a:ea typeface="SimSun" panose="02010600030101010101" pitchFamily="2" charset="-122"/>
-              <a:cs typeface="Times New Roman" panose="02020603050405020304" pitchFamily="18" charset="0"/>
-            </a:endParaRPr>
-          </a:p>
-        </p:txBody>
-      </p:sp>
-    </p:spTree>
-    <p:extLst>
-      <p:ext uri="{BB962C8B-B14F-4D97-AF65-F5344CB8AC3E}">
-        <p14:creationId xmlns:p14="http://schemas.microsoft.com/office/powerpoint/2010/main" val="474358115"/>
-      </p:ext>
-    </p:extLst>
-  </p:cSld>
-  <p:clrMapOvr>
-    <a:masterClrMapping/>
-  </p:clrMapOvr>
-</p:sld>
-</file>
-
-<file path=ppt/slides/slide8.xml><?xml version="1.0" encoding="utf-8"?>
-<p:sld xmlns:a="http://schemas.openxmlformats.org/drawingml/2006/main" xmlns:r="http://schemas.openxmlformats.org/officeDocument/2006/relationships" xmlns:p="http://schemas.openxmlformats.org/presentationml/2006/main">
-  <p:cSld>
-    <p:spTree>
-      <p:nvGrpSpPr>
-        <p:cNvPr id="1" name="">
-          <a:extLst>
-            <a:ext uri="{FF2B5EF4-FFF2-40B4-BE49-F238E27FC236}">
-              <a16:creationId xmlns:a16="http://schemas.microsoft.com/office/drawing/2014/main" id="{B06E950A-B995-9658-0F19-6F224B3D0193}"/>
-            </a:ext>
-          </a:extLst>
-        </p:cNvPr>
-        <p:cNvGrpSpPr/>
-        <p:nvPr/>
-      </p:nvGrpSpPr>
-      <p:grpSpPr>
-        <a:xfrm>
-          <a:off x="0" y="0"/>
-          <a:ext cx="0" cy="0"/>
-          <a:chOff x="0" y="0"/>
-          <a:chExt cx="0" cy="0"/>
-        </a:xfrm>
-      </p:grpSpPr>
-      <p:sp>
-        <p:nvSpPr>
-          <p:cNvPr id="5" name="矩形 4">
-            <a:extLst>
-              <a:ext uri="{FF2B5EF4-FFF2-40B4-BE49-F238E27FC236}">
-                <a16:creationId xmlns:a16="http://schemas.microsoft.com/office/drawing/2014/main" id="{E7119C40-C6A8-2E90-F055-90F7CCBB0BB1}"/>
-              </a:ext>
-            </a:extLst>
-          </p:cNvPr>
-          <p:cNvSpPr/>
-          <p:nvPr/>
-        </p:nvSpPr>
-        <p:spPr>
-          <a:xfrm>
-            <a:off x="0" y="105878"/>
-            <a:ext cx="10430933" cy="651933"/>
-          </a:xfrm>
-          <a:prstGeom prst="rect">
-            <a:avLst/>
-          </a:prstGeom>
-          <a:solidFill>
-            <a:schemeClr val="bg1"/>
-          </a:solidFill>
-          <a:ln>
-            <a:solidFill>
-              <a:schemeClr val="bg1"/>
-            </a:solidFill>
-          </a:ln>
-        </p:spPr>
-        <p:style>
-          <a:lnRef idx="2">
-            <a:schemeClr val="accent1">
-              <a:shade val="15000"/>
-            </a:schemeClr>
-          </a:lnRef>
-          <a:fillRef idx="1">
-            <a:schemeClr val="accent1"/>
-          </a:fillRef>
-          <a:effectRef idx="0">
-            <a:schemeClr val="accent1"/>
-          </a:effectRef>
-          <a:fontRef idx="minor">
-            <a:schemeClr val="lt1"/>
-          </a:fontRef>
-        </p:style>
-        <p:txBody>
-          <a:bodyPr rtlCol="0" anchor="ctr"/>
-          <a:lstStyle/>
-          <a:p>
-            <a:r>
-              <a:rPr lang="en-US" altLang="zh-CN" sz="3000" dirty="0">
-                <a:solidFill>
-                  <a:schemeClr val="tx1"/>
-                </a:solidFill>
-                <a:latin typeface="Times New Roman" panose="02020603050405020304" pitchFamily="18" charset="0"/>
-                <a:cs typeface="Times New Roman" panose="02020603050405020304" pitchFamily="18" charset="0"/>
-              </a:rPr>
-              <a:t>DeepSeekMath: Pushing the Limits of Mathematical Reasoning in Open Language Models</a:t>
-            </a:r>
-          </a:p>
-        </p:txBody>
-      </p:sp>
-      <p:sp>
-        <p:nvSpPr>
-          <p:cNvPr id="6" name="文本框 5">
-            <a:extLst>
-              <a:ext uri="{FF2B5EF4-FFF2-40B4-BE49-F238E27FC236}">
-                <a16:creationId xmlns:a16="http://schemas.microsoft.com/office/drawing/2014/main" id="{21C1B415-2A6D-6E16-6B55-76791E5CEF11}"/>
-              </a:ext>
-            </a:extLst>
-          </p:cNvPr>
-          <p:cNvSpPr txBox="1"/>
-          <p:nvPr/>
-        </p:nvSpPr>
-        <p:spPr>
-          <a:xfrm>
-            <a:off x="0" y="1347905"/>
-            <a:ext cx="12192000" cy="3785652"/>
-          </a:xfrm>
-          <a:prstGeom prst="rect">
-            <a:avLst/>
-          </a:prstGeom>
-          <a:noFill/>
-        </p:spPr>
-        <p:txBody>
-          <a:bodyPr wrap="square" rtlCol="0">
-            <a:spAutoFit/>
-          </a:bodyPr>
-          <a:lstStyle/>
-          <a:p>
-            <a:r>
-              <a:rPr lang="zh-CN" altLang="en-US" sz="2400" dirty="0">
-                <a:latin typeface="Times New Roman" panose="02020603050405020304" pitchFamily="18" charset="0"/>
-                <a:ea typeface="SimSun" panose="02010600030101010101" pitchFamily="2" charset="-122"/>
-                <a:cs typeface="Times New Roman" panose="02020603050405020304" pitchFamily="18" charset="0"/>
-              </a:rPr>
-              <a:t>思考</a:t>
-            </a:r>
-            <a:endParaRPr lang="en-US" altLang="zh-CN" sz="2400" dirty="0">
-              <a:latin typeface="Times New Roman" panose="02020603050405020304" pitchFamily="18" charset="0"/>
-              <a:ea typeface="SimSun" panose="02010600030101010101" pitchFamily="2" charset="-122"/>
-              <a:cs typeface="Times New Roman" panose="02020603050405020304" pitchFamily="18" charset="0"/>
-            </a:endParaRPr>
-          </a:p>
-          <a:p>
-            <a:r>
-              <a:rPr lang="en-US" altLang="zh-CN" sz="2400" dirty="0">
-                <a:latin typeface="Times New Roman" panose="02020603050405020304" pitchFamily="18" charset="0"/>
-                <a:ea typeface="SimSun" panose="02010600030101010101" pitchFamily="2" charset="-122"/>
-                <a:cs typeface="Times New Roman" panose="02020603050405020304" pitchFamily="18" charset="0"/>
-              </a:rPr>
-              <a:t>1. </a:t>
-            </a:r>
-            <a:r>
-              <a:rPr lang="zh-CN" altLang="en-US" sz="2400" dirty="0">
-                <a:latin typeface="Times New Roman" panose="02020603050405020304" pitchFamily="18" charset="0"/>
-                <a:ea typeface="SimSun" panose="02010600030101010101" pitchFamily="2" charset="-122"/>
-                <a:cs typeface="Times New Roman" panose="02020603050405020304" pitchFamily="18" charset="0"/>
-              </a:rPr>
-              <a:t>这个奖励函数如何构建？这是我们模型的基础</a:t>
-            </a:r>
-            <a:endParaRPr lang="en-US" altLang="zh-CN" sz="2400" dirty="0">
-              <a:latin typeface="Times New Roman" panose="02020603050405020304" pitchFamily="18" charset="0"/>
-              <a:ea typeface="SimSun" panose="02010600030101010101" pitchFamily="2" charset="-122"/>
-              <a:cs typeface="Times New Roman" panose="02020603050405020304" pitchFamily="18" charset="0"/>
-            </a:endParaRPr>
-          </a:p>
-          <a:p>
-            <a:r>
-              <a:rPr lang="zh-CN" altLang="en-US" sz="2400" dirty="0">
-                <a:latin typeface="Times New Roman" panose="02020603050405020304" pitchFamily="18" charset="0"/>
-                <a:ea typeface="SimSun" panose="02010600030101010101" pitchFamily="2" charset="-122"/>
-                <a:cs typeface="Times New Roman" panose="02020603050405020304" pitchFamily="18" charset="0"/>
-              </a:rPr>
-              <a:t>答：这篇论文从泛化能力，不确定性与过程奖励三个角度展开了粗略的介绍，但是具体怎么构建更好的？后续学习中再完善。</a:t>
-            </a:r>
-            <a:endParaRPr lang="en-US" altLang="zh-CN" sz="2400" dirty="0">
-              <a:latin typeface="Times New Roman" panose="02020603050405020304" pitchFamily="18" charset="0"/>
-              <a:ea typeface="SimSun" panose="02010600030101010101" pitchFamily="2" charset="-122"/>
-              <a:cs typeface="Times New Roman" panose="02020603050405020304" pitchFamily="18" charset="0"/>
-            </a:endParaRPr>
-          </a:p>
-          <a:p>
-            <a:pPr marL="457200" indent="-457200">
-              <a:buAutoNum type="arabicPeriod"/>
-            </a:pPr>
-            <a:endParaRPr lang="en-US" altLang="zh-CN" sz="2400" dirty="0">
-              <a:latin typeface="Times New Roman" panose="02020603050405020304" pitchFamily="18" charset="0"/>
-              <a:ea typeface="SimSun" panose="02010600030101010101" pitchFamily="2" charset="-122"/>
-              <a:cs typeface="Times New Roman" panose="02020603050405020304" pitchFamily="18" charset="0"/>
-            </a:endParaRPr>
-          </a:p>
-          <a:p>
-            <a:r>
-              <a:rPr lang="en-US" altLang="zh-CN" sz="2400" dirty="0">
-                <a:latin typeface="Times New Roman" panose="02020603050405020304" pitchFamily="18" charset="0"/>
-                <a:ea typeface="SimSun" panose="02010600030101010101" pitchFamily="2" charset="-122"/>
-                <a:cs typeface="Times New Roman" panose="02020603050405020304" pitchFamily="18" charset="0"/>
-              </a:rPr>
-              <a:t>2. </a:t>
-            </a:r>
-            <a:r>
-              <a:rPr lang="zh-CN" altLang="en-US" sz="2400" dirty="0">
-                <a:latin typeface="Times New Roman" panose="02020603050405020304" pitchFamily="18" charset="0"/>
-                <a:ea typeface="SimSun" panose="02010600030101010101" pitchFamily="2" charset="-122"/>
-                <a:cs typeface="Times New Roman" panose="02020603050405020304" pitchFamily="18" charset="0"/>
-              </a:rPr>
-              <a:t>为什么</a:t>
-            </a:r>
-            <a:r>
-              <a:rPr lang="en-US" altLang="zh-CN" sz="2400" dirty="0">
-                <a:latin typeface="Times New Roman" panose="02020603050405020304" pitchFamily="18" charset="0"/>
-                <a:ea typeface="SimSun" panose="02010600030101010101" pitchFamily="2" charset="-122"/>
-                <a:cs typeface="Times New Roman" panose="02020603050405020304" pitchFamily="18" charset="0"/>
-              </a:rPr>
-              <a:t>RL</a:t>
-            </a:r>
-            <a:r>
-              <a:rPr lang="zh-CN" altLang="en-US" sz="2400" dirty="0">
-                <a:latin typeface="Times New Roman" panose="02020603050405020304" pitchFamily="18" charset="0"/>
-                <a:ea typeface="SimSun" panose="02010600030101010101" pitchFamily="2" charset="-122"/>
-                <a:cs typeface="Times New Roman" panose="02020603050405020304" pitchFamily="18" charset="0"/>
-              </a:rPr>
-              <a:t>可以提升</a:t>
-            </a:r>
-            <a:r>
-              <a:rPr lang="en-US" altLang="zh-CN" sz="2400" dirty="0">
-                <a:latin typeface="Times New Roman" panose="02020603050405020304" pitchFamily="18" charset="0"/>
-                <a:ea typeface="SimSun" panose="02010600030101010101" pitchFamily="2" charset="-122"/>
-                <a:cs typeface="Times New Roman" panose="02020603050405020304" pitchFamily="18" charset="0"/>
-              </a:rPr>
-              <a:t>LLM</a:t>
-            </a:r>
-            <a:r>
-              <a:rPr lang="zh-CN" altLang="en-US" sz="2400" dirty="0">
-                <a:latin typeface="Times New Roman" panose="02020603050405020304" pitchFamily="18" charset="0"/>
-                <a:ea typeface="SimSun" panose="02010600030101010101" pitchFamily="2" charset="-122"/>
-                <a:cs typeface="Times New Roman" panose="02020603050405020304" pitchFamily="18" charset="0"/>
-              </a:rPr>
-              <a:t>的推理能力？</a:t>
-            </a:r>
-            <a:endParaRPr lang="en-US" altLang="zh-CN" sz="2400" dirty="0">
-              <a:latin typeface="Times New Roman" panose="02020603050405020304" pitchFamily="18" charset="0"/>
-              <a:ea typeface="SimSun" panose="02010600030101010101" pitchFamily="2" charset="-122"/>
-              <a:cs typeface="Times New Roman" panose="02020603050405020304" pitchFamily="18" charset="0"/>
-            </a:endParaRPr>
-          </a:p>
-          <a:p>
-            <a:r>
-              <a:rPr lang="zh-CN" altLang="en-US" sz="2400" dirty="0">
-                <a:latin typeface="Times New Roman" panose="02020603050405020304" pitchFamily="18" charset="0"/>
-                <a:ea typeface="SimSun" panose="02010600030101010101" pitchFamily="2" charset="-122"/>
-                <a:cs typeface="Times New Roman" panose="02020603050405020304" pitchFamily="18" charset="0"/>
-              </a:rPr>
-              <a:t>答：强化学习通过使输出分布更加稳健，从而提升了模型的整体性能。</a:t>
-            </a:r>
-            <a:endParaRPr lang="en-US" altLang="zh-CN" sz="2400" dirty="0">
-              <a:latin typeface="Times New Roman" panose="02020603050405020304" pitchFamily="18" charset="0"/>
-              <a:ea typeface="SimSun" panose="02010600030101010101" pitchFamily="2" charset="-122"/>
-              <a:cs typeface="Times New Roman" panose="02020603050405020304" pitchFamily="18" charset="0"/>
-            </a:endParaRPr>
-          </a:p>
-          <a:p>
-            <a:endParaRPr lang="en-US" altLang="zh-CN" sz="2400" dirty="0">
-              <a:latin typeface="Times New Roman" panose="02020603050405020304" pitchFamily="18" charset="0"/>
-              <a:ea typeface="SimSun" panose="02010600030101010101" pitchFamily="2" charset="-122"/>
-              <a:cs typeface="Times New Roman" panose="02020603050405020304" pitchFamily="18" charset="0"/>
-            </a:endParaRPr>
-          </a:p>
-          <a:p>
-            <a:endParaRPr lang="en-US" altLang="zh-CN" sz="2400" dirty="0">
-              <a:latin typeface="Times New Roman" panose="02020603050405020304" pitchFamily="18" charset="0"/>
-              <a:ea typeface="SimSun" panose="02010600030101010101" pitchFamily="2" charset="-122"/>
-              <a:cs typeface="Times New Roman" panose="02020603050405020304" pitchFamily="18" charset="0"/>
-            </a:endParaRPr>
-          </a:p>
-          <a:p>
-            <a:endParaRPr lang="en-US" altLang="zh-CN" sz="2400" dirty="0">
-              <a:latin typeface="Times New Roman" panose="02020603050405020304" pitchFamily="18" charset="0"/>
-              <a:ea typeface="SimSun" panose="02010600030101010101" pitchFamily="2" charset="-122"/>
-              <a:cs typeface="Times New Roman" panose="02020603050405020304" pitchFamily="18" charset="0"/>
-            </a:endParaRPr>
-          </a:p>
-        </p:txBody>
-      </p:sp>
-    </p:spTree>
-    <p:extLst>
-      <p:ext uri="{BB962C8B-B14F-4D97-AF65-F5344CB8AC3E}">
-        <p14:creationId xmlns:p14="http://schemas.microsoft.com/office/powerpoint/2010/main" val="4277722123"/>
-      </p:ext>
-    </p:extLst>
-  </p:cSld>
-  <p:clrMapOvr>
-    <a:masterClrMapping/>
-  </p:clrMapOvr>
-</p:sld>
-</file>
-
-<file path=ppt/slides/slide9.xml><?xml version="1.0" encoding="utf-8"?>
-<p:sld xmlns:a="http://schemas.openxmlformats.org/drawingml/2006/main" xmlns:r="http://schemas.openxmlformats.org/officeDocument/2006/relationships" xmlns:p="http://schemas.openxmlformats.org/presentationml/2006/main">
-  <p:cSld>
-    <p:spTree>
-      <p:nvGrpSpPr>
-        <p:cNvPr id="1" name="">
-          <a:extLst>
-            <a:ext uri="{FF2B5EF4-FFF2-40B4-BE49-F238E27FC236}">
-              <a16:creationId xmlns:a16="http://schemas.microsoft.com/office/drawing/2014/main" id="{3F0071F7-F652-E961-B8F6-AE4551B004C2}"/>
-            </a:ext>
-          </a:extLst>
-        </p:cNvPr>
-        <p:cNvGrpSpPr/>
-        <p:nvPr/>
-      </p:nvGrpSpPr>
-      <p:grpSpPr>
-        <a:xfrm>
-          <a:off x="0" y="0"/>
-          <a:ext cx="0" cy="0"/>
-          <a:chOff x="0" y="0"/>
-          <a:chExt cx="0" cy="0"/>
-        </a:xfrm>
-      </p:grpSpPr>
-      <p:sp>
-        <p:nvSpPr>
-          <p:cNvPr id="5" name="矩形 4">
-            <a:extLst>
-              <a:ext uri="{FF2B5EF4-FFF2-40B4-BE49-F238E27FC236}">
-                <a16:creationId xmlns:a16="http://schemas.microsoft.com/office/drawing/2014/main" id="{0B2C9B09-1D45-2B4D-CAC0-2541E76042C4}"/>
-              </a:ext>
-            </a:extLst>
-          </p:cNvPr>
-          <p:cNvSpPr/>
-          <p:nvPr/>
-        </p:nvSpPr>
-        <p:spPr>
-          <a:xfrm>
-            <a:off x="-2318" y="96253"/>
-            <a:ext cx="12172749" cy="651933"/>
-          </a:xfrm>
-          <a:prstGeom prst="rect">
-            <a:avLst/>
-          </a:prstGeom>
-          <a:solidFill>
-            <a:schemeClr val="bg1"/>
-          </a:solidFill>
-          <a:ln>
-            <a:solidFill>
-              <a:schemeClr val="bg1"/>
-            </a:solidFill>
-          </a:ln>
-        </p:spPr>
-        <p:style>
-          <a:lnRef idx="2">
-            <a:schemeClr val="accent1">
-              <a:shade val="15000"/>
-            </a:schemeClr>
-          </a:lnRef>
-          <a:fillRef idx="1">
-            <a:schemeClr val="accent1"/>
-          </a:fillRef>
-          <a:effectRef idx="0">
-            <a:schemeClr val="accent1"/>
-          </a:effectRef>
-          <a:fontRef idx="minor">
-            <a:schemeClr val="lt1"/>
-          </a:fontRef>
-        </p:style>
-        <p:txBody>
-          <a:bodyPr rtlCol="0" anchor="ctr"/>
-          <a:lstStyle/>
-          <a:p>
-            <a:pPr algn="just" latinLnBrk="1"/>
-            <a:r>
-              <a:rPr lang="en-US" altLang="zh-CN" sz="3000" dirty="0">
-                <a:solidFill>
-                  <a:schemeClr val="tx1"/>
-                </a:solidFill>
-                <a:latin typeface="Times New Roman" panose="02020603050405020304" pitchFamily="18" charset="0"/>
-                <a:cs typeface="Times New Roman" panose="02020603050405020304" pitchFamily="18" charset="0"/>
-              </a:rPr>
-              <a:t>Reinforcement Learning Meets Large Language Models: A Survey </a:t>
-            </a:r>
-            <a:r>
-              <a:rPr lang="en-US" altLang="zh-CN" sz="3000" dirty="0" err="1">
-                <a:solidFill>
-                  <a:schemeClr val="tx1"/>
-                </a:solidFill>
-                <a:latin typeface="Times New Roman" panose="02020603050405020304" pitchFamily="18" charset="0"/>
-                <a:cs typeface="Times New Roman" panose="02020603050405020304" pitchFamily="18" charset="0"/>
-              </a:rPr>
-              <a:t>ofAdvancements</a:t>
-            </a:r>
-            <a:r>
-              <a:rPr lang="en-US" altLang="zh-CN" sz="3000" dirty="0">
-                <a:solidFill>
-                  <a:schemeClr val="tx1"/>
-                </a:solidFill>
-                <a:latin typeface="Times New Roman" panose="02020603050405020304" pitchFamily="18" charset="0"/>
-                <a:cs typeface="Times New Roman" panose="02020603050405020304" pitchFamily="18" charset="0"/>
-              </a:rPr>
-              <a:t> and Applications Across the LLM Lifecycle</a:t>
-            </a:r>
-          </a:p>
-        </p:txBody>
-      </p:sp>
-      <p:sp>
-        <p:nvSpPr>
-          <p:cNvPr id="7" name="文本框 6">
-            <a:extLst>
-              <a:ext uri="{FF2B5EF4-FFF2-40B4-BE49-F238E27FC236}">
-                <a16:creationId xmlns:a16="http://schemas.microsoft.com/office/drawing/2014/main" id="{4AD2762F-CE38-9267-DD91-9921213EBD55}"/>
-              </a:ext>
-            </a:extLst>
-          </p:cNvPr>
-          <p:cNvSpPr txBox="1"/>
-          <p:nvPr/>
-        </p:nvSpPr>
-        <p:spPr>
-          <a:xfrm>
-            <a:off x="16933" y="1169470"/>
-            <a:ext cx="12192000" cy="4893647"/>
-          </a:xfrm>
-          <a:prstGeom prst="rect">
-            <a:avLst/>
-          </a:prstGeom>
-          <a:noFill/>
-        </p:spPr>
-        <p:txBody>
-          <a:bodyPr wrap="square" rtlCol="0">
-            <a:spAutoFit/>
-          </a:bodyPr>
-          <a:lstStyle/>
-          <a:p>
-            <a:r>
-              <a:rPr lang="zh-CN" altLang="en-US" sz="2400" dirty="0">
-                <a:latin typeface="Times New Roman" panose="02020603050405020304" pitchFamily="18" charset="0"/>
-                <a:ea typeface="SimSun" panose="02010600030101010101" pitchFamily="2" charset="-122"/>
-                <a:cs typeface="Times New Roman" panose="02020603050405020304" pitchFamily="18" charset="0"/>
-              </a:rPr>
-              <a:t>问题：开源模型在解决复杂数学问题时明显落后于闭源模型。</a:t>
-            </a:r>
-            <a:endParaRPr lang="en-US" altLang="zh-CN" sz="2400" dirty="0">
-              <a:latin typeface="Times New Roman" panose="02020603050405020304" pitchFamily="18" charset="0"/>
-              <a:ea typeface="SimSun" panose="02010600030101010101" pitchFamily="2" charset="-122"/>
-              <a:cs typeface="Times New Roman" panose="02020603050405020304" pitchFamily="18" charset="0"/>
-            </a:endParaRPr>
-          </a:p>
-          <a:p>
-            <a:endParaRPr lang="en-US" altLang="zh-CN" sz="2400" dirty="0">
-              <a:latin typeface="Times New Roman" panose="02020603050405020304" pitchFamily="18" charset="0"/>
-              <a:ea typeface="SimSun" panose="02010600030101010101" pitchFamily="2" charset="-122"/>
-              <a:cs typeface="Times New Roman" panose="02020603050405020304" pitchFamily="18" charset="0"/>
-            </a:endParaRPr>
-          </a:p>
-          <a:p>
-            <a:r>
-              <a:rPr lang="zh-CN" altLang="en-US" sz="2400" dirty="0">
-                <a:latin typeface="Times New Roman" panose="02020603050405020304" pitchFamily="18" charset="0"/>
-                <a:ea typeface="SimSun" panose="02010600030101010101" pitchFamily="2" charset="-122"/>
-                <a:cs typeface="Times New Roman" panose="02020603050405020304" pitchFamily="18" charset="0"/>
-              </a:rPr>
-              <a:t>动机：问题可以作为动机吗？没有明确说明受什么启发</a:t>
-            </a:r>
-            <a:endParaRPr lang="en-US" altLang="zh-CN" sz="2400" dirty="0">
-              <a:latin typeface="Times New Roman" panose="02020603050405020304" pitchFamily="18" charset="0"/>
-              <a:ea typeface="SimSun" panose="02010600030101010101" pitchFamily="2" charset="-122"/>
-              <a:cs typeface="Times New Roman" panose="02020603050405020304" pitchFamily="18" charset="0"/>
-            </a:endParaRPr>
-          </a:p>
-          <a:p>
-            <a:endParaRPr lang="en-US" altLang="zh-CN" sz="2400" dirty="0">
-              <a:latin typeface="SimSun" panose="02010600030101010101" pitchFamily="2" charset="-122"/>
-              <a:ea typeface="SimSun" panose="02010600030101010101" pitchFamily="2" charset="-122"/>
-              <a:cs typeface="Times New Roman" panose="02020603050405020304" pitchFamily="18" charset="0"/>
-            </a:endParaRPr>
-          </a:p>
-          <a:p>
-            <a:r>
-              <a:rPr lang="zh-CN" altLang="en-US" sz="2400" dirty="0">
-                <a:latin typeface="SimSun" panose="02010600030101010101" pitchFamily="2" charset="-122"/>
-                <a:ea typeface="SimSun" panose="02010600030101010101" pitchFamily="2" charset="-122"/>
-                <a:cs typeface="Times New Roman" panose="02020603050405020304" pitchFamily="18" charset="0"/>
-              </a:rPr>
-              <a:t>方法：基于构建的数据集先进行预训练，随后在后训练过程中先通过指令微调，再进行强化学习推理。</a:t>
-            </a:r>
-            <a:endParaRPr lang="en-US" altLang="zh-CN" sz="2400" dirty="0">
-              <a:latin typeface="SimSun" panose="02010600030101010101" pitchFamily="2" charset="-122"/>
-              <a:ea typeface="SimSun" panose="02010600030101010101" pitchFamily="2" charset="-122"/>
-              <a:cs typeface="Times New Roman" panose="02020603050405020304" pitchFamily="18" charset="0"/>
-            </a:endParaRPr>
-          </a:p>
-          <a:p>
-            <a:r>
-              <a:rPr lang="en-US" altLang="zh-CN" sz="2400" dirty="0">
-                <a:latin typeface="SimSun" panose="02010600030101010101" pitchFamily="2" charset="-122"/>
-                <a:ea typeface="SimSun" panose="02010600030101010101" pitchFamily="2" charset="-122"/>
-                <a:cs typeface="Times New Roman" panose="02020603050405020304" pitchFamily="18" charset="0"/>
-              </a:rPr>
-              <a:t>(</a:t>
-            </a:r>
-            <a:r>
-              <a:rPr lang="zh-CN" altLang="en-US" sz="2400" dirty="0">
-                <a:latin typeface="SimSun" panose="02010600030101010101" pitchFamily="2" charset="-122"/>
-                <a:ea typeface="SimSun" panose="02010600030101010101" pitchFamily="2" charset="-122"/>
-                <a:cs typeface="Times New Roman" panose="02020603050405020304" pitchFamily="18" charset="0"/>
-              </a:rPr>
-              <a:t>注：这其实就是将强化学习用于推理阶段，后面我将重点介绍</a:t>
-            </a:r>
-            <a:r>
-              <a:rPr lang="en-US" altLang="zh-CN" sz="2400" dirty="0">
-                <a:latin typeface="SimSun" panose="02010600030101010101" pitchFamily="2" charset="-122"/>
-                <a:ea typeface="SimSun" panose="02010600030101010101" pitchFamily="2" charset="-122"/>
-                <a:cs typeface="Times New Roman" panose="02020603050405020304" pitchFamily="18" charset="0"/>
-              </a:rPr>
-              <a:t>GRPO)</a:t>
-            </a:r>
-          </a:p>
-          <a:p>
-            <a:endParaRPr lang="en-US" altLang="zh-CN" sz="2400" dirty="0">
-              <a:latin typeface="SimSun" panose="02010600030101010101" pitchFamily="2" charset="-122"/>
-              <a:ea typeface="SimSun" panose="02010600030101010101" pitchFamily="2" charset="-122"/>
-              <a:cs typeface="Times New Roman" panose="02020603050405020304" pitchFamily="18" charset="0"/>
-            </a:endParaRPr>
-          </a:p>
-          <a:p>
-            <a:r>
-              <a:rPr lang="zh-CN" altLang="en-US" sz="2400" dirty="0">
-                <a:latin typeface="SimSun" panose="02010600030101010101" pitchFamily="2" charset="-122"/>
-                <a:ea typeface="SimSun" panose="02010600030101010101" pitchFamily="2" charset="-122"/>
-                <a:cs typeface="Times New Roman" panose="02020603050405020304" pitchFamily="18" charset="0"/>
-              </a:rPr>
-              <a:t>贡献：</a:t>
-            </a:r>
-            <a:r>
-              <a:rPr lang="en-US" altLang="zh-CN" sz="2400" dirty="0">
-                <a:latin typeface="SimSun" panose="02010600030101010101" pitchFamily="2" charset="-122"/>
-                <a:ea typeface="SimSun" panose="02010600030101010101" pitchFamily="2" charset="-122"/>
-                <a:cs typeface="Times New Roman" panose="02020603050405020304" pitchFamily="18" charset="0"/>
-              </a:rPr>
-              <a:t>1.</a:t>
-            </a:r>
-            <a:r>
-              <a:rPr lang="zh-CN" altLang="en-US" sz="2400" dirty="0">
-                <a:latin typeface="SimSun" panose="02010600030101010101" pitchFamily="2" charset="-122"/>
-                <a:ea typeface="SimSun" panose="02010600030101010101" pitchFamily="2" charset="-122"/>
-                <a:cs typeface="Times New Roman" panose="02020603050405020304" pitchFamily="18" charset="0"/>
-              </a:rPr>
-              <a:t>构建了一个高质量数据集。</a:t>
-            </a:r>
-            <a:endParaRPr lang="en-US" altLang="zh-CN" sz="2400" dirty="0">
-              <a:latin typeface="SimSun" panose="02010600030101010101" pitchFamily="2" charset="-122"/>
-              <a:ea typeface="SimSun" panose="02010600030101010101" pitchFamily="2" charset="-122"/>
-              <a:cs typeface="Times New Roman" panose="02020603050405020304" pitchFamily="18" charset="0"/>
-            </a:endParaRPr>
-          </a:p>
-          <a:p>
-            <a:r>
-              <a:rPr lang="en-US" altLang="zh-CN" sz="2400" dirty="0">
-                <a:latin typeface="SimSun" panose="02010600030101010101" pitchFamily="2" charset="-122"/>
-                <a:ea typeface="SimSun" panose="02010600030101010101" pitchFamily="2" charset="-122"/>
-                <a:cs typeface="Times New Roman" panose="02020603050405020304" pitchFamily="18" charset="0"/>
-              </a:rPr>
-              <a:t>	2.</a:t>
-            </a:r>
-            <a:r>
-              <a:rPr lang="zh-CN" altLang="en-US" sz="2400" dirty="0">
-                <a:latin typeface="SimSun" panose="02010600030101010101" pitchFamily="2" charset="-122"/>
-                <a:ea typeface="SimSun" panose="02010600030101010101" pitchFamily="2" charset="-122"/>
-                <a:cs typeface="Times New Roman" panose="02020603050405020304" pitchFamily="18" charset="0"/>
-              </a:rPr>
-              <a:t>提出了</a:t>
-            </a:r>
-            <a:r>
-              <a:rPr lang="en-US" altLang="zh-CN" sz="2400" dirty="0">
-                <a:latin typeface="SimSun" panose="02010600030101010101" pitchFamily="2" charset="-122"/>
-                <a:ea typeface="SimSun" panose="02010600030101010101" pitchFamily="2" charset="-122"/>
-                <a:cs typeface="Times New Roman" panose="02020603050405020304" pitchFamily="18" charset="0"/>
-              </a:rPr>
-              <a:t>GRPO</a:t>
-            </a:r>
-            <a:r>
-              <a:rPr lang="zh-CN" altLang="en-US" sz="2400" dirty="0">
-                <a:latin typeface="SimSun" panose="02010600030101010101" pitchFamily="2" charset="-122"/>
-                <a:ea typeface="SimSun" panose="02010600030101010101" pitchFamily="2" charset="-122"/>
-                <a:cs typeface="Times New Roman" panose="02020603050405020304" pitchFamily="18" charset="0"/>
-              </a:rPr>
-              <a:t>用于</a:t>
-            </a:r>
-            <a:r>
-              <a:rPr lang="en-US" altLang="zh-CN" sz="2400" dirty="0">
-                <a:latin typeface="SimSun" panose="02010600030101010101" pitchFamily="2" charset="-122"/>
-                <a:ea typeface="SimSun" panose="02010600030101010101" pitchFamily="2" charset="-122"/>
-                <a:cs typeface="Times New Roman" panose="02020603050405020304" pitchFamily="18" charset="0"/>
-              </a:rPr>
-              <a:t>LLM</a:t>
-            </a:r>
-            <a:r>
-              <a:rPr lang="zh-CN" altLang="en-US" sz="2400" dirty="0">
-                <a:latin typeface="SimSun" panose="02010600030101010101" pitchFamily="2" charset="-122"/>
-                <a:ea typeface="SimSun" panose="02010600030101010101" pitchFamily="2" charset="-122"/>
-                <a:cs typeface="Times New Roman" panose="02020603050405020304" pitchFamily="18" charset="0"/>
-              </a:rPr>
-              <a:t>中。</a:t>
-            </a:r>
-            <a:endParaRPr lang="en-US" altLang="zh-CN" sz="2400" dirty="0">
-              <a:latin typeface="SimSun" panose="02010600030101010101" pitchFamily="2" charset="-122"/>
-              <a:ea typeface="SimSun" panose="02010600030101010101" pitchFamily="2" charset="-122"/>
-              <a:cs typeface="Times New Roman" panose="02020603050405020304" pitchFamily="18" charset="0"/>
-            </a:endParaRPr>
-          </a:p>
-          <a:p>
-            <a:r>
-              <a:rPr lang="en-US" altLang="zh-CN" sz="2400" dirty="0">
-                <a:latin typeface="SimSun" panose="02010600030101010101" pitchFamily="2" charset="-122"/>
-                <a:ea typeface="SimSun" panose="02010600030101010101" pitchFamily="2" charset="-122"/>
-                <a:cs typeface="Times New Roman" panose="02020603050405020304" pitchFamily="18" charset="0"/>
-              </a:rPr>
-              <a:t>	3.</a:t>
-            </a:r>
-            <a:r>
-              <a:rPr lang="zh-CN" altLang="en-US" sz="2400" dirty="0">
-                <a:latin typeface="SimSun" panose="02010600030101010101" pitchFamily="2" charset="-122"/>
-                <a:ea typeface="SimSun" panose="02010600030101010101" pitchFamily="2" charset="-122"/>
-                <a:cs typeface="Times New Roman" panose="02020603050405020304" pitchFamily="18" charset="0"/>
-              </a:rPr>
-              <a:t>统一范式</a:t>
-            </a:r>
-            <a:endParaRPr lang="en-US" altLang="zh-CN" sz="2400" dirty="0">
-              <a:latin typeface="SimSun" panose="02010600030101010101" pitchFamily="2" charset="-122"/>
-              <a:ea typeface="SimSun" panose="02010600030101010101" pitchFamily="2" charset="-122"/>
-              <a:cs typeface="Times New Roman" panose="02020603050405020304" pitchFamily="18" charset="0"/>
-            </a:endParaRPr>
-          </a:p>
-          <a:p>
-            <a:endParaRPr lang="en-US" altLang="zh-CN" sz="2400" dirty="0">
-              <a:latin typeface="SimSun" panose="02010600030101010101" pitchFamily="2" charset="-122"/>
-              <a:ea typeface="SimSun" panose="02010600030101010101" pitchFamily="2" charset="-122"/>
-              <a:cs typeface="Times New Roman" panose="02020603050405020304" pitchFamily="18" charset="0"/>
-            </a:endParaRPr>
-          </a:p>
-          <a:p>
-            <a:endParaRPr lang="en-US" altLang="zh-CN" sz="2400" dirty="0">
-              <a:latin typeface="SimSun" panose="02010600030101010101" pitchFamily="2" charset="-122"/>
-              <a:ea typeface="SimSun" panose="02010600030101010101" pitchFamily="2" charset="-122"/>
-              <a:cs typeface="Times New Roman" panose="02020603050405020304" pitchFamily="18" charset="0"/>
-            </a:endParaRPr>
-          </a:p>
-        </p:txBody>
-      </p:sp>
-    </p:spTree>
-    <p:extLst>
-      <p:ext uri="{BB962C8B-B14F-4D97-AF65-F5344CB8AC3E}">
-        <p14:creationId xmlns:p14="http://schemas.microsoft.com/office/powerpoint/2010/main" val="2039586319"/>
       </p:ext>
     </p:extLst>
   </p:cSld>

--- a/LLM/阶段一.pptx
+++ b/LLM/阶段一.pptx
@@ -5,7 +5,7 @@
     <p:sldMasterId id="2147483648" r:id="rId1"/>
   </p:sldMasterIdLst>
   <p:notesMasterIdLst>
-    <p:notesMasterId r:id="rId15"/>
+    <p:notesMasterId r:id="rId17"/>
   </p:notesMasterIdLst>
   <p:sldIdLst>
     <p:sldId id="256" r:id="rId2"/>
@@ -21,6 +21,8 @@
     <p:sldId id="271" r:id="rId12"/>
     <p:sldId id="272" r:id="rId13"/>
     <p:sldId id="278" r:id="rId14"/>
+    <p:sldId id="279" r:id="rId15"/>
+    <p:sldId id="280" r:id="rId16"/>
   </p:sldIdLst>
   <p:sldSz cx="12192000" cy="6858000"/>
   <p:notesSz cx="6858000" cy="9144000"/>
@@ -138,6 +140,42 @@
 </p:presentation>
 </file>
 
+<file path=ppt/authors.xml><?xml version="1.0" encoding="utf-8"?>
+<p188:authorLst xmlns:a="http://schemas.openxmlformats.org/drawingml/2006/main" xmlns:r="http://schemas.openxmlformats.org/officeDocument/2006/relationships" xmlns:p188="http://schemas.microsoft.com/office/powerpoint/2018/8/main">
+  <p188:author id="{0885DA48-52E3-A539-821A-31189D645E1D}" name="祈 楪" initials="祈楪" userId="014d52ee20da7d07" providerId="Windows Live"/>
+</p188:authorLst>
+</file>
+
+<file path=ppt/comments/modernComment_117_B4C71992.xml><?xml version="1.0" encoding="utf-8"?>
+<p188:cmLst xmlns:a="http://schemas.openxmlformats.org/drawingml/2006/main" xmlns:r="http://schemas.openxmlformats.org/officeDocument/2006/relationships" xmlns:p188="http://schemas.microsoft.com/office/powerpoint/2018/8/main">
+  <p188:cm id="{61557C65-BBA1-4CE3-8B18-EF6179EB17E1}" authorId="{0885DA48-52E3-A539-821A-31189D645E1D}" created="2026-05-02T11:13:02.446">
+    <ac:txMkLst xmlns:ac="http://schemas.microsoft.com/office/drawing/2013/main/command">
+      <pc:docMk xmlns:pc="http://schemas.microsoft.com/office/powerpoint/2013/main/command"/>
+      <pc:sldMk xmlns:pc="http://schemas.microsoft.com/office/powerpoint/2013/main/command" cId="3032947090" sldId="279"/>
+      <ac:spMk id="5" creationId="{5AEE5B00-17B5-6CAA-9D22-2A9D23FD8934}"/>
+      <ac:txMk cp="0" len="79">
+        <ac:context len="80" hash="2526429526"/>
+      </ac:txMk>
+    </ac:txMkLst>
+    <p188:pos x="12125124" y="194467"/>
+    <p188:txBody>
+      <a:bodyPr/>
+      <a:lstStyle/>
+      <a:p>
+        <a:r>
+          <a:rPr lang="zh-CN" altLang="en-US"/>
+          <a:t>SPARK 的核心思想：
+1.用生成模型产生多种解答。
+2.用 verifier 通过 self-consistency 和 meta-critique 生成合成验证信号。
+3.用合成数据训练一个 generative process reward model。
+4.在 RL 中用这个 PRM 给模型每一步的奖励</a:t>
+        </a:r>
+      </a:p>
+    </p188:txBody>
+  </p188:cm>
+</p188:cmLst>
+</file>
+
 <file path=ppt/notesMasters/notesMaster1.xml><?xml version="1.0" encoding="utf-8"?>
 <p:notesMaster xmlns:a="http://schemas.openxmlformats.org/drawingml/2006/main" xmlns:r="http://schemas.openxmlformats.org/officeDocument/2006/relationships" xmlns:p="http://schemas.openxmlformats.org/presentationml/2006/main">
   <p:cSld>
@@ -220,7 +258,7 @@
           <a:p>
             <a:fld id="{B9E7821D-D706-4DD4-95CE-52CCF92123E0}" type="datetimeFigureOut">
               <a:rPr lang="zh-CN" altLang="en-US" smtClean="0"/>
-              <a:t>2026/4/29</a:t>
+              <a:t>2026/5/2</a:t>
             </a:fld>
             <a:endParaRPr lang="zh-CN" altLang="en-US"/>
           </a:p>
@@ -578,6 +616,121 @@
 </p:notes>
 </file>
 
+<file path=ppt/notesSlides/notesSlide10.xml><?xml version="1.0" encoding="utf-8"?>
+<p:notes xmlns:a="http://schemas.openxmlformats.org/drawingml/2006/main" xmlns:r="http://schemas.openxmlformats.org/officeDocument/2006/relationships" xmlns:p="http://schemas.openxmlformats.org/presentationml/2006/main">
+  <p:cSld>
+    <p:spTree>
+      <p:nvGrpSpPr>
+        <p:cNvPr id="1" name="">
+          <a:extLst>
+            <a:ext uri="{FF2B5EF4-FFF2-40B4-BE49-F238E27FC236}">
+              <a16:creationId xmlns:a16="http://schemas.microsoft.com/office/drawing/2014/main" id="{95544447-C083-4F3B-DC3C-76799E4D1E84}"/>
+            </a:ext>
+          </a:extLst>
+        </p:cNvPr>
+        <p:cNvGrpSpPr/>
+        <p:nvPr/>
+      </p:nvGrpSpPr>
+      <p:grpSpPr>
+        <a:xfrm>
+          <a:off x="0" y="0"/>
+          <a:ext cx="0" cy="0"/>
+          <a:chOff x="0" y="0"/>
+          <a:chExt cx="0" cy="0"/>
+        </a:xfrm>
+      </p:grpSpPr>
+      <p:sp>
+        <p:nvSpPr>
+          <p:cNvPr id="2" name="幻灯片图像占位符 1">
+            <a:extLst>
+              <a:ext uri="{FF2B5EF4-FFF2-40B4-BE49-F238E27FC236}">
+                <a16:creationId xmlns:a16="http://schemas.microsoft.com/office/drawing/2014/main" id="{BA74C36B-F87C-530D-62B7-2766AF880133}"/>
+              </a:ext>
+            </a:extLst>
+          </p:cNvPr>
+          <p:cNvSpPr>
+            <a:spLocks noGrp="1" noRot="1" noChangeAspect="1"/>
+          </p:cNvSpPr>
+          <p:nvPr>
+            <p:ph type="sldImg"/>
+          </p:nvPr>
+        </p:nvSpPr>
+        <p:spPr/>
+        <p:txBody>
+          <a:bodyPr/>
+          <a:lstStyle/>
+          <a:p>
+            <a:endParaRPr lang="zh-CN" altLang="en-US"/>
+          </a:p>
+        </p:txBody>
+      </p:sp>
+      <p:sp>
+        <p:nvSpPr>
+          <p:cNvPr id="3" name="备注占位符 2">
+            <a:extLst>
+              <a:ext uri="{FF2B5EF4-FFF2-40B4-BE49-F238E27FC236}">
+                <a16:creationId xmlns:a16="http://schemas.microsoft.com/office/drawing/2014/main" id="{35CE85FE-FE0E-FA57-E052-0A91D541E9A7}"/>
+              </a:ext>
+            </a:extLst>
+          </p:cNvPr>
+          <p:cNvSpPr>
+            <a:spLocks noGrp="1"/>
+          </p:cNvSpPr>
+          <p:nvPr>
+            <p:ph type="body" idx="1"/>
+          </p:nvPr>
+        </p:nvSpPr>
+        <p:spPr/>
+        <p:txBody>
+          <a:bodyPr/>
+          <a:lstStyle/>
+          <a:p>
+            <a:endParaRPr lang="zh-CN" altLang="en-US" dirty="0"/>
+          </a:p>
+        </p:txBody>
+      </p:sp>
+      <p:sp>
+        <p:nvSpPr>
+          <p:cNvPr id="4" name="灯片编号占位符 3">
+            <a:extLst>
+              <a:ext uri="{FF2B5EF4-FFF2-40B4-BE49-F238E27FC236}">
+                <a16:creationId xmlns:a16="http://schemas.microsoft.com/office/drawing/2014/main" id="{DD3A92DD-C230-A3D7-88E3-60BAF8DCC453}"/>
+              </a:ext>
+            </a:extLst>
+          </p:cNvPr>
+          <p:cNvSpPr>
+            <a:spLocks noGrp="1"/>
+          </p:cNvSpPr>
+          <p:nvPr>
+            <p:ph type="sldNum" sz="quarter" idx="5"/>
+          </p:nvPr>
+        </p:nvSpPr>
+        <p:spPr/>
+        <p:txBody>
+          <a:bodyPr/>
+          <a:lstStyle/>
+          <a:p>
+            <a:fld id="{C1392EEC-5A43-47B9-BD96-D1C08A9714A4}" type="slidenum">
+              <a:rPr lang="zh-CN" altLang="en-US" smtClean="0"/>
+              <a:t>15</a:t>
+            </a:fld>
+            <a:endParaRPr lang="zh-CN" altLang="en-US"/>
+          </a:p>
+        </p:txBody>
+      </p:sp>
+    </p:spTree>
+    <p:extLst>
+      <p:ext uri="{BB962C8B-B14F-4D97-AF65-F5344CB8AC3E}">
+        <p14:creationId xmlns:p14="http://schemas.microsoft.com/office/powerpoint/2010/main" val="2235542797"/>
+      </p:ext>
+    </p:extLst>
+  </p:cSld>
+  <p:clrMapOvr>
+    <a:masterClrMapping/>
+  </p:clrMapOvr>
+</p:notes>
+</file>
+
 <file path=ppt/notesSlides/notesSlide2.xml><?xml version="1.0" encoding="utf-8"?>
 <p:notes xmlns:a="http://schemas.openxmlformats.org/drawingml/2006/main" xmlns:r="http://schemas.openxmlformats.org/officeDocument/2006/relationships" xmlns:p="http://schemas.openxmlformats.org/presentationml/2006/main">
   <p:cSld>
@@ -1350,6 +1503,121 @@
     <p:extLst>
       <p:ext uri="{BB962C8B-B14F-4D97-AF65-F5344CB8AC3E}">
         <p14:creationId xmlns:p14="http://schemas.microsoft.com/office/powerpoint/2010/main" val="2026231553"/>
+      </p:ext>
+    </p:extLst>
+  </p:cSld>
+  <p:clrMapOvr>
+    <a:masterClrMapping/>
+  </p:clrMapOvr>
+</p:notes>
+</file>
+
+<file path=ppt/notesSlides/notesSlide9.xml><?xml version="1.0" encoding="utf-8"?>
+<p:notes xmlns:a="http://schemas.openxmlformats.org/drawingml/2006/main" xmlns:r="http://schemas.openxmlformats.org/officeDocument/2006/relationships" xmlns:p="http://schemas.openxmlformats.org/presentationml/2006/main">
+  <p:cSld>
+    <p:spTree>
+      <p:nvGrpSpPr>
+        <p:cNvPr id="1" name="">
+          <a:extLst>
+            <a:ext uri="{FF2B5EF4-FFF2-40B4-BE49-F238E27FC236}">
+              <a16:creationId xmlns:a16="http://schemas.microsoft.com/office/drawing/2014/main" id="{DB055E2C-5105-54E7-CCFF-45ADC18009F0}"/>
+            </a:ext>
+          </a:extLst>
+        </p:cNvPr>
+        <p:cNvGrpSpPr/>
+        <p:nvPr/>
+      </p:nvGrpSpPr>
+      <p:grpSpPr>
+        <a:xfrm>
+          <a:off x="0" y="0"/>
+          <a:ext cx="0" cy="0"/>
+          <a:chOff x="0" y="0"/>
+          <a:chExt cx="0" cy="0"/>
+        </a:xfrm>
+      </p:grpSpPr>
+      <p:sp>
+        <p:nvSpPr>
+          <p:cNvPr id="2" name="幻灯片图像占位符 1">
+            <a:extLst>
+              <a:ext uri="{FF2B5EF4-FFF2-40B4-BE49-F238E27FC236}">
+                <a16:creationId xmlns:a16="http://schemas.microsoft.com/office/drawing/2014/main" id="{FC5AA6A6-7615-EEFA-B6AB-F357D44BAC74}"/>
+              </a:ext>
+            </a:extLst>
+          </p:cNvPr>
+          <p:cNvSpPr>
+            <a:spLocks noGrp="1" noRot="1" noChangeAspect="1"/>
+          </p:cNvSpPr>
+          <p:nvPr>
+            <p:ph type="sldImg"/>
+          </p:nvPr>
+        </p:nvSpPr>
+        <p:spPr/>
+        <p:txBody>
+          <a:bodyPr/>
+          <a:lstStyle/>
+          <a:p>
+            <a:endParaRPr lang="zh-CN" altLang="en-US"/>
+          </a:p>
+        </p:txBody>
+      </p:sp>
+      <p:sp>
+        <p:nvSpPr>
+          <p:cNvPr id="3" name="备注占位符 2">
+            <a:extLst>
+              <a:ext uri="{FF2B5EF4-FFF2-40B4-BE49-F238E27FC236}">
+                <a16:creationId xmlns:a16="http://schemas.microsoft.com/office/drawing/2014/main" id="{8E08A608-918A-4561-9CEE-AA6B6BA3E55D}"/>
+              </a:ext>
+            </a:extLst>
+          </p:cNvPr>
+          <p:cNvSpPr>
+            <a:spLocks noGrp="1"/>
+          </p:cNvSpPr>
+          <p:nvPr>
+            <p:ph type="body" idx="1"/>
+          </p:nvPr>
+        </p:nvSpPr>
+        <p:spPr/>
+        <p:txBody>
+          <a:bodyPr/>
+          <a:lstStyle/>
+          <a:p>
+            <a:endParaRPr lang="zh-CN" altLang="en-US" dirty="0"/>
+          </a:p>
+        </p:txBody>
+      </p:sp>
+      <p:sp>
+        <p:nvSpPr>
+          <p:cNvPr id="4" name="灯片编号占位符 3">
+            <a:extLst>
+              <a:ext uri="{FF2B5EF4-FFF2-40B4-BE49-F238E27FC236}">
+                <a16:creationId xmlns:a16="http://schemas.microsoft.com/office/drawing/2014/main" id="{F2F29AC8-DAB2-E858-2CF1-4E071833C4A6}"/>
+              </a:ext>
+            </a:extLst>
+          </p:cNvPr>
+          <p:cNvSpPr>
+            <a:spLocks noGrp="1"/>
+          </p:cNvSpPr>
+          <p:nvPr>
+            <p:ph type="sldNum" sz="quarter" idx="5"/>
+          </p:nvPr>
+        </p:nvSpPr>
+        <p:spPr/>
+        <p:txBody>
+          <a:bodyPr/>
+          <a:lstStyle/>
+          <a:p>
+            <a:fld id="{C1392EEC-5A43-47B9-BD96-D1C08A9714A4}" type="slidenum">
+              <a:rPr lang="zh-CN" altLang="en-US" smtClean="0"/>
+              <a:t>14</a:t>
+            </a:fld>
+            <a:endParaRPr lang="zh-CN" altLang="en-US"/>
+          </a:p>
+        </p:txBody>
+      </p:sp>
+    </p:spTree>
+    <p:extLst>
+      <p:ext uri="{BB962C8B-B14F-4D97-AF65-F5344CB8AC3E}">
+        <p14:creationId xmlns:p14="http://schemas.microsoft.com/office/powerpoint/2010/main" val="3284596318"/>
       </p:ext>
     </p:extLst>
   </p:cSld>
@@ -1506,7 +1774,7 @@
           <a:p>
             <a:fld id="{CC37D159-D846-43FD-8AE1-DC0896E64EB2}" type="datetimeFigureOut">
               <a:rPr lang="zh-CN" altLang="en-US" smtClean="0"/>
-              <a:t>2026/4/29</a:t>
+              <a:t>2026/5/2</a:t>
             </a:fld>
             <a:endParaRPr lang="zh-CN" altLang="en-US"/>
           </a:p>
@@ -1704,7 +1972,7 @@
           <a:p>
             <a:fld id="{CC37D159-D846-43FD-8AE1-DC0896E64EB2}" type="datetimeFigureOut">
               <a:rPr lang="zh-CN" altLang="en-US" smtClean="0"/>
-              <a:t>2026/4/29</a:t>
+              <a:t>2026/5/2</a:t>
             </a:fld>
             <a:endParaRPr lang="zh-CN" altLang="en-US"/>
           </a:p>
@@ -1912,7 +2180,7 @@
           <a:p>
             <a:fld id="{CC37D159-D846-43FD-8AE1-DC0896E64EB2}" type="datetimeFigureOut">
               <a:rPr lang="zh-CN" altLang="en-US" smtClean="0"/>
-              <a:t>2026/4/29</a:t>
+              <a:t>2026/5/2</a:t>
             </a:fld>
             <a:endParaRPr lang="zh-CN" altLang="en-US"/>
           </a:p>
@@ -2110,7 +2378,7 @@
           <a:p>
             <a:fld id="{CC37D159-D846-43FD-8AE1-DC0896E64EB2}" type="datetimeFigureOut">
               <a:rPr lang="zh-CN" altLang="en-US" smtClean="0"/>
-              <a:t>2026/4/29</a:t>
+              <a:t>2026/5/2</a:t>
             </a:fld>
             <a:endParaRPr lang="zh-CN" altLang="en-US"/>
           </a:p>
@@ -2385,7 +2653,7 @@
           <a:p>
             <a:fld id="{CC37D159-D846-43FD-8AE1-DC0896E64EB2}" type="datetimeFigureOut">
               <a:rPr lang="zh-CN" altLang="en-US" smtClean="0"/>
-              <a:t>2026/4/29</a:t>
+              <a:t>2026/5/2</a:t>
             </a:fld>
             <a:endParaRPr lang="zh-CN" altLang="en-US"/>
           </a:p>
@@ -2650,7 +2918,7 @@
           <a:p>
             <a:fld id="{CC37D159-D846-43FD-8AE1-DC0896E64EB2}" type="datetimeFigureOut">
               <a:rPr lang="zh-CN" altLang="en-US" smtClean="0"/>
-              <a:t>2026/4/29</a:t>
+              <a:t>2026/5/2</a:t>
             </a:fld>
             <a:endParaRPr lang="zh-CN" altLang="en-US"/>
           </a:p>
@@ -3062,7 +3330,7 @@
           <a:p>
             <a:fld id="{CC37D159-D846-43FD-8AE1-DC0896E64EB2}" type="datetimeFigureOut">
               <a:rPr lang="zh-CN" altLang="en-US" smtClean="0"/>
-              <a:t>2026/4/29</a:t>
+              <a:t>2026/5/2</a:t>
             </a:fld>
             <a:endParaRPr lang="zh-CN" altLang="en-US"/>
           </a:p>
@@ -3203,7 +3471,7 @@
           <a:p>
             <a:fld id="{CC37D159-D846-43FD-8AE1-DC0896E64EB2}" type="datetimeFigureOut">
               <a:rPr lang="zh-CN" altLang="en-US" smtClean="0"/>
-              <a:t>2026/4/29</a:t>
+              <a:t>2026/5/2</a:t>
             </a:fld>
             <a:endParaRPr lang="zh-CN" altLang="en-US"/>
           </a:p>
@@ -3316,7 +3584,7 @@
           <a:p>
             <a:fld id="{CC37D159-D846-43FD-8AE1-DC0896E64EB2}" type="datetimeFigureOut">
               <a:rPr lang="zh-CN" altLang="en-US" smtClean="0"/>
-              <a:t>2026/4/29</a:t>
+              <a:t>2026/5/2</a:t>
             </a:fld>
             <a:endParaRPr lang="zh-CN" altLang="en-US"/>
           </a:p>
@@ -3627,7 +3895,7 @@
           <a:p>
             <a:fld id="{CC37D159-D846-43FD-8AE1-DC0896E64EB2}" type="datetimeFigureOut">
               <a:rPr lang="zh-CN" altLang="en-US" smtClean="0"/>
-              <a:t>2026/4/29</a:t>
+              <a:t>2026/5/2</a:t>
             </a:fld>
             <a:endParaRPr lang="zh-CN" altLang="en-US"/>
           </a:p>
@@ -3915,7 +4183,7 @@
           <a:p>
             <a:fld id="{CC37D159-D846-43FD-8AE1-DC0896E64EB2}" type="datetimeFigureOut">
               <a:rPr lang="zh-CN" altLang="en-US" smtClean="0"/>
-              <a:t>2026/4/29</a:t>
+              <a:t>2026/5/2</a:t>
             </a:fld>
             <a:endParaRPr lang="zh-CN" altLang="en-US"/>
           </a:p>
@@ -4156,7 +4424,7 @@
           <a:p>
             <a:fld id="{CC37D159-D846-43FD-8AE1-DC0896E64EB2}" type="datetimeFigureOut">
               <a:rPr lang="zh-CN" altLang="en-US" smtClean="0"/>
-              <a:t>2026/4/29</a:t>
+              <a:t>2026/5/2</a:t>
             </a:fld>
             <a:endParaRPr lang="zh-CN" altLang="en-US"/>
           </a:p>
@@ -6965,6 +7233,714 @@
 </p:sld>
 </file>
 
+<file path=ppt/slides/slide14.xml><?xml version="1.0" encoding="utf-8"?>
+<p:sld xmlns:a="http://schemas.openxmlformats.org/drawingml/2006/main" xmlns:r="http://schemas.openxmlformats.org/officeDocument/2006/relationships" xmlns:p="http://schemas.openxmlformats.org/presentationml/2006/main">
+  <p:cSld>
+    <p:spTree>
+      <p:nvGrpSpPr>
+        <p:cNvPr id="1" name="">
+          <a:extLst>
+            <a:ext uri="{FF2B5EF4-FFF2-40B4-BE49-F238E27FC236}">
+              <a16:creationId xmlns:a16="http://schemas.microsoft.com/office/drawing/2014/main" id="{0FEB5A8A-6FD2-89CD-66FC-3FEA15B3A170}"/>
+            </a:ext>
+          </a:extLst>
+        </p:cNvPr>
+        <p:cNvGrpSpPr/>
+        <p:nvPr/>
+      </p:nvGrpSpPr>
+      <p:grpSpPr>
+        <a:xfrm>
+          <a:off x="0" y="0"/>
+          <a:ext cx="0" cy="0"/>
+          <a:chOff x="0" y="0"/>
+          <a:chExt cx="0" cy="0"/>
+        </a:xfrm>
+      </p:grpSpPr>
+      <p:sp>
+        <p:nvSpPr>
+          <p:cNvPr id="5" name="矩形 4">
+            <a:extLst>
+              <a:ext uri="{FF2B5EF4-FFF2-40B4-BE49-F238E27FC236}">
+                <a16:creationId xmlns:a16="http://schemas.microsoft.com/office/drawing/2014/main" id="{5AEE5B00-17B5-6CAA-9D22-2A9D23FD8934}"/>
+              </a:ext>
+            </a:extLst>
+          </p:cNvPr>
+          <p:cNvSpPr/>
+          <p:nvPr/>
+        </p:nvSpPr>
+        <p:spPr>
+          <a:xfrm>
+            <a:off x="19251" y="205583"/>
+            <a:ext cx="12172749" cy="651933"/>
+          </a:xfrm>
+          <a:prstGeom prst="rect">
+            <a:avLst/>
+          </a:prstGeom>
+          <a:solidFill>
+            <a:schemeClr val="bg1"/>
+          </a:solidFill>
+          <a:ln>
+            <a:solidFill>
+              <a:schemeClr val="bg1"/>
+            </a:solidFill>
+          </a:ln>
+        </p:spPr>
+        <p:style>
+          <a:lnRef idx="2">
+            <a:schemeClr val="accent1">
+              <a:shade val="15000"/>
+            </a:schemeClr>
+          </a:lnRef>
+          <a:fillRef idx="1">
+            <a:schemeClr val="accent1"/>
+          </a:fillRef>
+          <a:effectRef idx="0">
+            <a:schemeClr val="accent1"/>
+          </a:effectRef>
+          <a:fontRef idx="minor">
+            <a:schemeClr val="lt1"/>
+          </a:fontRef>
+        </p:style>
+        <p:txBody>
+          <a:bodyPr rtlCol="0" anchor="ctr"/>
+          <a:lstStyle/>
+          <a:p>
+            <a:pPr algn="just" latinLnBrk="1"/>
+            <a:r>
+              <a:rPr lang="en-US" altLang="zh-CN" sz="3000" dirty="0">
+                <a:solidFill>
+                  <a:schemeClr val="tx1"/>
+                </a:solidFill>
+                <a:latin typeface="Times New Roman" panose="02020603050405020304" pitchFamily="18" charset="0"/>
+                <a:cs typeface="Times New Roman" panose="02020603050405020304" pitchFamily="18" charset="0"/>
+              </a:rPr>
+              <a:t>SPARK: STEPWISE PROCESS-AWARE REWARDS FOR REFERENCE-FREE REINFORCEMENT LEARNING</a:t>
+            </a:r>
+          </a:p>
+        </p:txBody>
+      </p:sp>
+      <p:sp>
+        <p:nvSpPr>
+          <p:cNvPr id="7" name="文本框 6">
+            <a:extLst>
+              <a:ext uri="{FF2B5EF4-FFF2-40B4-BE49-F238E27FC236}">
+                <a16:creationId xmlns:a16="http://schemas.microsoft.com/office/drawing/2014/main" id="{37050EC8-88B9-F005-EB4F-30C64FD45601}"/>
+              </a:ext>
+            </a:extLst>
+          </p:cNvPr>
+          <p:cNvSpPr txBox="1"/>
+          <p:nvPr/>
+        </p:nvSpPr>
+        <p:spPr>
+          <a:xfrm>
+            <a:off x="129208" y="2150816"/>
+            <a:ext cx="12192000" cy="3416320"/>
+          </a:xfrm>
+          <a:prstGeom prst="rect">
+            <a:avLst/>
+          </a:prstGeom>
+          <a:noFill/>
+        </p:spPr>
+        <p:txBody>
+          <a:bodyPr wrap="square" rtlCol="0">
+            <a:spAutoFit/>
+          </a:bodyPr>
+          <a:lstStyle/>
+          <a:p>
+            <a:r>
+              <a:rPr lang="zh-CN" altLang="en-US" sz="2400" dirty="0">
+                <a:latin typeface="Times New Roman" panose="02020603050405020304" pitchFamily="18" charset="0"/>
+                <a:ea typeface="SimSun" panose="02010600030101010101" pitchFamily="2" charset="-122"/>
+                <a:cs typeface="Times New Roman" panose="02020603050405020304" pitchFamily="18" charset="0"/>
+              </a:rPr>
+              <a:t>问题：当前 </a:t>
+            </a:r>
+            <a:r>
+              <a:rPr lang="de-DE" altLang="zh-CN" sz="2400" dirty="0">
+                <a:latin typeface="Times New Roman" panose="02020603050405020304" pitchFamily="18" charset="0"/>
+                <a:ea typeface="SimSun" panose="02010600030101010101" pitchFamily="2" charset="-122"/>
+                <a:cs typeface="Times New Roman" panose="02020603050405020304" pitchFamily="18" charset="0"/>
+              </a:rPr>
+              <a:t>RLVR </a:t>
+            </a:r>
+            <a:r>
+              <a:rPr lang="zh-CN" altLang="en-US" sz="2400" dirty="0">
+                <a:latin typeface="Times New Roman" panose="02020603050405020304" pitchFamily="18" charset="0"/>
+                <a:ea typeface="SimSun" panose="02010600030101010101" pitchFamily="2" charset="-122"/>
+                <a:cs typeface="Times New Roman" panose="02020603050405020304" pitchFamily="18" charset="0"/>
+              </a:rPr>
+              <a:t>是否真正使 </a:t>
+            </a:r>
+            <a:r>
+              <a:rPr lang="de-DE" altLang="zh-CN" sz="2400" dirty="0">
+                <a:latin typeface="Times New Roman" panose="02020603050405020304" pitchFamily="18" charset="0"/>
+                <a:ea typeface="SimSun" panose="02010600030101010101" pitchFamily="2" charset="-122"/>
+                <a:cs typeface="Times New Roman" panose="02020603050405020304" pitchFamily="18" charset="0"/>
+              </a:rPr>
+              <a:t>LLM </a:t>
+            </a:r>
+            <a:r>
+              <a:rPr lang="zh-CN" altLang="en-US" sz="2400" dirty="0">
+                <a:latin typeface="Times New Roman" panose="02020603050405020304" pitchFamily="18" charset="0"/>
+                <a:ea typeface="SimSun" panose="02010600030101010101" pitchFamily="2" charset="-122"/>
+                <a:cs typeface="Times New Roman" panose="02020603050405020304" pitchFamily="18" charset="0"/>
+              </a:rPr>
+              <a:t>获得了新的推理能力，还是仅仅利用基础模型中已经存在的推理模式？</a:t>
+            </a:r>
+            <a:endParaRPr lang="en-US" altLang="zh-CN" sz="2400" dirty="0">
+              <a:latin typeface="Times New Roman" panose="02020603050405020304" pitchFamily="18" charset="0"/>
+              <a:ea typeface="SimSun" panose="02010600030101010101" pitchFamily="2" charset="-122"/>
+              <a:cs typeface="Times New Roman" panose="02020603050405020304" pitchFamily="18" charset="0"/>
+            </a:endParaRPr>
+          </a:p>
+          <a:p>
+            <a:endParaRPr lang="en-US" altLang="zh-CN" sz="2400" dirty="0">
+              <a:latin typeface="Times New Roman" panose="02020603050405020304" pitchFamily="18" charset="0"/>
+              <a:ea typeface="SimSun" panose="02010600030101010101" pitchFamily="2" charset="-122"/>
+              <a:cs typeface="Times New Roman" panose="02020603050405020304" pitchFamily="18" charset="0"/>
+            </a:endParaRPr>
+          </a:p>
+          <a:p>
+            <a:r>
+              <a:rPr lang="zh-CN" altLang="en-US" sz="2400" dirty="0">
+                <a:latin typeface="Times New Roman" panose="02020603050405020304" pitchFamily="18" charset="0"/>
+                <a:ea typeface="SimSun" panose="02010600030101010101" pitchFamily="2" charset="-122"/>
+                <a:cs typeface="Times New Roman" panose="02020603050405020304" pitchFamily="18" charset="0"/>
+              </a:rPr>
+              <a:t>动机：没有找到整篇论文的动机</a:t>
+            </a:r>
+            <a:endParaRPr lang="en-US" altLang="zh-CN" sz="2400" dirty="0">
+              <a:latin typeface="Times New Roman" panose="02020603050405020304" pitchFamily="18" charset="0"/>
+              <a:ea typeface="SimSun" panose="02010600030101010101" pitchFamily="2" charset="-122"/>
+              <a:cs typeface="Times New Roman" panose="02020603050405020304" pitchFamily="18" charset="0"/>
+            </a:endParaRPr>
+          </a:p>
+          <a:p>
+            <a:r>
+              <a:rPr lang="en-US" altLang="zh-CN" sz="2400" dirty="0">
+                <a:latin typeface="Times New Roman" panose="02020603050405020304" pitchFamily="18" charset="0"/>
+                <a:ea typeface="SimSun" panose="02010600030101010101" pitchFamily="2" charset="-122"/>
+                <a:cs typeface="Times New Roman" panose="02020603050405020304" pitchFamily="18" charset="0"/>
+              </a:rPr>
+              <a:t>(</a:t>
+            </a:r>
+            <a:r>
+              <a:rPr lang="zh-CN" altLang="en-US" sz="2400" dirty="0">
+                <a:latin typeface="Times New Roman" panose="02020603050405020304" pitchFamily="18" charset="0"/>
+                <a:ea typeface="SimSun" panose="02010600030101010101" pitchFamily="2" charset="-122"/>
+                <a:cs typeface="Times New Roman" panose="02020603050405020304" pitchFamily="18" charset="0"/>
+              </a:rPr>
+              <a:t>注：但是对于具体阶段中每个地方的小动机能看出来</a:t>
+            </a:r>
+            <a:r>
+              <a:rPr lang="en-US" altLang="zh-CN" sz="2400" dirty="0">
+                <a:latin typeface="Times New Roman" panose="02020603050405020304" pitchFamily="18" charset="0"/>
+                <a:ea typeface="SimSun" panose="02010600030101010101" pitchFamily="2" charset="-122"/>
+                <a:cs typeface="Times New Roman" panose="02020603050405020304" pitchFamily="18" charset="0"/>
+              </a:rPr>
+              <a:t>)</a:t>
+            </a:r>
+          </a:p>
+          <a:p>
+            <a:endParaRPr lang="en-US" altLang="zh-CN" sz="2400" dirty="0">
+              <a:latin typeface="Times New Roman" panose="02020603050405020304" pitchFamily="18" charset="0"/>
+              <a:ea typeface="SimSun" panose="02010600030101010101" pitchFamily="2" charset="-122"/>
+              <a:cs typeface="Times New Roman" panose="02020603050405020304" pitchFamily="18" charset="0"/>
+            </a:endParaRPr>
+          </a:p>
+          <a:p>
+            <a:r>
+              <a:rPr lang="zh-CN" altLang="en-US" sz="2400" dirty="0">
+                <a:latin typeface="Times New Roman" panose="02020603050405020304" pitchFamily="18" charset="0"/>
+                <a:ea typeface="SimSun" panose="02010600030101010101" pitchFamily="2" charset="-122"/>
+                <a:cs typeface="Times New Roman" panose="02020603050405020304" pitchFamily="18" charset="0"/>
+              </a:rPr>
+              <a:t>方法：用 </a:t>
+            </a:r>
+            <a:r>
+              <a:rPr lang="de-DE" altLang="zh-CN" sz="2400" dirty="0">
+                <a:latin typeface="Times New Roman" panose="02020603050405020304" pitchFamily="18" charset="0"/>
+                <a:ea typeface="SimSun" panose="02010600030101010101" pitchFamily="2" charset="-122"/>
+                <a:cs typeface="Times New Roman" panose="02020603050405020304" pitchFamily="18" charset="0"/>
+              </a:rPr>
+              <a:t>pass@k </a:t>
+            </a:r>
+            <a:r>
+              <a:rPr lang="zh-CN" altLang="en-US" sz="2400" dirty="0">
+                <a:latin typeface="Times New Roman" panose="02020603050405020304" pitchFamily="18" charset="0"/>
+                <a:ea typeface="SimSun" panose="02010600030101010101" pitchFamily="2" charset="-122"/>
+                <a:cs typeface="Times New Roman" panose="02020603050405020304" pitchFamily="18" charset="0"/>
+              </a:rPr>
+              <a:t>测推理能力，再用 </a:t>
+            </a:r>
+            <a:r>
+              <a:rPr lang="de-DE" altLang="zh-CN" sz="2400" dirty="0">
+                <a:latin typeface="Times New Roman" panose="02020603050405020304" pitchFamily="18" charset="0"/>
+                <a:ea typeface="SimSun" panose="02010600030101010101" pitchFamily="2" charset="-122"/>
+                <a:cs typeface="Times New Roman" panose="02020603050405020304" pitchFamily="18" charset="0"/>
+              </a:rPr>
+              <a:t>coverage/perplexity </a:t>
+            </a:r>
+            <a:r>
+              <a:rPr lang="zh-CN" altLang="en-US" sz="2400" dirty="0">
+                <a:latin typeface="Times New Roman" panose="02020603050405020304" pitchFamily="18" charset="0"/>
+                <a:ea typeface="SimSun" panose="02010600030101010101" pitchFamily="2" charset="-122"/>
+                <a:cs typeface="Times New Roman" panose="02020603050405020304" pitchFamily="18" charset="0"/>
+              </a:rPr>
+              <a:t>判断 </a:t>
+            </a:r>
+            <a:r>
+              <a:rPr lang="de-DE" altLang="zh-CN" sz="2400" dirty="0">
+                <a:latin typeface="Times New Roman" panose="02020603050405020304" pitchFamily="18" charset="0"/>
+                <a:ea typeface="SimSun" panose="02010600030101010101" pitchFamily="2" charset="-122"/>
+                <a:cs typeface="Times New Roman" panose="02020603050405020304" pitchFamily="18" charset="0"/>
+              </a:rPr>
+              <a:t>RLVR </a:t>
+            </a:r>
+            <a:r>
+              <a:rPr lang="zh-CN" altLang="en-US" sz="2400" dirty="0">
+                <a:latin typeface="Times New Roman" panose="02020603050405020304" pitchFamily="18" charset="0"/>
+                <a:ea typeface="SimSun" panose="02010600030101010101" pitchFamily="2" charset="-122"/>
+                <a:cs typeface="Times New Roman" panose="02020603050405020304" pitchFamily="18" charset="0"/>
+              </a:rPr>
+              <a:t>是否产生新的推理路径。</a:t>
+            </a:r>
+            <a:endParaRPr lang="en-US" altLang="zh-CN" sz="2400" dirty="0">
+              <a:latin typeface="Times New Roman" panose="02020603050405020304" pitchFamily="18" charset="0"/>
+              <a:ea typeface="SimSun" panose="02010600030101010101" pitchFamily="2" charset="-122"/>
+              <a:cs typeface="Times New Roman" panose="02020603050405020304" pitchFamily="18" charset="0"/>
+            </a:endParaRPr>
+          </a:p>
+          <a:p>
+            <a:endParaRPr lang="en-US" altLang="zh-CN" sz="2400" dirty="0">
+              <a:latin typeface="Times New Roman" panose="02020603050405020304" pitchFamily="18" charset="0"/>
+              <a:ea typeface="SimSun" panose="02010600030101010101" pitchFamily="2" charset="-122"/>
+              <a:cs typeface="Times New Roman" panose="02020603050405020304" pitchFamily="18" charset="0"/>
+            </a:endParaRPr>
+          </a:p>
+          <a:p>
+            <a:endParaRPr lang="en-US" altLang="zh-CN" sz="2400" dirty="0">
+              <a:latin typeface="Times New Roman" panose="02020603050405020304" pitchFamily="18" charset="0"/>
+              <a:ea typeface="SimSun" panose="02010600030101010101" pitchFamily="2" charset="-122"/>
+              <a:cs typeface="Times New Roman" panose="02020603050405020304" pitchFamily="18" charset="0"/>
+            </a:endParaRPr>
+          </a:p>
+        </p:txBody>
+      </p:sp>
+    </p:spTree>
+    <p:extLst>
+      <p:ext uri="{BB962C8B-B14F-4D97-AF65-F5344CB8AC3E}">
+        <p14:creationId xmlns:p14="http://schemas.microsoft.com/office/powerpoint/2010/main" val="3032947090"/>
+      </p:ext>
+    </p:extLst>
+  </p:cSld>
+  <p:clrMapOvr>
+    <a:masterClrMapping/>
+  </p:clrMapOvr>
+  <p:extLst>
+    <p:ext uri="{6950BFC3-D8DA-4A85-94F7-54DA5524770B}">
+      <p188:commentRel xmlns:p188="http://schemas.microsoft.com/office/powerpoint/2018/8/main" r:id="rId3"/>
+    </p:ext>
+  </p:extLst>
+</p:sld>
+</file>
+
+<file path=ppt/slides/slide15.xml><?xml version="1.0" encoding="utf-8"?>
+<p:sld xmlns:a="http://schemas.openxmlformats.org/drawingml/2006/main" xmlns:r="http://schemas.openxmlformats.org/officeDocument/2006/relationships" xmlns:p="http://schemas.openxmlformats.org/presentationml/2006/main">
+  <p:cSld>
+    <p:spTree>
+      <p:nvGrpSpPr>
+        <p:cNvPr id="1" name="">
+          <a:extLst>
+            <a:ext uri="{FF2B5EF4-FFF2-40B4-BE49-F238E27FC236}">
+              <a16:creationId xmlns:a16="http://schemas.microsoft.com/office/drawing/2014/main" id="{309F7B55-C7D2-9787-0AFB-7C4CA92A7E52}"/>
+            </a:ext>
+          </a:extLst>
+        </p:cNvPr>
+        <p:cNvGrpSpPr/>
+        <p:nvPr/>
+      </p:nvGrpSpPr>
+      <p:grpSpPr>
+        <a:xfrm>
+          <a:off x="0" y="0"/>
+          <a:ext cx="0" cy="0"/>
+          <a:chOff x="0" y="0"/>
+          <a:chExt cx="0" cy="0"/>
+        </a:xfrm>
+      </p:grpSpPr>
+      <p:sp>
+        <p:nvSpPr>
+          <p:cNvPr id="5" name="矩形 4">
+            <a:extLst>
+              <a:ext uri="{FF2B5EF4-FFF2-40B4-BE49-F238E27FC236}">
+                <a16:creationId xmlns:a16="http://schemas.microsoft.com/office/drawing/2014/main" id="{D04C81DE-F268-5630-EA9D-83B1DAE7C7A9}"/>
+              </a:ext>
+            </a:extLst>
+          </p:cNvPr>
+          <p:cNvSpPr/>
+          <p:nvPr/>
+        </p:nvSpPr>
+        <p:spPr>
+          <a:xfrm>
+            <a:off x="19251" y="205583"/>
+            <a:ext cx="12172749" cy="651933"/>
+          </a:xfrm>
+          <a:prstGeom prst="rect">
+            <a:avLst/>
+          </a:prstGeom>
+          <a:solidFill>
+            <a:schemeClr val="bg1"/>
+          </a:solidFill>
+          <a:ln>
+            <a:solidFill>
+              <a:schemeClr val="bg1"/>
+            </a:solidFill>
+          </a:ln>
+        </p:spPr>
+        <p:style>
+          <a:lnRef idx="2">
+            <a:schemeClr val="accent1">
+              <a:shade val="15000"/>
+            </a:schemeClr>
+          </a:lnRef>
+          <a:fillRef idx="1">
+            <a:schemeClr val="accent1"/>
+          </a:fillRef>
+          <a:effectRef idx="0">
+            <a:schemeClr val="accent1"/>
+          </a:effectRef>
+          <a:fontRef idx="minor">
+            <a:schemeClr val="lt1"/>
+          </a:fontRef>
+        </p:style>
+        <p:txBody>
+          <a:bodyPr rtlCol="0" anchor="ctr"/>
+          <a:lstStyle/>
+          <a:p>
+            <a:pPr algn="just" latinLnBrk="1"/>
+            <a:r>
+              <a:rPr lang="zh-CN" altLang="en-US" sz="3000" dirty="0">
+                <a:solidFill>
+                  <a:schemeClr val="tx1"/>
+                </a:solidFill>
+                <a:latin typeface="Times New Roman" panose="02020603050405020304" pitchFamily="18" charset="0"/>
+                <a:ea typeface="SimSun" panose="02010600030101010101" pitchFamily="2" charset="-122"/>
+                <a:cs typeface="Times New Roman" panose="02020603050405020304" pitchFamily="18" charset="0"/>
+              </a:rPr>
+              <a:t>思考</a:t>
+            </a:r>
+            <a:endParaRPr lang="en-US" altLang="zh-CN" sz="3000" dirty="0">
+              <a:solidFill>
+                <a:schemeClr val="tx1"/>
+              </a:solidFill>
+              <a:latin typeface="Times New Roman" panose="02020603050405020304" pitchFamily="18" charset="0"/>
+              <a:ea typeface="SimSun" panose="02010600030101010101" pitchFamily="2" charset="-122"/>
+              <a:cs typeface="Times New Roman" panose="02020603050405020304" pitchFamily="18" charset="0"/>
+            </a:endParaRPr>
+          </a:p>
+        </p:txBody>
+      </p:sp>
+      <p:sp>
+        <p:nvSpPr>
+          <p:cNvPr id="7" name="文本框 6">
+            <a:extLst>
+              <a:ext uri="{FF2B5EF4-FFF2-40B4-BE49-F238E27FC236}">
+                <a16:creationId xmlns:a16="http://schemas.microsoft.com/office/drawing/2014/main" id="{A72C4378-EF71-9119-0FCD-B29A084760F9}"/>
+              </a:ext>
+            </a:extLst>
+          </p:cNvPr>
+          <p:cNvSpPr txBox="1"/>
+          <p:nvPr/>
+        </p:nvSpPr>
+        <p:spPr>
+          <a:xfrm>
+            <a:off x="0" y="948181"/>
+            <a:ext cx="12192000" cy="4154984"/>
+          </a:xfrm>
+          <a:prstGeom prst="rect">
+            <a:avLst/>
+          </a:prstGeom>
+          <a:noFill/>
+        </p:spPr>
+        <p:txBody>
+          <a:bodyPr wrap="square" rtlCol="0">
+            <a:spAutoFit/>
+          </a:bodyPr>
+          <a:lstStyle/>
+          <a:p>
+            <a:r>
+              <a:rPr lang="en-US" altLang="zh-CN" sz="2400" dirty="0">
+                <a:latin typeface="Times New Roman" panose="02020603050405020304" pitchFamily="18" charset="0"/>
+                <a:ea typeface="SimSun" panose="02010600030101010101" pitchFamily="2" charset="-122"/>
+                <a:cs typeface="Times New Roman" panose="02020603050405020304" pitchFamily="18" charset="0"/>
+              </a:rPr>
+              <a:t>1. </a:t>
+            </a:r>
+            <a:r>
+              <a:rPr lang="zh-CN" altLang="en-US" sz="2400" dirty="0">
+                <a:latin typeface="Times New Roman" panose="02020603050405020304" pitchFamily="18" charset="0"/>
+                <a:ea typeface="SimSun" panose="02010600030101010101" pitchFamily="2" charset="-122"/>
+                <a:cs typeface="Times New Roman" panose="02020603050405020304" pitchFamily="18" charset="0"/>
+              </a:rPr>
+              <a:t>我们把</a:t>
+            </a:r>
+            <a:r>
+              <a:rPr lang="de-DE" altLang="zh-CN" sz="2400" dirty="0">
+                <a:latin typeface="Times New Roman" panose="02020603050405020304" pitchFamily="18" charset="0"/>
+                <a:ea typeface="SimSun" panose="02010600030101010101" pitchFamily="2" charset="-122"/>
+                <a:cs typeface="Times New Roman" panose="02020603050405020304" pitchFamily="18" charset="0"/>
+              </a:rPr>
+              <a:t>SPARK</a:t>
+            </a:r>
+            <a:r>
+              <a:rPr lang="zh-CN" altLang="en-US" sz="2400" dirty="0">
+                <a:latin typeface="Times New Roman" panose="02020603050405020304" pitchFamily="18" charset="0"/>
+                <a:ea typeface="SimSun" panose="02010600030101010101" pitchFamily="2" charset="-122"/>
+                <a:cs typeface="Times New Roman" panose="02020603050405020304" pitchFamily="18" charset="0"/>
+              </a:rPr>
+              <a:t>这种方法用于综述中的</a:t>
+            </a:r>
+            <a:r>
+              <a:rPr lang="de-DE" altLang="zh-CN" sz="2400" dirty="0">
+                <a:latin typeface="Times New Roman" panose="02020603050405020304" pitchFamily="18" charset="0"/>
+                <a:ea typeface="SimSun" panose="02010600030101010101" pitchFamily="2" charset="-122"/>
+                <a:cs typeface="Times New Roman" panose="02020603050405020304" pitchFamily="18" charset="0"/>
+              </a:rPr>
+              <a:t>long-horizon decision</a:t>
+            </a:r>
+            <a:r>
+              <a:rPr lang="zh-CN" altLang="en-US" sz="2400" dirty="0">
+                <a:latin typeface="Times New Roman" panose="02020603050405020304" pitchFamily="18" charset="0"/>
+                <a:ea typeface="SimSun" panose="02010600030101010101" pitchFamily="2" charset="-122"/>
+                <a:cs typeface="Times New Roman" panose="02020603050405020304" pitchFamily="18" charset="0"/>
+              </a:rPr>
+              <a:t>问题，能解决吗？</a:t>
+            </a:r>
+            <a:endParaRPr lang="en-US" altLang="zh-CN" sz="2400" dirty="0">
+              <a:latin typeface="Times New Roman" panose="02020603050405020304" pitchFamily="18" charset="0"/>
+              <a:ea typeface="SimSun" panose="02010600030101010101" pitchFamily="2" charset="-122"/>
+              <a:cs typeface="Times New Roman" panose="02020603050405020304" pitchFamily="18" charset="0"/>
+            </a:endParaRPr>
+          </a:p>
+          <a:p>
+            <a:r>
+              <a:rPr lang="zh-CN" altLang="en-US" sz="2400" dirty="0">
+                <a:latin typeface="Times New Roman" panose="02020603050405020304" pitchFamily="18" charset="0"/>
+                <a:ea typeface="SimSun" panose="02010600030101010101" pitchFamily="2" charset="-122"/>
+                <a:cs typeface="Times New Roman" panose="02020603050405020304" pitchFamily="18" charset="0"/>
+              </a:rPr>
+              <a:t>答：可以一定程度上的缓解，因为这种方法主要用于单轮交互的推理中，在多轮交互时还要考虑一些随机动态的状况</a:t>
+            </a:r>
+            <a:r>
+              <a:rPr lang="en-US" altLang="zh-CN" sz="2400" dirty="0">
+                <a:latin typeface="Times New Roman" panose="02020603050405020304" pitchFamily="18" charset="0"/>
+                <a:ea typeface="SimSun" panose="02010600030101010101" pitchFamily="2" charset="-122"/>
+                <a:cs typeface="Times New Roman" panose="02020603050405020304" pitchFamily="18" charset="0"/>
+              </a:rPr>
+              <a:t>(</a:t>
+            </a:r>
+            <a:r>
+              <a:rPr lang="zh-CN" altLang="en-US" sz="2400" dirty="0">
+                <a:latin typeface="Times New Roman" panose="02020603050405020304" pitchFamily="18" charset="0"/>
+                <a:ea typeface="SimSun" panose="02010600030101010101" pitchFamily="2" charset="-122"/>
+                <a:cs typeface="Times New Roman" panose="02020603050405020304" pitchFamily="18" charset="0"/>
+              </a:rPr>
+              <a:t>也就是环境突然反馈了什么</a:t>
+            </a:r>
+            <a:r>
+              <a:rPr lang="en-US" altLang="zh-CN" sz="2400" dirty="0">
+                <a:latin typeface="Times New Roman" panose="02020603050405020304" pitchFamily="18" charset="0"/>
+                <a:ea typeface="SimSun" panose="02010600030101010101" pitchFamily="2" charset="-122"/>
+                <a:cs typeface="Times New Roman" panose="02020603050405020304" pitchFamily="18" charset="0"/>
+              </a:rPr>
+              <a:t>)</a:t>
+            </a:r>
+          </a:p>
+          <a:p>
+            <a:endParaRPr lang="en-US" altLang="zh-CN" sz="2400" dirty="0">
+              <a:latin typeface="Times New Roman" panose="02020603050405020304" pitchFamily="18" charset="0"/>
+              <a:ea typeface="SimSun" panose="02010600030101010101" pitchFamily="2" charset="-122"/>
+              <a:cs typeface="Times New Roman" panose="02020603050405020304" pitchFamily="18" charset="0"/>
+            </a:endParaRPr>
+          </a:p>
+          <a:p>
+            <a:r>
+              <a:rPr lang="en-US" altLang="zh-CN" sz="2400" dirty="0">
+                <a:latin typeface="Times New Roman" panose="02020603050405020304" pitchFamily="18" charset="0"/>
+                <a:ea typeface="SimSun" panose="02010600030101010101" pitchFamily="2" charset="-122"/>
+                <a:cs typeface="Times New Roman" panose="02020603050405020304" pitchFamily="18" charset="0"/>
+              </a:rPr>
+              <a:t>2. RLVR</a:t>
+            </a:r>
+            <a:r>
+              <a:rPr lang="zh-CN" altLang="en-US" sz="2400" dirty="0">
+                <a:latin typeface="Times New Roman" panose="02020603050405020304" pitchFamily="18" charset="0"/>
+                <a:ea typeface="SimSun" panose="02010600030101010101" pitchFamily="2" charset="-122"/>
+                <a:cs typeface="Times New Roman" panose="02020603050405020304" pitchFamily="18" charset="0"/>
+              </a:rPr>
+              <a:t>存在的问题？</a:t>
+            </a:r>
+            <a:endParaRPr lang="en-US" altLang="zh-CN" sz="2400" dirty="0">
+              <a:latin typeface="Times New Roman" panose="02020603050405020304" pitchFamily="18" charset="0"/>
+              <a:ea typeface="SimSun" panose="02010600030101010101" pitchFamily="2" charset="-122"/>
+              <a:cs typeface="Times New Roman" panose="02020603050405020304" pitchFamily="18" charset="0"/>
+            </a:endParaRPr>
+          </a:p>
+          <a:p>
+            <a:r>
+              <a:rPr lang="zh-CN" altLang="en-US" sz="2400" dirty="0">
+                <a:latin typeface="Times New Roman" panose="02020603050405020304" pitchFamily="18" charset="0"/>
+                <a:ea typeface="SimSun" panose="02010600030101010101" pitchFamily="2" charset="-122"/>
+                <a:cs typeface="Times New Roman" panose="02020603050405020304" pitchFamily="18" charset="0"/>
+              </a:rPr>
+              <a:t>答：</a:t>
+            </a:r>
+            <a:r>
+              <a:rPr lang="zh-CN" altLang="en-US" sz="2400" b="1" dirty="0">
+                <a:latin typeface="Times New Roman" panose="02020603050405020304" pitchFamily="18" charset="0"/>
+                <a:ea typeface="SimSun" panose="02010600030101010101" pitchFamily="2" charset="-122"/>
+                <a:cs typeface="Times New Roman" panose="02020603050405020304" pitchFamily="18" charset="0"/>
+              </a:rPr>
+              <a:t>首先，奖励太稀疏，只看最后答案对不对</a:t>
+            </a:r>
+            <a:r>
+              <a:rPr lang="zh-CN" altLang="en-US" sz="2400" dirty="0">
+                <a:latin typeface="Times New Roman" panose="02020603050405020304" pitchFamily="18" charset="0"/>
+                <a:ea typeface="SimSun" panose="02010600030101010101" pitchFamily="2" charset="-122"/>
+                <a:cs typeface="Times New Roman" panose="02020603050405020304" pitchFamily="18" charset="0"/>
+              </a:rPr>
+              <a:t>。如果答案错了，整条推理链都被判负分。但这是不合理的，因为内部的每一个步骤正确性也同样重要。</a:t>
+            </a:r>
+            <a:endParaRPr lang="en-US" altLang="zh-CN" sz="2400" dirty="0">
+              <a:latin typeface="Times New Roman" panose="02020603050405020304" pitchFamily="18" charset="0"/>
+              <a:ea typeface="SimSun" panose="02010600030101010101" pitchFamily="2" charset="-122"/>
+              <a:cs typeface="Times New Roman" panose="02020603050405020304" pitchFamily="18" charset="0"/>
+            </a:endParaRPr>
+          </a:p>
+          <a:p>
+            <a:r>
+              <a:rPr lang="zh-CN" altLang="en-US" sz="2400" b="1" dirty="0">
+                <a:latin typeface="Times New Roman" panose="02020603050405020304" pitchFamily="18" charset="0"/>
+                <a:ea typeface="SimSun" panose="02010600030101010101" pitchFamily="2" charset="-122"/>
+                <a:cs typeface="Times New Roman" panose="02020603050405020304" pitchFamily="18" charset="0"/>
+              </a:rPr>
+              <a:t>其次，当正确解很难被采样到时，</a:t>
+            </a:r>
+            <a:r>
+              <a:rPr lang="en-US" altLang="zh-CN" sz="2400" b="1" dirty="0">
+                <a:latin typeface="Times New Roman" panose="02020603050405020304" pitchFamily="18" charset="0"/>
+                <a:ea typeface="SimSun" panose="02010600030101010101" pitchFamily="2" charset="-122"/>
+                <a:cs typeface="Times New Roman" panose="02020603050405020304" pitchFamily="18" charset="0"/>
+              </a:rPr>
+              <a:t>RLVR</a:t>
+            </a:r>
+            <a:r>
+              <a:rPr lang="zh-CN" altLang="en-US" sz="2400" b="1" dirty="0">
+                <a:latin typeface="Times New Roman" panose="02020603050405020304" pitchFamily="18" charset="0"/>
+                <a:ea typeface="SimSun" panose="02010600030101010101" pitchFamily="2" charset="-122"/>
+                <a:cs typeface="Times New Roman" panose="02020603050405020304" pitchFamily="18" charset="0"/>
+              </a:rPr>
+              <a:t>会失效</a:t>
+            </a:r>
+            <a:r>
+              <a:rPr lang="zh-CN" altLang="en-US" sz="2400" dirty="0">
+                <a:latin typeface="Times New Roman" panose="02020603050405020304" pitchFamily="18" charset="0"/>
+                <a:ea typeface="SimSun" panose="02010600030101010101" pitchFamily="2" charset="-122"/>
+                <a:cs typeface="Times New Roman" panose="02020603050405020304" pitchFamily="18" charset="0"/>
+              </a:rPr>
+              <a:t>。也就是在小模型在难题上经常这样：采样很多次，但全错，</a:t>
+            </a:r>
+            <a:r>
+              <a:rPr lang="en-US" altLang="zh-CN" sz="2400" dirty="0">
+                <a:latin typeface="Times New Roman" panose="02020603050405020304" pitchFamily="18" charset="0"/>
+                <a:ea typeface="SimSun" panose="02010600030101010101" pitchFamily="2" charset="-122"/>
+                <a:cs typeface="Times New Roman" panose="02020603050405020304" pitchFamily="18" charset="0"/>
+              </a:rPr>
+              <a:t>reward </a:t>
+            </a:r>
+            <a:r>
+              <a:rPr lang="zh-CN" altLang="en-US" sz="2400" dirty="0">
+                <a:latin typeface="Times New Roman" panose="02020603050405020304" pitchFamily="18" charset="0"/>
+                <a:ea typeface="SimSun" panose="02010600030101010101" pitchFamily="2" charset="-122"/>
+                <a:cs typeface="Times New Roman" panose="02020603050405020304" pitchFamily="18" charset="0"/>
+              </a:rPr>
+              <a:t>全是</a:t>
+            </a:r>
+            <a:r>
+              <a:rPr lang="en-US" altLang="zh-CN" sz="2400" dirty="0">
+                <a:latin typeface="Times New Roman" panose="02020603050405020304" pitchFamily="18" charset="0"/>
+                <a:ea typeface="SimSun" panose="02010600030101010101" pitchFamily="2" charset="-122"/>
+                <a:cs typeface="Times New Roman" panose="02020603050405020304" pitchFamily="18" charset="0"/>
+              </a:rPr>
+              <a:t>0</a:t>
+            </a:r>
+            <a:r>
+              <a:rPr lang="zh-CN" altLang="en-US" sz="2400" dirty="0">
+                <a:latin typeface="Times New Roman" panose="02020603050405020304" pitchFamily="18" charset="0"/>
+                <a:ea typeface="SimSun" panose="02010600030101010101" pitchFamily="2" charset="-122"/>
+                <a:cs typeface="Times New Roman" panose="02020603050405020304" pitchFamily="18" charset="0"/>
+              </a:rPr>
+              <a:t>，这样</a:t>
+            </a:r>
+            <a:r>
+              <a:rPr lang="en-US" altLang="zh-CN" sz="2400" b="1" dirty="0">
+                <a:latin typeface="Times New Roman" panose="02020603050405020304" pitchFamily="18" charset="0"/>
+                <a:ea typeface="SimSun" panose="02010600030101010101" pitchFamily="2" charset="-122"/>
+                <a:cs typeface="Times New Roman" panose="02020603050405020304" pitchFamily="18" charset="0"/>
+              </a:rPr>
+              <a:t>RLVR</a:t>
+            </a:r>
+            <a:r>
+              <a:rPr lang="zh-CN" altLang="en-US" sz="2400" dirty="0">
+                <a:latin typeface="Times New Roman" panose="02020603050405020304" pitchFamily="18" charset="0"/>
+                <a:ea typeface="SimSun" panose="02010600030101010101" pitchFamily="2" charset="-122"/>
+                <a:cs typeface="Times New Roman" panose="02020603050405020304" pitchFamily="18" charset="0"/>
+              </a:rPr>
+              <a:t>就会失效</a:t>
+            </a:r>
+            <a:r>
+              <a:rPr lang="zh-CN" altLang="en-US" sz="2400" b="1" dirty="0">
+                <a:latin typeface="Times New Roman" panose="02020603050405020304" pitchFamily="18" charset="0"/>
+                <a:ea typeface="SimSun" panose="02010600030101010101" pitchFamily="2" charset="-122"/>
+                <a:cs typeface="Times New Roman" panose="02020603050405020304" pitchFamily="18" charset="0"/>
+              </a:rPr>
+              <a:t>。</a:t>
+            </a:r>
+            <a:endParaRPr lang="en-US" altLang="zh-CN" sz="2400" b="1" dirty="0">
+              <a:latin typeface="Times New Roman" panose="02020603050405020304" pitchFamily="18" charset="0"/>
+              <a:ea typeface="SimSun" panose="02010600030101010101" pitchFamily="2" charset="-122"/>
+              <a:cs typeface="Times New Roman" panose="02020603050405020304" pitchFamily="18" charset="0"/>
+            </a:endParaRPr>
+          </a:p>
+          <a:p>
+            <a:endParaRPr lang="en-US" altLang="zh-CN" sz="2400" dirty="0">
+              <a:latin typeface="Times New Roman" panose="02020603050405020304" pitchFamily="18" charset="0"/>
+              <a:ea typeface="SimSun" panose="02010600030101010101" pitchFamily="2" charset="-122"/>
+              <a:cs typeface="Times New Roman" panose="02020603050405020304" pitchFamily="18" charset="0"/>
+            </a:endParaRPr>
+          </a:p>
+          <a:p>
+            <a:endParaRPr lang="en-US" altLang="zh-CN" sz="2400" dirty="0">
+              <a:latin typeface="Times New Roman" panose="02020603050405020304" pitchFamily="18" charset="0"/>
+              <a:ea typeface="SimSun" panose="02010600030101010101" pitchFamily="2" charset="-122"/>
+              <a:cs typeface="Times New Roman" panose="02020603050405020304" pitchFamily="18" charset="0"/>
+            </a:endParaRPr>
+          </a:p>
+        </p:txBody>
+      </p:sp>
+    </p:spTree>
+    <p:extLst>
+      <p:ext uri="{BB962C8B-B14F-4D97-AF65-F5344CB8AC3E}">
+        <p14:creationId xmlns:p14="http://schemas.microsoft.com/office/powerpoint/2010/main" val="673800897"/>
+      </p:ext>
+    </p:extLst>
+  </p:cSld>
+  <p:clrMapOvr>
+    <a:masterClrMapping/>
+  </p:clrMapOvr>
+</p:sld>
+</file>
+
 <file path=ppt/slides/slide2.xml><?xml version="1.0" encoding="utf-8"?>
 <p:sld xmlns:a="http://schemas.openxmlformats.org/drawingml/2006/main" xmlns:r="http://schemas.openxmlformats.org/officeDocument/2006/relationships" xmlns:p="http://schemas.openxmlformats.org/presentationml/2006/main">
   <p:cSld>
@@ -7072,6 +8048,7 @@
           </a:bodyPr>
           <a:lstStyle/>
           <a:p>
+            <a:pPr algn="just" latinLnBrk="1"/>
             <a:r>
               <a:rPr lang="en-US" altLang="zh-CN" sz="2400" dirty="0">
                 <a:latin typeface="Times New Roman" panose="02020603050405020304" pitchFamily="18" charset="0"/>
@@ -7082,6 +8059,7 @@
             </a:r>
           </a:p>
           <a:p>
+            <a:pPr algn="just" latinLnBrk="1"/>
             <a:r>
               <a:rPr lang="en-US" altLang="zh-CN" sz="2400" dirty="0">
                 <a:latin typeface="Times New Roman" panose="02020603050405020304" pitchFamily="18" charset="0"/>
@@ -7124,6 +8102,7 @@
             </a:r>
           </a:p>
           <a:p>
+            <a:pPr algn="just" latinLnBrk="1"/>
             <a:endParaRPr lang="en-US" altLang="zh-CN" sz="2400" dirty="0">
               <a:latin typeface="Times New Roman" panose="02020603050405020304" pitchFamily="18" charset="0"/>
               <a:ea typeface="SimSun" panose="02010600030101010101" pitchFamily="2" charset="-122"/>
@@ -7131,6 +8110,7 @@
             </a:endParaRPr>
           </a:p>
           <a:p>
+            <a:pPr algn="just" latinLnBrk="1"/>
             <a:r>
               <a:rPr lang="en-US" altLang="zh-CN" sz="2400" dirty="0">
                 <a:latin typeface="Times New Roman" panose="02020603050405020304" pitchFamily="18" charset="0"/>
@@ -7141,6 +8121,7 @@
             </a:r>
           </a:p>
           <a:p>
+            <a:pPr algn="just" latinLnBrk="1"/>
             <a:r>
               <a:rPr lang="en-US" altLang="zh-CN" sz="2400" dirty="0">
                 <a:latin typeface="Times New Roman" panose="02020603050405020304" pitchFamily="18" charset="0"/>
@@ -7151,6 +8132,7 @@
             </a:r>
           </a:p>
           <a:p>
+            <a:pPr algn="just" latinLnBrk="1"/>
             <a:endParaRPr lang="zh-CN" altLang="en-US" sz="2400" dirty="0">
               <a:latin typeface="Times New Roman" panose="02020603050405020304" pitchFamily="18" charset="0"/>
               <a:ea typeface="SimSun" panose="02010600030101010101" pitchFamily="2" charset="-122"/>
@@ -7158,6 +8140,7 @@
             </a:endParaRPr>
           </a:p>
           <a:p>
+            <a:pPr algn="just" latinLnBrk="1"/>
             <a:r>
               <a:rPr lang="en-US" altLang="zh-CN" sz="2400" dirty="0">
                 <a:latin typeface="Times New Roman" panose="02020603050405020304" pitchFamily="18" charset="0"/>
@@ -7168,6 +8151,7 @@
             </a:r>
           </a:p>
           <a:p>
+            <a:pPr algn="just" latinLnBrk="1"/>
             <a:r>
               <a:rPr lang="en-US" altLang="zh-CN" sz="2400" dirty="0">
                 <a:latin typeface="Times New Roman" panose="02020603050405020304" pitchFamily="18" charset="0"/>
@@ -7178,6 +8162,7 @@
             </a:r>
           </a:p>
           <a:p>
+            <a:pPr algn="just" latinLnBrk="1"/>
             <a:endParaRPr lang="en-US" altLang="zh-CN" sz="2400" dirty="0">
               <a:latin typeface="Times New Roman" panose="02020603050405020304" pitchFamily="18" charset="0"/>
               <a:ea typeface="SimSun" panose="02010600030101010101" pitchFamily="2" charset="-122"/>
@@ -7185,6 +8170,7 @@
             </a:endParaRPr>
           </a:p>
           <a:p>
+            <a:pPr algn="just" latinLnBrk="1"/>
             <a:r>
               <a:rPr lang="en-US" altLang="zh-CN" sz="2400" dirty="0">
                 <a:latin typeface="Times New Roman" panose="02020603050405020304" pitchFamily="18" charset="0"/>
@@ -7195,6 +8181,7 @@
             </a:r>
           </a:p>
           <a:p>
+            <a:pPr algn="just" latinLnBrk="1"/>
             <a:endParaRPr lang="en-US" altLang="zh-CN" sz="2400" dirty="0">
               <a:latin typeface="Times New Roman" panose="02020603050405020304" pitchFamily="18" charset="0"/>
               <a:ea typeface="SimSun" panose="02010600030101010101" pitchFamily="2" charset="-122"/>
@@ -7202,104 +8189,14 @@
             </a:endParaRPr>
           </a:p>
           <a:p>
-            <a:r>
-              <a:rPr lang="en-US" altLang="zh-CN" sz="2400" dirty="0">
-                <a:latin typeface="Times New Roman" panose="02020603050405020304" pitchFamily="18" charset="0"/>
-                <a:ea typeface="SimSun" panose="02010600030101010101" pitchFamily="2" charset="-122"/>
-                <a:cs typeface="Times New Roman" panose="02020603050405020304" pitchFamily="18" charset="0"/>
-              </a:rPr>
-              <a:t>(</a:t>
-            </a:r>
-            <a:r>
-              <a:rPr lang="zh-CN" altLang="en-US" sz="2400" dirty="0">
-                <a:solidFill>
-                  <a:srgbClr val="C00000"/>
-                </a:solidFill>
-                <a:latin typeface="Times New Roman" panose="02020603050405020304" pitchFamily="18" charset="0"/>
-                <a:ea typeface="SimSun" panose="02010600030101010101" pitchFamily="2" charset="-122"/>
-                <a:cs typeface="Times New Roman" panose="02020603050405020304" pitchFamily="18" charset="0"/>
-              </a:rPr>
-              <a:t>注：</a:t>
-            </a:r>
-            <a:r>
-              <a:rPr lang="zh-CN" altLang="en-US" sz="2400" dirty="0">
-                <a:latin typeface="Times New Roman" panose="02020603050405020304" pitchFamily="18" charset="0"/>
-                <a:ea typeface="SimSun" panose="02010600030101010101" pitchFamily="2" charset="-122"/>
-                <a:cs typeface="Times New Roman" panose="02020603050405020304" pitchFamily="18" charset="0"/>
-              </a:rPr>
-              <a:t>按照先建立框架，再从推理阶段入手，推理阶段中先建立</a:t>
-            </a:r>
-            <a:r>
-              <a:rPr lang="en-US" altLang="zh-CN" sz="2400" dirty="0">
-                <a:latin typeface="Times New Roman" panose="02020603050405020304" pitchFamily="18" charset="0"/>
-                <a:ea typeface="SimSun" panose="02010600030101010101" pitchFamily="2" charset="-122"/>
-                <a:cs typeface="Times New Roman" panose="02020603050405020304" pitchFamily="18" charset="0"/>
-              </a:rPr>
-              <a:t>PPO</a:t>
-            </a:r>
-            <a:r>
-              <a:rPr lang="zh-CN" altLang="en-US" sz="2400" dirty="0">
-                <a:latin typeface="Times New Roman" panose="02020603050405020304" pitchFamily="18" charset="0"/>
-                <a:ea typeface="SimSun" panose="02010600030101010101" pitchFamily="2" charset="-122"/>
-                <a:cs typeface="Times New Roman" panose="02020603050405020304" pitchFamily="18" charset="0"/>
-              </a:rPr>
-              <a:t>基础知识，再进一步入手</a:t>
-            </a:r>
-            <a:r>
-              <a:rPr lang="en-US" altLang="zh-CN" sz="2400" dirty="0">
-                <a:latin typeface="Times New Roman" panose="02020603050405020304" pitchFamily="18" charset="0"/>
-                <a:ea typeface="SimSun" panose="02010600030101010101" pitchFamily="2" charset="-122"/>
-                <a:cs typeface="Times New Roman" panose="02020603050405020304" pitchFamily="18" charset="0"/>
-              </a:rPr>
-              <a:t>GRPO</a:t>
-            </a:r>
-            <a:r>
-              <a:rPr lang="zh-CN" altLang="en-US" sz="2400" dirty="0">
-                <a:latin typeface="Times New Roman" panose="02020603050405020304" pitchFamily="18" charset="0"/>
-                <a:ea typeface="SimSun" panose="02010600030101010101" pitchFamily="2" charset="-122"/>
-                <a:cs typeface="Times New Roman" panose="02020603050405020304" pitchFamily="18" charset="0"/>
-              </a:rPr>
-              <a:t>，随后关注推理阶段</a:t>
-            </a:r>
-            <a:r>
-              <a:rPr lang="en-US" altLang="zh-CN" sz="2400" dirty="0">
-                <a:latin typeface="Times New Roman" panose="02020603050405020304" pitchFamily="18" charset="0"/>
-                <a:ea typeface="SimSun" panose="02010600030101010101" pitchFamily="2" charset="-122"/>
-                <a:cs typeface="Times New Roman" panose="02020603050405020304" pitchFamily="18" charset="0"/>
-              </a:rPr>
-              <a:t>RL</a:t>
-            </a:r>
-            <a:r>
-              <a:rPr lang="zh-CN" altLang="en-US" sz="2400" dirty="0">
-                <a:latin typeface="Times New Roman" panose="02020603050405020304" pitchFamily="18" charset="0"/>
-                <a:ea typeface="SimSun" panose="02010600030101010101" pitchFamily="2" charset="-122"/>
-                <a:cs typeface="Times New Roman" panose="02020603050405020304" pitchFamily="18" charset="0"/>
-              </a:rPr>
-              <a:t>对</a:t>
-            </a:r>
-            <a:r>
-              <a:rPr lang="en-US" altLang="zh-CN" sz="2400" dirty="0">
-                <a:latin typeface="Times New Roman" panose="02020603050405020304" pitchFamily="18" charset="0"/>
-                <a:ea typeface="SimSun" panose="02010600030101010101" pitchFamily="2" charset="-122"/>
-                <a:cs typeface="Times New Roman" panose="02020603050405020304" pitchFamily="18" charset="0"/>
-              </a:rPr>
-              <a:t>LLM</a:t>
-            </a:r>
-            <a:r>
-              <a:rPr lang="zh-CN" altLang="en-US" sz="2400" dirty="0">
-                <a:latin typeface="Times New Roman" panose="02020603050405020304" pitchFamily="18" charset="0"/>
-                <a:ea typeface="SimSun" panose="02010600030101010101" pitchFamily="2" charset="-122"/>
-                <a:cs typeface="Times New Roman" panose="02020603050405020304" pitchFamily="18" charset="0"/>
-              </a:rPr>
-              <a:t>提升的是什么</a:t>
-            </a:r>
-            <a:r>
-              <a:rPr lang="en-US" altLang="zh-CN" sz="2400" dirty="0">
-                <a:latin typeface="Times New Roman" panose="02020603050405020304" pitchFamily="18" charset="0"/>
-                <a:ea typeface="SimSun" panose="02010600030101010101" pitchFamily="2" charset="-122"/>
-                <a:cs typeface="Times New Roman" panose="02020603050405020304" pitchFamily="18" charset="0"/>
-              </a:rPr>
-              <a:t>)</a:t>
+            <a:pPr algn="just" latinLnBrk="1"/>
+            <a:r>
+              <a:rPr lang="en-US" altLang="zh-CN" sz="2400" dirty="0">
+                <a:latin typeface="Times New Roman" panose="02020603050405020304" pitchFamily="18" charset="0"/>
+                <a:ea typeface="SimSun" panose="02010600030101010101" pitchFamily="2" charset="-122"/>
+                <a:cs typeface="Times New Roman" panose="02020603050405020304" pitchFamily="18" charset="0"/>
+              </a:rPr>
+              <a:t>5. SPARK: STEPWISE PROCESS-AWARE REWARDS FOR REFERENCE-FREE REINFORCEMENT LEARNING</a:t>
             </a:r>
           </a:p>
         </p:txBody>
@@ -8517,7 +9414,21 @@
               </a:rPr>
               <a:t>出了问题。</a:t>
             </a:r>
+            <a:r>
+              <a:rPr lang="zh-CN" altLang="en-US" sz="2400" dirty="0">
+                <a:solidFill>
+                  <a:srgbClr val="FF0000"/>
+                </a:solidFill>
+                <a:latin typeface="Times New Roman" panose="02020603050405020304" pitchFamily="18" charset="0"/>
+                <a:ea typeface="SimSun" panose="02010600030101010101" pitchFamily="2" charset="-122"/>
+                <a:cs typeface="Times New Roman" panose="02020603050405020304" pitchFamily="18" charset="0"/>
+              </a:rPr>
+              <a:t>但实际中我们需要知道到底哪一步有问题</a:t>
+            </a:r>
             <a:endParaRPr lang="en-US" altLang="zh-CN" sz="2400" dirty="0">
+              <a:solidFill>
+                <a:srgbClr val="FF0000"/>
+              </a:solidFill>
               <a:latin typeface="Times New Roman" panose="02020603050405020304" pitchFamily="18" charset="0"/>
               <a:ea typeface="SimSun" panose="02010600030101010101" pitchFamily="2" charset="-122"/>
               <a:cs typeface="Times New Roman" panose="02020603050405020304" pitchFamily="18" charset="0"/>
